--- a/slides/pptx/week-04.pptx
+++ b/slides/pptx/week-04.pptx
@@ -12,9 +12,10 @@
     <p:sldId id="260" r:id="rId6"/>
     <p:sldId id="261" r:id="rId7"/>
     <p:sldId id="262" r:id="rId8"/>
+    <p:sldId id="263" r:id="rId9"/>
   </p:sldIdLst>
   <p:notesMasterIdLst>
-    <p:notesMasterId r:id="rId9"/>
+    <p:notesMasterId r:id="rId10"/>
   </p:notesMasterIdLst>
   <p:sldSz cx="12191695" cy="6858000"/>
   <p:notesSz cx="6858000" cy="12191695"/>
@@ -1078,6 +1079,94 @@
 </p:notes>
 </file>
 
+<file path=ppt/notesSlides/notesSlide8.xml><?xml version="1.0" encoding="utf-8"?>
+<p:notes xmlns:a="http://schemas.openxmlformats.org/drawingml/2006/main" xmlns:r="http://schemas.openxmlformats.org/officeDocument/2006/relationships" xmlns:p="http://schemas.openxmlformats.org/presentationml/2006/main">
+  <p:cSld>
+    <p:spTree>
+      <p:nvGrpSpPr>
+        <p:cNvPr id="1" name=""/>
+        <p:cNvGrpSpPr/>
+        <p:nvPr/>
+      </p:nvGrpSpPr>
+      <p:grpSpPr>
+        <a:xfrm>
+          <a:off x="0" y="0"/>
+          <a:ext cx="0" cy="0"/>
+          <a:chOff x="0" y="0"/>
+          <a:chExt cx="0" cy="0"/>
+        </a:xfrm>
+      </p:grpSpPr>
+      <p:sp>
+        <p:nvSpPr>
+          <p:cNvPr id="2" name="Slide Image Placeholder 1"/>
+          <p:cNvSpPr>
+            <a:spLocks noGrp="1" noRot="1" noChangeAspect="1"/>
+          </p:cNvSpPr>
+          <p:nvPr>
+            <p:ph type="sldImg"/>
+          </p:nvPr>
+        </p:nvSpPr>
+        <p:spPr/>
+      </p:sp>
+      <p:sp>
+        <p:nvSpPr>
+          <p:cNvPr id="3" name="Notes Placeholder 2"/>
+          <p:cNvSpPr>
+            <a:spLocks noGrp="1"/>
+          </p:cNvSpPr>
+          <p:nvPr>
+            <p:ph type="body" idx="1"/>
+          </p:nvPr>
+        </p:nvSpPr>
+        <p:spPr/>
+        <p:txBody>
+          <a:bodyPr/>
+          <a:lstStyle/>
+          <a:p>
+            <a:r>
+              <a:rPr lang="en-US" dirty="0"/>
+              <a:t/>
+            </a:r>
+            <a:endParaRPr lang="en-US" dirty="0"/>
+          </a:p>
+        </p:txBody>
+      </p:sp>
+      <p:sp>
+        <p:nvSpPr>
+          <p:cNvPr id="4" name="Slide Number Placeholder 3"/>
+          <p:cNvSpPr>
+            <a:spLocks noGrp="1"/>
+          </p:cNvSpPr>
+          <p:nvPr>
+            <p:ph type="sldNum" sz="quarter" idx="10"/>
+          </p:nvPr>
+        </p:nvSpPr>
+        <p:spPr/>
+        <p:txBody>
+          <a:bodyPr/>
+          <a:lstStyle/>
+          <a:p>
+            <a:fld id="{F7021451-1387-4CA6-816F-3879F97B5CBC}" type="slidenum">
+              <a:rPr lang="en-US"/>
+              <a:t>8</a:t>
+            </a:fld>
+            <a:endParaRPr lang="en-US"/>
+          </a:p>
+        </p:txBody>
+      </p:sp>
+    </p:spTree>
+    <p:extLst>
+      <p:ext uri="{BB962C8B-B14F-4D97-AF65-F5344CB8AC3E}">
+        <p14:creationId xmlns:p14="http://schemas.microsoft.com/office/powerpoint/2010/main" val="1024086991"/>
+      </p:ext>
+    </p:extLst>
+  </p:cSld>
+  <p:clrMapOvr>
+    <a:masterClrMapping/>
+  </p:clrMapOvr>
+</p:notes>
+</file>
+
 <file path=ppt/slideLayouts/slideLayout1.xml><?xml version="1.0" encoding="utf-8"?>
 <p:sldLayout xmlns:a="http://schemas.openxmlformats.org/drawingml/2006/main" xmlns:r="http://schemas.openxmlformats.org/officeDocument/2006/relationships" xmlns:p="http://schemas.openxmlformats.org/presentationml/2006/main" preserve="1">
   <p:cSld name="DEFAULT">
@@ -4090,6 +4179,548 @@
 <file path=ppt/slides/slide7.xml><?xml version="1.0" encoding="utf-8"?>
 <p:sld xmlns:a="http://schemas.openxmlformats.org/drawingml/2006/main" xmlns:r="http://schemas.openxmlformats.org/officeDocument/2006/relationships" xmlns:p="http://schemas.openxmlformats.org/presentationml/2006/main">
   <p:cSld name="Slide 7">
+    <p:bg>
+      <p:bgPr>
+        <a:solidFill>
+          <a:srgbClr val="FFFFFF"/>
+        </a:solidFill>
+      </p:bgPr>
+    </p:bg>
+    <p:spTree>
+      <p:nvGrpSpPr>
+        <p:cNvPr id="1" name=""/>
+        <p:cNvGrpSpPr/>
+        <p:nvPr/>
+      </p:nvGrpSpPr>
+      <p:grpSpPr>
+        <a:xfrm>
+          <a:off x="0" y="0"/>
+          <a:ext cx="0" cy="0"/>
+          <a:chOff x="0" y="0"/>
+          <a:chExt cx="0" cy="0"/>
+        </a:xfrm>
+      </p:grpSpPr>
+      <p:sp>
+        <p:nvSpPr>
+          <p:cNvPr id="2" name="Text 0"/>
+          <p:cNvSpPr/>
+          <p:nvPr/>
+        </p:nvSpPr>
+        <p:spPr>
+          <a:xfrm>
+            <a:off x="640080" y="640080"/>
+            <a:ext cx="10058400" cy="320040"/>
+          </a:xfrm>
+          <a:prstGeom prst="rect">
+            <a:avLst/>
+          </a:prstGeom>
+          <a:noFill/>
+          <a:ln/>
+        </p:spPr>
+        <p:txBody>
+          <a:bodyPr wrap="square" rtlCol="0" anchor="ctr"/>
+          <a:lstStyle/>
+          <a:p>
+            <a:pPr indent="0" marL="0">
+              <a:buNone/>
+            </a:pPr>
+            <a:r>
+              <a:rPr lang="en-US" sz="1300" b="1" spc="300" kern="0" dirty="0">
+                <a:solidFill>
+                  <a:srgbClr val="7A3B2E"/>
+                </a:solidFill>
+                <a:latin typeface="Calibri" pitchFamily="34" charset="0"/>
+                <a:ea typeface="Calibri" pitchFamily="34" charset="-122"/>
+                <a:cs typeface="Calibri" pitchFamily="34" charset="-120"/>
+              </a:rPr>
+              <a:t>HOW THIS WEEK CONNECTS</a:t>
+            </a:r>
+            <a:endParaRPr lang="en-US" sz="1300" dirty="0"/>
+          </a:p>
+        </p:txBody>
+      </p:sp>
+      <p:sp>
+        <p:nvSpPr>
+          <p:cNvPr id="3" name="Text 1"/>
+          <p:cNvSpPr/>
+          <p:nvPr/>
+        </p:nvSpPr>
+        <p:spPr>
+          <a:xfrm>
+            <a:off x="640080" y="987552"/>
+            <a:ext cx="10058400" cy="640080"/>
+          </a:xfrm>
+          <a:prstGeom prst="rect">
+            <a:avLst/>
+          </a:prstGeom>
+          <a:noFill/>
+          <a:ln/>
+        </p:spPr>
+        <p:txBody>
+          <a:bodyPr wrap="square" rtlCol="0" anchor="ctr"/>
+          <a:lstStyle/>
+          <a:p>
+            <a:pPr indent="0" marL="0">
+              <a:buNone/>
+            </a:pPr>
+            <a:r>
+              <a:rPr lang="en-US" sz="2800" b="1" dirty="0">
+                <a:solidFill>
+                  <a:srgbClr val="1A1A1A"/>
+                </a:solidFill>
+                <a:latin typeface="Cambria" pitchFamily="34" charset="0"/>
+                <a:ea typeface="Cambria" pitchFamily="34" charset="-122"/>
+                <a:cs typeface="Cambria" pitchFamily="34" charset="-120"/>
+              </a:rPr>
+              <a:t>The course's through-lines</a:t>
+            </a:r>
+            <a:endParaRPr lang="en-US" sz="2800" dirty="0"/>
+          </a:p>
+        </p:txBody>
+      </p:sp>
+      <p:sp>
+        <p:nvSpPr>
+          <p:cNvPr id="4" name="Shape 2"/>
+          <p:cNvSpPr/>
+          <p:nvPr/>
+        </p:nvSpPr>
+        <p:spPr>
+          <a:xfrm>
+            <a:off x="640080" y="2057400"/>
+            <a:ext cx="457200" cy="457200"/>
+          </a:xfrm>
+          <a:prstGeom prst="roundRect">
+            <a:avLst>
+              <a:gd name="adj" fmla="val 16000"/>
+            </a:avLst>
+          </a:prstGeom>
+          <a:solidFill>
+            <a:srgbClr val="7A3B2E"/>
+          </a:solidFill>
+          <a:ln/>
+        </p:spPr>
+      </p:sp>
+      <p:sp>
+        <p:nvSpPr>
+          <p:cNvPr id="5" name="Text 3"/>
+          <p:cNvSpPr/>
+          <p:nvPr/>
+        </p:nvSpPr>
+        <p:spPr>
+          <a:xfrm>
+            <a:off x="640080" y="2057400"/>
+            <a:ext cx="457200" cy="457200"/>
+          </a:xfrm>
+          <a:prstGeom prst="rect">
+            <a:avLst/>
+          </a:prstGeom>
+          <a:noFill/>
+          <a:ln/>
+        </p:spPr>
+        <p:txBody>
+          <a:bodyPr wrap="square" rtlCol="0" anchor="ctr"/>
+          <a:lstStyle/>
+          <a:p>
+            <a:pPr algn="ctr" indent="0" marL="0">
+              <a:buNone/>
+            </a:pPr>
+            <a:r>
+              <a:rPr lang="en-US" sz="2000" b="1" dirty="0">
+                <a:solidFill>
+                  <a:srgbClr val="FFFFFF"/>
+                </a:solidFill>
+                <a:latin typeface="Cambria" pitchFamily="34" charset="0"/>
+                <a:ea typeface="Cambria" pitchFamily="34" charset="-122"/>
+                <a:cs typeface="Cambria" pitchFamily="34" charset="-120"/>
+              </a:rPr>
+              <a:t>1</a:t>
+            </a:r>
+            <a:endParaRPr lang="en-US" sz="2000" dirty="0"/>
+          </a:p>
+        </p:txBody>
+      </p:sp>
+      <p:sp>
+        <p:nvSpPr>
+          <p:cNvPr id="6" name="Text 4"/>
+          <p:cNvSpPr/>
+          <p:nvPr/>
+        </p:nvSpPr>
+        <p:spPr>
+          <a:xfrm>
+            <a:off x="1371600" y="2020824"/>
+            <a:ext cx="10332720" cy="411480"/>
+          </a:xfrm>
+          <a:prstGeom prst="rect">
+            <a:avLst/>
+          </a:prstGeom>
+          <a:noFill/>
+          <a:ln/>
+        </p:spPr>
+        <p:txBody>
+          <a:bodyPr wrap="square" rtlCol="0" anchor="ctr"/>
+          <a:lstStyle/>
+          <a:p>
+            <a:pPr indent="0" marL="0">
+              <a:buNone/>
+            </a:pPr>
+            <a:r>
+              <a:rPr lang="en-US" sz="1900" b="1" dirty="0">
+                <a:solidFill>
+                  <a:srgbClr val="7A3B2E"/>
+                </a:solidFill>
+                <a:latin typeface="Cambria" pitchFamily="34" charset="0"/>
+                <a:ea typeface="Cambria" pitchFamily="34" charset="-122"/>
+                <a:cs typeface="Cambria" pitchFamily="34" charset="-120"/>
+              </a:rPr>
+              <a:t>Whose data</a:t>
+            </a:r>
+            <a:endParaRPr lang="en-US" sz="1900" dirty="0"/>
+          </a:p>
+        </p:txBody>
+      </p:sp>
+      <p:sp>
+        <p:nvSpPr>
+          <p:cNvPr id="7" name="Text 5"/>
+          <p:cNvSpPr/>
+          <p:nvPr/>
+        </p:nvSpPr>
+        <p:spPr>
+          <a:xfrm>
+            <a:off x="1371600" y="2441448"/>
+            <a:ext cx="10332720" cy="914400"/>
+          </a:xfrm>
+          <a:prstGeom prst="rect">
+            <a:avLst/>
+          </a:prstGeom>
+          <a:noFill/>
+          <a:ln/>
+        </p:spPr>
+        <p:txBody>
+          <a:bodyPr wrap="square" rtlCol="0" anchor="t">
+            <a:spAutoFit/>
+          </a:bodyPr>
+          <a:lstStyle/>
+          <a:p>
+            <a:pPr indent="0" marL="0">
+              <a:lnSpc>
+                <a:spcPct val="112000"/>
+              </a:lnSpc>
+              <a:buNone/>
+            </a:pPr>
+            <a:r>
+              <a:rPr lang="en-US" sz="1450" dirty="0">
+                <a:solidFill>
+                  <a:srgbClr val="1A1A1A"/>
+                </a:solidFill>
+                <a:latin typeface="Calibri" pitchFamily="34" charset="0"/>
+                <a:ea typeface="Calibri" pitchFamily="34" charset="-122"/>
+                <a:cs typeface="Calibri" pitchFamily="34" charset="-120"/>
+              </a:rPr>
+              <a:t>The Data Biography: where it came from, who is missing, what it cannot say.</a:t>
+            </a:r>
+            <a:endParaRPr lang="en-US" sz="1450" dirty="0"/>
+          </a:p>
+        </p:txBody>
+      </p:sp>
+      <p:sp>
+        <p:nvSpPr>
+          <p:cNvPr id="8" name="Shape 6"/>
+          <p:cNvSpPr/>
+          <p:nvPr/>
+        </p:nvSpPr>
+        <p:spPr>
+          <a:xfrm>
+            <a:off x="640080" y="3520440"/>
+            <a:ext cx="457200" cy="457200"/>
+          </a:xfrm>
+          <a:prstGeom prst="roundRect">
+            <a:avLst>
+              <a:gd name="adj" fmla="val 16000"/>
+            </a:avLst>
+          </a:prstGeom>
+          <a:solidFill>
+            <a:srgbClr val="3F6F5F"/>
+          </a:solidFill>
+          <a:ln/>
+        </p:spPr>
+      </p:sp>
+      <p:sp>
+        <p:nvSpPr>
+          <p:cNvPr id="9" name="Text 7"/>
+          <p:cNvSpPr/>
+          <p:nvPr/>
+        </p:nvSpPr>
+        <p:spPr>
+          <a:xfrm>
+            <a:off x="640080" y="3520440"/>
+            <a:ext cx="457200" cy="457200"/>
+          </a:xfrm>
+          <a:prstGeom prst="rect">
+            <a:avLst/>
+          </a:prstGeom>
+          <a:noFill/>
+          <a:ln/>
+        </p:spPr>
+        <p:txBody>
+          <a:bodyPr wrap="square" rtlCol="0" anchor="ctr"/>
+          <a:lstStyle/>
+          <a:p>
+            <a:pPr algn="ctr" indent="0" marL="0">
+              <a:buNone/>
+            </a:pPr>
+            <a:r>
+              <a:rPr lang="en-US" sz="2000" b="1" dirty="0">
+                <a:solidFill>
+                  <a:srgbClr val="FFFFFF"/>
+                </a:solidFill>
+                <a:latin typeface="Cambria" pitchFamily="34" charset="0"/>
+                <a:ea typeface="Cambria" pitchFamily="34" charset="-122"/>
+                <a:cs typeface="Cambria" pitchFamily="34" charset="-120"/>
+              </a:rPr>
+              <a:t>2</a:t>
+            </a:r>
+            <a:endParaRPr lang="en-US" sz="2000" dirty="0"/>
+          </a:p>
+        </p:txBody>
+      </p:sp>
+      <p:sp>
+        <p:nvSpPr>
+          <p:cNvPr id="10" name="Text 8"/>
+          <p:cNvSpPr/>
+          <p:nvPr/>
+        </p:nvSpPr>
+        <p:spPr>
+          <a:xfrm>
+            <a:off x="1371600" y="3483864"/>
+            <a:ext cx="10332720" cy="411480"/>
+          </a:xfrm>
+          <a:prstGeom prst="rect">
+            <a:avLst/>
+          </a:prstGeom>
+          <a:noFill/>
+          <a:ln/>
+        </p:spPr>
+        <p:txBody>
+          <a:bodyPr wrap="square" rtlCol="0" anchor="ctr"/>
+          <a:lstStyle/>
+          <a:p>
+            <a:pPr indent="0" marL="0">
+              <a:buNone/>
+            </a:pPr>
+            <a:r>
+              <a:rPr lang="en-US" sz="1900" b="1" dirty="0">
+                <a:solidFill>
+                  <a:srgbClr val="3F6F5F"/>
+                </a:solidFill>
+                <a:latin typeface="Cambria" pitchFamily="34" charset="0"/>
+                <a:ea typeface="Cambria" pitchFamily="34" charset="-122"/>
+                <a:cs typeface="Cambria" pitchFamily="34" charset="-120"/>
+              </a:rPr>
+              <a:t>The licensing line</a:t>
+            </a:r>
+            <a:endParaRPr lang="en-US" sz="1900" dirty="0"/>
+          </a:p>
+        </p:txBody>
+      </p:sp>
+      <p:sp>
+        <p:nvSpPr>
+          <p:cNvPr id="11" name="Text 9"/>
+          <p:cNvSpPr/>
+          <p:nvPr/>
+        </p:nvSpPr>
+        <p:spPr>
+          <a:xfrm>
+            <a:off x="1371600" y="3904488"/>
+            <a:ext cx="10332720" cy="914400"/>
+          </a:xfrm>
+          <a:prstGeom prst="rect">
+            <a:avLst/>
+          </a:prstGeom>
+          <a:noFill/>
+          <a:ln/>
+        </p:spPr>
+        <p:txBody>
+          <a:bodyPr wrap="square" rtlCol="0" anchor="t">
+            <a:spAutoFit/>
+          </a:bodyPr>
+          <a:lstStyle/>
+          <a:p>
+            <a:pPr indent="0" marL="0">
+              <a:lnSpc>
+                <a:spcPct val="112000"/>
+              </a:lnSpc>
+              <a:buNone/>
+            </a:pPr>
+            <a:r>
+              <a:rPr lang="en-US" sz="1450" dirty="0">
+                <a:solidFill>
+                  <a:srgbClr val="1A1A1A"/>
+                </a:solidFill>
+                <a:latin typeface="Calibri" pitchFamily="34" charset="0"/>
+                <a:ea typeface="Calibri" pitchFamily="34" charset="-122"/>
+                <a:cs typeface="Calibri" pitchFamily="34" charset="-120"/>
+              </a:rPr>
+              <a:t>CC0, to scrape-with-care, to never (LibGen). Judgment, not a rulebook.</a:t>
+            </a:r>
+            <a:endParaRPr lang="en-US" sz="1450" dirty="0"/>
+          </a:p>
+        </p:txBody>
+      </p:sp>
+      <p:sp>
+        <p:nvSpPr>
+          <p:cNvPr id="12" name="Shape 10"/>
+          <p:cNvSpPr/>
+          <p:nvPr/>
+        </p:nvSpPr>
+        <p:spPr>
+          <a:xfrm>
+            <a:off x="640080" y="4983480"/>
+            <a:ext cx="457200" cy="457200"/>
+          </a:xfrm>
+          <a:prstGeom prst="roundRect">
+            <a:avLst>
+              <a:gd name="adj" fmla="val 16000"/>
+            </a:avLst>
+          </a:prstGeom>
+          <a:solidFill>
+            <a:srgbClr val="B9852F"/>
+          </a:solidFill>
+          <a:ln/>
+        </p:spPr>
+      </p:sp>
+      <p:sp>
+        <p:nvSpPr>
+          <p:cNvPr id="13" name="Text 11"/>
+          <p:cNvSpPr/>
+          <p:nvPr/>
+        </p:nvSpPr>
+        <p:spPr>
+          <a:xfrm>
+            <a:off x="640080" y="4983480"/>
+            <a:ext cx="457200" cy="457200"/>
+          </a:xfrm>
+          <a:prstGeom prst="rect">
+            <a:avLst/>
+          </a:prstGeom>
+          <a:noFill/>
+          <a:ln/>
+        </p:spPr>
+        <p:txBody>
+          <a:bodyPr wrap="square" rtlCol="0" anchor="ctr"/>
+          <a:lstStyle/>
+          <a:p>
+            <a:pPr algn="ctr" indent="0" marL="0">
+              <a:buNone/>
+            </a:pPr>
+            <a:r>
+              <a:rPr lang="en-US" sz="2000" b="1" dirty="0">
+                <a:solidFill>
+                  <a:srgbClr val="FFFFFF"/>
+                </a:solidFill>
+                <a:latin typeface="Cambria" pitchFamily="34" charset="0"/>
+                <a:ea typeface="Cambria" pitchFamily="34" charset="-122"/>
+                <a:cs typeface="Cambria" pitchFamily="34" charset="-120"/>
+              </a:rPr>
+              <a:t>3</a:t>
+            </a:r>
+            <a:endParaRPr lang="en-US" sz="2000" dirty="0"/>
+          </a:p>
+        </p:txBody>
+      </p:sp>
+      <p:sp>
+        <p:nvSpPr>
+          <p:cNvPr id="14" name="Text 12"/>
+          <p:cNvSpPr/>
+          <p:nvPr/>
+        </p:nvSpPr>
+        <p:spPr>
+          <a:xfrm>
+            <a:off x="1371600" y="4946904"/>
+            <a:ext cx="10332720" cy="411480"/>
+          </a:xfrm>
+          <a:prstGeom prst="rect">
+            <a:avLst/>
+          </a:prstGeom>
+          <a:noFill/>
+          <a:ln/>
+        </p:spPr>
+        <p:txBody>
+          <a:bodyPr wrap="square" rtlCol="0" anchor="ctr"/>
+          <a:lstStyle/>
+          <a:p>
+            <a:pPr indent="0" marL="0">
+              <a:buNone/>
+            </a:pPr>
+            <a:r>
+              <a:rPr lang="en-US" sz="1900" b="1" dirty="0">
+                <a:solidFill>
+                  <a:srgbClr val="B9852F"/>
+                </a:solidFill>
+                <a:latin typeface="Cambria" pitchFamily="34" charset="0"/>
+                <a:ea typeface="Cambria" pitchFamily="34" charset="-122"/>
+                <a:cs typeface="Cambria" pitchFamily="34" charset="-120"/>
+              </a:rPr>
+              <a:t>Make something real</a:t>
+            </a:r>
+            <a:endParaRPr lang="en-US" sz="1900" dirty="0"/>
+          </a:p>
+        </p:txBody>
+      </p:sp>
+      <p:sp>
+        <p:nvSpPr>
+          <p:cNvPr id="15" name="Text 13"/>
+          <p:cNvSpPr/>
+          <p:nvPr/>
+        </p:nvSpPr>
+        <p:spPr>
+          <a:xfrm>
+            <a:off x="1371600" y="5367528"/>
+            <a:ext cx="10332720" cy="914400"/>
+          </a:xfrm>
+          <a:prstGeom prst="rect">
+            <a:avLst/>
+          </a:prstGeom>
+          <a:noFill/>
+          <a:ln/>
+        </p:spPr>
+        <p:txBody>
+          <a:bodyPr wrap="square" rtlCol="0" anchor="t">
+            <a:spAutoFit/>
+          </a:bodyPr>
+          <a:lstStyle/>
+          <a:p>
+            <a:pPr indent="0" marL="0">
+              <a:lnSpc>
+                <a:spcPct val="112000"/>
+              </a:lnSpc>
+              <a:buNone/>
+            </a:pPr>
+            <a:r>
+              <a:rPr lang="en-US" sz="1450" dirty="0">
+                <a:solidFill>
+                  <a:srgbClr val="1A1A1A"/>
+                </a:solidFill>
+                <a:latin typeface="Calibri" pitchFamily="34" charset="0"/>
+                <a:ea typeface="Calibri" pitchFamily="34" charset="-122"/>
+                <a:cs typeface="Calibri" pitchFamily="34" charset="-120"/>
+              </a:rPr>
+              <a:t>You leave with a real corpus in hand and a project repo born.</a:t>
+            </a:r>
+            <a:endParaRPr lang="en-US" sz="1450" dirty="0"/>
+          </a:p>
+        </p:txBody>
+      </p:sp>
+    </p:spTree>
+  </p:cSld>
+  <p:clrMapOvr>
+    <a:masterClrMapping/>
+  </p:clrMapOvr>
+</p:sld>
+</file>
+
+<file path=ppt/slides/slide8.xml><?xml version="1.0" encoding="utf-8"?>
+<p:sld xmlns:a="http://schemas.openxmlformats.org/drawingml/2006/main" xmlns:r="http://schemas.openxmlformats.org/officeDocument/2006/relationships" xmlns:p="http://schemas.openxmlformats.org/presentationml/2006/main">
+  <p:cSld name="Slide 8">
     <p:bg>
       <p:bgPr>
         <a:solidFill>

--- a/slides/pptx/week-04.pptx
+++ b/slides/pptx/week-04.pptx
@@ -13,9 +13,13 @@
     <p:sldId id="261" r:id="rId7"/>
     <p:sldId id="262" r:id="rId8"/>
     <p:sldId id="263" r:id="rId9"/>
+    <p:sldId id="264" r:id="rId10"/>
+    <p:sldId id="265" r:id="rId11"/>
+    <p:sldId id="266" r:id="rId12"/>
+    <p:sldId id="267" r:id="rId13"/>
   </p:sldIdLst>
   <p:notesMasterIdLst>
-    <p:notesMasterId r:id="rId10"/>
+    <p:notesMasterId r:id="rId14"/>
   </p:notesMasterIdLst>
   <p:sldSz cx="12191695" cy="6858000"/>
   <p:notesSz cx="6858000" cy="12191695"/>
@@ -551,6 +555,270 @@
 </p:notes>
 </file>
 
+<file path=ppt/notesSlides/notesSlide10.xml><?xml version="1.0" encoding="utf-8"?>
+<p:notes xmlns:a="http://schemas.openxmlformats.org/drawingml/2006/main" xmlns:r="http://schemas.openxmlformats.org/officeDocument/2006/relationships" xmlns:p="http://schemas.openxmlformats.org/presentationml/2006/main">
+  <p:cSld>
+    <p:spTree>
+      <p:nvGrpSpPr>
+        <p:cNvPr id="1" name=""/>
+        <p:cNvGrpSpPr/>
+        <p:nvPr/>
+      </p:nvGrpSpPr>
+      <p:grpSpPr>
+        <a:xfrm>
+          <a:off x="0" y="0"/>
+          <a:ext cx="0" cy="0"/>
+          <a:chOff x="0" y="0"/>
+          <a:chExt cx="0" cy="0"/>
+        </a:xfrm>
+      </p:grpSpPr>
+      <p:sp>
+        <p:nvSpPr>
+          <p:cNvPr id="2" name="Slide Image Placeholder 1"/>
+          <p:cNvSpPr>
+            <a:spLocks noGrp="1" noRot="1" noChangeAspect="1"/>
+          </p:cNvSpPr>
+          <p:nvPr>
+            <p:ph type="sldImg"/>
+          </p:nvPr>
+        </p:nvSpPr>
+        <p:spPr/>
+      </p:sp>
+      <p:sp>
+        <p:nvSpPr>
+          <p:cNvPr id="3" name="Notes Placeholder 2"/>
+          <p:cNvSpPr>
+            <a:spLocks noGrp="1"/>
+          </p:cNvSpPr>
+          <p:nvPr>
+            <p:ph type="body" idx="1"/>
+          </p:nvPr>
+        </p:nvSpPr>
+        <p:spPr/>
+        <p:txBody>
+          <a:bodyPr/>
+          <a:lstStyle/>
+          <a:p>
+            <a:r>
+              <a:rPr lang="en-US" dirty="0"/>
+              <a:t/>
+            </a:r>
+            <a:endParaRPr lang="en-US" dirty="0"/>
+          </a:p>
+        </p:txBody>
+      </p:sp>
+      <p:sp>
+        <p:nvSpPr>
+          <p:cNvPr id="4" name="Slide Number Placeholder 3"/>
+          <p:cNvSpPr>
+            <a:spLocks noGrp="1"/>
+          </p:cNvSpPr>
+          <p:nvPr>
+            <p:ph type="sldNum" sz="quarter" idx="10"/>
+          </p:nvPr>
+        </p:nvSpPr>
+        <p:spPr/>
+        <p:txBody>
+          <a:bodyPr/>
+          <a:lstStyle/>
+          <a:p>
+            <a:fld id="{F7021451-1387-4CA6-816F-3879F97B5CBC}" type="slidenum">
+              <a:rPr lang="en-US"/>
+              <a:t>10</a:t>
+            </a:fld>
+            <a:endParaRPr lang="en-US"/>
+          </a:p>
+        </p:txBody>
+      </p:sp>
+    </p:spTree>
+    <p:extLst>
+      <p:ext uri="{BB962C8B-B14F-4D97-AF65-F5344CB8AC3E}">
+        <p14:creationId xmlns:p14="http://schemas.microsoft.com/office/powerpoint/2010/main" val="1024086991"/>
+      </p:ext>
+    </p:extLst>
+  </p:cSld>
+  <p:clrMapOvr>
+    <a:masterClrMapping/>
+  </p:clrMapOvr>
+</p:notes>
+</file>
+
+<file path=ppt/notesSlides/notesSlide11.xml><?xml version="1.0" encoding="utf-8"?>
+<p:notes xmlns:a="http://schemas.openxmlformats.org/drawingml/2006/main" xmlns:r="http://schemas.openxmlformats.org/officeDocument/2006/relationships" xmlns:p="http://schemas.openxmlformats.org/presentationml/2006/main">
+  <p:cSld>
+    <p:spTree>
+      <p:nvGrpSpPr>
+        <p:cNvPr id="1" name=""/>
+        <p:cNvGrpSpPr/>
+        <p:nvPr/>
+      </p:nvGrpSpPr>
+      <p:grpSpPr>
+        <a:xfrm>
+          <a:off x="0" y="0"/>
+          <a:ext cx="0" cy="0"/>
+          <a:chOff x="0" y="0"/>
+          <a:chExt cx="0" cy="0"/>
+        </a:xfrm>
+      </p:grpSpPr>
+      <p:sp>
+        <p:nvSpPr>
+          <p:cNvPr id="2" name="Slide Image Placeholder 1"/>
+          <p:cNvSpPr>
+            <a:spLocks noGrp="1" noRot="1" noChangeAspect="1"/>
+          </p:cNvSpPr>
+          <p:nvPr>
+            <p:ph type="sldImg"/>
+          </p:nvPr>
+        </p:nvSpPr>
+        <p:spPr/>
+      </p:sp>
+      <p:sp>
+        <p:nvSpPr>
+          <p:cNvPr id="3" name="Notes Placeholder 2"/>
+          <p:cNvSpPr>
+            <a:spLocks noGrp="1"/>
+          </p:cNvSpPr>
+          <p:nvPr>
+            <p:ph type="body" idx="1"/>
+          </p:nvPr>
+        </p:nvSpPr>
+        <p:spPr/>
+        <p:txBody>
+          <a:bodyPr/>
+          <a:lstStyle/>
+          <a:p>
+            <a:r>
+              <a:rPr lang="en-US" dirty="0"/>
+              <a:t/>
+            </a:r>
+            <a:endParaRPr lang="en-US" dirty="0"/>
+          </a:p>
+        </p:txBody>
+      </p:sp>
+      <p:sp>
+        <p:nvSpPr>
+          <p:cNvPr id="4" name="Slide Number Placeholder 3"/>
+          <p:cNvSpPr>
+            <a:spLocks noGrp="1"/>
+          </p:cNvSpPr>
+          <p:nvPr>
+            <p:ph type="sldNum" sz="quarter" idx="10"/>
+          </p:nvPr>
+        </p:nvSpPr>
+        <p:spPr/>
+        <p:txBody>
+          <a:bodyPr/>
+          <a:lstStyle/>
+          <a:p>
+            <a:fld id="{F7021451-1387-4CA6-816F-3879F97B5CBC}" type="slidenum">
+              <a:rPr lang="en-US"/>
+              <a:t>11</a:t>
+            </a:fld>
+            <a:endParaRPr lang="en-US"/>
+          </a:p>
+        </p:txBody>
+      </p:sp>
+    </p:spTree>
+    <p:extLst>
+      <p:ext uri="{BB962C8B-B14F-4D97-AF65-F5344CB8AC3E}">
+        <p14:creationId xmlns:p14="http://schemas.microsoft.com/office/powerpoint/2010/main" val="1024086991"/>
+      </p:ext>
+    </p:extLst>
+  </p:cSld>
+  <p:clrMapOvr>
+    <a:masterClrMapping/>
+  </p:clrMapOvr>
+</p:notes>
+</file>
+
+<file path=ppt/notesSlides/notesSlide12.xml><?xml version="1.0" encoding="utf-8"?>
+<p:notes xmlns:a="http://schemas.openxmlformats.org/drawingml/2006/main" xmlns:r="http://schemas.openxmlformats.org/officeDocument/2006/relationships" xmlns:p="http://schemas.openxmlformats.org/presentationml/2006/main">
+  <p:cSld>
+    <p:spTree>
+      <p:nvGrpSpPr>
+        <p:cNvPr id="1" name=""/>
+        <p:cNvGrpSpPr/>
+        <p:nvPr/>
+      </p:nvGrpSpPr>
+      <p:grpSpPr>
+        <a:xfrm>
+          <a:off x="0" y="0"/>
+          <a:ext cx="0" cy="0"/>
+          <a:chOff x="0" y="0"/>
+          <a:chExt cx="0" cy="0"/>
+        </a:xfrm>
+      </p:grpSpPr>
+      <p:sp>
+        <p:nvSpPr>
+          <p:cNvPr id="2" name="Slide Image Placeholder 1"/>
+          <p:cNvSpPr>
+            <a:spLocks noGrp="1" noRot="1" noChangeAspect="1"/>
+          </p:cNvSpPr>
+          <p:nvPr>
+            <p:ph type="sldImg"/>
+          </p:nvPr>
+        </p:nvSpPr>
+        <p:spPr/>
+      </p:sp>
+      <p:sp>
+        <p:nvSpPr>
+          <p:cNvPr id="3" name="Notes Placeholder 2"/>
+          <p:cNvSpPr>
+            <a:spLocks noGrp="1"/>
+          </p:cNvSpPr>
+          <p:nvPr>
+            <p:ph type="body" idx="1"/>
+          </p:nvPr>
+        </p:nvSpPr>
+        <p:spPr/>
+        <p:txBody>
+          <a:bodyPr/>
+          <a:lstStyle/>
+          <a:p>
+            <a:r>
+              <a:rPr lang="en-US" dirty="0"/>
+              <a:t/>
+            </a:r>
+            <a:endParaRPr lang="en-US" dirty="0"/>
+          </a:p>
+        </p:txBody>
+      </p:sp>
+      <p:sp>
+        <p:nvSpPr>
+          <p:cNvPr id="4" name="Slide Number Placeholder 3"/>
+          <p:cNvSpPr>
+            <a:spLocks noGrp="1"/>
+          </p:cNvSpPr>
+          <p:nvPr>
+            <p:ph type="sldNum" sz="quarter" idx="10"/>
+          </p:nvPr>
+        </p:nvSpPr>
+        <p:spPr/>
+        <p:txBody>
+          <a:bodyPr/>
+          <a:lstStyle/>
+          <a:p>
+            <a:fld id="{F7021451-1387-4CA6-816F-3879F97B5CBC}" type="slidenum">
+              <a:rPr lang="en-US"/>
+              <a:t>12</a:t>
+            </a:fld>
+            <a:endParaRPr lang="en-US"/>
+          </a:p>
+        </p:txBody>
+      </p:sp>
+    </p:spTree>
+    <p:extLst>
+      <p:ext uri="{BB962C8B-B14F-4D97-AF65-F5344CB8AC3E}">
+        <p14:creationId xmlns:p14="http://schemas.microsoft.com/office/powerpoint/2010/main" val="1024086991"/>
+      </p:ext>
+    </p:extLst>
+  </p:cSld>
+  <p:clrMapOvr>
+    <a:masterClrMapping/>
+  </p:clrMapOvr>
+</p:notes>
+</file>
+
 <file path=ppt/notesSlides/notesSlide2.xml><?xml version="1.0" encoding="utf-8"?>
 <p:notes xmlns:a="http://schemas.openxmlformats.org/drawingml/2006/main" xmlns:r="http://schemas.openxmlformats.org/officeDocument/2006/relationships" xmlns:p="http://schemas.openxmlformats.org/presentationml/2006/main">
   <p:cSld>
@@ -1149,6 +1417,94 @@
             <a:fld id="{F7021451-1387-4CA6-816F-3879F97B5CBC}" type="slidenum">
               <a:rPr lang="en-US"/>
               <a:t>8</a:t>
+            </a:fld>
+            <a:endParaRPr lang="en-US"/>
+          </a:p>
+        </p:txBody>
+      </p:sp>
+    </p:spTree>
+    <p:extLst>
+      <p:ext uri="{BB962C8B-B14F-4D97-AF65-F5344CB8AC3E}">
+        <p14:creationId xmlns:p14="http://schemas.microsoft.com/office/powerpoint/2010/main" val="1024086991"/>
+      </p:ext>
+    </p:extLst>
+  </p:cSld>
+  <p:clrMapOvr>
+    <a:masterClrMapping/>
+  </p:clrMapOvr>
+</p:notes>
+</file>
+
+<file path=ppt/notesSlides/notesSlide9.xml><?xml version="1.0" encoding="utf-8"?>
+<p:notes xmlns:a="http://schemas.openxmlformats.org/drawingml/2006/main" xmlns:r="http://schemas.openxmlformats.org/officeDocument/2006/relationships" xmlns:p="http://schemas.openxmlformats.org/presentationml/2006/main">
+  <p:cSld>
+    <p:spTree>
+      <p:nvGrpSpPr>
+        <p:cNvPr id="1" name=""/>
+        <p:cNvGrpSpPr/>
+        <p:nvPr/>
+      </p:nvGrpSpPr>
+      <p:grpSpPr>
+        <a:xfrm>
+          <a:off x="0" y="0"/>
+          <a:ext cx="0" cy="0"/>
+          <a:chOff x="0" y="0"/>
+          <a:chExt cx="0" cy="0"/>
+        </a:xfrm>
+      </p:grpSpPr>
+      <p:sp>
+        <p:nvSpPr>
+          <p:cNvPr id="2" name="Slide Image Placeholder 1"/>
+          <p:cNvSpPr>
+            <a:spLocks noGrp="1" noRot="1" noChangeAspect="1"/>
+          </p:cNvSpPr>
+          <p:nvPr>
+            <p:ph type="sldImg"/>
+          </p:nvPr>
+        </p:nvSpPr>
+        <p:spPr/>
+      </p:sp>
+      <p:sp>
+        <p:nvSpPr>
+          <p:cNvPr id="3" name="Notes Placeholder 2"/>
+          <p:cNvSpPr>
+            <a:spLocks noGrp="1"/>
+          </p:cNvSpPr>
+          <p:nvPr>
+            <p:ph type="body" idx="1"/>
+          </p:nvPr>
+        </p:nvSpPr>
+        <p:spPr/>
+        <p:txBody>
+          <a:bodyPr/>
+          <a:lstStyle/>
+          <a:p>
+            <a:r>
+              <a:rPr lang="en-US" dirty="0"/>
+              <a:t/>
+            </a:r>
+            <a:endParaRPr lang="en-US" dirty="0"/>
+          </a:p>
+        </p:txBody>
+      </p:sp>
+      <p:sp>
+        <p:nvSpPr>
+          <p:cNvPr id="4" name="Slide Number Placeholder 3"/>
+          <p:cNvSpPr>
+            <a:spLocks noGrp="1"/>
+          </p:cNvSpPr>
+          <p:nvPr>
+            <p:ph type="sldNum" sz="quarter" idx="10"/>
+          </p:nvPr>
+        </p:nvSpPr>
+        <p:spPr/>
+        <p:txBody>
+          <a:bodyPr/>
+          <a:lstStyle/>
+          <a:p>
+            <a:fld id="{F7021451-1387-4CA6-816F-3879F97B5CBC}" type="slidenum">
+              <a:rPr lang="en-US"/>
+              <a:t>9</a:t>
             </a:fld>
             <a:endParaRPr lang="en-US"/>
           </a:p>
@@ -2025,6 +2381,1453 @@
 </p:sld>
 </file>
 
+<file path=ppt/slides/slide10.xml><?xml version="1.0" encoding="utf-8"?>
+<p:sld xmlns:a="http://schemas.openxmlformats.org/drawingml/2006/main" xmlns:r="http://schemas.openxmlformats.org/officeDocument/2006/relationships" xmlns:p="http://schemas.openxmlformats.org/presentationml/2006/main">
+  <p:cSld name="Slide 10">
+    <p:bg>
+      <p:bgPr>
+        <a:solidFill>
+          <a:srgbClr val="FFFFFF"/>
+        </a:solidFill>
+      </p:bgPr>
+    </p:bg>
+    <p:spTree>
+      <p:nvGrpSpPr>
+        <p:cNvPr id="1" name=""/>
+        <p:cNvGrpSpPr/>
+        <p:nvPr/>
+      </p:nvGrpSpPr>
+      <p:grpSpPr>
+        <a:xfrm>
+          <a:off x="0" y="0"/>
+          <a:ext cx="0" cy="0"/>
+          <a:chOff x="0" y="0"/>
+          <a:chExt cx="0" cy="0"/>
+        </a:xfrm>
+      </p:grpSpPr>
+      <p:sp>
+        <p:nvSpPr>
+          <p:cNvPr id="2" name="Text 0"/>
+          <p:cNvSpPr/>
+          <p:nvPr/>
+        </p:nvSpPr>
+        <p:spPr>
+          <a:xfrm>
+            <a:off x="640080" y="640080"/>
+            <a:ext cx="10058400" cy="731520"/>
+          </a:xfrm>
+          <a:prstGeom prst="rect">
+            <a:avLst/>
+          </a:prstGeom>
+          <a:noFill/>
+          <a:ln/>
+        </p:spPr>
+        <p:txBody>
+          <a:bodyPr wrap="square" rtlCol="0" anchor="ctr"/>
+          <a:lstStyle/>
+          <a:p>
+            <a:pPr indent="0" marL="0">
+              <a:buNone/>
+            </a:pPr>
+            <a:r>
+              <a:rPr lang="en-US" sz="3000" b="1" dirty="0">
+                <a:solidFill>
+                  <a:srgbClr val="1A1A1A"/>
+                </a:solidFill>
+                <a:latin typeface="Cambria" pitchFamily="34" charset="0"/>
+                <a:ea typeface="Cambria" pitchFamily="34" charset="-122"/>
+                <a:cs typeface="Cambria" pitchFamily="34" charset="-120"/>
+              </a:rPr>
+              <a:t>Reading &amp; homework</a:t>
+            </a:r>
+            <a:endParaRPr lang="en-US" sz="3000" dirty="0"/>
+          </a:p>
+        </p:txBody>
+      </p:sp>
+      <p:sp>
+        <p:nvSpPr>
+          <p:cNvPr id="3" name="Shape 1"/>
+          <p:cNvSpPr/>
+          <p:nvPr/>
+        </p:nvSpPr>
+        <p:spPr>
+          <a:xfrm>
+            <a:off x="640080" y="1810512"/>
+            <a:ext cx="219456" cy="219456"/>
+          </a:xfrm>
+          <a:prstGeom prst="ellipse">
+            <a:avLst/>
+          </a:prstGeom>
+          <a:solidFill>
+            <a:srgbClr val="7A3B2E"/>
+          </a:solidFill>
+          <a:ln/>
+        </p:spPr>
+      </p:sp>
+      <p:sp>
+        <p:nvSpPr>
+          <p:cNvPr id="4" name="Text 2"/>
+          <p:cNvSpPr/>
+          <p:nvPr/>
+        </p:nvSpPr>
+        <p:spPr>
+          <a:xfrm>
+            <a:off x="1051560" y="1737360"/>
+            <a:ext cx="10424160" cy="365760"/>
+          </a:xfrm>
+          <a:prstGeom prst="rect">
+            <a:avLst/>
+          </a:prstGeom>
+          <a:noFill/>
+          <a:ln/>
+        </p:spPr>
+        <p:txBody>
+          <a:bodyPr wrap="square" rtlCol="0" anchor="ctr"/>
+          <a:lstStyle/>
+          <a:p>
+            <a:pPr indent="0" marL="0">
+              <a:buNone/>
+            </a:pPr>
+            <a:r>
+              <a:rPr lang="en-US" sz="1500" b="1" dirty="0">
+                <a:solidFill>
+                  <a:srgbClr val="7A3B2E"/>
+                </a:solidFill>
+                <a:latin typeface="Calibri" pitchFamily="34" charset="0"/>
+                <a:ea typeface="Calibri" pitchFamily="34" charset="-122"/>
+                <a:cs typeface="Calibri" pitchFamily="34" charset="-120"/>
+              </a:rPr>
+              <a:t>Reading</a:t>
+            </a:r>
+            <a:endParaRPr lang="en-US" sz="1500" dirty="0"/>
+          </a:p>
+        </p:txBody>
+      </p:sp>
+      <p:sp>
+        <p:nvSpPr>
+          <p:cNvPr id="5" name="Text 3"/>
+          <p:cNvSpPr/>
+          <p:nvPr/>
+        </p:nvSpPr>
+        <p:spPr>
+          <a:xfrm>
+            <a:off x="1051560" y="2121408"/>
+            <a:ext cx="10424160" cy="731520"/>
+          </a:xfrm>
+          <a:prstGeom prst="rect">
+            <a:avLst/>
+          </a:prstGeom>
+          <a:noFill/>
+          <a:ln/>
+        </p:spPr>
+        <p:txBody>
+          <a:bodyPr wrap="square" rtlCol="0" anchor="t">
+            <a:spAutoFit/>
+          </a:bodyPr>
+          <a:lstStyle/>
+          <a:p>
+            <a:pPr indent="0" marL="0">
+              <a:buNone/>
+            </a:pPr>
+            <a:r>
+              <a:rPr lang="en-US" sz="1400" dirty="0">
+                <a:solidFill>
+                  <a:srgbClr val="1A1A1A"/>
+                </a:solidFill>
+                <a:latin typeface="Calibri" pitchFamily="34" charset="0"/>
+                <a:ea typeface="Calibri" pitchFamily="34" charset="-122"/>
+                <a:cs typeface="Calibri" pitchFamily="34" charset="-120"/>
+              </a:rPr>
+              <a:t>Krause, Data Biographies (We All Count)</a:t>
+            </a:r>
+            <a:endParaRPr lang="en-US" sz="1400" dirty="0"/>
+          </a:p>
+        </p:txBody>
+      </p:sp>
+      <p:sp>
+        <p:nvSpPr>
+          <p:cNvPr id="6" name="Shape 4"/>
+          <p:cNvSpPr/>
+          <p:nvPr/>
+        </p:nvSpPr>
+        <p:spPr>
+          <a:xfrm>
+            <a:off x="640080" y="2953512"/>
+            <a:ext cx="219456" cy="219456"/>
+          </a:xfrm>
+          <a:prstGeom prst="ellipse">
+            <a:avLst/>
+          </a:prstGeom>
+          <a:solidFill>
+            <a:srgbClr val="3F6F5F"/>
+          </a:solidFill>
+          <a:ln/>
+        </p:spPr>
+      </p:sp>
+      <p:sp>
+        <p:nvSpPr>
+          <p:cNvPr id="7" name="Text 5"/>
+          <p:cNvSpPr/>
+          <p:nvPr/>
+        </p:nvSpPr>
+        <p:spPr>
+          <a:xfrm>
+            <a:off x="1051560" y="2880360"/>
+            <a:ext cx="10424160" cy="365760"/>
+          </a:xfrm>
+          <a:prstGeom prst="rect">
+            <a:avLst/>
+          </a:prstGeom>
+          <a:noFill/>
+          <a:ln/>
+        </p:spPr>
+        <p:txBody>
+          <a:bodyPr wrap="square" rtlCol="0" anchor="ctr"/>
+          <a:lstStyle/>
+          <a:p>
+            <a:pPr indent="0" marL="0">
+              <a:buNone/>
+            </a:pPr>
+            <a:r>
+              <a:rPr lang="en-US" sz="1500" b="1" dirty="0">
+                <a:solidFill>
+                  <a:srgbClr val="3F6F5F"/>
+                </a:solidFill>
+                <a:latin typeface="Calibri" pitchFamily="34" charset="0"/>
+                <a:ea typeface="Calibri" pitchFamily="34" charset="-122"/>
+                <a:cs typeface="Calibri" pitchFamily="34" charset="-120"/>
+              </a:rPr>
+              <a:t>Supplement</a:t>
+            </a:r>
+            <a:endParaRPr lang="en-US" sz="1500" dirty="0"/>
+          </a:p>
+        </p:txBody>
+      </p:sp>
+      <p:sp>
+        <p:nvSpPr>
+          <p:cNvPr id="8" name="Text 6"/>
+          <p:cNvSpPr/>
+          <p:nvPr/>
+        </p:nvSpPr>
+        <p:spPr>
+          <a:xfrm>
+            <a:off x="1051560" y="3264408"/>
+            <a:ext cx="10424160" cy="731520"/>
+          </a:xfrm>
+          <a:prstGeom prst="rect">
+            <a:avLst/>
+          </a:prstGeom>
+          <a:noFill/>
+          <a:ln/>
+        </p:spPr>
+        <p:txBody>
+          <a:bodyPr wrap="square" rtlCol="0" anchor="t">
+            <a:spAutoFit/>
+          </a:bodyPr>
+          <a:lstStyle/>
+          <a:p>
+            <a:pPr indent="0" marL="0">
+              <a:buNone/>
+            </a:pPr>
+            <a:r>
+              <a:rPr lang="en-US" sz="1400" dirty="0">
+                <a:solidFill>
+                  <a:srgbClr val="1A1A1A"/>
+                </a:solidFill>
+                <a:latin typeface="Calibri" pitchFamily="34" charset="0"/>
+                <a:ea typeface="Calibri" pitchFamily="34" charset="-122"/>
+                <a:cs typeface="Calibri" pitchFamily="34" charset="-120"/>
+              </a:rPr>
+              <a:t>Freelon, Post-API Age</a:t>
+            </a:r>
+            <a:endParaRPr lang="en-US" sz="1400" dirty="0"/>
+          </a:p>
+        </p:txBody>
+      </p:sp>
+      <p:sp>
+        <p:nvSpPr>
+          <p:cNvPr id="9" name="Shape 7"/>
+          <p:cNvSpPr/>
+          <p:nvPr/>
+        </p:nvSpPr>
+        <p:spPr>
+          <a:xfrm>
+            <a:off x="640080" y="4096512"/>
+            <a:ext cx="219456" cy="219456"/>
+          </a:xfrm>
+          <a:prstGeom prst="ellipse">
+            <a:avLst/>
+          </a:prstGeom>
+          <a:solidFill>
+            <a:srgbClr val="B9852F"/>
+          </a:solidFill>
+          <a:ln/>
+        </p:spPr>
+      </p:sp>
+      <p:sp>
+        <p:nvSpPr>
+          <p:cNvPr id="10" name="Text 8"/>
+          <p:cNvSpPr/>
+          <p:nvPr/>
+        </p:nvSpPr>
+        <p:spPr>
+          <a:xfrm>
+            <a:off x="1051560" y="4023360"/>
+            <a:ext cx="10424160" cy="365760"/>
+          </a:xfrm>
+          <a:prstGeom prst="rect">
+            <a:avLst/>
+          </a:prstGeom>
+          <a:noFill/>
+          <a:ln/>
+        </p:spPr>
+        <p:txBody>
+          <a:bodyPr wrap="square" rtlCol="0" anchor="ctr"/>
+          <a:lstStyle/>
+          <a:p>
+            <a:pPr indent="0" marL="0">
+              <a:buNone/>
+            </a:pPr>
+            <a:r>
+              <a:rPr lang="en-US" sz="1500" b="1" dirty="0">
+                <a:solidFill>
+                  <a:srgbClr val="B9852F"/>
+                </a:solidFill>
+                <a:latin typeface="Calibri" pitchFamily="34" charset="0"/>
+                <a:ea typeface="Calibri" pitchFamily="34" charset="-122"/>
+                <a:cs typeface="Calibri" pitchFamily="34" charset="-120"/>
+              </a:rPr>
+              <a:t>Sketch</a:t>
+            </a:r>
+            <a:endParaRPr lang="en-US" sz="1500" dirty="0"/>
+          </a:p>
+        </p:txBody>
+      </p:sp>
+      <p:sp>
+        <p:nvSpPr>
+          <p:cNvPr id="11" name="Text 9"/>
+          <p:cNvSpPr/>
+          <p:nvPr/>
+        </p:nvSpPr>
+        <p:spPr>
+          <a:xfrm>
+            <a:off x="1051560" y="4407408"/>
+            <a:ext cx="10424160" cy="731520"/>
+          </a:xfrm>
+          <a:prstGeom prst="rect">
+            <a:avLst/>
+          </a:prstGeom>
+          <a:noFill/>
+          <a:ln/>
+        </p:spPr>
+        <p:txBody>
+          <a:bodyPr wrap="square" rtlCol="0" anchor="t">
+            <a:spAutoFit/>
+          </a:bodyPr>
+          <a:lstStyle/>
+          <a:p>
+            <a:pPr indent="0" marL="0">
+              <a:buNone/>
+            </a:pPr>
+            <a:r>
+              <a:rPr lang="en-US" sz="1400" dirty="0">
+                <a:solidFill>
+                  <a:srgbClr val="1A1A1A"/>
+                </a:solidFill>
+                <a:latin typeface="Calibri" pitchFamily="34" charset="0"/>
+                <a:ea typeface="Calibri" pitchFamily="34" charset="-122"/>
+                <a:cs typeface="Calibri" pitchFamily="34" charset="-120"/>
+              </a:rPr>
+              <a:t>Write your Data Biography (~400 words) and actually collect your corpus with the cookbook.</a:t>
+            </a:r>
+            <a:endParaRPr lang="en-US" sz="1400" dirty="0"/>
+          </a:p>
+        </p:txBody>
+      </p:sp>
+      <p:sp>
+        <p:nvSpPr>
+          <p:cNvPr id="12" name="Shape 10"/>
+          <p:cNvSpPr/>
+          <p:nvPr/>
+        </p:nvSpPr>
+        <p:spPr>
+          <a:xfrm>
+            <a:off x="640080" y="5239512"/>
+            <a:ext cx="219456" cy="219456"/>
+          </a:xfrm>
+          <a:prstGeom prst="ellipse">
+            <a:avLst/>
+          </a:prstGeom>
+          <a:solidFill>
+            <a:srgbClr val="7A3B2E"/>
+          </a:solidFill>
+          <a:ln/>
+        </p:spPr>
+      </p:sp>
+      <p:sp>
+        <p:nvSpPr>
+          <p:cNvPr id="13" name="Text 11"/>
+          <p:cNvSpPr/>
+          <p:nvPr/>
+        </p:nvSpPr>
+        <p:spPr>
+          <a:xfrm>
+            <a:off x="1051560" y="5166360"/>
+            <a:ext cx="10424160" cy="365760"/>
+          </a:xfrm>
+          <a:prstGeom prst="rect">
+            <a:avLst/>
+          </a:prstGeom>
+          <a:noFill/>
+          <a:ln/>
+        </p:spPr>
+        <p:txBody>
+          <a:bodyPr wrap="square" rtlCol="0" anchor="ctr"/>
+          <a:lstStyle/>
+          <a:p>
+            <a:pPr indent="0" marL="0">
+              <a:buNone/>
+            </a:pPr>
+            <a:r>
+              <a:rPr lang="en-US" sz="1500" b="1" dirty="0">
+                <a:solidFill>
+                  <a:srgbClr val="7A3B2E"/>
+                </a:solidFill>
+                <a:latin typeface="Calibri" pitchFamily="34" charset="0"/>
+                <a:ea typeface="Calibri" pitchFamily="34" charset="-122"/>
+                <a:cs typeface="Calibri" pitchFamily="34" charset="-120"/>
+              </a:rPr>
+              <a:t>Check (AI closed)</a:t>
+            </a:r>
+            <a:endParaRPr lang="en-US" sz="1500" dirty="0"/>
+          </a:p>
+        </p:txBody>
+      </p:sp>
+      <p:sp>
+        <p:nvSpPr>
+          <p:cNvPr id="14" name="Text 12"/>
+          <p:cNvSpPr/>
+          <p:nvPr/>
+        </p:nvSpPr>
+        <p:spPr>
+          <a:xfrm>
+            <a:off x="1051560" y="5550408"/>
+            <a:ext cx="10424160" cy="731520"/>
+          </a:xfrm>
+          <a:prstGeom prst="rect">
+            <a:avLst/>
+          </a:prstGeom>
+          <a:noFill/>
+          <a:ln/>
+        </p:spPr>
+        <p:txBody>
+          <a:bodyPr wrap="square" rtlCol="0" anchor="t">
+            <a:spAutoFit/>
+          </a:bodyPr>
+          <a:lstStyle/>
+          <a:p>
+            <a:pPr indent="0" marL="0">
+              <a:buNone/>
+            </a:pPr>
+            <a:r>
+              <a:rPr lang="en-US" sz="1400" dirty="0">
+                <a:solidFill>
+                  <a:srgbClr val="1A1A1A"/>
+                </a:solidFill>
+                <a:latin typeface="Calibri" pitchFamily="34" charset="0"/>
+                <a:ea typeface="Calibri" pitchFamily="34" charset="-122"/>
+                <a:cs typeface="Calibri" pitchFamily="34" charset="-120"/>
+              </a:rPr>
+              <a:t>Explain it: your question aloud, what it omits, and where your data actually comes from. (Competencies 2, 6.)</a:t>
+            </a:r>
+            <a:endParaRPr lang="en-US" sz="1400" dirty="0"/>
+          </a:p>
+        </p:txBody>
+      </p:sp>
+    </p:spTree>
+  </p:cSld>
+  <p:clrMapOvr>
+    <a:masterClrMapping/>
+  </p:clrMapOvr>
+</p:sld>
+</file>
+
+<file path=ppt/slides/slide11.xml><?xml version="1.0" encoding="utf-8"?>
+<p:sld xmlns:a="http://schemas.openxmlformats.org/drawingml/2006/main" xmlns:r="http://schemas.openxmlformats.org/officeDocument/2006/relationships" xmlns:p="http://schemas.openxmlformats.org/presentationml/2006/main">
+  <p:cSld name="Slide 11">
+    <p:bg>
+      <p:bgPr>
+        <a:solidFill>
+          <a:srgbClr val="FFFFFF"/>
+        </a:solidFill>
+      </p:bgPr>
+    </p:bg>
+    <p:spTree>
+      <p:nvGrpSpPr>
+        <p:cNvPr id="1" name=""/>
+        <p:cNvGrpSpPr/>
+        <p:nvPr/>
+      </p:nvGrpSpPr>
+      <p:grpSpPr>
+        <a:xfrm>
+          <a:off x="0" y="0"/>
+          <a:ext cx="0" cy="0"/>
+          <a:chOff x="0" y="0"/>
+          <a:chExt cx="0" cy="0"/>
+        </a:xfrm>
+      </p:grpSpPr>
+      <p:sp>
+        <p:nvSpPr>
+          <p:cNvPr id="2" name="Text 0"/>
+          <p:cNvSpPr/>
+          <p:nvPr/>
+        </p:nvSpPr>
+        <p:spPr>
+          <a:xfrm>
+            <a:off x="640080" y="640080"/>
+            <a:ext cx="10058400" cy="320040"/>
+          </a:xfrm>
+          <a:prstGeom prst="rect">
+            <a:avLst/>
+          </a:prstGeom>
+          <a:noFill/>
+          <a:ln/>
+        </p:spPr>
+        <p:txBody>
+          <a:bodyPr wrap="square" rtlCol="0" anchor="ctr"/>
+          <a:lstStyle/>
+          <a:p>
+            <a:pPr indent="0" marL="0">
+              <a:buNone/>
+            </a:pPr>
+            <a:r>
+              <a:rPr lang="en-US" sz="1300" b="1" spc="300" kern="0" dirty="0">
+                <a:solidFill>
+                  <a:srgbClr val="7A3B2E"/>
+                </a:solidFill>
+                <a:latin typeface="Calibri" pitchFamily="34" charset="0"/>
+                <a:ea typeface="Calibri" pitchFamily="34" charset="-122"/>
+                <a:cs typeface="Calibri" pitchFamily="34" charset="-120"/>
+              </a:rPr>
+              <a:t>HOW THIS WEEK CONNECTS</a:t>
+            </a:r>
+            <a:endParaRPr lang="en-US" sz="1300" dirty="0"/>
+          </a:p>
+        </p:txBody>
+      </p:sp>
+      <p:sp>
+        <p:nvSpPr>
+          <p:cNvPr id="3" name="Text 1"/>
+          <p:cNvSpPr/>
+          <p:nvPr/>
+        </p:nvSpPr>
+        <p:spPr>
+          <a:xfrm>
+            <a:off x="640080" y="987552"/>
+            <a:ext cx="10058400" cy="640080"/>
+          </a:xfrm>
+          <a:prstGeom prst="rect">
+            <a:avLst/>
+          </a:prstGeom>
+          <a:noFill/>
+          <a:ln/>
+        </p:spPr>
+        <p:txBody>
+          <a:bodyPr wrap="square" rtlCol="0" anchor="ctr"/>
+          <a:lstStyle/>
+          <a:p>
+            <a:pPr indent="0" marL="0">
+              <a:buNone/>
+            </a:pPr>
+            <a:r>
+              <a:rPr lang="en-US" sz="2800" b="1" dirty="0">
+                <a:solidFill>
+                  <a:srgbClr val="1A1A1A"/>
+                </a:solidFill>
+                <a:latin typeface="Cambria" pitchFamily="34" charset="0"/>
+                <a:ea typeface="Cambria" pitchFamily="34" charset="-122"/>
+                <a:cs typeface="Cambria" pitchFamily="34" charset="-120"/>
+              </a:rPr>
+              <a:t>The course's through-lines</a:t>
+            </a:r>
+            <a:endParaRPr lang="en-US" sz="2800" dirty="0"/>
+          </a:p>
+        </p:txBody>
+      </p:sp>
+      <p:sp>
+        <p:nvSpPr>
+          <p:cNvPr id="4" name="Shape 2"/>
+          <p:cNvSpPr/>
+          <p:nvPr/>
+        </p:nvSpPr>
+        <p:spPr>
+          <a:xfrm>
+            <a:off x="640080" y="2057400"/>
+            <a:ext cx="457200" cy="457200"/>
+          </a:xfrm>
+          <a:prstGeom prst="roundRect">
+            <a:avLst>
+              <a:gd name="adj" fmla="val 16000"/>
+            </a:avLst>
+          </a:prstGeom>
+          <a:solidFill>
+            <a:srgbClr val="7A3B2E"/>
+          </a:solidFill>
+          <a:ln/>
+        </p:spPr>
+      </p:sp>
+      <p:sp>
+        <p:nvSpPr>
+          <p:cNvPr id="5" name="Text 3"/>
+          <p:cNvSpPr/>
+          <p:nvPr/>
+        </p:nvSpPr>
+        <p:spPr>
+          <a:xfrm>
+            <a:off x="640080" y="2057400"/>
+            <a:ext cx="457200" cy="457200"/>
+          </a:xfrm>
+          <a:prstGeom prst="rect">
+            <a:avLst/>
+          </a:prstGeom>
+          <a:noFill/>
+          <a:ln/>
+        </p:spPr>
+        <p:txBody>
+          <a:bodyPr wrap="square" rtlCol="0" anchor="ctr"/>
+          <a:lstStyle/>
+          <a:p>
+            <a:pPr algn="ctr" indent="0" marL="0">
+              <a:buNone/>
+            </a:pPr>
+            <a:r>
+              <a:rPr lang="en-US" sz="2000" b="1" dirty="0">
+                <a:solidFill>
+                  <a:srgbClr val="FFFFFF"/>
+                </a:solidFill>
+                <a:latin typeface="Cambria" pitchFamily="34" charset="0"/>
+                <a:ea typeface="Cambria" pitchFamily="34" charset="-122"/>
+                <a:cs typeface="Cambria" pitchFamily="34" charset="-120"/>
+              </a:rPr>
+              <a:t>1</a:t>
+            </a:r>
+            <a:endParaRPr lang="en-US" sz="2000" dirty="0"/>
+          </a:p>
+        </p:txBody>
+      </p:sp>
+      <p:sp>
+        <p:nvSpPr>
+          <p:cNvPr id="6" name="Text 4"/>
+          <p:cNvSpPr/>
+          <p:nvPr/>
+        </p:nvSpPr>
+        <p:spPr>
+          <a:xfrm>
+            <a:off x="1371600" y="2020824"/>
+            <a:ext cx="10332720" cy="411480"/>
+          </a:xfrm>
+          <a:prstGeom prst="rect">
+            <a:avLst/>
+          </a:prstGeom>
+          <a:noFill/>
+          <a:ln/>
+        </p:spPr>
+        <p:txBody>
+          <a:bodyPr wrap="square" rtlCol="0" anchor="ctr"/>
+          <a:lstStyle/>
+          <a:p>
+            <a:pPr indent="0" marL="0">
+              <a:buNone/>
+            </a:pPr>
+            <a:r>
+              <a:rPr lang="en-US" sz="1900" b="1" dirty="0">
+                <a:solidFill>
+                  <a:srgbClr val="7A3B2E"/>
+                </a:solidFill>
+                <a:latin typeface="Cambria" pitchFamily="34" charset="0"/>
+                <a:ea typeface="Cambria" pitchFamily="34" charset="-122"/>
+                <a:cs typeface="Cambria" pitchFamily="34" charset="-120"/>
+              </a:rPr>
+              <a:t>Whose data</a:t>
+            </a:r>
+            <a:endParaRPr lang="en-US" sz="1900" dirty="0"/>
+          </a:p>
+        </p:txBody>
+      </p:sp>
+      <p:sp>
+        <p:nvSpPr>
+          <p:cNvPr id="7" name="Text 5"/>
+          <p:cNvSpPr/>
+          <p:nvPr/>
+        </p:nvSpPr>
+        <p:spPr>
+          <a:xfrm>
+            <a:off x="1371600" y="2441448"/>
+            <a:ext cx="10332720" cy="914400"/>
+          </a:xfrm>
+          <a:prstGeom prst="rect">
+            <a:avLst/>
+          </a:prstGeom>
+          <a:noFill/>
+          <a:ln/>
+        </p:spPr>
+        <p:txBody>
+          <a:bodyPr wrap="square" rtlCol="0" anchor="t">
+            <a:spAutoFit/>
+          </a:bodyPr>
+          <a:lstStyle/>
+          <a:p>
+            <a:pPr indent="0" marL="0">
+              <a:lnSpc>
+                <a:spcPct val="112000"/>
+              </a:lnSpc>
+              <a:buNone/>
+            </a:pPr>
+            <a:r>
+              <a:rPr lang="en-US" sz="1450" dirty="0">
+                <a:solidFill>
+                  <a:srgbClr val="1A1A1A"/>
+                </a:solidFill>
+                <a:latin typeface="Calibri" pitchFamily="34" charset="0"/>
+                <a:ea typeface="Calibri" pitchFamily="34" charset="-122"/>
+                <a:cs typeface="Calibri" pitchFamily="34" charset="-120"/>
+              </a:rPr>
+              <a:t>The Data Biography: where it came from, who is missing, what it cannot say.</a:t>
+            </a:r>
+            <a:endParaRPr lang="en-US" sz="1450" dirty="0"/>
+          </a:p>
+        </p:txBody>
+      </p:sp>
+      <p:sp>
+        <p:nvSpPr>
+          <p:cNvPr id="8" name="Shape 6"/>
+          <p:cNvSpPr/>
+          <p:nvPr/>
+        </p:nvSpPr>
+        <p:spPr>
+          <a:xfrm>
+            <a:off x="640080" y="3520440"/>
+            <a:ext cx="457200" cy="457200"/>
+          </a:xfrm>
+          <a:prstGeom prst="roundRect">
+            <a:avLst>
+              <a:gd name="adj" fmla="val 16000"/>
+            </a:avLst>
+          </a:prstGeom>
+          <a:solidFill>
+            <a:srgbClr val="3F6F5F"/>
+          </a:solidFill>
+          <a:ln/>
+        </p:spPr>
+      </p:sp>
+      <p:sp>
+        <p:nvSpPr>
+          <p:cNvPr id="9" name="Text 7"/>
+          <p:cNvSpPr/>
+          <p:nvPr/>
+        </p:nvSpPr>
+        <p:spPr>
+          <a:xfrm>
+            <a:off x="640080" y="3520440"/>
+            <a:ext cx="457200" cy="457200"/>
+          </a:xfrm>
+          <a:prstGeom prst="rect">
+            <a:avLst/>
+          </a:prstGeom>
+          <a:noFill/>
+          <a:ln/>
+        </p:spPr>
+        <p:txBody>
+          <a:bodyPr wrap="square" rtlCol="0" anchor="ctr"/>
+          <a:lstStyle/>
+          <a:p>
+            <a:pPr algn="ctr" indent="0" marL="0">
+              <a:buNone/>
+            </a:pPr>
+            <a:r>
+              <a:rPr lang="en-US" sz="2000" b="1" dirty="0">
+                <a:solidFill>
+                  <a:srgbClr val="FFFFFF"/>
+                </a:solidFill>
+                <a:latin typeface="Cambria" pitchFamily="34" charset="0"/>
+                <a:ea typeface="Cambria" pitchFamily="34" charset="-122"/>
+                <a:cs typeface="Cambria" pitchFamily="34" charset="-120"/>
+              </a:rPr>
+              <a:t>2</a:t>
+            </a:r>
+            <a:endParaRPr lang="en-US" sz="2000" dirty="0"/>
+          </a:p>
+        </p:txBody>
+      </p:sp>
+      <p:sp>
+        <p:nvSpPr>
+          <p:cNvPr id="10" name="Text 8"/>
+          <p:cNvSpPr/>
+          <p:nvPr/>
+        </p:nvSpPr>
+        <p:spPr>
+          <a:xfrm>
+            <a:off x="1371600" y="3483864"/>
+            <a:ext cx="10332720" cy="411480"/>
+          </a:xfrm>
+          <a:prstGeom prst="rect">
+            <a:avLst/>
+          </a:prstGeom>
+          <a:noFill/>
+          <a:ln/>
+        </p:spPr>
+        <p:txBody>
+          <a:bodyPr wrap="square" rtlCol="0" anchor="ctr"/>
+          <a:lstStyle/>
+          <a:p>
+            <a:pPr indent="0" marL="0">
+              <a:buNone/>
+            </a:pPr>
+            <a:r>
+              <a:rPr lang="en-US" sz="1900" b="1" dirty="0">
+                <a:solidFill>
+                  <a:srgbClr val="3F6F5F"/>
+                </a:solidFill>
+                <a:latin typeface="Cambria" pitchFamily="34" charset="0"/>
+                <a:ea typeface="Cambria" pitchFamily="34" charset="-122"/>
+                <a:cs typeface="Cambria" pitchFamily="34" charset="-120"/>
+              </a:rPr>
+              <a:t>The licensing line</a:t>
+            </a:r>
+            <a:endParaRPr lang="en-US" sz="1900" dirty="0"/>
+          </a:p>
+        </p:txBody>
+      </p:sp>
+      <p:sp>
+        <p:nvSpPr>
+          <p:cNvPr id="11" name="Text 9"/>
+          <p:cNvSpPr/>
+          <p:nvPr/>
+        </p:nvSpPr>
+        <p:spPr>
+          <a:xfrm>
+            <a:off x="1371600" y="3904488"/>
+            <a:ext cx="10332720" cy="914400"/>
+          </a:xfrm>
+          <a:prstGeom prst="rect">
+            <a:avLst/>
+          </a:prstGeom>
+          <a:noFill/>
+          <a:ln/>
+        </p:spPr>
+        <p:txBody>
+          <a:bodyPr wrap="square" rtlCol="0" anchor="t">
+            <a:spAutoFit/>
+          </a:bodyPr>
+          <a:lstStyle/>
+          <a:p>
+            <a:pPr indent="0" marL="0">
+              <a:lnSpc>
+                <a:spcPct val="112000"/>
+              </a:lnSpc>
+              <a:buNone/>
+            </a:pPr>
+            <a:r>
+              <a:rPr lang="en-US" sz="1450" dirty="0">
+                <a:solidFill>
+                  <a:srgbClr val="1A1A1A"/>
+                </a:solidFill>
+                <a:latin typeface="Calibri" pitchFamily="34" charset="0"/>
+                <a:ea typeface="Calibri" pitchFamily="34" charset="-122"/>
+                <a:cs typeface="Calibri" pitchFamily="34" charset="-120"/>
+              </a:rPr>
+              <a:t>CC0, to scrape-with-care, to never (LibGen). Judgment, not a rulebook.</a:t>
+            </a:r>
+            <a:endParaRPr lang="en-US" sz="1450" dirty="0"/>
+          </a:p>
+        </p:txBody>
+      </p:sp>
+      <p:sp>
+        <p:nvSpPr>
+          <p:cNvPr id="12" name="Shape 10"/>
+          <p:cNvSpPr/>
+          <p:nvPr/>
+        </p:nvSpPr>
+        <p:spPr>
+          <a:xfrm>
+            <a:off x="640080" y="4983480"/>
+            <a:ext cx="457200" cy="457200"/>
+          </a:xfrm>
+          <a:prstGeom prst="roundRect">
+            <a:avLst>
+              <a:gd name="adj" fmla="val 16000"/>
+            </a:avLst>
+          </a:prstGeom>
+          <a:solidFill>
+            <a:srgbClr val="B9852F"/>
+          </a:solidFill>
+          <a:ln/>
+        </p:spPr>
+      </p:sp>
+      <p:sp>
+        <p:nvSpPr>
+          <p:cNvPr id="13" name="Text 11"/>
+          <p:cNvSpPr/>
+          <p:nvPr/>
+        </p:nvSpPr>
+        <p:spPr>
+          <a:xfrm>
+            <a:off x="640080" y="4983480"/>
+            <a:ext cx="457200" cy="457200"/>
+          </a:xfrm>
+          <a:prstGeom prst="rect">
+            <a:avLst/>
+          </a:prstGeom>
+          <a:noFill/>
+          <a:ln/>
+        </p:spPr>
+        <p:txBody>
+          <a:bodyPr wrap="square" rtlCol="0" anchor="ctr"/>
+          <a:lstStyle/>
+          <a:p>
+            <a:pPr algn="ctr" indent="0" marL="0">
+              <a:buNone/>
+            </a:pPr>
+            <a:r>
+              <a:rPr lang="en-US" sz="2000" b="1" dirty="0">
+                <a:solidFill>
+                  <a:srgbClr val="FFFFFF"/>
+                </a:solidFill>
+                <a:latin typeface="Cambria" pitchFamily="34" charset="0"/>
+                <a:ea typeface="Cambria" pitchFamily="34" charset="-122"/>
+                <a:cs typeface="Cambria" pitchFamily="34" charset="-120"/>
+              </a:rPr>
+              <a:t>3</a:t>
+            </a:r>
+            <a:endParaRPr lang="en-US" sz="2000" dirty="0"/>
+          </a:p>
+        </p:txBody>
+      </p:sp>
+      <p:sp>
+        <p:nvSpPr>
+          <p:cNvPr id="14" name="Text 12"/>
+          <p:cNvSpPr/>
+          <p:nvPr/>
+        </p:nvSpPr>
+        <p:spPr>
+          <a:xfrm>
+            <a:off x="1371600" y="4946904"/>
+            <a:ext cx="10332720" cy="411480"/>
+          </a:xfrm>
+          <a:prstGeom prst="rect">
+            <a:avLst/>
+          </a:prstGeom>
+          <a:noFill/>
+          <a:ln/>
+        </p:spPr>
+        <p:txBody>
+          <a:bodyPr wrap="square" rtlCol="0" anchor="ctr"/>
+          <a:lstStyle/>
+          <a:p>
+            <a:pPr indent="0" marL="0">
+              <a:buNone/>
+            </a:pPr>
+            <a:r>
+              <a:rPr lang="en-US" sz="1900" b="1" dirty="0">
+                <a:solidFill>
+                  <a:srgbClr val="B9852F"/>
+                </a:solidFill>
+                <a:latin typeface="Cambria" pitchFamily="34" charset="0"/>
+                <a:ea typeface="Cambria" pitchFamily="34" charset="-122"/>
+                <a:cs typeface="Cambria" pitchFamily="34" charset="-120"/>
+              </a:rPr>
+              <a:t>Make something real</a:t>
+            </a:r>
+            <a:endParaRPr lang="en-US" sz="1900" dirty="0"/>
+          </a:p>
+        </p:txBody>
+      </p:sp>
+      <p:sp>
+        <p:nvSpPr>
+          <p:cNvPr id="15" name="Text 13"/>
+          <p:cNvSpPr/>
+          <p:nvPr/>
+        </p:nvSpPr>
+        <p:spPr>
+          <a:xfrm>
+            <a:off x="1371600" y="5367528"/>
+            <a:ext cx="10332720" cy="914400"/>
+          </a:xfrm>
+          <a:prstGeom prst="rect">
+            <a:avLst/>
+          </a:prstGeom>
+          <a:noFill/>
+          <a:ln/>
+        </p:spPr>
+        <p:txBody>
+          <a:bodyPr wrap="square" rtlCol="0" anchor="t">
+            <a:spAutoFit/>
+          </a:bodyPr>
+          <a:lstStyle/>
+          <a:p>
+            <a:pPr indent="0" marL="0">
+              <a:lnSpc>
+                <a:spcPct val="112000"/>
+              </a:lnSpc>
+              <a:buNone/>
+            </a:pPr>
+            <a:r>
+              <a:rPr lang="en-US" sz="1450" dirty="0">
+                <a:solidFill>
+                  <a:srgbClr val="1A1A1A"/>
+                </a:solidFill>
+                <a:latin typeface="Calibri" pitchFamily="34" charset="0"/>
+                <a:ea typeface="Calibri" pitchFamily="34" charset="-122"/>
+                <a:cs typeface="Calibri" pitchFamily="34" charset="-120"/>
+              </a:rPr>
+              <a:t>You leave with a real corpus in hand and a project repo born.</a:t>
+            </a:r>
+            <a:endParaRPr lang="en-US" sz="1450" dirty="0"/>
+          </a:p>
+        </p:txBody>
+      </p:sp>
+    </p:spTree>
+  </p:cSld>
+  <p:clrMapOvr>
+    <a:masterClrMapping/>
+  </p:clrMapOvr>
+</p:sld>
+</file>
+
+<file path=ppt/slides/slide12.xml><?xml version="1.0" encoding="utf-8"?>
+<p:sld xmlns:a="http://schemas.openxmlformats.org/drawingml/2006/main" xmlns:r="http://schemas.openxmlformats.org/officeDocument/2006/relationships" xmlns:p="http://schemas.openxmlformats.org/presentationml/2006/main">
+  <p:cSld name="Slide 12">
+    <p:bg>
+      <p:bgPr>
+        <a:solidFill>
+          <a:srgbClr val="4E261D"/>
+        </a:solidFill>
+      </p:bgPr>
+    </p:bg>
+    <p:spTree>
+      <p:nvGrpSpPr>
+        <p:cNvPr id="1" name=""/>
+        <p:cNvGrpSpPr/>
+        <p:nvPr/>
+      </p:nvGrpSpPr>
+      <p:grpSpPr>
+        <a:xfrm>
+          <a:off x="0" y="0"/>
+          <a:ext cx="0" cy="0"/>
+          <a:chOff x="0" y="0"/>
+          <a:chExt cx="0" cy="0"/>
+        </a:xfrm>
+      </p:grpSpPr>
+      <p:sp>
+        <p:nvSpPr>
+          <p:cNvPr id="2" name="Text 0"/>
+          <p:cNvSpPr/>
+          <p:nvPr/>
+        </p:nvSpPr>
+        <p:spPr>
+          <a:xfrm>
+            <a:off x="640080" y="1005840"/>
+            <a:ext cx="8229600" cy="320040"/>
+          </a:xfrm>
+          <a:prstGeom prst="rect">
+            <a:avLst/>
+          </a:prstGeom>
+          <a:noFill/>
+          <a:ln/>
+        </p:spPr>
+        <p:txBody>
+          <a:bodyPr wrap="square" rtlCol="0" anchor="ctr"/>
+          <a:lstStyle/>
+          <a:p>
+            <a:pPr indent="0" marL="0">
+              <a:buNone/>
+            </a:pPr>
+            <a:r>
+              <a:rPr lang="en-US" sz="1300" b="1" spc="300" kern="0" dirty="0">
+                <a:solidFill>
+                  <a:srgbClr val="B9852F"/>
+                </a:solidFill>
+                <a:latin typeface="Calibri" pitchFamily="34" charset="0"/>
+                <a:ea typeface="Calibri" pitchFamily="34" charset="-122"/>
+                <a:cs typeface="Calibri" pitchFamily="34" charset="-120"/>
+              </a:rPr>
+              <a:t>THE CHECK, AI CLOSED</a:t>
+            </a:r>
+            <a:endParaRPr lang="en-US" sz="1300" dirty="0"/>
+          </a:p>
+        </p:txBody>
+      </p:sp>
+      <p:sp>
+        <p:nvSpPr>
+          <p:cNvPr id="3" name="Text 1"/>
+          <p:cNvSpPr/>
+          <p:nvPr/>
+        </p:nvSpPr>
+        <p:spPr>
+          <a:xfrm>
+            <a:off x="640080" y="1645920"/>
+            <a:ext cx="8686800" cy="3108960"/>
+          </a:xfrm>
+          <a:prstGeom prst="rect">
+            <a:avLst/>
+          </a:prstGeom>
+          <a:noFill/>
+          <a:ln/>
+        </p:spPr>
+        <p:txBody>
+          <a:bodyPr wrap="square" rtlCol="0" anchor="t">
+            <a:spAutoFit/>
+          </a:bodyPr>
+          <a:lstStyle/>
+          <a:p>
+            <a:pPr indent="0" marL="0">
+              <a:lnSpc>
+                <a:spcPct val="115000"/>
+              </a:lnSpc>
+              <a:buNone/>
+            </a:pPr>
+            <a:r>
+              <a:rPr lang="en-US" sz="2600" dirty="0">
+                <a:solidFill>
+                  <a:srgbClr val="FFFFFF"/>
+                </a:solidFill>
+                <a:latin typeface="Cambria" pitchFamily="34" charset="0"/>
+                <a:ea typeface="Cambria" pitchFamily="34" charset="-122"/>
+                <a:cs typeface="Cambria" pitchFamily="34" charset="-120"/>
+              </a:rPr>
+              <a:t>Explain it: your question aloud, what it omits, and where your data actually comes from. (Competencies 2, 6.)</a:t>
+            </a:r>
+            <a:endParaRPr lang="en-US" sz="2600" dirty="0"/>
+          </a:p>
+        </p:txBody>
+      </p:sp>
+      <p:sp>
+        <p:nvSpPr>
+          <p:cNvPr id="4" name="Text 2"/>
+          <p:cNvSpPr/>
+          <p:nvPr/>
+        </p:nvSpPr>
+        <p:spPr>
+          <a:xfrm>
+            <a:off x="640080" y="6126480"/>
+            <a:ext cx="7315200" cy="365760"/>
+          </a:xfrm>
+          <a:prstGeom prst="rect">
+            <a:avLst/>
+          </a:prstGeom>
+          <a:noFill/>
+          <a:ln/>
+        </p:spPr>
+        <p:txBody>
+          <a:bodyPr wrap="square" rtlCol="0" anchor="ctr"/>
+          <a:lstStyle/>
+          <a:p>
+            <a:pPr indent="0" marL="0">
+              <a:buNone/>
+            </a:pPr>
+            <a:r>
+              <a:rPr lang="en-US" sz="1200" dirty="0">
+                <a:solidFill>
+                  <a:srgbClr val="E8DCD6"/>
+                </a:solidFill>
+                <a:latin typeface="Calibri" pitchFamily="34" charset="0"/>
+                <a:ea typeface="Calibri" pitchFamily="34" charset="-122"/>
+                <a:cs typeface="Calibri" pitchFamily="34" charset="-120"/>
+              </a:rPr>
+              <a:t>Culture as Data  ·  Week 4</a:t>
+            </a:r>
+            <a:endParaRPr lang="en-US" sz="1200" dirty="0"/>
+          </a:p>
+        </p:txBody>
+      </p:sp>
+      <p:sp>
+        <p:nvSpPr>
+          <p:cNvPr id="5" name="Shape 3"/>
+          <p:cNvSpPr/>
+          <p:nvPr/>
+        </p:nvSpPr>
+        <p:spPr>
+          <a:xfrm>
+            <a:off x="9314870" y="4684302"/>
+            <a:ext cx="97826" cy="97826"/>
+          </a:xfrm>
+          <a:prstGeom prst="ellipse">
+            <a:avLst/>
+          </a:prstGeom>
+          <a:solidFill>
+            <a:srgbClr val="7A3B2E"/>
+          </a:solidFill>
+          <a:ln/>
+        </p:spPr>
+      </p:sp>
+      <p:sp>
+        <p:nvSpPr>
+          <p:cNvPr id="6" name="Shape 4"/>
+          <p:cNvSpPr/>
+          <p:nvPr/>
+        </p:nvSpPr>
+        <p:spPr>
+          <a:xfrm>
+            <a:off x="10817510" y="5927824"/>
+            <a:ext cx="55265" cy="55265"/>
+          </a:xfrm>
+          <a:prstGeom prst="ellipse">
+            <a:avLst/>
+          </a:prstGeom>
+          <a:solidFill>
+            <a:srgbClr val="3F6F5F"/>
+          </a:solidFill>
+          <a:ln/>
+        </p:spPr>
+      </p:sp>
+      <p:sp>
+        <p:nvSpPr>
+          <p:cNvPr id="7" name="Shape 5"/>
+          <p:cNvSpPr/>
+          <p:nvPr/>
+        </p:nvSpPr>
+        <p:spPr>
+          <a:xfrm>
+            <a:off x="9967264" y="4657804"/>
+            <a:ext cx="50677" cy="50677"/>
+          </a:xfrm>
+          <a:prstGeom prst="ellipse">
+            <a:avLst/>
+          </a:prstGeom>
+          <a:solidFill>
+            <a:srgbClr val="B9852F"/>
+          </a:solidFill>
+          <a:ln/>
+        </p:spPr>
+      </p:sp>
+      <p:sp>
+        <p:nvSpPr>
+          <p:cNvPr id="8" name="Shape 6"/>
+          <p:cNvSpPr/>
+          <p:nvPr/>
+        </p:nvSpPr>
+        <p:spPr>
+          <a:xfrm>
+            <a:off x="10391251" y="5072862"/>
+            <a:ext cx="52058" cy="52058"/>
+          </a:xfrm>
+          <a:prstGeom prst="ellipse">
+            <a:avLst/>
+          </a:prstGeom>
+          <a:solidFill>
+            <a:srgbClr val="7A3B2E"/>
+          </a:solidFill>
+          <a:ln/>
+        </p:spPr>
+      </p:sp>
+      <p:sp>
+        <p:nvSpPr>
+          <p:cNvPr id="9" name="Shape 7"/>
+          <p:cNvSpPr/>
+          <p:nvPr/>
+        </p:nvSpPr>
+        <p:spPr>
+          <a:xfrm>
+            <a:off x="10595952" y="6159539"/>
+            <a:ext cx="82267" cy="82267"/>
+          </a:xfrm>
+          <a:prstGeom prst="ellipse">
+            <a:avLst/>
+          </a:prstGeom>
+          <a:solidFill>
+            <a:srgbClr val="3F6F5F"/>
+          </a:solidFill>
+          <a:ln/>
+        </p:spPr>
+      </p:sp>
+      <p:sp>
+        <p:nvSpPr>
+          <p:cNvPr id="10" name="Shape 8"/>
+          <p:cNvSpPr/>
+          <p:nvPr/>
+        </p:nvSpPr>
+        <p:spPr>
+          <a:xfrm>
+            <a:off x="9087846" y="5167014"/>
+            <a:ext cx="54438" cy="54438"/>
+          </a:xfrm>
+          <a:prstGeom prst="ellipse">
+            <a:avLst/>
+          </a:prstGeom>
+          <a:solidFill>
+            <a:srgbClr val="B9852F"/>
+          </a:solidFill>
+          <a:ln/>
+        </p:spPr>
+      </p:sp>
+      <p:sp>
+        <p:nvSpPr>
+          <p:cNvPr id="11" name="Shape 9"/>
+          <p:cNvSpPr/>
+          <p:nvPr/>
+        </p:nvSpPr>
+        <p:spPr>
+          <a:xfrm>
+            <a:off x="9494053" y="4556547"/>
+            <a:ext cx="46294" cy="46294"/>
+          </a:xfrm>
+          <a:prstGeom prst="ellipse">
+            <a:avLst/>
+          </a:prstGeom>
+          <a:solidFill>
+            <a:srgbClr val="7A3B2E"/>
+          </a:solidFill>
+          <a:ln/>
+        </p:spPr>
+      </p:sp>
+      <p:sp>
+        <p:nvSpPr>
+          <p:cNvPr id="12" name="Shape 10"/>
+          <p:cNvSpPr/>
+          <p:nvPr/>
+        </p:nvSpPr>
+        <p:spPr>
+          <a:xfrm>
+            <a:off x="10321053" y="5052039"/>
+            <a:ext cx="80695" cy="80695"/>
+          </a:xfrm>
+          <a:prstGeom prst="ellipse">
+            <a:avLst/>
+          </a:prstGeom>
+          <a:solidFill>
+            <a:srgbClr val="3F6F5F"/>
+          </a:solidFill>
+          <a:ln/>
+        </p:spPr>
+      </p:sp>
+      <p:sp>
+        <p:nvSpPr>
+          <p:cNvPr id="13" name="Shape 11"/>
+          <p:cNvSpPr/>
+          <p:nvPr/>
+        </p:nvSpPr>
+        <p:spPr>
+          <a:xfrm>
+            <a:off x="10075327" y="5640029"/>
+            <a:ext cx="70772" cy="70772"/>
+          </a:xfrm>
+          <a:prstGeom prst="ellipse">
+            <a:avLst/>
+          </a:prstGeom>
+          <a:solidFill>
+            <a:srgbClr val="B9852F"/>
+          </a:solidFill>
+          <a:ln/>
+        </p:spPr>
+      </p:sp>
+      <p:sp>
+        <p:nvSpPr>
+          <p:cNvPr id="14" name="Shape 12"/>
+          <p:cNvSpPr/>
+          <p:nvPr/>
+        </p:nvSpPr>
+        <p:spPr>
+          <a:xfrm>
+            <a:off x="9823674" y="5307057"/>
+            <a:ext cx="94251" cy="94251"/>
+          </a:xfrm>
+          <a:prstGeom prst="ellipse">
+            <a:avLst/>
+          </a:prstGeom>
+          <a:solidFill>
+            <a:srgbClr val="7A3B2E"/>
+          </a:solidFill>
+          <a:ln/>
+        </p:spPr>
+      </p:sp>
+      <p:sp>
+        <p:nvSpPr>
+          <p:cNvPr id="15" name="Shape 13"/>
+          <p:cNvSpPr/>
+          <p:nvPr/>
+        </p:nvSpPr>
+        <p:spPr>
+          <a:xfrm>
+            <a:off x="10632895" y="4777024"/>
+            <a:ext cx="64263" cy="64263"/>
+          </a:xfrm>
+          <a:prstGeom prst="ellipse">
+            <a:avLst/>
+          </a:prstGeom>
+          <a:solidFill>
+            <a:srgbClr val="3F6F5F"/>
+          </a:solidFill>
+          <a:ln/>
+        </p:spPr>
+      </p:sp>
+      <p:sp>
+        <p:nvSpPr>
+          <p:cNvPr id="16" name="Shape 14"/>
+          <p:cNvSpPr/>
+          <p:nvPr/>
+        </p:nvSpPr>
+        <p:spPr>
+          <a:xfrm>
+            <a:off x="11009469" y="4773829"/>
+            <a:ext cx="58532" cy="58532"/>
+          </a:xfrm>
+          <a:prstGeom prst="ellipse">
+            <a:avLst/>
+          </a:prstGeom>
+          <a:solidFill>
+            <a:srgbClr val="B9852F"/>
+          </a:solidFill>
+          <a:ln/>
+        </p:spPr>
+      </p:sp>
+      <p:sp>
+        <p:nvSpPr>
+          <p:cNvPr id="17" name="Shape 15"/>
+          <p:cNvSpPr/>
+          <p:nvPr/>
+        </p:nvSpPr>
+        <p:spPr>
+          <a:xfrm>
+            <a:off x="9459876" y="6021372"/>
+            <a:ext cx="99917" cy="99917"/>
+          </a:xfrm>
+          <a:prstGeom prst="ellipse">
+            <a:avLst/>
+          </a:prstGeom>
+          <a:solidFill>
+            <a:srgbClr val="7A3B2E"/>
+          </a:solidFill>
+          <a:ln/>
+        </p:spPr>
+      </p:sp>
+      <p:sp>
+        <p:nvSpPr>
+          <p:cNvPr id="18" name="Shape 16"/>
+          <p:cNvSpPr/>
+          <p:nvPr/>
+        </p:nvSpPr>
+        <p:spPr>
+          <a:xfrm>
+            <a:off x="9611236" y="5768834"/>
+            <a:ext cx="46688" cy="46688"/>
+          </a:xfrm>
+          <a:prstGeom prst="ellipse">
+            <a:avLst/>
+          </a:prstGeom>
+          <a:solidFill>
+            <a:srgbClr val="3F6F5F"/>
+          </a:solidFill>
+          <a:ln/>
+        </p:spPr>
+      </p:sp>
+    </p:spTree>
+  </p:cSld>
+  <p:clrMapOvr>
+    <a:masterClrMapping/>
+  </p:clrMapOvr>
+</p:sld>
+</file>
+
 <file path=ppt/slides/slide2.xml><?xml version="1.0" encoding="utf-8"?>
 <p:sld xmlns:a="http://schemas.openxmlformats.org/drawingml/2006/main" xmlns:r="http://schemas.openxmlformats.org/officeDocument/2006/relationships" xmlns:p="http://schemas.openxmlformats.org/presentationml/2006/main">
   <p:cSld name="Slide 2">
@@ -2461,14 +4264,34 @@
       </p:grpSpPr>
       <p:sp>
         <p:nvSpPr>
-          <p:cNvPr id="2" name="Text 0"/>
-          <p:cNvSpPr/>
-          <p:nvPr/>
-        </p:nvSpPr>
-        <p:spPr>
-          <a:xfrm>
-            <a:off x="640080" y="731520"/>
-            <a:ext cx="10058400" cy="731520"/>
+          <p:cNvPr id="2" name="Shape 0"/>
+          <p:cNvSpPr/>
+          <p:nvPr/>
+        </p:nvSpPr>
+        <p:spPr>
+          <a:xfrm>
+            <a:off x="0" y="0"/>
+            <a:ext cx="164592" cy="6858000"/>
+          </a:xfrm>
+          <a:prstGeom prst="rect">
+            <a:avLst/>
+          </a:prstGeom>
+          <a:solidFill>
+            <a:srgbClr val="7A3B2E"/>
+          </a:solidFill>
+          <a:ln/>
+        </p:spPr>
+      </p:sp>
+      <p:sp>
+        <p:nvSpPr>
+          <p:cNvPr id="3" name="Text 1"/>
+          <p:cNvSpPr/>
+          <p:nvPr/>
+        </p:nvSpPr>
+        <p:spPr>
+          <a:xfrm>
+            <a:off x="640080" y="640080"/>
+            <a:ext cx="10058400" cy="320040"/>
           </a:xfrm>
           <a:prstGeom prst="rect">
             <a:avLst/>
@@ -2478,6 +4301,47 @@
         </p:spPr>
         <p:txBody>
           <a:bodyPr wrap="square" rtlCol="0" anchor="ctr"/>
+          <a:lstStyle/>
+          <a:p>
+            <a:pPr indent="0" marL="0">
+              <a:buNone/>
+            </a:pPr>
+            <a:r>
+              <a:rPr lang="en-US" sz="1200" b="1" spc="300" kern="0" dirty="0">
+                <a:solidFill>
+                  <a:srgbClr val="7A3B2E"/>
+                </a:solidFill>
+                <a:latin typeface="Calibri" pitchFamily="34" charset="0"/>
+                <a:ea typeface="Calibri" pitchFamily="34" charset="-122"/>
+                <a:cs typeface="Calibri" pitchFamily="34" charset="-120"/>
+              </a:rPr>
+              <a:t>WEEK 4 · THE MATERIAL</a:t>
+            </a:r>
+            <a:endParaRPr lang="en-US" sz="1200" dirty="0"/>
+          </a:p>
+        </p:txBody>
+      </p:sp>
+      <p:sp>
+        <p:nvSpPr>
+          <p:cNvPr id="4" name="Text 2"/>
+          <p:cNvSpPr/>
+          <p:nvPr/>
+        </p:nvSpPr>
+        <p:spPr>
+          <a:xfrm>
+            <a:off x="640080" y="1005840"/>
+            <a:ext cx="10881360" cy="914400"/>
+          </a:xfrm>
+          <a:prstGeom prst="rect">
+            <a:avLst/>
+          </a:prstGeom>
+          <a:noFill/>
+          <a:ln/>
+        </p:spPr>
+        <p:txBody>
+          <a:bodyPr wrap="square" rtlCol="0" anchor="t">
+            <a:spAutoFit/>
+          </a:bodyPr>
           <a:lstStyle/>
           <a:p>
             <a:pPr indent="0" marL="0">
@@ -2492,7 +4356,7 @@
                 <a:ea typeface="Cambria" pitchFamily="34" charset="-122"/>
                 <a:cs typeface="Cambria" pitchFamily="34" charset="-120"/>
               </a:rPr>
-              <a:t>Three modes today</a:t>
+              <a:t>A pitch that survives contact</a:t>
             </a:r>
             <a:endParaRPr lang="en-US" sz="3000" dirty="0"/>
           </a:p>
@@ -2500,134 +4364,98 @@
       </p:sp>
       <p:sp>
         <p:nvSpPr>
-          <p:cNvPr id="3" name="Text 1"/>
-          <p:cNvSpPr/>
-          <p:nvPr/>
-        </p:nvSpPr>
-        <p:spPr>
-          <a:xfrm>
-            <a:off x="640080" y="1417320"/>
-            <a:ext cx="10058400" cy="365760"/>
-          </a:xfrm>
-          <a:prstGeom prst="rect">
-            <a:avLst/>
-          </a:prstGeom>
-          <a:noFill/>
-          <a:ln/>
-        </p:spPr>
-        <p:txBody>
-          <a:bodyPr wrap="square" rtlCol="0" anchor="ctr"/>
+          <p:cNvPr id="5" name="Shape 3"/>
+          <p:cNvSpPr/>
+          <p:nvPr/>
+        </p:nvSpPr>
+        <p:spPr>
+          <a:xfrm>
+            <a:off x="640080" y="2331720"/>
+            <a:ext cx="201168" cy="201168"/>
+          </a:xfrm>
+          <a:prstGeom prst="ellipse">
+            <a:avLst/>
+          </a:prstGeom>
+          <a:solidFill>
+            <a:srgbClr val="7A3B2E"/>
+          </a:solidFill>
+          <a:ln/>
+        </p:spPr>
+      </p:sp>
+      <p:sp>
+        <p:nvSpPr>
+          <p:cNvPr id="6" name="Text 4"/>
+          <p:cNvSpPr/>
+          <p:nvPr/>
+        </p:nvSpPr>
+        <p:spPr>
+          <a:xfrm>
+            <a:off x="1097280" y="2240280"/>
+            <a:ext cx="10607040" cy="1017270"/>
+          </a:xfrm>
+          <a:prstGeom prst="rect">
+            <a:avLst/>
+          </a:prstGeom>
+          <a:noFill/>
+          <a:ln/>
+        </p:spPr>
+        <p:txBody>
+          <a:bodyPr wrap="square" rtlCol="0" anchor="t">
+            <a:spAutoFit/>
+          </a:bodyPr>
           <a:lstStyle/>
           <a:p>
             <a:pPr indent="0" marL="0">
-              <a:buNone/>
-            </a:pPr>
-            <a:r>
-              <a:rPr lang="en-US" sz="1400" i="1" dirty="0">
-                <a:solidFill>
-                  <a:srgbClr val="6B6B63"/>
+              <a:lnSpc>
+                <a:spcPct val="112000"/>
+              </a:lnSpc>
+              <a:buNone/>
+            </a:pPr>
+            <a:r>
+              <a:rPr lang="en-US" sz="1650" dirty="0">
+                <a:solidFill>
+                  <a:srgbClr val="1A1A1A"/>
                 </a:solidFill>
                 <a:latin typeface="Calibri" pitchFamily="34" charset="0"/>
                 <a:ea typeface="Calibri" pitchFamily="34" charset="-122"/>
                 <a:cs typeface="Calibri" pitchFamily="34" charset="-120"/>
               </a:rPr>
-              <a:t>about a third of the session each</a:t>
-            </a:r>
-            <a:endParaRPr lang="en-US" sz="1400" dirty="0"/>
-          </a:p>
-        </p:txBody>
-      </p:sp>
-      <p:sp>
-        <p:nvSpPr>
-          <p:cNvPr id="4" name="Shape 2"/>
-          <p:cNvSpPr/>
-          <p:nvPr/>
-        </p:nvSpPr>
-        <p:spPr>
-          <a:xfrm>
-            <a:off x="640080" y="2194560"/>
-            <a:ext cx="3383280" cy="3291840"/>
-          </a:xfrm>
-          <a:prstGeom prst="roundRect">
-            <a:avLst>
-              <a:gd name="adj" fmla="val 3333"/>
-            </a:avLst>
-          </a:prstGeom>
-          <a:solidFill>
-            <a:srgbClr val="F4EEE8"/>
-          </a:solidFill>
-          <a:ln/>
-        </p:spPr>
-      </p:sp>
-      <p:sp>
-        <p:nvSpPr>
-          <p:cNvPr id="5" name="Shape 3"/>
-          <p:cNvSpPr/>
-          <p:nvPr/>
-        </p:nvSpPr>
-        <p:spPr>
-          <a:xfrm>
-            <a:off x="1051560" y="2606040"/>
-            <a:ext cx="548640" cy="548640"/>
+              <a:t>Three minutes, hard cap: your corpus (existence proof on screen), your two methods, and what would count as a finding.</a:t>
+            </a:r>
+            <a:endParaRPr lang="en-US" sz="1650" dirty="0"/>
+          </a:p>
+        </p:txBody>
+      </p:sp>
+      <p:sp>
+        <p:nvSpPr>
+          <p:cNvPr id="7" name="Shape 5"/>
+          <p:cNvSpPr/>
+          <p:nvPr/>
+        </p:nvSpPr>
+        <p:spPr>
+          <a:xfrm>
+            <a:off x="640080" y="3348990"/>
+            <a:ext cx="201168" cy="201168"/>
           </a:xfrm>
           <a:prstGeom prst="ellipse">
             <a:avLst/>
           </a:prstGeom>
           <a:solidFill>
-            <a:srgbClr val="7A3B2E"/>
-          </a:solidFill>
-          <a:ln/>
-        </p:spPr>
-      </p:sp>
-      <p:sp>
-        <p:nvSpPr>
-          <p:cNvPr id="6" name="Text 4"/>
-          <p:cNvSpPr/>
-          <p:nvPr/>
-        </p:nvSpPr>
-        <p:spPr>
-          <a:xfrm>
-            <a:off x="1005840" y="3383280"/>
-            <a:ext cx="2651760" cy="548640"/>
-          </a:xfrm>
-          <a:prstGeom prst="rect">
-            <a:avLst/>
-          </a:prstGeom>
-          <a:noFill/>
-          <a:ln/>
-        </p:spPr>
-        <p:txBody>
-          <a:bodyPr wrap="square" rtlCol="0" anchor="ctr"/>
-          <a:lstStyle/>
-          <a:p>
-            <a:pPr indent="0" marL="0">
-              <a:buNone/>
-            </a:pPr>
-            <a:r>
-              <a:rPr lang="en-US" sz="2100" b="1" dirty="0">
-                <a:solidFill>
-                  <a:srgbClr val="1A1A1A"/>
-                </a:solidFill>
-                <a:latin typeface="Cambria" pitchFamily="34" charset="0"/>
-                <a:ea typeface="Cambria" pitchFamily="34" charset="-122"/>
-                <a:cs typeface="Cambria" pitchFamily="34" charset="-120"/>
-              </a:rPr>
-              <a:t>Lecture / demo</a:t>
-            </a:r>
-            <a:endParaRPr lang="en-US" sz="2100" dirty="0"/>
-          </a:p>
-        </p:txBody>
-      </p:sp>
-      <p:sp>
-        <p:nvSpPr>
-          <p:cNvPr id="7" name="Text 5"/>
-          <p:cNvSpPr/>
-          <p:nvPr/>
-        </p:nvSpPr>
-        <p:spPr>
-          <a:xfrm>
-            <a:off x="1005840" y="3977640"/>
-            <a:ext cx="2651760" cy="1371600"/>
+            <a:srgbClr val="3F6F5F"/>
+          </a:solidFill>
+          <a:ln/>
+        </p:spPr>
+      </p:sp>
+      <p:sp>
+        <p:nvSpPr>
+          <p:cNvPr id="8" name="Text 6"/>
+          <p:cNvSpPr/>
+          <p:nvPr/>
+        </p:nvSpPr>
+        <p:spPr>
+          <a:xfrm>
+            <a:off x="1097280" y="3257550"/>
+            <a:ext cx="10607040" cy="1017270"/>
           </a:xfrm>
           <a:prstGeom prst="rect">
             <a:avLst/>
@@ -2643,12 +4471,12 @@
           <a:p>
             <a:pPr indent="0" marL="0">
               <a:lnSpc>
-                <a:spcPct val="115000"/>
+                <a:spcPct val="112000"/>
               </a:lnSpc>
               <a:buNone/>
             </a:pPr>
             <a:r>
-              <a:rPr lang="en-US" sz="1500" dirty="0">
+              <a:rPr lang="en-US" sz="1650" dirty="0">
                 <a:solidFill>
                   <a:srgbClr val="1A1A1A"/>
                 </a:solidFill>
@@ -2656,33 +4484,11 @@
                 <a:ea typeface="Calibri" pitchFamily="34" charset="-122"/>
                 <a:cs typeface="Calibri" pitchFamily="34" charset="-120"/>
               </a:rPr>
-              <a:t>The project (no new mechanism this week)</a:t>
-            </a:r>
-            <a:endParaRPr lang="en-US" sz="1500" dirty="0"/>
-          </a:p>
-        </p:txBody>
-      </p:sp>
-      <p:sp>
-        <p:nvSpPr>
-          <p:cNvPr id="8" name="Shape 6"/>
-          <p:cNvSpPr/>
-          <p:nvPr/>
-        </p:nvSpPr>
-        <p:spPr>
-          <a:xfrm>
-            <a:off x="4526280" y="2194560"/>
-            <a:ext cx="3383280" cy="3291840"/>
-          </a:xfrm>
-          <a:prstGeom prst="roundRect">
-            <a:avLst>
-              <a:gd name="adj" fmla="val 3333"/>
-            </a:avLst>
-          </a:prstGeom>
-          <a:solidFill>
-            <a:srgbClr val="F4EEE8"/>
-          </a:solidFill>
-          <a:ln/>
-        </p:spPr>
+              <a:t>"Explore themes in music" is not answerable. "Did Billboard #1 lyrics narrow in vocabulary 1990-2020?" is.</a:t>
+            </a:r>
+            <a:endParaRPr lang="en-US" sz="1650" dirty="0"/>
+          </a:p>
+        </p:txBody>
       </p:sp>
       <p:sp>
         <p:nvSpPr>
@@ -2692,14 +4498,14 @@
         </p:nvSpPr>
         <p:spPr>
           <a:xfrm>
-            <a:off x="4937760" y="2606040"/>
-            <a:ext cx="548640" cy="548640"/>
+            <a:off x="640080" y="4366260"/>
+            <a:ext cx="201168" cy="201168"/>
           </a:xfrm>
           <a:prstGeom prst="ellipse">
             <a:avLst/>
           </a:prstGeom>
           <a:solidFill>
-            <a:srgbClr val="3F6F5F"/>
+            <a:srgbClr val="B9852F"/>
           </a:solidFill>
           <a:ln/>
         </p:spPr>
@@ -2712,47 +4518,8 @@
         </p:nvSpPr>
         <p:spPr>
           <a:xfrm>
-            <a:off x="4892040" y="3383280"/>
-            <a:ext cx="2651760" cy="548640"/>
-          </a:xfrm>
-          <a:prstGeom prst="rect">
-            <a:avLst/>
-          </a:prstGeom>
-          <a:noFill/>
-          <a:ln/>
-        </p:spPr>
-        <p:txBody>
-          <a:bodyPr wrap="square" rtlCol="0" anchor="ctr"/>
-          <a:lstStyle/>
-          <a:p>
-            <a:pPr indent="0" marL="0">
-              <a:buNone/>
-            </a:pPr>
-            <a:r>
-              <a:rPr lang="en-US" sz="2100" b="1" dirty="0">
-                <a:solidFill>
-                  <a:srgbClr val="1A1A1A"/>
-                </a:solidFill>
-                <a:latin typeface="Cambria" pitchFamily="34" charset="0"/>
-                <a:ea typeface="Cambria" pitchFamily="34" charset="-122"/>
-                <a:cs typeface="Cambria" pitchFamily="34" charset="-120"/>
-              </a:rPr>
-              <a:t>Workshop</a:t>
-            </a:r>
-            <a:endParaRPr lang="en-US" sz="2100" dirty="0"/>
-          </a:p>
-        </p:txBody>
-      </p:sp>
-      <p:sp>
-        <p:nvSpPr>
-          <p:cNvPr id="11" name="Text 9"/>
-          <p:cNvSpPr/>
-          <p:nvPr/>
-        </p:nvSpPr>
-        <p:spPr>
-          <a:xfrm>
-            <a:off x="4892040" y="3977640"/>
-            <a:ext cx="2651760" cy="1371600"/>
+            <a:off x="1097280" y="4274820"/>
+            <a:ext cx="10607040" cy="1017270"/>
           </a:xfrm>
           <a:prstGeom prst="rect">
             <a:avLst/>
@@ -2768,12 +4535,12 @@
           <a:p>
             <a:pPr indent="0" marL="0">
               <a:lnSpc>
-                <a:spcPct val="115000"/>
+                <a:spcPct val="112000"/>
               </a:lnSpc>
               <a:buNone/>
             </a:pPr>
             <a:r>
-              <a:rPr lang="en-US" sz="1500" dirty="0">
+              <a:rPr lang="en-US" sz="1650" dirty="0">
                 <a:solidFill>
                   <a:srgbClr val="1A1A1A"/>
                 </a:solidFill>
@@ -2781,103 +4548,42 @@
                 <a:ea typeface="Calibri" pitchFamily="34" charset="-122"/>
                 <a:cs typeface="Calibri" pitchFamily="34" charset="-120"/>
               </a:rPr>
-              <a:t>Build hands-on on your own data.</a:t>
-            </a:r>
-            <a:endParaRPr lang="en-US" sz="1500" dirty="0"/>
-          </a:p>
-        </p:txBody>
-      </p:sp>
-      <p:sp>
-        <p:nvSpPr>
-          <p:cNvPr id="12" name="Shape 10"/>
-          <p:cNvSpPr/>
-          <p:nvPr/>
-        </p:nvSpPr>
-        <p:spPr>
-          <a:xfrm>
-            <a:off x="8412480" y="2194560"/>
-            <a:ext cx="3383280" cy="3291840"/>
-          </a:xfrm>
-          <a:prstGeom prst="roundRect">
-            <a:avLst>
-              <a:gd name="adj" fmla="val 3333"/>
-            </a:avLst>
-          </a:prstGeom>
-          <a:solidFill>
-            <a:srgbClr val="F4EEE8"/>
-          </a:solidFill>
-          <a:ln/>
-        </p:spPr>
-      </p:sp>
-      <p:sp>
-        <p:nvSpPr>
-          <p:cNvPr id="13" name="Shape 11"/>
-          <p:cNvSpPr/>
-          <p:nvPr/>
-        </p:nvSpPr>
-        <p:spPr>
-          <a:xfrm>
-            <a:off x="8823960" y="2606040"/>
-            <a:ext cx="548640" cy="548640"/>
+              <a:t>A null result, honestly shown, is a complete project: "I expected X, the data doesn't show it, here's how I know."</a:t>
+            </a:r>
+            <a:endParaRPr lang="en-US" sz="1650" dirty="0"/>
+          </a:p>
+        </p:txBody>
+      </p:sp>
+      <p:sp>
+        <p:nvSpPr>
+          <p:cNvPr id="11" name="Shape 9"/>
+          <p:cNvSpPr/>
+          <p:nvPr/>
+        </p:nvSpPr>
+        <p:spPr>
+          <a:xfrm>
+            <a:off x="640080" y="5383530"/>
+            <a:ext cx="201168" cy="201168"/>
           </a:xfrm>
           <a:prstGeom prst="ellipse">
             <a:avLst/>
           </a:prstGeom>
           <a:solidFill>
-            <a:srgbClr val="B9852F"/>
-          </a:solidFill>
-          <a:ln/>
-        </p:spPr>
-      </p:sp>
-      <p:sp>
-        <p:nvSpPr>
-          <p:cNvPr id="14" name="Text 12"/>
-          <p:cNvSpPr/>
-          <p:nvPr/>
-        </p:nvSpPr>
-        <p:spPr>
-          <a:xfrm>
-            <a:off x="8778240" y="3383280"/>
-            <a:ext cx="2651760" cy="548640"/>
-          </a:xfrm>
-          <a:prstGeom prst="rect">
-            <a:avLst/>
-          </a:prstGeom>
-          <a:noFill/>
-          <a:ln/>
-        </p:spPr>
-        <p:txBody>
-          <a:bodyPr wrap="square" rtlCol="0" anchor="ctr"/>
-          <a:lstStyle/>
-          <a:p>
-            <a:pPr indent="0" marL="0">
-              <a:buNone/>
-            </a:pPr>
-            <a:r>
-              <a:rPr lang="en-US" sz="2100" b="1" dirty="0">
-                <a:solidFill>
-                  <a:srgbClr val="1A1A1A"/>
-                </a:solidFill>
-                <a:latin typeface="Cambria" pitchFamily="34" charset="0"/>
-                <a:ea typeface="Cambria" pitchFamily="34" charset="-122"/>
-                <a:cs typeface="Cambria" pitchFamily="34" charset="-120"/>
-              </a:rPr>
-              <a:t>Discussion</a:t>
-            </a:r>
-            <a:endParaRPr lang="en-US" sz="2100" dirty="0"/>
-          </a:p>
-        </p:txBody>
-      </p:sp>
-      <p:sp>
-        <p:nvSpPr>
-          <p:cNvPr id="15" name="Text 13"/>
-          <p:cNvSpPr/>
-          <p:nvPr/>
-        </p:nvSpPr>
-        <p:spPr>
-          <a:xfrm>
-            <a:off x="8778240" y="3977640"/>
-            <a:ext cx="2651760" cy="1371600"/>
+            <a:srgbClr val="7A3B2E"/>
+          </a:solidFill>
+          <a:ln/>
+        </p:spPr>
+      </p:sp>
+      <p:sp>
+        <p:nvSpPr>
+          <p:cNvPr id="12" name="Text 10"/>
+          <p:cNvSpPr/>
+          <p:nvPr/>
+        </p:nvSpPr>
+        <p:spPr>
+          <a:xfrm>
+            <a:off x="1097280" y="5292090"/>
+            <a:ext cx="10607040" cy="1017270"/>
           </a:xfrm>
           <a:prstGeom prst="rect">
             <a:avLst/>
@@ -2893,12 +4599,12 @@
           <a:p>
             <a:pPr indent="0" marL="0">
               <a:lnSpc>
-                <a:spcPct val="115000"/>
+                <a:spcPct val="112000"/>
               </a:lnSpc>
               <a:buNone/>
             </a:pPr>
             <a:r>
-              <a:rPr lang="en-US" sz="1500" dirty="0">
+              <a:rPr lang="en-US" sz="1650" dirty="0">
                 <a:solidFill>
                   <a:srgbClr val="1A1A1A"/>
                 </a:solidFill>
@@ -2906,9 +4612,9 @@
                 <a:ea typeface="Calibri" pitchFamily="34" charset="-122"/>
                 <a:cs typeface="Calibri" pitchFamily="34" charset="-120"/>
               </a:rPr>
-              <a:t>Interrogate the study, debate it, or critique each other's work.</a:t>
-            </a:r>
-            <a:endParaRPr lang="en-US" sz="1500" dirty="0"/>
+              <a:t>The pivot kit exists because corpora fail. Adopting a fallback pair is normal, not defeat.</a:t>
+            </a:r>
+            <a:endParaRPr lang="en-US" sz="1650" dirty="0"/>
           </a:p>
         </p:txBody>
       </p:sp>
@@ -2946,14 +4652,34 @@
       </p:grpSpPr>
       <p:sp>
         <p:nvSpPr>
-          <p:cNvPr id="2" name="Text 0"/>
+          <p:cNvPr id="2" name="Shape 0"/>
+          <p:cNvSpPr/>
+          <p:nvPr/>
+        </p:nvSpPr>
+        <p:spPr>
+          <a:xfrm>
+            <a:off x="0" y="0"/>
+            <a:ext cx="164592" cy="6858000"/>
+          </a:xfrm>
+          <a:prstGeom prst="rect">
+            <a:avLst/>
+          </a:prstGeom>
+          <a:solidFill>
+            <a:srgbClr val="3F6F5F"/>
+          </a:solidFill>
+          <a:ln/>
+        </p:spPr>
+      </p:sp>
+      <p:sp>
+        <p:nvSpPr>
+          <p:cNvPr id="3" name="Text 1"/>
           <p:cNvSpPr/>
           <p:nvPr/>
         </p:nvSpPr>
         <p:spPr>
           <a:xfrm>
             <a:off x="640080" y="640080"/>
-            <a:ext cx="10058400" cy="731520"/>
+            <a:ext cx="10058400" cy="320040"/>
           </a:xfrm>
           <a:prstGeom prst="rect">
             <a:avLst/>
@@ -2963,6 +4689,47 @@
         </p:spPr>
         <p:txBody>
           <a:bodyPr wrap="square" rtlCol="0" anchor="ctr"/>
+          <a:lstStyle/>
+          <a:p>
+            <a:pPr indent="0" marL="0">
+              <a:buNone/>
+            </a:pPr>
+            <a:r>
+              <a:rPr lang="en-US" sz="1200" b="1" spc="300" kern="0" dirty="0">
+                <a:solidFill>
+                  <a:srgbClr val="3F6F5F"/>
+                </a:solidFill>
+                <a:latin typeface="Calibri" pitchFamily="34" charset="0"/>
+                <a:ea typeface="Calibri" pitchFamily="34" charset="-122"/>
+                <a:cs typeface="Calibri" pitchFamily="34" charset="-120"/>
+              </a:rPr>
+              <a:t>WEEK 4 · THE MATERIAL</a:t>
+            </a:r>
+            <a:endParaRPr lang="en-US" sz="1200" dirty="0"/>
+          </a:p>
+        </p:txBody>
+      </p:sp>
+      <p:sp>
+        <p:nvSpPr>
+          <p:cNvPr id="4" name="Text 2"/>
+          <p:cNvSpPr/>
+          <p:nvPr/>
+        </p:nvSpPr>
+        <p:spPr>
+          <a:xfrm>
+            <a:off x="640080" y="1005840"/>
+            <a:ext cx="10881360" cy="914400"/>
+          </a:xfrm>
+          <a:prstGeom prst="rect">
+            <a:avLst/>
+          </a:prstGeom>
+          <a:noFill/>
+          <a:ln/>
+        </p:spPr>
+        <p:txBody>
+          <a:bodyPr wrap="square" rtlCol="0" anchor="t">
+            <a:spAutoFit/>
+          </a:bodyPr>
           <a:lstStyle/>
           <a:p>
             <a:pPr indent="0" marL="0">
@@ -2977,7 +4744,7 @@
                 <a:ea typeface="Cambria" pitchFamily="34" charset="-122"/>
                 <a:cs typeface="Cambria" pitchFamily="34" charset="-120"/>
               </a:rPr>
-              <a:t>The session</a:t>
+              <a:t>The licensing line, in one slide</a:t>
             </a:r>
             <a:endParaRPr lang="en-US" sz="3000" dirty="0"/>
           </a:p>
@@ -2985,19 +4752,17 @@
       </p:sp>
       <p:sp>
         <p:nvSpPr>
-          <p:cNvPr id="3" name="Shape 1"/>
-          <p:cNvSpPr/>
-          <p:nvPr/>
-        </p:nvSpPr>
-        <p:spPr>
-          <a:xfrm>
-            <a:off x="640080" y="1572768"/>
-            <a:ext cx="868680" cy="457200"/>
-          </a:xfrm>
-          <a:prstGeom prst="roundRect">
-            <a:avLst>
-              <a:gd name="adj" fmla="val 12000"/>
-            </a:avLst>
+          <p:cNvPr id="5" name="Shape 3"/>
+          <p:cNvSpPr/>
+          <p:nvPr/>
+        </p:nvSpPr>
+        <p:spPr>
+          <a:xfrm>
+            <a:off x="640080" y="2331720"/>
+            <a:ext cx="201168" cy="201168"/>
+          </a:xfrm>
+          <a:prstGeom prst="ellipse">
+            <a:avLst/>
           </a:prstGeom>
           <a:solidFill>
             <a:srgbClr val="7A3B2E"/>
@@ -3007,71 +4772,99 @@
       </p:sp>
       <p:sp>
         <p:nvSpPr>
-          <p:cNvPr id="4" name="Text 2"/>
-          <p:cNvSpPr/>
-          <p:nvPr/>
-        </p:nvSpPr>
-        <p:spPr>
-          <a:xfrm>
-            <a:off x="640080" y="1572768"/>
-            <a:ext cx="868680" cy="457200"/>
-          </a:xfrm>
-          <a:prstGeom prst="rect">
-            <a:avLst/>
-          </a:prstGeom>
-          <a:noFill/>
-          <a:ln/>
-        </p:spPr>
-        <p:txBody>
-          <a:bodyPr wrap="square" rtlCol="0" anchor="ctr"/>
-          <a:lstStyle/>
-          <a:p>
-            <a:pPr algn="ctr" indent="0" marL="0">
-              <a:buNone/>
-            </a:pPr>
-            <a:r>
-              <a:rPr lang="en-US" sz="1100" b="1" dirty="0">
-                <a:solidFill>
-                  <a:srgbClr val="FFFFFF"/>
+          <p:cNvPr id="6" name="Text 4"/>
+          <p:cNvSpPr/>
+          <p:nvPr/>
+        </p:nvSpPr>
+        <p:spPr>
+          <a:xfrm>
+            <a:off x="1097280" y="2240280"/>
+            <a:ext cx="10607040" cy="1017270"/>
+          </a:xfrm>
+          <a:prstGeom prst="rect">
+            <a:avLst/>
+          </a:prstGeom>
+          <a:noFill/>
+          <a:ln/>
+        </p:spPr>
+        <p:txBody>
+          <a:bodyPr wrap="square" rtlCol="0" anchor="t">
+            <a:spAutoFit/>
+          </a:bodyPr>
+          <a:lstStyle/>
+          <a:p>
+            <a:pPr indent="0" marL="0">
+              <a:lnSpc>
+                <a:spcPct val="112000"/>
+              </a:lnSpc>
+              <a:buNone/>
+            </a:pPr>
+            <a:r>
+              <a:rPr lang="en-US" sz="1650" dirty="0">
+                <a:solidFill>
+                  <a:srgbClr val="1A1A1A"/>
                 </a:solidFill>
                 <a:latin typeface="Calibri" pitchFamily="34" charset="0"/>
                 <a:ea typeface="Calibri" pitchFamily="34" charset="-122"/>
                 <a:cs typeface="Calibri" pitchFamily="34" charset="-120"/>
               </a:rPr>
-              <a:t>0:00</a:t>
-            </a:r>
-            <a:endParaRPr lang="en-US" sz="1100" dirty="0"/>
-          </a:p>
-        </p:txBody>
-      </p:sp>
-      <p:sp>
-        <p:nvSpPr>
-          <p:cNvPr id="5" name="Text 3"/>
-          <p:cNvSpPr/>
-          <p:nvPr/>
-        </p:nvSpPr>
-        <p:spPr>
-          <a:xfrm>
-            <a:off x="1691640" y="1554480"/>
-            <a:ext cx="9646920" cy="566928"/>
-          </a:xfrm>
-          <a:prstGeom prst="rect">
-            <a:avLst/>
-          </a:prstGeom>
-          <a:noFill/>
-          <a:ln/>
-        </p:spPr>
-        <p:txBody>
-          <a:bodyPr wrap="square" rtlCol="0" anchor="ctr">
+              <a:t>CC0 museum data and public-domain books: use freely, republish freely.</a:t>
+            </a:r>
+            <a:endParaRPr lang="en-US" sz="1650" dirty="0"/>
+          </a:p>
+        </p:txBody>
+      </p:sp>
+      <p:sp>
+        <p:nvSpPr>
+          <p:cNvPr id="7" name="Shape 5"/>
+          <p:cNvSpPr/>
+          <p:nvPr/>
+        </p:nvSpPr>
+        <p:spPr>
+          <a:xfrm>
+            <a:off x="640080" y="3348990"/>
+            <a:ext cx="201168" cy="201168"/>
+          </a:xfrm>
+          <a:prstGeom prst="ellipse">
+            <a:avLst/>
+          </a:prstGeom>
+          <a:solidFill>
+            <a:srgbClr val="3F6F5F"/>
+          </a:solidFill>
+          <a:ln/>
+        </p:spPr>
+      </p:sp>
+      <p:sp>
+        <p:nvSpPr>
+          <p:cNvPr id="8" name="Text 6"/>
+          <p:cNvSpPr/>
+          <p:nvPr/>
+        </p:nvSpPr>
+        <p:spPr>
+          <a:xfrm>
+            <a:off x="1097280" y="3257550"/>
+            <a:ext cx="10607040" cy="1017270"/>
+          </a:xfrm>
+          <a:prstGeom prst="rect">
+            <a:avLst/>
+          </a:prstGeom>
+          <a:noFill/>
+          <a:ln/>
+        </p:spPr>
+        <p:txBody>
+          <a:bodyPr wrap="square" rtlCol="0" anchor="t">
             <a:spAutoFit/>
           </a:bodyPr>
           <a:lstStyle/>
           <a:p>
             <a:pPr indent="0" marL="0">
-              <a:buNone/>
-            </a:pPr>
-            <a:r>
-              <a:rPr lang="en-US" sz="1250" dirty="0">
+              <a:lnSpc>
+                <a:spcPct val="112000"/>
+              </a:lnSpc>
+              <a:buNone/>
+            </a:pPr>
+            <a:r>
+              <a:rPr lang="en-US" sz="1650" dirty="0">
                 <a:solidFill>
                   <a:srgbClr val="1A1A1A"/>
                 </a:solidFill>
@@ -3079,101 +4872,127 @@
                 <a:ea typeface="Calibri" pitchFamily="34" charset="-122"/>
                 <a:cs typeface="Calibri" pitchFamily="34" charset="-120"/>
               </a:rPr>
-              <a:t>Warm-up + Look at This: the process post.</a:t>
-            </a:r>
-            <a:endParaRPr lang="en-US" sz="1250" dirty="0"/>
-          </a:p>
-        </p:txBody>
-      </p:sp>
-      <p:sp>
-        <p:nvSpPr>
-          <p:cNvPr id="6" name="Shape 4"/>
-          <p:cNvSpPr/>
-          <p:nvPr/>
-        </p:nvSpPr>
-        <p:spPr>
-          <a:xfrm>
-            <a:off x="640080" y="2139696"/>
-            <a:ext cx="868680" cy="457200"/>
-          </a:xfrm>
-          <a:prstGeom prst="roundRect">
-            <a:avLst>
-              <a:gd name="adj" fmla="val 12000"/>
-            </a:avLst>
-          </a:prstGeom>
-          <a:solidFill>
-            <a:srgbClr val="7A3B2E"/>
-          </a:solidFill>
-          <a:ln/>
-        </p:spPr>
-      </p:sp>
-      <p:sp>
-        <p:nvSpPr>
-          <p:cNvPr id="7" name="Text 5"/>
-          <p:cNvSpPr/>
-          <p:nvPr/>
-        </p:nvSpPr>
-        <p:spPr>
-          <a:xfrm>
-            <a:off x="640080" y="2139696"/>
-            <a:ext cx="868680" cy="457200"/>
-          </a:xfrm>
-          <a:prstGeom prst="rect">
-            <a:avLst/>
-          </a:prstGeom>
-          <a:noFill/>
-          <a:ln/>
-        </p:spPr>
-        <p:txBody>
-          <a:bodyPr wrap="square" rtlCol="0" anchor="ctr"/>
-          <a:lstStyle/>
-          <a:p>
-            <a:pPr algn="ctr" indent="0" marL="0">
-              <a:buNone/>
-            </a:pPr>
-            <a:r>
-              <a:rPr lang="en-US" sz="1100" b="1" dirty="0">
-                <a:solidFill>
-                  <a:srgbClr val="FFFFFF"/>
+              <a:t>Academic corpora: analyze, don't redistribute. Lyrics and review text: metadata and counts only.</a:t>
+            </a:r>
+            <a:endParaRPr lang="en-US" sz="1650" dirty="0"/>
+          </a:p>
+        </p:txBody>
+      </p:sp>
+      <p:sp>
+        <p:nvSpPr>
+          <p:cNvPr id="9" name="Shape 7"/>
+          <p:cNvSpPr/>
+          <p:nvPr/>
+        </p:nvSpPr>
+        <p:spPr>
+          <a:xfrm>
+            <a:off x="640080" y="4366260"/>
+            <a:ext cx="201168" cy="201168"/>
+          </a:xfrm>
+          <a:prstGeom prst="ellipse">
+            <a:avLst/>
+          </a:prstGeom>
+          <a:solidFill>
+            <a:srgbClr val="B9852F"/>
+          </a:solidFill>
+          <a:ln/>
+        </p:spPr>
+      </p:sp>
+      <p:sp>
+        <p:nvSpPr>
+          <p:cNvPr id="10" name="Text 8"/>
+          <p:cNvSpPr/>
+          <p:nvPr/>
+        </p:nvSpPr>
+        <p:spPr>
+          <a:xfrm>
+            <a:off x="1097280" y="4274820"/>
+            <a:ext cx="10607040" cy="1017270"/>
+          </a:xfrm>
+          <a:prstGeom prst="rect">
+            <a:avLst/>
+          </a:prstGeom>
+          <a:noFill/>
+          <a:ln/>
+        </p:spPr>
+        <p:txBody>
+          <a:bodyPr wrap="square" rtlCol="0" anchor="t">
+            <a:spAutoFit/>
+          </a:bodyPr>
+          <a:lstStyle/>
+          <a:p>
+            <a:pPr indent="0" marL="0">
+              <a:lnSpc>
+                <a:spcPct val="112000"/>
+              </a:lnSpc>
+              <a:buNone/>
+            </a:pPr>
+            <a:r>
+              <a:rPr lang="en-US" sz="1650" dirty="0">
+                <a:solidFill>
+                  <a:srgbClr val="1A1A1A"/>
                 </a:solidFill>
                 <a:latin typeface="Calibri" pitchFamily="34" charset="0"/>
                 <a:ea typeface="Calibri" pitchFamily="34" charset="-122"/>
                 <a:cs typeface="Calibri" pitchFamily="34" charset="-120"/>
               </a:rPr>
-              <a:t>0:08</a:t>
-            </a:r>
-            <a:endParaRPr lang="en-US" sz="1100" dirty="0"/>
-          </a:p>
-        </p:txBody>
-      </p:sp>
-      <p:sp>
-        <p:nvSpPr>
-          <p:cNvPr id="8" name="Text 6"/>
-          <p:cNvSpPr/>
-          <p:nvPr/>
-        </p:nvSpPr>
-        <p:spPr>
-          <a:xfrm>
-            <a:off x="1691640" y="2121408"/>
-            <a:ext cx="9646920" cy="566928"/>
-          </a:xfrm>
-          <a:prstGeom prst="rect">
-            <a:avLst/>
-          </a:prstGeom>
-          <a:noFill/>
-          <a:ln/>
-        </p:spPr>
-        <p:txBody>
-          <a:bodyPr wrap="square" rtlCol="0" anchor="ctr">
+              <a:t>AO3 and other community-opposed archives: a small attributed sample at most, never a shared dataset.</a:t>
+            </a:r>
+            <a:endParaRPr lang="en-US" sz="1650" dirty="0"/>
+          </a:p>
+        </p:txBody>
+      </p:sp>
+      <p:sp>
+        <p:nvSpPr>
+          <p:cNvPr id="11" name="Shape 9"/>
+          <p:cNvSpPr/>
+          <p:nvPr/>
+        </p:nvSpPr>
+        <p:spPr>
+          <a:xfrm>
+            <a:off x="640080" y="5383530"/>
+            <a:ext cx="201168" cy="201168"/>
+          </a:xfrm>
+          <a:prstGeom prst="ellipse">
+            <a:avLst/>
+          </a:prstGeom>
+          <a:solidFill>
+            <a:srgbClr val="7A3B2E"/>
+          </a:solidFill>
+          <a:ln/>
+        </p:spPr>
+      </p:sp>
+      <p:sp>
+        <p:nvSpPr>
+          <p:cNvPr id="12" name="Text 10"/>
+          <p:cNvSpPr/>
+          <p:nvPr/>
+        </p:nvSpPr>
+        <p:spPr>
+          <a:xfrm>
+            <a:off x="1097280" y="5292090"/>
+            <a:ext cx="10607040" cy="1017270"/>
+          </a:xfrm>
+          <a:prstGeom prst="rect">
+            <a:avLst/>
+          </a:prstGeom>
+          <a:noFill/>
+          <a:ln/>
+        </p:spPr>
+        <p:txBody>
+          <a:bodyPr wrap="square" rtlCol="0" anchor="t">
             <a:spAutoFit/>
           </a:bodyPr>
           <a:lstStyle/>
           <a:p>
             <a:pPr indent="0" marL="0">
-              <a:buNone/>
-            </a:pPr>
-            <a:r>
-              <a:rPr lang="en-US" sz="1250" dirty="0">
+              <a:lnSpc>
+                <a:spcPct val="112000"/>
+              </a:lnSpc>
+              <a:buNone/>
+            </a:pPr>
+            <a:r>
+              <a:rPr lang="en-US" sz="1650" dirty="0">
                 <a:solidFill>
                   <a:srgbClr val="1A1A1A"/>
                 </a:solidFill>
@@ -3181,519 +5000,9 @@
                 <a:ea typeface="Calibri" pitchFamily="34" charset="-122"/>
                 <a:cs typeface="Calibri" pitchFamily="34" charset="-120"/>
               </a:rPr>
-              <a:t>Pitches, three-minute hard cap each: your corpus (existence proof shown), your two methods, what would count as a finding.</a:t>
-            </a:r>
-            <a:endParaRPr lang="en-US" sz="1250" dirty="0"/>
-          </a:p>
-        </p:txBody>
-      </p:sp>
-      <p:sp>
-        <p:nvSpPr>
-          <p:cNvPr id="9" name="Shape 7"/>
-          <p:cNvSpPr/>
-          <p:nvPr/>
-        </p:nvSpPr>
-        <p:spPr>
-          <a:xfrm>
-            <a:off x="640080" y="2706624"/>
-            <a:ext cx="868680" cy="457200"/>
-          </a:xfrm>
-          <a:prstGeom prst="roundRect">
-            <a:avLst>
-              <a:gd name="adj" fmla="val 12000"/>
-            </a:avLst>
-          </a:prstGeom>
-          <a:solidFill>
-            <a:srgbClr val="7A3B2E"/>
-          </a:solidFill>
-          <a:ln/>
-        </p:spPr>
-      </p:sp>
-      <p:sp>
-        <p:nvSpPr>
-          <p:cNvPr id="10" name="Text 8"/>
-          <p:cNvSpPr/>
-          <p:nvPr/>
-        </p:nvSpPr>
-        <p:spPr>
-          <a:xfrm>
-            <a:off x="640080" y="2706624"/>
-            <a:ext cx="868680" cy="457200"/>
-          </a:xfrm>
-          <a:prstGeom prst="rect">
-            <a:avLst/>
-          </a:prstGeom>
-          <a:noFill/>
-          <a:ln/>
-        </p:spPr>
-        <p:txBody>
-          <a:bodyPr wrap="square" rtlCol="0" anchor="ctr"/>
-          <a:lstStyle/>
-          <a:p>
-            <a:pPr algn="ctr" indent="0" marL="0">
-              <a:buNone/>
-            </a:pPr>
-            <a:r>
-              <a:rPr lang="en-US" sz="1100" b="1" dirty="0">
-                <a:solidFill>
-                  <a:srgbClr val="FFFFFF"/>
-                </a:solidFill>
-                <a:latin typeface="Calibri" pitchFamily="34" charset="0"/>
-                <a:ea typeface="Calibri" pitchFamily="34" charset="-122"/>
-                <a:cs typeface="Calibri" pitchFamily="34" charset="-120"/>
-              </a:rPr>
-              <a:t>0:48</a:t>
-            </a:r>
-            <a:endParaRPr lang="en-US" sz="1100" dirty="0"/>
-          </a:p>
-        </p:txBody>
-      </p:sp>
-      <p:sp>
-        <p:nvSpPr>
-          <p:cNvPr id="11" name="Text 9"/>
-          <p:cNvSpPr/>
-          <p:nvPr/>
-        </p:nvSpPr>
-        <p:spPr>
-          <a:xfrm>
-            <a:off x="1691640" y="2688336"/>
-            <a:ext cx="9646920" cy="566928"/>
-          </a:xfrm>
-          <a:prstGeom prst="rect">
-            <a:avLst/>
-          </a:prstGeom>
-          <a:noFill/>
-          <a:ln/>
-        </p:spPr>
-        <p:txBody>
-          <a:bodyPr wrap="square" rtlCol="0" anchor="ctr">
-            <a:spAutoFit/>
-          </a:bodyPr>
-          <a:lstStyle/>
-          <a:p>
-            <a:pPr indent="0" marL="0">
-              <a:buNone/>
-            </a:pPr>
-            <a:r>
-              <a:rPr lang="en-US" sz="1250" dirty="0">
-                <a:solidFill>
-                  <a:srgbClr val="1A1A1A"/>
-                </a:solidFill>
-                <a:latin typeface="Calibri" pitchFamily="34" charset="0"/>
-                <a:ea typeface="Calibri" pitchFamily="34" charset="-122"/>
-                <a:cs typeface="Calibri" pitchFamily="34" charset="-120"/>
-              </a:rPr>
-              <a:t>Break</a:t>
-            </a:r>
-            <a:endParaRPr lang="en-US" sz="1250" dirty="0"/>
-          </a:p>
-        </p:txBody>
-      </p:sp>
-      <p:sp>
-        <p:nvSpPr>
-          <p:cNvPr id="12" name="Shape 10"/>
-          <p:cNvSpPr/>
-          <p:nvPr/>
-        </p:nvSpPr>
-        <p:spPr>
-          <a:xfrm>
-            <a:off x="640080" y="3273552"/>
-            <a:ext cx="868680" cy="457200"/>
-          </a:xfrm>
-          <a:prstGeom prst="roundRect">
-            <a:avLst>
-              <a:gd name="adj" fmla="val 12000"/>
-            </a:avLst>
-          </a:prstGeom>
-          <a:solidFill>
-            <a:srgbClr val="7A3B2E"/>
-          </a:solidFill>
-          <a:ln/>
-        </p:spPr>
-      </p:sp>
-      <p:sp>
-        <p:nvSpPr>
-          <p:cNvPr id="13" name="Text 11"/>
-          <p:cNvSpPr/>
-          <p:nvPr/>
-        </p:nvSpPr>
-        <p:spPr>
-          <a:xfrm>
-            <a:off x="640080" y="3273552"/>
-            <a:ext cx="868680" cy="457200"/>
-          </a:xfrm>
-          <a:prstGeom prst="rect">
-            <a:avLst/>
-          </a:prstGeom>
-          <a:noFill/>
-          <a:ln/>
-        </p:spPr>
-        <p:txBody>
-          <a:bodyPr wrap="square" rtlCol="0" anchor="ctr"/>
-          <a:lstStyle/>
-          <a:p>
-            <a:pPr algn="ctr" indent="0" marL="0">
-              <a:buNone/>
-            </a:pPr>
-            <a:r>
-              <a:rPr lang="en-US" sz="1100" b="1" dirty="0">
-                <a:solidFill>
-                  <a:srgbClr val="FFFFFF"/>
-                </a:solidFill>
-                <a:latin typeface="Calibri" pitchFamily="34" charset="0"/>
-                <a:ea typeface="Calibri" pitchFamily="34" charset="-122"/>
-                <a:cs typeface="Calibri" pitchFamily="34" charset="-120"/>
-              </a:rPr>
-              <a:t>0:58</a:t>
-            </a:r>
-            <a:endParaRPr lang="en-US" sz="1100" dirty="0"/>
-          </a:p>
-        </p:txBody>
-      </p:sp>
-      <p:sp>
-        <p:nvSpPr>
-          <p:cNvPr id="14" name="Text 12"/>
-          <p:cNvSpPr/>
-          <p:nvPr/>
-        </p:nvSpPr>
-        <p:spPr>
-          <a:xfrm>
-            <a:off x="1691640" y="3255264"/>
-            <a:ext cx="9646920" cy="566928"/>
-          </a:xfrm>
-          <a:prstGeom prst="rect">
-            <a:avLst/>
-          </a:prstGeom>
-          <a:noFill/>
-          <a:ln/>
-        </p:spPr>
-        <p:txBody>
-          <a:bodyPr wrap="square" rtlCol="0" anchor="ctr">
-            <a:spAutoFit/>
-          </a:bodyPr>
-          <a:lstStyle/>
-          <a:p>
-            <a:pPr indent="0" marL="0">
-              <a:buNone/>
-            </a:pPr>
-            <a:r>
-              <a:rPr lang="en-US" sz="1250" dirty="0">
-                <a:solidFill>
-                  <a:srgbClr val="1A1A1A"/>
-                </a:solidFill>
-                <a:latin typeface="Calibri" pitchFamily="34" charset="0"/>
-                <a:ea typeface="Calibri" pitchFamily="34" charset="-122"/>
-                <a:cs typeface="Calibri" pitchFamily="34" charset="-120"/>
-              </a:rPr>
-              <a:t>The data conversation: the licensing one-pager (CC0 museums and public-domain books go anywhere; academic-only sets analyze-don't-redistribute; lyrics and review text metadata-only; AO3 and other community-opposed archives a small attributed sample at most, never a shared dataset; live firehoses we discuss, don't scrape; pirated full-text books from shadow libraries like LibGen never, the line the field's $1.5B settlement was about), and the Data Biography introduced.</a:t>
-            </a:r>
-            <a:endParaRPr lang="en-US" sz="1250" dirty="0"/>
-          </a:p>
-        </p:txBody>
-      </p:sp>
-      <p:sp>
-        <p:nvSpPr>
-          <p:cNvPr id="15" name="Shape 13"/>
-          <p:cNvSpPr/>
-          <p:nvPr/>
-        </p:nvSpPr>
-        <p:spPr>
-          <a:xfrm>
-            <a:off x="640080" y="3840480"/>
-            <a:ext cx="868680" cy="457200"/>
-          </a:xfrm>
-          <a:prstGeom prst="roundRect">
-            <a:avLst>
-              <a:gd name="adj" fmla="val 12000"/>
-            </a:avLst>
-          </a:prstGeom>
-          <a:solidFill>
-            <a:srgbClr val="7A3B2E"/>
-          </a:solidFill>
-          <a:ln/>
-        </p:spPr>
-      </p:sp>
-      <p:sp>
-        <p:nvSpPr>
-          <p:cNvPr id="16" name="Text 14"/>
-          <p:cNvSpPr/>
-          <p:nvPr/>
-        </p:nvSpPr>
-        <p:spPr>
-          <a:xfrm>
-            <a:off x="640080" y="3840480"/>
-            <a:ext cx="868680" cy="457200"/>
-          </a:xfrm>
-          <a:prstGeom prst="rect">
-            <a:avLst/>
-          </a:prstGeom>
-          <a:noFill/>
-          <a:ln/>
-        </p:spPr>
-        <p:txBody>
-          <a:bodyPr wrap="square" rtlCol="0" anchor="ctr"/>
-          <a:lstStyle/>
-          <a:p>
-            <a:pPr algn="ctr" indent="0" marL="0">
-              <a:buNone/>
-            </a:pPr>
-            <a:r>
-              <a:rPr lang="en-US" sz="1100" b="1" dirty="0">
-                <a:solidFill>
-                  <a:srgbClr val="FFFFFF"/>
-                </a:solidFill>
-                <a:latin typeface="Calibri" pitchFamily="34" charset="0"/>
-                <a:ea typeface="Calibri" pitchFamily="34" charset="-122"/>
-                <a:cs typeface="Calibri" pitchFamily="34" charset="-120"/>
-              </a:rPr>
-              <a:t>1:10</a:t>
-            </a:r>
-            <a:endParaRPr lang="en-US" sz="1100" dirty="0"/>
-          </a:p>
-        </p:txBody>
-      </p:sp>
-      <p:sp>
-        <p:nvSpPr>
-          <p:cNvPr id="17" name="Text 15"/>
-          <p:cNvSpPr/>
-          <p:nvPr/>
-        </p:nvSpPr>
-        <p:spPr>
-          <a:xfrm>
-            <a:off x="1691640" y="3822192"/>
-            <a:ext cx="9646920" cy="566928"/>
-          </a:xfrm>
-          <a:prstGeom prst="rect">
-            <a:avLst/>
-          </a:prstGeom>
-          <a:noFill/>
-          <a:ln/>
-        </p:spPr>
-        <p:txBody>
-          <a:bodyPr wrap="square" rtlCol="0" anchor="ctr">
-            <a:spAutoFit/>
-          </a:bodyPr>
-          <a:lstStyle/>
-          <a:p>
-            <a:pPr indent="0" marL="0">
-              <a:buNone/>
-            </a:pPr>
-            <a:r>
-              <a:rPr lang="en-US" sz="1250" dirty="0">
-                <a:solidFill>
-                  <a:srgbClr val="1A1A1A"/>
-                </a:solidFill>
-                <a:latin typeface="Calibri" pitchFamily="34" charset="0"/>
-                <a:ea typeface="Calibri" pitchFamily="34" charset="-122"/>
-                <a:cs typeface="Calibri" pitchFamily="34" charset="-120"/>
-              </a:rPr>
-              <a:t>Getting the data, APIs and scraping, demoed live with the AI writing the code. API first (the Met or Art Institute, no key); scraping second, with the robots.txt / ToS / rate-limit / anti-republish check.</a:t>
-            </a:r>
-            <a:endParaRPr lang="en-US" sz="1250" dirty="0"/>
-          </a:p>
-        </p:txBody>
-      </p:sp>
-      <p:sp>
-        <p:nvSpPr>
-          <p:cNvPr id="18" name="Shape 16"/>
-          <p:cNvSpPr/>
-          <p:nvPr/>
-        </p:nvSpPr>
-        <p:spPr>
-          <a:xfrm>
-            <a:off x="640080" y="4407408"/>
-            <a:ext cx="868680" cy="457200"/>
-          </a:xfrm>
-          <a:prstGeom prst="roundRect">
-            <a:avLst>
-              <a:gd name="adj" fmla="val 12000"/>
-            </a:avLst>
-          </a:prstGeom>
-          <a:solidFill>
-            <a:srgbClr val="7A3B2E"/>
-          </a:solidFill>
-          <a:ln/>
-        </p:spPr>
-      </p:sp>
-      <p:sp>
-        <p:nvSpPr>
-          <p:cNvPr id="19" name="Text 17"/>
-          <p:cNvSpPr/>
-          <p:nvPr/>
-        </p:nvSpPr>
-        <p:spPr>
-          <a:xfrm>
-            <a:off x="640080" y="4407408"/>
-            <a:ext cx="868680" cy="457200"/>
-          </a:xfrm>
-          <a:prstGeom prst="rect">
-            <a:avLst/>
-          </a:prstGeom>
-          <a:noFill/>
-          <a:ln/>
-        </p:spPr>
-        <p:txBody>
-          <a:bodyPr wrap="square" rtlCol="0" anchor="ctr"/>
-          <a:lstStyle/>
-          <a:p>
-            <a:pPr algn="ctr" indent="0" marL="0">
-              <a:buNone/>
-            </a:pPr>
-            <a:r>
-              <a:rPr lang="en-US" sz="1100" b="1" dirty="0">
-                <a:solidFill>
-                  <a:srgbClr val="FFFFFF"/>
-                </a:solidFill>
-                <a:latin typeface="Calibri" pitchFamily="34" charset="0"/>
-                <a:ea typeface="Calibri" pitchFamily="34" charset="-122"/>
-                <a:cs typeface="Calibri" pitchFamily="34" charset="-120"/>
-              </a:rPr>
-              <a:t>1:30</a:t>
-            </a:r>
-            <a:endParaRPr lang="en-US" sz="1100" dirty="0"/>
-          </a:p>
-        </p:txBody>
-      </p:sp>
-      <p:sp>
-        <p:nvSpPr>
-          <p:cNvPr id="20" name="Text 18"/>
-          <p:cNvSpPr/>
-          <p:nvPr/>
-        </p:nvSpPr>
-        <p:spPr>
-          <a:xfrm>
-            <a:off x="1691640" y="4389120"/>
-            <a:ext cx="9646920" cy="566928"/>
-          </a:xfrm>
-          <a:prstGeom prst="rect">
-            <a:avLst/>
-          </a:prstGeom>
-          <a:noFill/>
-          <a:ln/>
-        </p:spPr>
-        <p:txBody>
-          <a:bodyPr wrap="square" rtlCol="0" anchor="ctr">
-            <a:spAutoFit/>
-          </a:bodyPr>
-          <a:lstStyle/>
-          <a:p>
-            <a:pPr indent="0" marL="0">
-              <a:buNone/>
-            </a:pPr>
-            <a:r>
-              <a:rPr lang="en-US" sz="1250" dirty="0">
-                <a:solidFill>
-                  <a:srgbClr val="1A1A1A"/>
-                </a:solidFill>
-                <a:latin typeface="Calibri" pitchFamily="34" charset="0"/>
-                <a:ea typeface="Calibri" pitchFamily="34" charset="-122"/>
-                <a:cs typeface="Calibri" pitchFamily="34" charset="-120"/>
-              </a:rPr>
-              <a:t>Collect-and-build lab: point the cookbook notebook at your corpus, reshape it, and save it to your Drive project folder so it's there next week (when the Week 1 Drive mount pays off), and fork the publishing template. Your project repo is born today.</a:t>
-            </a:r>
-            <a:endParaRPr lang="en-US" sz="1250" dirty="0"/>
-          </a:p>
-        </p:txBody>
-      </p:sp>
-      <p:sp>
-        <p:nvSpPr>
-          <p:cNvPr id="21" name="Shape 19"/>
-          <p:cNvSpPr/>
-          <p:nvPr/>
-        </p:nvSpPr>
-        <p:spPr>
-          <a:xfrm>
-            <a:off x="640080" y="4974336"/>
-            <a:ext cx="868680" cy="457200"/>
-          </a:xfrm>
-          <a:prstGeom prst="roundRect">
-            <a:avLst>
-              <a:gd name="adj" fmla="val 12000"/>
-            </a:avLst>
-          </a:prstGeom>
-          <a:solidFill>
-            <a:srgbClr val="7A3B2E"/>
-          </a:solidFill>
-          <a:ln/>
-        </p:spPr>
-      </p:sp>
-      <p:sp>
-        <p:nvSpPr>
-          <p:cNvPr id="22" name="Text 20"/>
-          <p:cNvSpPr/>
-          <p:nvPr/>
-        </p:nvSpPr>
-        <p:spPr>
-          <a:xfrm>
-            <a:off x="640080" y="4974336"/>
-            <a:ext cx="868680" cy="457200"/>
-          </a:xfrm>
-          <a:prstGeom prst="rect">
-            <a:avLst/>
-          </a:prstGeom>
-          <a:noFill/>
-          <a:ln/>
-        </p:spPr>
-        <p:txBody>
-          <a:bodyPr wrap="square" rtlCol="0" anchor="ctr"/>
-          <a:lstStyle/>
-          <a:p>
-            <a:pPr algn="ctr" indent="0" marL="0">
-              <a:buNone/>
-            </a:pPr>
-            <a:r>
-              <a:rPr lang="en-US" sz="1100" b="1" dirty="0">
-                <a:solidFill>
-                  <a:srgbClr val="FFFFFF"/>
-                </a:solidFill>
-                <a:latin typeface="Calibri" pitchFamily="34" charset="0"/>
-                <a:ea typeface="Calibri" pitchFamily="34" charset="-122"/>
-                <a:cs typeface="Calibri" pitchFamily="34" charset="-120"/>
-              </a:rPr>
-              <a:t>1:55</a:t>
-            </a:r>
-            <a:endParaRPr lang="en-US" sz="1100" dirty="0"/>
-          </a:p>
-        </p:txBody>
-      </p:sp>
-      <p:sp>
-        <p:nvSpPr>
-          <p:cNvPr id="23" name="Text 21"/>
-          <p:cNvSpPr/>
-          <p:nvPr/>
-        </p:nvSpPr>
-        <p:spPr>
-          <a:xfrm>
-            <a:off x="1691640" y="4956048"/>
-            <a:ext cx="9646920" cy="566928"/>
-          </a:xfrm>
-          <a:prstGeom prst="rect">
-            <a:avLst/>
-          </a:prstGeom>
-          <a:noFill/>
-          <a:ln/>
-        </p:spPr>
-        <p:txBody>
-          <a:bodyPr wrap="square" rtlCol="0" anchor="ctr">
-            <a:spAutoFit/>
-          </a:bodyPr>
-          <a:lstStyle/>
-          <a:p>
-            <a:pPr indent="0" marL="0">
-              <a:buNone/>
-            </a:pPr>
-            <a:r>
-              <a:rPr lang="en-US" sz="1250" dirty="0">
-                <a:solidFill>
-                  <a:srgbClr val="1A1A1A"/>
-                </a:solidFill>
-                <a:latin typeface="Calibri" pitchFamily="34" charset="0"/>
-                <a:ea typeface="Calibri" pitchFamily="34" charset="-122"/>
-                <a:cs typeface="Calibri" pitchFamily="34" charset="-120"/>
-              </a:rPr>
-              <a:t>Commit, with the pivot kit named as insurance. A null result honestly shown is a complete project. Check-out.</a:t>
-            </a:r>
-            <a:endParaRPr lang="en-US" sz="1250" dirty="0"/>
+              <a:t>Shadow-library books: never. That line is what the field's $1.5B settlement was about.</a:t>
+            </a:r>
+            <a:endParaRPr lang="en-US" sz="1650" dirty="0"/>
           </a:p>
         </p:txBody>
       </p:sp>
@@ -3731,14 +5040,34 @@
       </p:grpSpPr>
       <p:sp>
         <p:nvSpPr>
-          <p:cNvPr id="2" name="Text 0"/>
+          <p:cNvPr id="2" name="Shape 0"/>
+          <p:cNvSpPr/>
+          <p:nvPr/>
+        </p:nvSpPr>
+        <p:spPr>
+          <a:xfrm>
+            <a:off x="0" y="0"/>
+            <a:ext cx="164592" cy="6858000"/>
+          </a:xfrm>
+          <a:prstGeom prst="rect">
+            <a:avLst/>
+          </a:prstGeom>
+          <a:solidFill>
+            <a:srgbClr val="B9852F"/>
+          </a:solidFill>
+          <a:ln/>
+        </p:spPr>
+      </p:sp>
+      <p:sp>
+        <p:nvSpPr>
+          <p:cNvPr id="3" name="Text 1"/>
           <p:cNvSpPr/>
           <p:nvPr/>
         </p:nvSpPr>
         <p:spPr>
           <a:xfrm>
             <a:off x="640080" y="640080"/>
-            <a:ext cx="10058400" cy="731520"/>
+            <a:ext cx="10058400" cy="320040"/>
           </a:xfrm>
           <a:prstGeom prst="rect">
             <a:avLst/>
@@ -3748,6 +5077,47 @@
         </p:spPr>
         <p:txBody>
           <a:bodyPr wrap="square" rtlCol="0" anchor="ctr"/>
+          <a:lstStyle/>
+          <a:p>
+            <a:pPr indent="0" marL="0">
+              <a:buNone/>
+            </a:pPr>
+            <a:r>
+              <a:rPr lang="en-US" sz="1200" b="1" spc="300" kern="0" dirty="0">
+                <a:solidFill>
+                  <a:srgbClr val="B9852F"/>
+                </a:solidFill>
+                <a:latin typeface="Calibri" pitchFamily="34" charset="0"/>
+                <a:ea typeface="Calibri" pitchFamily="34" charset="-122"/>
+                <a:cs typeface="Calibri" pitchFamily="34" charset="-120"/>
+              </a:rPr>
+              <a:t>WEEK 4 · THE MATERIAL</a:t>
+            </a:r>
+            <a:endParaRPr lang="en-US" sz="1200" dirty="0"/>
+          </a:p>
+        </p:txBody>
+      </p:sp>
+      <p:sp>
+        <p:nvSpPr>
+          <p:cNvPr id="4" name="Text 2"/>
+          <p:cNvSpPr/>
+          <p:nvPr/>
+        </p:nvSpPr>
+        <p:spPr>
+          <a:xfrm>
+            <a:off x="640080" y="1005840"/>
+            <a:ext cx="10881360" cy="914400"/>
+          </a:xfrm>
+          <a:prstGeom prst="rect">
+            <a:avLst/>
+          </a:prstGeom>
+          <a:noFill/>
+          <a:ln/>
+        </p:spPr>
+        <p:txBody>
+          <a:bodyPr wrap="square" rtlCol="0" anchor="t">
+            <a:spAutoFit/>
+          </a:bodyPr>
           <a:lstStyle/>
           <a:p>
             <a:pPr indent="0" marL="0">
@@ -3762,7 +5132,7 @@
                 <a:ea typeface="Cambria" pitchFamily="34" charset="-122"/>
                 <a:cs typeface="Cambria" pitchFamily="34" charset="-120"/>
               </a:rPr>
-              <a:t>Reading &amp; homework</a:t>
+              <a:t>Three routes to a corpus</a:t>
             </a:r>
             <a:endParaRPr lang="en-US" sz="3000" dirty="0"/>
           </a:p>
@@ -3770,14 +5140,14 @@
       </p:sp>
       <p:sp>
         <p:nvSpPr>
-          <p:cNvPr id="3" name="Shape 1"/>
-          <p:cNvSpPr/>
-          <p:nvPr/>
-        </p:nvSpPr>
-        <p:spPr>
-          <a:xfrm>
-            <a:off x="640080" y="1810512"/>
-            <a:ext cx="219456" cy="219456"/>
+          <p:cNvPr id="5" name="Shape 3"/>
+          <p:cNvSpPr/>
+          <p:nvPr/>
+        </p:nvSpPr>
+        <p:spPr>
+          <a:xfrm>
+            <a:off x="640080" y="2331720"/>
+            <a:ext cx="201168" cy="201168"/>
           </a:xfrm>
           <a:prstGeom prst="ellipse">
             <a:avLst/>
@@ -3790,53 +5160,78 @@
       </p:sp>
       <p:sp>
         <p:nvSpPr>
-          <p:cNvPr id="4" name="Text 2"/>
-          <p:cNvSpPr/>
-          <p:nvPr/>
-        </p:nvSpPr>
-        <p:spPr>
-          <a:xfrm>
-            <a:off x="1051560" y="1737360"/>
-            <a:ext cx="10424160" cy="365760"/>
-          </a:xfrm>
-          <a:prstGeom prst="rect">
-            <a:avLst/>
-          </a:prstGeom>
-          <a:noFill/>
-          <a:ln/>
-        </p:spPr>
-        <p:txBody>
-          <a:bodyPr wrap="square" rtlCol="0" anchor="ctr"/>
+          <p:cNvPr id="6" name="Text 4"/>
+          <p:cNvSpPr/>
+          <p:nvPr/>
+        </p:nvSpPr>
+        <p:spPr>
+          <a:xfrm>
+            <a:off x="1097280" y="2240280"/>
+            <a:ext cx="10607040" cy="1017270"/>
+          </a:xfrm>
+          <a:prstGeom prst="rect">
+            <a:avLst/>
+          </a:prstGeom>
+          <a:noFill/>
+          <a:ln/>
+        </p:spPr>
+        <p:txBody>
+          <a:bodyPr wrap="square" rtlCol="0" anchor="t">
+            <a:spAutoFit/>
+          </a:bodyPr>
           <a:lstStyle/>
           <a:p>
             <a:pPr indent="0" marL="0">
-              <a:buNone/>
-            </a:pPr>
-            <a:r>
-              <a:rPr lang="en-US" sz="1500" b="1" dirty="0">
-                <a:solidFill>
-                  <a:srgbClr val="7A3B2E"/>
+              <a:lnSpc>
+                <a:spcPct val="112000"/>
+              </a:lnSpc>
+              <a:buNone/>
+            </a:pPr>
+            <a:r>
+              <a:rPr lang="en-US" sz="1650" dirty="0">
+                <a:solidFill>
+                  <a:srgbClr val="1A1A1A"/>
                 </a:solidFill>
                 <a:latin typeface="Calibri" pitchFamily="34" charset="0"/>
                 <a:ea typeface="Calibri" pitchFamily="34" charset="-122"/>
                 <a:cs typeface="Calibri" pitchFamily="34" charset="-120"/>
               </a:rPr>
-              <a:t>Reading</a:t>
-            </a:r>
-            <a:endParaRPr lang="en-US" sz="1500" dirty="0"/>
-          </a:p>
-        </p:txBody>
-      </p:sp>
-      <p:sp>
-        <p:nvSpPr>
-          <p:cNvPr id="5" name="Text 3"/>
-          <p:cNvSpPr/>
-          <p:nvPr/>
-        </p:nvSpPr>
-        <p:spPr>
-          <a:xfrm>
-            <a:off x="1051560" y="2121408"/>
-            <a:ext cx="10424160" cy="731520"/>
+              <a:t>Route 1, the common case: a prepared file. pd.read_csv(url), gdown for Drive links, load_dataset() for Hugging Face.</a:t>
+            </a:r>
+            <a:endParaRPr lang="en-US" sz="1650" dirty="0"/>
+          </a:p>
+        </p:txBody>
+      </p:sp>
+      <p:sp>
+        <p:nvSpPr>
+          <p:cNvPr id="7" name="Shape 5"/>
+          <p:cNvSpPr/>
+          <p:nvPr/>
+        </p:nvSpPr>
+        <p:spPr>
+          <a:xfrm>
+            <a:off x="640080" y="3348990"/>
+            <a:ext cx="201168" cy="201168"/>
+          </a:xfrm>
+          <a:prstGeom prst="ellipse">
+            <a:avLst/>
+          </a:prstGeom>
+          <a:solidFill>
+            <a:srgbClr val="3F6F5F"/>
+          </a:solidFill>
+          <a:ln/>
+        </p:spPr>
+      </p:sp>
+      <p:sp>
+        <p:nvSpPr>
+          <p:cNvPr id="8" name="Text 6"/>
+          <p:cNvSpPr/>
+          <p:nvPr/>
+        </p:nvSpPr>
+        <p:spPr>
+          <a:xfrm>
+            <a:off x="1097280" y="3257550"/>
+            <a:ext cx="10607040" cy="1017270"/>
           </a:xfrm>
           <a:prstGeom prst="rect">
             <a:avLst/>
@@ -3851,10 +5246,13 @@
           <a:lstStyle/>
           <a:p>
             <a:pPr indent="0" marL="0">
-              <a:buNone/>
-            </a:pPr>
-            <a:r>
-              <a:rPr lang="en-US" sz="1400" dirty="0">
+              <a:lnSpc>
+                <a:spcPct val="112000"/>
+              </a:lnSpc>
+              <a:buNone/>
+            </a:pPr>
+            <a:r>
+              <a:rPr lang="en-US" sz="1650" dirty="0">
                 <a:solidFill>
                   <a:srgbClr val="1A1A1A"/>
                 </a:solidFill>
@@ -3862,81 +5260,106 @@
                 <a:ea typeface="Calibri" pitchFamily="34" charset="-122"/>
                 <a:cs typeface="Calibri" pitchFamily="34" charset="-120"/>
               </a:rPr>
-              <a:t>Krause, Data Biographies (We All Count)</a:t>
-            </a:r>
-            <a:endParaRPr lang="en-US" sz="1400" dirty="0"/>
-          </a:p>
-        </p:txBody>
-      </p:sp>
-      <p:sp>
-        <p:nvSpPr>
-          <p:cNvPr id="6" name="Shape 4"/>
-          <p:cNvSpPr/>
-          <p:nvPr/>
-        </p:nvSpPr>
-        <p:spPr>
-          <a:xfrm>
-            <a:off x="640080" y="2953512"/>
-            <a:ext cx="219456" cy="219456"/>
+              <a:t>Route 2, the polite front door: an API. The Met's endpoint returns JSON, no key required.</a:t>
+            </a:r>
+            <a:endParaRPr lang="en-US" sz="1650" dirty="0"/>
+          </a:p>
+        </p:txBody>
+      </p:sp>
+      <p:sp>
+        <p:nvSpPr>
+          <p:cNvPr id="9" name="Shape 7"/>
+          <p:cNvSpPr/>
+          <p:nvPr/>
+        </p:nvSpPr>
+        <p:spPr>
+          <a:xfrm>
+            <a:off x="640080" y="4366260"/>
+            <a:ext cx="201168" cy="201168"/>
           </a:xfrm>
           <a:prstGeom prst="ellipse">
             <a:avLst/>
           </a:prstGeom>
           <a:solidFill>
-            <a:srgbClr val="3F6F5F"/>
-          </a:solidFill>
-          <a:ln/>
-        </p:spPr>
-      </p:sp>
-      <p:sp>
-        <p:nvSpPr>
-          <p:cNvPr id="7" name="Text 5"/>
-          <p:cNvSpPr/>
-          <p:nvPr/>
-        </p:nvSpPr>
-        <p:spPr>
-          <a:xfrm>
-            <a:off x="1051560" y="2880360"/>
-            <a:ext cx="10424160" cy="365760"/>
-          </a:xfrm>
-          <a:prstGeom prst="rect">
-            <a:avLst/>
-          </a:prstGeom>
-          <a:noFill/>
-          <a:ln/>
-        </p:spPr>
-        <p:txBody>
-          <a:bodyPr wrap="square" rtlCol="0" anchor="ctr"/>
+            <a:srgbClr val="B9852F"/>
+          </a:solidFill>
+          <a:ln/>
+        </p:spPr>
+      </p:sp>
+      <p:sp>
+        <p:nvSpPr>
+          <p:cNvPr id="10" name="Text 8"/>
+          <p:cNvSpPr/>
+          <p:nvPr/>
+        </p:nvSpPr>
+        <p:spPr>
+          <a:xfrm>
+            <a:off x="1097280" y="4274820"/>
+            <a:ext cx="10607040" cy="1017270"/>
+          </a:xfrm>
+          <a:prstGeom prst="rect">
+            <a:avLst/>
+          </a:prstGeom>
+          <a:noFill/>
+          <a:ln/>
+        </p:spPr>
+        <p:txBody>
+          <a:bodyPr wrap="square" rtlCol="0" anchor="t">
+            <a:spAutoFit/>
+          </a:bodyPr>
           <a:lstStyle/>
           <a:p>
             <a:pPr indent="0" marL="0">
-              <a:buNone/>
-            </a:pPr>
-            <a:r>
-              <a:rPr lang="en-US" sz="1500" b="1" dirty="0">
-                <a:solidFill>
-                  <a:srgbClr val="3F6F5F"/>
+              <a:lnSpc>
+                <a:spcPct val="112000"/>
+              </a:lnSpc>
+              <a:buNone/>
+            </a:pPr>
+            <a:r>
+              <a:rPr lang="en-US" sz="1650" dirty="0">
+                <a:solidFill>
+                  <a:srgbClr val="1A1A1A"/>
                 </a:solidFill>
                 <a:latin typeface="Calibri" pitchFamily="34" charset="0"/>
                 <a:ea typeface="Calibri" pitchFamily="34" charset="-122"/>
                 <a:cs typeface="Calibri" pitchFamily="34" charset="-120"/>
               </a:rPr>
-              <a:t>Supplement</a:t>
-            </a:r>
-            <a:endParaRPr lang="en-US" sz="1500" dirty="0"/>
-          </a:p>
-        </p:txBody>
-      </p:sp>
-      <p:sp>
-        <p:nvSpPr>
-          <p:cNvPr id="8" name="Text 6"/>
-          <p:cNvSpPr/>
-          <p:nvPr/>
-        </p:nvSpPr>
-        <p:spPr>
-          <a:xfrm>
-            <a:off x="1051560" y="3264408"/>
-            <a:ext cx="10424160" cy="731520"/>
+              <a:t>Route 3, the back door: scrape, carefully. Read robots.txt and the ToS, go slow, take only what you need, never republish.</a:t>
+            </a:r>
+            <a:endParaRPr lang="en-US" sz="1650" dirty="0"/>
+          </a:p>
+        </p:txBody>
+      </p:sp>
+      <p:sp>
+        <p:nvSpPr>
+          <p:cNvPr id="11" name="Shape 9"/>
+          <p:cNvSpPr/>
+          <p:nvPr/>
+        </p:nvSpPr>
+        <p:spPr>
+          <a:xfrm>
+            <a:off x="640080" y="5383530"/>
+            <a:ext cx="201168" cy="201168"/>
+          </a:xfrm>
+          <a:prstGeom prst="ellipse">
+            <a:avLst/>
+          </a:prstGeom>
+          <a:solidFill>
+            <a:srgbClr val="7A3B2E"/>
+          </a:solidFill>
+          <a:ln/>
+        </p:spPr>
+      </p:sp>
+      <p:sp>
+        <p:nvSpPr>
+          <p:cNvPr id="12" name="Text 10"/>
+          <p:cNvSpPr/>
+          <p:nvPr/>
+        </p:nvSpPr>
+        <p:spPr>
+          <a:xfrm>
+            <a:off x="1097280" y="5292090"/>
+            <a:ext cx="10607040" cy="1017270"/>
           </a:xfrm>
           <a:prstGeom prst="rect">
             <a:avLst/>
@@ -3951,10 +5374,13 @@
           <a:lstStyle/>
           <a:p>
             <a:pPr indent="0" marL="0">
-              <a:buNone/>
-            </a:pPr>
-            <a:r>
-              <a:rPr lang="en-US" sz="1400" dirty="0">
+              <a:lnSpc>
+                <a:spcPct val="112000"/>
+              </a:lnSpc>
+              <a:buNone/>
+            </a:pPr>
+            <a:r>
+              <a:rPr lang="en-US" sz="1650" dirty="0">
                 <a:solidFill>
                   <a:srgbClr val="1A1A1A"/>
                 </a:solidFill>
@@ -3962,209 +5388,9 @@
                 <a:ea typeface="Calibri" pitchFamily="34" charset="-122"/>
                 <a:cs typeface="Calibri" pitchFamily="34" charset="-120"/>
               </a:rPr>
-              <a:t>Freelon, Post-API Age</a:t>
-            </a:r>
-            <a:endParaRPr lang="en-US" sz="1400" dirty="0"/>
-          </a:p>
-        </p:txBody>
-      </p:sp>
-      <p:sp>
-        <p:nvSpPr>
-          <p:cNvPr id="9" name="Shape 7"/>
-          <p:cNvSpPr/>
-          <p:nvPr/>
-        </p:nvSpPr>
-        <p:spPr>
-          <a:xfrm>
-            <a:off x="640080" y="4096512"/>
-            <a:ext cx="219456" cy="219456"/>
-          </a:xfrm>
-          <a:prstGeom prst="ellipse">
-            <a:avLst/>
-          </a:prstGeom>
-          <a:solidFill>
-            <a:srgbClr val="B9852F"/>
-          </a:solidFill>
-          <a:ln/>
-        </p:spPr>
-      </p:sp>
-      <p:sp>
-        <p:nvSpPr>
-          <p:cNvPr id="10" name="Text 8"/>
-          <p:cNvSpPr/>
-          <p:nvPr/>
-        </p:nvSpPr>
-        <p:spPr>
-          <a:xfrm>
-            <a:off x="1051560" y="4023360"/>
-            <a:ext cx="10424160" cy="365760"/>
-          </a:xfrm>
-          <a:prstGeom prst="rect">
-            <a:avLst/>
-          </a:prstGeom>
-          <a:noFill/>
-          <a:ln/>
-        </p:spPr>
-        <p:txBody>
-          <a:bodyPr wrap="square" rtlCol="0" anchor="ctr"/>
-          <a:lstStyle/>
-          <a:p>
-            <a:pPr indent="0" marL="0">
-              <a:buNone/>
-            </a:pPr>
-            <a:r>
-              <a:rPr lang="en-US" sz="1500" b="1" dirty="0">
-                <a:solidFill>
-                  <a:srgbClr val="B9852F"/>
-                </a:solidFill>
-                <a:latin typeface="Calibri" pitchFamily="34" charset="0"/>
-                <a:ea typeface="Calibri" pitchFamily="34" charset="-122"/>
-                <a:cs typeface="Calibri" pitchFamily="34" charset="-120"/>
-              </a:rPr>
-              <a:t>Sketch</a:t>
-            </a:r>
-            <a:endParaRPr lang="en-US" sz="1500" dirty="0"/>
-          </a:p>
-        </p:txBody>
-      </p:sp>
-      <p:sp>
-        <p:nvSpPr>
-          <p:cNvPr id="11" name="Text 9"/>
-          <p:cNvSpPr/>
-          <p:nvPr/>
-        </p:nvSpPr>
-        <p:spPr>
-          <a:xfrm>
-            <a:off x="1051560" y="4407408"/>
-            <a:ext cx="10424160" cy="731520"/>
-          </a:xfrm>
-          <a:prstGeom prst="rect">
-            <a:avLst/>
-          </a:prstGeom>
-          <a:noFill/>
-          <a:ln/>
-        </p:spPr>
-        <p:txBody>
-          <a:bodyPr wrap="square" rtlCol="0" anchor="t">
-            <a:spAutoFit/>
-          </a:bodyPr>
-          <a:lstStyle/>
-          <a:p>
-            <a:pPr indent="0" marL="0">
-              <a:buNone/>
-            </a:pPr>
-            <a:r>
-              <a:rPr lang="en-US" sz="1400" dirty="0">
-                <a:solidFill>
-                  <a:srgbClr val="1A1A1A"/>
-                </a:solidFill>
-                <a:latin typeface="Calibri" pitchFamily="34" charset="0"/>
-                <a:ea typeface="Calibri" pitchFamily="34" charset="-122"/>
-                <a:cs typeface="Calibri" pitchFamily="34" charset="-120"/>
-              </a:rPr>
-              <a:t>Write your Data Biography (~400 words) and actually collect your corpus with the cookbook.</a:t>
-            </a:r>
-            <a:endParaRPr lang="en-US" sz="1400" dirty="0"/>
-          </a:p>
-        </p:txBody>
-      </p:sp>
-      <p:sp>
-        <p:nvSpPr>
-          <p:cNvPr id="12" name="Shape 10"/>
-          <p:cNvSpPr/>
-          <p:nvPr/>
-        </p:nvSpPr>
-        <p:spPr>
-          <a:xfrm>
-            <a:off x="640080" y="5239512"/>
-            <a:ext cx="219456" cy="219456"/>
-          </a:xfrm>
-          <a:prstGeom prst="ellipse">
-            <a:avLst/>
-          </a:prstGeom>
-          <a:solidFill>
-            <a:srgbClr val="7A3B2E"/>
-          </a:solidFill>
-          <a:ln/>
-        </p:spPr>
-      </p:sp>
-      <p:sp>
-        <p:nvSpPr>
-          <p:cNvPr id="13" name="Text 11"/>
-          <p:cNvSpPr/>
-          <p:nvPr/>
-        </p:nvSpPr>
-        <p:spPr>
-          <a:xfrm>
-            <a:off x="1051560" y="5166360"/>
-            <a:ext cx="10424160" cy="365760"/>
-          </a:xfrm>
-          <a:prstGeom prst="rect">
-            <a:avLst/>
-          </a:prstGeom>
-          <a:noFill/>
-          <a:ln/>
-        </p:spPr>
-        <p:txBody>
-          <a:bodyPr wrap="square" rtlCol="0" anchor="ctr"/>
-          <a:lstStyle/>
-          <a:p>
-            <a:pPr indent="0" marL="0">
-              <a:buNone/>
-            </a:pPr>
-            <a:r>
-              <a:rPr lang="en-US" sz="1500" b="1" dirty="0">
-                <a:solidFill>
-                  <a:srgbClr val="7A3B2E"/>
-                </a:solidFill>
-                <a:latin typeface="Calibri" pitchFamily="34" charset="0"/>
-                <a:ea typeface="Calibri" pitchFamily="34" charset="-122"/>
-                <a:cs typeface="Calibri" pitchFamily="34" charset="-120"/>
-              </a:rPr>
-              <a:t>Check (AI closed)</a:t>
-            </a:r>
-            <a:endParaRPr lang="en-US" sz="1500" dirty="0"/>
-          </a:p>
-        </p:txBody>
-      </p:sp>
-      <p:sp>
-        <p:nvSpPr>
-          <p:cNvPr id="14" name="Text 12"/>
-          <p:cNvSpPr/>
-          <p:nvPr/>
-        </p:nvSpPr>
-        <p:spPr>
-          <a:xfrm>
-            <a:off x="1051560" y="5550408"/>
-            <a:ext cx="10424160" cy="731520"/>
-          </a:xfrm>
-          <a:prstGeom prst="rect">
-            <a:avLst/>
-          </a:prstGeom>
-          <a:noFill/>
-          <a:ln/>
-        </p:spPr>
-        <p:txBody>
-          <a:bodyPr wrap="square" rtlCol="0" anchor="t">
-            <a:spAutoFit/>
-          </a:bodyPr>
-          <a:lstStyle/>
-          <a:p>
-            <a:pPr indent="0" marL="0">
-              <a:buNone/>
-            </a:pPr>
-            <a:r>
-              <a:rPr lang="en-US" sz="1400" dirty="0">
-                <a:solidFill>
-                  <a:srgbClr val="1A1A1A"/>
-                </a:solidFill>
-                <a:latin typeface="Calibri" pitchFamily="34" charset="0"/>
-                <a:ea typeface="Calibri" pitchFamily="34" charset="-122"/>
-                <a:cs typeface="Calibri" pitchFamily="34" charset="-120"/>
-              </a:rPr>
-              <a:t>Explain it: your question aloud, what it omits, and where your data actually comes from. (Competencies 2, 6.)</a:t>
-            </a:r>
-            <a:endParaRPr lang="en-US" sz="1400" dirty="0"/>
+              <a:t>Whatever the route: save the result to your Drive project folder today. Week 5 depends on it.</a:t>
+            </a:r>
+            <a:endParaRPr lang="en-US" sz="1650" dirty="0"/>
           </a:p>
         </p:txBody>
       </p:sp>
@@ -4202,7 +5428,27 @@
       </p:grpSpPr>
       <p:sp>
         <p:nvSpPr>
-          <p:cNvPr id="2" name="Text 0"/>
+          <p:cNvPr id="2" name="Shape 0"/>
+          <p:cNvSpPr/>
+          <p:nvPr/>
+        </p:nvSpPr>
+        <p:spPr>
+          <a:xfrm>
+            <a:off x="0" y="0"/>
+            <a:ext cx="164592" cy="6858000"/>
+          </a:xfrm>
+          <a:prstGeom prst="rect">
+            <a:avLst/>
+          </a:prstGeom>
+          <a:solidFill>
+            <a:srgbClr val="7A3B2E"/>
+          </a:solidFill>
+          <a:ln/>
+        </p:spPr>
+      </p:sp>
+      <p:sp>
+        <p:nvSpPr>
+          <p:cNvPr id="3" name="Text 1"/>
           <p:cNvSpPr/>
           <p:nvPr/>
         </p:nvSpPr>
@@ -4225,7 +5471,7 @@
               <a:buNone/>
             </a:pPr>
             <a:r>
-              <a:rPr lang="en-US" sz="1300" b="1" spc="300" kern="0" dirty="0">
+              <a:rPr lang="en-US" sz="1200" b="1" spc="300" kern="0" dirty="0">
                 <a:solidFill>
                   <a:srgbClr val="7A3B2E"/>
                 </a:solidFill>
@@ -4233,38 +5479,40 @@
                 <a:ea typeface="Calibri" pitchFamily="34" charset="-122"/>
                 <a:cs typeface="Calibri" pitchFamily="34" charset="-120"/>
               </a:rPr>
-              <a:t>HOW THIS WEEK CONNECTS</a:t>
-            </a:r>
-            <a:endParaRPr lang="en-US" sz="1300" dirty="0"/>
-          </a:p>
-        </p:txBody>
-      </p:sp>
-      <p:sp>
-        <p:nvSpPr>
-          <p:cNvPr id="3" name="Text 1"/>
-          <p:cNvSpPr/>
-          <p:nvPr/>
-        </p:nvSpPr>
-        <p:spPr>
-          <a:xfrm>
-            <a:off x="640080" y="987552"/>
-            <a:ext cx="10058400" cy="640080"/>
-          </a:xfrm>
-          <a:prstGeom prst="rect">
-            <a:avLst/>
-          </a:prstGeom>
-          <a:noFill/>
-          <a:ln/>
-        </p:spPr>
-        <p:txBody>
-          <a:bodyPr wrap="square" rtlCol="0" anchor="ctr"/>
+              <a:t>WEEK 4 · THE MATERIAL</a:t>
+            </a:r>
+            <a:endParaRPr lang="en-US" sz="1200" dirty="0"/>
+          </a:p>
+        </p:txBody>
+      </p:sp>
+      <p:sp>
+        <p:nvSpPr>
+          <p:cNvPr id="4" name="Text 2"/>
+          <p:cNvSpPr/>
+          <p:nvPr/>
+        </p:nvSpPr>
+        <p:spPr>
+          <a:xfrm>
+            <a:off x="640080" y="1005840"/>
+            <a:ext cx="10881360" cy="914400"/>
+          </a:xfrm>
+          <a:prstGeom prst="rect">
+            <a:avLst/>
+          </a:prstGeom>
+          <a:noFill/>
+          <a:ln/>
+        </p:spPr>
+        <p:txBody>
+          <a:bodyPr wrap="square" rtlCol="0" anchor="t">
+            <a:spAutoFit/>
+          </a:bodyPr>
           <a:lstStyle/>
           <a:p>
             <a:pPr indent="0" marL="0">
               <a:buNone/>
             </a:pPr>
             <a:r>
-              <a:rPr lang="en-US" sz="2800" b="1" dirty="0">
+              <a:rPr lang="en-US" sz="3000" b="1" dirty="0">
                 <a:solidFill>
                   <a:srgbClr val="1A1A1A"/>
                 </a:solidFill>
@@ -4272,27 +5520,25 @@
                 <a:ea typeface="Cambria" pitchFamily="34" charset="-122"/>
                 <a:cs typeface="Cambria" pitchFamily="34" charset="-120"/>
               </a:rPr>
-              <a:t>The course's through-lines</a:t>
-            </a:r>
-            <a:endParaRPr lang="en-US" sz="2800" dirty="0"/>
-          </a:p>
-        </p:txBody>
-      </p:sp>
-      <p:sp>
-        <p:nvSpPr>
-          <p:cNvPr id="4" name="Shape 2"/>
-          <p:cNvSpPr/>
-          <p:nvPr/>
-        </p:nvSpPr>
-        <p:spPr>
-          <a:xfrm>
-            <a:off x="640080" y="2057400"/>
-            <a:ext cx="457200" cy="457200"/>
-          </a:xfrm>
-          <a:prstGeom prst="roundRect">
-            <a:avLst>
-              <a:gd name="adj" fmla="val 16000"/>
-            </a:avLst>
+              <a:t>The Data Biography (~400 words, due Week 5)</a:t>
+            </a:r>
+            <a:endParaRPr lang="en-US" sz="3000" dirty="0"/>
+          </a:p>
+        </p:txBody>
+      </p:sp>
+      <p:sp>
+        <p:nvSpPr>
+          <p:cNvPr id="5" name="Shape 3"/>
+          <p:cNvSpPr/>
+          <p:nvPr/>
+        </p:nvSpPr>
+        <p:spPr>
+          <a:xfrm>
+            <a:off x="640080" y="2331720"/>
+            <a:ext cx="201168" cy="201168"/>
+          </a:xfrm>
+          <a:prstGeom prst="ellipse">
+            <a:avLst/>
           </a:prstGeom>
           <a:solidFill>
             <a:srgbClr val="7A3B2E"/>
@@ -4302,92 +5548,14 @@
       </p:sp>
       <p:sp>
         <p:nvSpPr>
-          <p:cNvPr id="5" name="Text 3"/>
-          <p:cNvSpPr/>
-          <p:nvPr/>
-        </p:nvSpPr>
-        <p:spPr>
-          <a:xfrm>
-            <a:off x="640080" y="2057400"/>
-            <a:ext cx="457200" cy="457200"/>
-          </a:xfrm>
-          <a:prstGeom prst="rect">
-            <a:avLst/>
-          </a:prstGeom>
-          <a:noFill/>
-          <a:ln/>
-        </p:spPr>
-        <p:txBody>
-          <a:bodyPr wrap="square" rtlCol="0" anchor="ctr"/>
-          <a:lstStyle/>
-          <a:p>
-            <a:pPr algn="ctr" indent="0" marL="0">
-              <a:buNone/>
-            </a:pPr>
-            <a:r>
-              <a:rPr lang="en-US" sz="2000" b="1" dirty="0">
-                <a:solidFill>
-                  <a:srgbClr val="FFFFFF"/>
-                </a:solidFill>
-                <a:latin typeface="Cambria" pitchFamily="34" charset="0"/>
-                <a:ea typeface="Cambria" pitchFamily="34" charset="-122"/>
-                <a:cs typeface="Cambria" pitchFamily="34" charset="-120"/>
-              </a:rPr>
-              <a:t>1</a:t>
-            </a:r>
-            <a:endParaRPr lang="en-US" sz="2000" dirty="0"/>
-          </a:p>
-        </p:txBody>
-      </p:sp>
-      <p:sp>
-        <p:nvSpPr>
           <p:cNvPr id="6" name="Text 4"/>
           <p:cNvSpPr/>
           <p:nvPr/>
         </p:nvSpPr>
         <p:spPr>
           <a:xfrm>
-            <a:off x="1371600" y="2020824"/>
-            <a:ext cx="10332720" cy="411480"/>
-          </a:xfrm>
-          <a:prstGeom prst="rect">
-            <a:avLst/>
-          </a:prstGeom>
-          <a:noFill/>
-          <a:ln/>
-        </p:spPr>
-        <p:txBody>
-          <a:bodyPr wrap="square" rtlCol="0" anchor="ctr"/>
-          <a:lstStyle/>
-          <a:p>
-            <a:pPr indent="0" marL="0">
-              <a:buNone/>
-            </a:pPr>
-            <a:r>
-              <a:rPr lang="en-US" sz="1900" b="1" dirty="0">
-                <a:solidFill>
-                  <a:srgbClr val="7A3B2E"/>
-                </a:solidFill>
-                <a:latin typeface="Cambria" pitchFamily="34" charset="0"/>
-                <a:ea typeface="Cambria" pitchFamily="34" charset="-122"/>
-                <a:cs typeface="Cambria" pitchFamily="34" charset="-120"/>
-              </a:rPr>
-              <a:t>Whose data</a:t>
-            </a:r>
-            <a:endParaRPr lang="en-US" sz="1900" dirty="0"/>
-          </a:p>
-        </p:txBody>
-      </p:sp>
-      <p:sp>
-        <p:nvSpPr>
-          <p:cNvPr id="7" name="Text 5"/>
-          <p:cNvSpPr/>
-          <p:nvPr/>
-        </p:nvSpPr>
-        <p:spPr>
-          <a:xfrm>
-            <a:off x="1371600" y="2441448"/>
-            <a:ext cx="10332720" cy="914400"/>
+            <a:off x="1097280" y="2240280"/>
+            <a:ext cx="10607040" cy="1017270"/>
           </a:xfrm>
           <a:prstGeom prst="rect">
             <a:avLst/>
@@ -4408,7 +5576,7 @@
               <a:buNone/>
             </a:pPr>
             <a:r>
-              <a:rPr lang="en-US" sz="1450" dirty="0">
+              <a:rPr lang="en-US" sz="1650" dirty="0">
                 <a:solidFill>
                   <a:srgbClr val="1A1A1A"/>
                 </a:solidFill>
@@ -4416,27 +5584,25 @@
                 <a:ea typeface="Calibri" pitchFamily="34" charset="-122"/>
                 <a:cs typeface="Calibri" pitchFamily="34" charset="-120"/>
               </a:rPr>
-              <a:t>The Data Biography: where it came from, who is missing, what it cannot say.</a:t>
-            </a:r>
-            <a:endParaRPr lang="en-US" sz="1450" dirty="0"/>
-          </a:p>
-        </p:txBody>
-      </p:sp>
-      <p:sp>
-        <p:nvSpPr>
-          <p:cNvPr id="8" name="Shape 6"/>
-          <p:cNvSpPr/>
-          <p:nvPr/>
-        </p:nvSpPr>
-        <p:spPr>
-          <a:xfrm>
-            <a:off x="640080" y="3520440"/>
-            <a:ext cx="457200" cy="457200"/>
-          </a:xfrm>
-          <a:prstGeom prst="roundRect">
-            <a:avLst>
-              <a:gd name="adj" fmla="val 16000"/>
-            </a:avLst>
+              <a:t>Where did this data come from, and who made it?</a:t>
+            </a:r>
+            <a:endParaRPr lang="en-US" sz="1650" dirty="0"/>
+          </a:p>
+        </p:txBody>
+      </p:sp>
+      <p:sp>
+        <p:nvSpPr>
+          <p:cNvPr id="7" name="Shape 5"/>
+          <p:cNvSpPr/>
+          <p:nvPr/>
+        </p:nvSpPr>
+        <p:spPr>
+          <a:xfrm>
+            <a:off x="640080" y="3348990"/>
+            <a:ext cx="201168" cy="201168"/>
+          </a:xfrm>
+          <a:prstGeom prst="ellipse">
+            <a:avLst/>
           </a:prstGeom>
           <a:solidFill>
             <a:srgbClr val="3F6F5F"/>
@@ -4446,92 +5612,14 @@
       </p:sp>
       <p:sp>
         <p:nvSpPr>
-          <p:cNvPr id="9" name="Text 7"/>
-          <p:cNvSpPr/>
-          <p:nvPr/>
-        </p:nvSpPr>
-        <p:spPr>
-          <a:xfrm>
-            <a:off x="640080" y="3520440"/>
-            <a:ext cx="457200" cy="457200"/>
-          </a:xfrm>
-          <a:prstGeom prst="rect">
-            <a:avLst/>
-          </a:prstGeom>
-          <a:noFill/>
-          <a:ln/>
-        </p:spPr>
-        <p:txBody>
-          <a:bodyPr wrap="square" rtlCol="0" anchor="ctr"/>
-          <a:lstStyle/>
-          <a:p>
-            <a:pPr algn="ctr" indent="0" marL="0">
-              <a:buNone/>
-            </a:pPr>
-            <a:r>
-              <a:rPr lang="en-US" sz="2000" b="1" dirty="0">
-                <a:solidFill>
-                  <a:srgbClr val="FFFFFF"/>
-                </a:solidFill>
-                <a:latin typeface="Cambria" pitchFamily="34" charset="0"/>
-                <a:ea typeface="Cambria" pitchFamily="34" charset="-122"/>
-                <a:cs typeface="Cambria" pitchFamily="34" charset="-120"/>
-              </a:rPr>
-              <a:t>2</a:t>
-            </a:r>
-            <a:endParaRPr lang="en-US" sz="2000" dirty="0"/>
-          </a:p>
-        </p:txBody>
-      </p:sp>
-      <p:sp>
-        <p:nvSpPr>
-          <p:cNvPr id="10" name="Text 8"/>
-          <p:cNvSpPr/>
-          <p:nvPr/>
-        </p:nvSpPr>
-        <p:spPr>
-          <a:xfrm>
-            <a:off x="1371600" y="3483864"/>
-            <a:ext cx="10332720" cy="411480"/>
-          </a:xfrm>
-          <a:prstGeom prst="rect">
-            <a:avLst/>
-          </a:prstGeom>
-          <a:noFill/>
-          <a:ln/>
-        </p:spPr>
-        <p:txBody>
-          <a:bodyPr wrap="square" rtlCol="0" anchor="ctr"/>
-          <a:lstStyle/>
-          <a:p>
-            <a:pPr indent="0" marL="0">
-              <a:buNone/>
-            </a:pPr>
-            <a:r>
-              <a:rPr lang="en-US" sz="1900" b="1" dirty="0">
-                <a:solidFill>
-                  <a:srgbClr val="3F6F5F"/>
-                </a:solidFill>
-                <a:latin typeface="Cambria" pitchFamily="34" charset="0"/>
-                <a:ea typeface="Cambria" pitchFamily="34" charset="-122"/>
-                <a:cs typeface="Cambria" pitchFamily="34" charset="-120"/>
-              </a:rPr>
-              <a:t>The licensing line</a:t>
-            </a:r>
-            <a:endParaRPr lang="en-US" sz="1900" dirty="0"/>
-          </a:p>
-        </p:txBody>
-      </p:sp>
-      <p:sp>
-        <p:nvSpPr>
-          <p:cNvPr id="11" name="Text 9"/>
-          <p:cNvSpPr/>
-          <p:nvPr/>
-        </p:nvSpPr>
-        <p:spPr>
-          <a:xfrm>
-            <a:off x="1371600" y="3904488"/>
-            <a:ext cx="10332720" cy="914400"/>
+          <p:cNvPr id="8" name="Text 6"/>
+          <p:cNvSpPr/>
+          <p:nvPr/>
+        </p:nvSpPr>
+        <p:spPr>
+          <a:xfrm>
+            <a:off x="1097280" y="3257550"/>
+            <a:ext cx="10607040" cy="1017270"/>
           </a:xfrm>
           <a:prstGeom prst="rect">
             <a:avLst/>
@@ -4552,7 +5640,7 @@
               <a:buNone/>
             </a:pPr>
             <a:r>
-              <a:rPr lang="en-US" sz="1450" dirty="0">
+              <a:rPr lang="en-US" sz="1650" dirty="0">
                 <a:solidFill>
                   <a:srgbClr val="1A1A1A"/>
                 </a:solidFill>
@@ -4560,27 +5648,25 @@
                 <a:ea typeface="Calibri" pitchFamily="34" charset="-122"/>
                 <a:cs typeface="Calibri" pitchFamily="34" charset="-120"/>
               </a:rPr>
-              <a:t>CC0, to scrape-with-care, to never (LibGen). Judgment, not a rulebook.</a:t>
-            </a:r>
-            <a:endParaRPr lang="en-US" sz="1450" dirty="0"/>
-          </a:p>
-        </p:txBody>
-      </p:sp>
-      <p:sp>
-        <p:nvSpPr>
-          <p:cNvPr id="12" name="Shape 10"/>
-          <p:cNvSpPr/>
-          <p:nvPr/>
-        </p:nvSpPr>
-        <p:spPr>
-          <a:xfrm>
-            <a:off x="640080" y="4983480"/>
-            <a:ext cx="457200" cy="457200"/>
-          </a:xfrm>
-          <a:prstGeom prst="roundRect">
-            <a:avLst>
-              <a:gd name="adj" fmla="val 16000"/>
-            </a:avLst>
+              <a:t>Who is in it, and who is missing from it?</a:t>
+            </a:r>
+            <a:endParaRPr lang="en-US" sz="1650" dirty="0"/>
+          </a:p>
+        </p:txBody>
+      </p:sp>
+      <p:sp>
+        <p:nvSpPr>
+          <p:cNvPr id="9" name="Shape 7"/>
+          <p:cNvSpPr/>
+          <p:nvPr/>
+        </p:nvSpPr>
+        <p:spPr>
+          <a:xfrm>
+            <a:off x="640080" y="4366260"/>
+            <a:ext cx="201168" cy="201168"/>
+          </a:xfrm>
+          <a:prstGeom prst="ellipse">
+            <a:avLst/>
           </a:prstGeom>
           <a:solidFill>
             <a:srgbClr val="B9852F"/>
@@ -4590,92 +5676,14 @@
       </p:sp>
       <p:sp>
         <p:nvSpPr>
-          <p:cNvPr id="13" name="Text 11"/>
-          <p:cNvSpPr/>
-          <p:nvPr/>
-        </p:nvSpPr>
-        <p:spPr>
-          <a:xfrm>
-            <a:off x="640080" y="4983480"/>
-            <a:ext cx="457200" cy="457200"/>
-          </a:xfrm>
-          <a:prstGeom prst="rect">
-            <a:avLst/>
-          </a:prstGeom>
-          <a:noFill/>
-          <a:ln/>
-        </p:spPr>
-        <p:txBody>
-          <a:bodyPr wrap="square" rtlCol="0" anchor="ctr"/>
-          <a:lstStyle/>
-          <a:p>
-            <a:pPr algn="ctr" indent="0" marL="0">
-              <a:buNone/>
-            </a:pPr>
-            <a:r>
-              <a:rPr lang="en-US" sz="2000" b="1" dirty="0">
-                <a:solidFill>
-                  <a:srgbClr val="FFFFFF"/>
-                </a:solidFill>
-                <a:latin typeface="Cambria" pitchFamily="34" charset="0"/>
-                <a:ea typeface="Cambria" pitchFamily="34" charset="-122"/>
-                <a:cs typeface="Cambria" pitchFamily="34" charset="-120"/>
-              </a:rPr>
-              <a:t>3</a:t>
-            </a:r>
-            <a:endParaRPr lang="en-US" sz="2000" dirty="0"/>
-          </a:p>
-        </p:txBody>
-      </p:sp>
-      <p:sp>
-        <p:nvSpPr>
-          <p:cNvPr id="14" name="Text 12"/>
-          <p:cNvSpPr/>
-          <p:nvPr/>
-        </p:nvSpPr>
-        <p:spPr>
-          <a:xfrm>
-            <a:off x="1371600" y="4946904"/>
-            <a:ext cx="10332720" cy="411480"/>
-          </a:xfrm>
-          <a:prstGeom prst="rect">
-            <a:avLst/>
-          </a:prstGeom>
-          <a:noFill/>
-          <a:ln/>
-        </p:spPr>
-        <p:txBody>
-          <a:bodyPr wrap="square" rtlCol="0" anchor="ctr"/>
-          <a:lstStyle/>
-          <a:p>
-            <a:pPr indent="0" marL="0">
-              <a:buNone/>
-            </a:pPr>
-            <a:r>
-              <a:rPr lang="en-US" sz="1900" b="1" dirty="0">
-                <a:solidFill>
-                  <a:srgbClr val="B9852F"/>
-                </a:solidFill>
-                <a:latin typeface="Cambria" pitchFamily="34" charset="0"/>
-                <a:ea typeface="Cambria" pitchFamily="34" charset="-122"/>
-                <a:cs typeface="Cambria" pitchFamily="34" charset="-120"/>
-              </a:rPr>
-              <a:t>Make something real</a:t>
-            </a:r>
-            <a:endParaRPr lang="en-US" sz="1900" dirty="0"/>
-          </a:p>
-        </p:txBody>
-      </p:sp>
-      <p:sp>
-        <p:nvSpPr>
-          <p:cNvPr id="15" name="Text 13"/>
-          <p:cNvSpPr/>
-          <p:nvPr/>
-        </p:nvSpPr>
-        <p:spPr>
-          <a:xfrm>
-            <a:off x="1371600" y="5367528"/>
-            <a:ext cx="10332720" cy="914400"/>
+          <p:cNvPr id="10" name="Text 8"/>
+          <p:cNvSpPr/>
+          <p:nvPr/>
+        </p:nvSpPr>
+        <p:spPr>
+          <a:xfrm>
+            <a:off x="1097280" y="4274820"/>
+            <a:ext cx="10607040" cy="1017270"/>
           </a:xfrm>
           <a:prstGeom prst="rect">
             <a:avLst/>
@@ -4696,7 +5704,7 @@
               <a:buNone/>
             </a:pPr>
             <a:r>
-              <a:rPr lang="en-US" sz="1450" dirty="0">
+              <a:rPr lang="en-US" sz="1650" dirty="0">
                 <a:solidFill>
                   <a:srgbClr val="1A1A1A"/>
                 </a:solidFill>
@@ -4704,9 +5712,73 @@
                 <a:ea typeface="Calibri" pitchFamily="34" charset="-122"/>
                 <a:cs typeface="Calibri" pitchFamily="34" charset="-120"/>
               </a:rPr>
-              <a:t>You leave with a real corpus in hand and a project repo born.</a:t>
-            </a:r>
-            <a:endParaRPr lang="en-US" sz="1450" dirty="0"/>
+              <a:t>What can it not tell you, no matter how cleverly you count?</a:t>
+            </a:r>
+            <a:endParaRPr lang="en-US" sz="1650" dirty="0"/>
+          </a:p>
+        </p:txBody>
+      </p:sp>
+      <p:sp>
+        <p:nvSpPr>
+          <p:cNvPr id="11" name="Shape 9"/>
+          <p:cNvSpPr/>
+          <p:nvPr/>
+        </p:nvSpPr>
+        <p:spPr>
+          <a:xfrm>
+            <a:off x="640080" y="5383530"/>
+            <a:ext cx="201168" cy="201168"/>
+          </a:xfrm>
+          <a:prstGeom prst="ellipse">
+            <a:avLst/>
+          </a:prstGeom>
+          <a:solidFill>
+            <a:srgbClr val="7A3B2E"/>
+          </a:solidFill>
+          <a:ln/>
+        </p:spPr>
+      </p:sp>
+      <p:sp>
+        <p:nvSpPr>
+          <p:cNvPr id="12" name="Text 10"/>
+          <p:cNvSpPr/>
+          <p:nvPr/>
+        </p:nvSpPr>
+        <p:spPr>
+          <a:xfrm>
+            <a:off x="1097280" y="5292090"/>
+            <a:ext cx="10607040" cy="1017270"/>
+          </a:xfrm>
+          <a:prstGeom prst="rect">
+            <a:avLst/>
+          </a:prstGeom>
+          <a:noFill/>
+          <a:ln/>
+        </p:spPr>
+        <p:txBody>
+          <a:bodyPr wrap="square" rtlCol="0" anchor="t">
+            <a:spAutoFit/>
+          </a:bodyPr>
+          <a:lstStyle/>
+          <a:p>
+            <a:pPr indent="0" marL="0">
+              <a:lnSpc>
+                <a:spcPct val="112000"/>
+              </a:lnSpc>
+              <a:buNone/>
+            </a:pPr>
+            <a:r>
+              <a:rPr lang="en-US" sz="1650" dirty="0">
+                <a:solidFill>
+                  <a:srgbClr val="1A1A1A"/>
+                </a:solidFill>
+                <a:latin typeface="Calibri" pitchFamily="34" charset="0"/>
+                <a:ea typeface="Calibri" pitchFamily="34" charset="-122"/>
+                <a:cs typeface="Calibri" pitchFamily="34" charset="-120"/>
+              </a:rPr>
+              <a:t>Its distilled form becomes your essay's corpus note in Week 8. Write it once, use it twice.</a:t>
+            </a:r>
+            <a:endParaRPr lang="en-US" sz="1650" dirty="0"/>
           </a:p>
         </p:txBody>
       </p:sp>
@@ -4724,7 +5796,7 @@
     <p:bg>
       <p:bgPr>
         <a:solidFill>
-          <a:srgbClr val="4E261D"/>
+          <a:srgbClr val="FFFFFF"/>
         </a:solidFill>
       </p:bgPr>
     </p:bg>
@@ -4750,8 +5822,8 @@
         </p:nvSpPr>
         <p:spPr>
           <a:xfrm>
-            <a:off x="640080" y="1005840"/>
-            <a:ext cx="8229600" cy="320040"/>
+            <a:off x="640080" y="731520"/>
+            <a:ext cx="10058400" cy="731520"/>
           </a:xfrm>
           <a:prstGeom prst="rect">
             <a:avLst/>
@@ -4767,30 +5839,150 @@
               <a:buNone/>
             </a:pPr>
             <a:r>
-              <a:rPr lang="en-US" sz="1300" b="1" spc="300" kern="0" dirty="0">
-                <a:solidFill>
-                  <a:srgbClr val="B9852F"/>
+              <a:rPr lang="en-US" sz="3000" b="1" dirty="0">
+                <a:solidFill>
+                  <a:srgbClr val="1A1A1A"/>
+                </a:solidFill>
+                <a:latin typeface="Cambria" pitchFamily="34" charset="0"/>
+                <a:ea typeface="Cambria" pitchFamily="34" charset="-122"/>
+                <a:cs typeface="Cambria" pitchFamily="34" charset="-120"/>
+              </a:rPr>
+              <a:t>Three modes today</a:t>
+            </a:r>
+            <a:endParaRPr lang="en-US" sz="3000" dirty="0"/>
+          </a:p>
+        </p:txBody>
+      </p:sp>
+      <p:sp>
+        <p:nvSpPr>
+          <p:cNvPr id="3" name="Text 1"/>
+          <p:cNvSpPr/>
+          <p:nvPr/>
+        </p:nvSpPr>
+        <p:spPr>
+          <a:xfrm>
+            <a:off x="640080" y="1417320"/>
+            <a:ext cx="10058400" cy="365760"/>
+          </a:xfrm>
+          <a:prstGeom prst="rect">
+            <a:avLst/>
+          </a:prstGeom>
+          <a:noFill/>
+          <a:ln/>
+        </p:spPr>
+        <p:txBody>
+          <a:bodyPr wrap="square" rtlCol="0" anchor="ctr"/>
+          <a:lstStyle/>
+          <a:p>
+            <a:pPr indent="0" marL="0">
+              <a:buNone/>
+            </a:pPr>
+            <a:r>
+              <a:rPr lang="en-US" sz="1400" i="1" dirty="0">
+                <a:solidFill>
+                  <a:srgbClr val="6B6B63"/>
                 </a:solidFill>
                 <a:latin typeface="Calibri" pitchFamily="34" charset="0"/>
                 <a:ea typeface="Calibri" pitchFamily="34" charset="-122"/>
                 <a:cs typeface="Calibri" pitchFamily="34" charset="-120"/>
               </a:rPr>
-              <a:t>THE CHECK, AI CLOSED</a:t>
-            </a:r>
-            <a:endParaRPr lang="en-US" sz="1300" dirty="0"/>
-          </a:p>
-        </p:txBody>
-      </p:sp>
-      <p:sp>
-        <p:nvSpPr>
-          <p:cNvPr id="3" name="Text 1"/>
-          <p:cNvSpPr/>
-          <p:nvPr/>
-        </p:nvSpPr>
-        <p:spPr>
-          <a:xfrm>
-            <a:off x="640080" y="1645920"/>
-            <a:ext cx="8686800" cy="3108960"/>
+              <a:t>about a third of the session each</a:t>
+            </a:r>
+            <a:endParaRPr lang="en-US" sz="1400" dirty="0"/>
+          </a:p>
+        </p:txBody>
+      </p:sp>
+      <p:sp>
+        <p:nvSpPr>
+          <p:cNvPr id="4" name="Shape 2"/>
+          <p:cNvSpPr/>
+          <p:nvPr/>
+        </p:nvSpPr>
+        <p:spPr>
+          <a:xfrm>
+            <a:off x="640080" y="2194560"/>
+            <a:ext cx="3383280" cy="3291840"/>
+          </a:xfrm>
+          <a:prstGeom prst="roundRect">
+            <a:avLst>
+              <a:gd name="adj" fmla="val 3333"/>
+            </a:avLst>
+          </a:prstGeom>
+          <a:solidFill>
+            <a:srgbClr val="F4EEE8"/>
+          </a:solidFill>
+          <a:ln/>
+        </p:spPr>
+      </p:sp>
+      <p:sp>
+        <p:nvSpPr>
+          <p:cNvPr id="5" name="Shape 3"/>
+          <p:cNvSpPr/>
+          <p:nvPr/>
+        </p:nvSpPr>
+        <p:spPr>
+          <a:xfrm>
+            <a:off x="1051560" y="2606040"/>
+            <a:ext cx="548640" cy="548640"/>
+          </a:xfrm>
+          <a:prstGeom prst="ellipse">
+            <a:avLst/>
+          </a:prstGeom>
+          <a:solidFill>
+            <a:srgbClr val="7A3B2E"/>
+          </a:solidFill>
+          <a:ln/>
+        </p:spPr>
+      </p:sp>
+      <p:sp>
+        <p:nvSpPr>
+          <p:cNvPr id="6" name="Text 4"/>
+          <p:cNvSpPr/>
+          <p:nvPr/>
+        </p:nvSpPr>
+        <p:spPr>
+          <a:xfrm>
+            <a:off x="1005840" y="3383280"/>
+            <a:ext cx="2651760" cy="548640"/>
+          </a:xfrm>
+          <a:prstGeom prst="rect">
+            <a:avLst/>
+          </a:prstGeom>
+          <a:noFill/>
+          <a:ln/>
+        </p:spPr>
+        <p:txBody>
+          <a:bodyPr wrap="square" rtlCol="0" anchor="ctr"/>
+          <a:lstStyle/>
+          <a:p>
+            <a:pPr indent="0" marL="0">
+              <a:buNone/>
+            </a:pPr>
+            <a:r>
+              <a:rPr lang="en-US" sz="2100" b="1" dirty="0">
+                <a:solidFill>
+                  <a:srgbClr val="1A1A1A"/>
+                </a:solidFill>
+                <a:latin typeface="Cambria" pitchFamily="34" charset="0"/>
+                <a:ea typeface="Cambria" pitchFamily="34" charset="-122"/>
+                <a:cs typeface="Cambria" pitchFamily="34" charset="-120"/>
+              </a:rPr>
+              <a:t>Lecture / demo</a:t>
+            </a:r>
+            <a:endParaRPr lang="en-US" sz="2100" dirty="0"/>
+          </a:p>
+        </p:txBody>
+      </p:sp>
+      <p:sp>
+        <p:nvSpPr>
+          <p:cNvPr id="7" name="Text 5"/>
+          <p:cNvSpPr/>
+          <p:nvPr/>
+        </p:nvSpPr>
+        <p:spPr>
+          <a:xfrm>
+            <a:off x="1005840" y="3977640"/>
+            <a:ext cx="2651760" cy="1371600"/>
           </a:xfrm>
           <a:prstGeom prst="rect">
             <a:avLst/>
@@ -4811,74 +6003,358 @@
               <a:buNone/>
             </a:pPr>
             <a:r>
-              <a:rPr lang="en-US" sz="2600" dirty="0">
-                <a:solidFill>
-                  <a:srgbClr val="FFFFFF"/>
+              <a:rPr lang="en-US" sz="1500" dirty="0">
+                <a:solidFill>
+                  <a:srgbClr val="1A1A1A"/>
+                </a:solidFill>
+                <a:latin typeface="Calibri" pitchFamily="34" charset="0"/>
+                <a:ea typeface="Calibri" pitchFamily="34" charset="-122"/>
+                <a:cs typeface="Calibri" pitchFamily="34" charset="-120"/>
+              </a:rPr>
+              <a:t>The project (no new mechanism this week)</a:t>
+            </a:r>
+            <a:endParaRPr lang="en-US" sz="1500" dirty="0"/>
+          </a:p>
+        </p:txBody>
+      </p:sp>
+      <p:sp>
+        <p:nvSpPr>
+          <p:cNvPr id="8" name="Shape 6"/>
+          <p:cNvSpPr/>
+          <p:nvPr/>
+        </p:nvSpPr>
+        <p:spPr>
+          <a:xfrm>
+            <a:off x="4526280" y="2194560"/>
+            <a:ext cx="3383280" cy="3291840"/>
+          </a:xfrm>
+          <a:prstGeom prst="roundRect">
+            <a:avLst>
+              <a:gd name="adj" fmla="val 3333"/>
+            </a:avLst>
+          </a:prstGeom>
+          <a:solidFill>
+            <a:srgbClr val="F4EEE8"/>
+          </a:solidFill>
+          <a:ln/>
+        </p:spPr>
+      </p:sp>
+      <p:sp>
+        <p:nvSpPr>
+          <p:cNvPr id="9" name="Shape 7"/>
+          <p:cNvSpPr/>
+          <p:nvPr/>
+        </p:nvSpPr>
+        <p:spPr>
+          <a:xfrm>
+            <a:off x="4937760" y="2606040"/>
+            <a:ext cx="548640" cy="548640"/>
+          </a:xfrm>
+          <a:prstGeom prst="ellipse">
+            <a:avLst/>
+          </a:prstGeom>
+          <a:solidFill>
+            <a:srgbClr val="3F6F5F"/>
+          </a:solidFill>
+          <a:ln/>
+        </p:spPr>
+      </p:sp>
+      <p:sp>
+        <p:nvSpPr>
+          <p:cNvPr id="10" name="Text 8"/>
+          <p:cNvSpPr/>
+          <p:nvPr/>
+        </p:nvSpPr>
+        <p:spPr>
+          <a:xfrm>
+            <a:off x="4892040" y="3383280"/>
+            <a:ext cx="2651760" cy="548640"/>
+          </a:xfrm>
+          <a:prstGeom prst="rect">
+            <a:avLst/>
+          </a:prstGeom>
+          <a:noFill/>
+          <a:ln/>
+        </p:spPr>
+        <p:txBody>
+          <a:bodyPr wrap="square" rtlCol="0" anchor="ctr"/>
+          <a:lstStyle/>
+          <a:p>
+            <a:pPr indent="0" marL="0">
+              <a:buNone/>
+            </a:pPr>
+            <a:r>
+              <a:rPr lang="en-US" sz="2100" b="1" dirty="0">
+                <a:solidFill>
+                  <a:srgbClr val="1A1A1A"/>
                 </a:solidFill>
                 <a:latin typeface="Cambria" pitchFamily="34" charset="0"/>
                 <a:ea typeface="Cambria" pitchFamily="34" charset="-122"/>
                 <a:cs typeface="Cambria" pitchFamily="34" charset="-120"/>
               </a:rPr>
-              <a:t>Explain it: your question aloud, what it omits, and where your data actually comes from. (Competencies 2, 6.)</a:t>
-            </a:r>
-            <a:endParaRPr lang="en-US" sz="2600" dirty="0"/>
-          </a:p>
-        </p:txBody>
-      </p:sp>
-      <p:sp>
-        <p:nvSpPr>
-          <p:cNvPr id="4" name="Text 2"/>
-          <p:cNvSpPr/>
-          <p:nvPr/>
-        </p:nvSpPr>
-        <p:spPr>
-          <a:xfrm>
-            <a:off x="640080" y="6126480"/>
-            <a:ext cx="7315200" cy="365760"/>
-          </a:xfrm>
-          <a:prstGeom prst="rect">
-            <a:avLst/>
-          </a:prstGeom>
-          <a:noFill/>
-          <a:ln/>
-        </p:spPr>
-        <p:txBody>
-          <a:bodyPr wrap="square" rtlCol="0" anchor="ctr"/>
+              <a:t>Workshop</a:t>
+            </a:r>
+            <a:endParaRPr lang="en-US" sz="2100" dirty="0"/>
+          </a:p>
+        </p:txBody>
+      </p:sp>
+      <p:sp>
+        <p:nvSpPr>
+          <p:cNvPr id="11" name="Text 9"/>
+          <p:cNvSpPr/>
+          <p:nvPr/>
+        </p:nvSpPr>
+        <p:spPr>
+          <a:xfrm>
+            <a:off x="4892040" y="3977640"/>
+            <a:ext cx="2651760" cy="1371600"/>
+          </a:xfrm>
+          <a:prstGeom prst="rect">
+            <a:avLst/>
+          </a:prstGeom>
+          <a:noFill/>
+          <a:ln/>
+        </p:spPr>
+        <p:txBody>
+          <a:bodyPr wrap="square" rtlCol="0" anchor="t">
+            <a:spAutoFit/>
+          </a:bodyPr>
           <a:lstStyle/>
           <a:p>
             <a:pPr indent="0" marL="0">
-              <a:buNone/>
-            </a:pPr>
-            <a:r>
-              <a:rPr lang="en-US" sz="1200" dirty="0">
-                <a:solidFill>
-                  <a:srgbClr val="E8DCD6"/>
+              <a:lnSpc>
+                <a:spcPct val="115000"/>
+              </a:lnSpc>
+              <a:buNone/>
+            </a:pPr>
+            <a:r>
+              <a:rPr lang="en-US" sz="1500" dirty="0">
+                <a:solidFill>
+                  <a:srgbClr val="1A1A1A"/>
                 </a:solidFill>
                 <a:latin typeface="Calibri" pitchFamily="34" charset="0"/>
                 <a:ea typeface="Calibri" pitchFamily="34" charset="-122"/>
                 <a:cs typeface="Calibri" pitchFamily="34" charset="-120"/>
               </a:rPr>
-              <a:t>Culture as Data  ·  Week 4</a:t>
-            </a:r>
-            <a:endParaRPr lang="en-US" sz="1200" dirty="0"/>
-          </a:p>
-        </p:txBody>
-      </p:sp>
-      <p:sp>
-        <p:nvSpPr>
-          <p:cNvPr id="5" name="Shape 3"/>
-          <p:cNvSpPr/>
-          <p:nvPr/>
-        </p:nvSpPr>
-        <p:spPr>
-          <a:xfrm>
-            <a:off x="9314870" y="4684302"/>
-            <a:ext cx="97826" cy="97826"/>
+              <a:t>Build hands-on on your own data.</a:t>
+            </a:r>
+            <a:endParaRPr lang="en-US" sz="1500" dirty="0"/>
+          </a:p>
+        </p:txBody>
+      </p:sp>
+      <p:sp>
+        <p:nvSpPr>
+          <p:cNvPr id="12" name="Shape 10"/>
+          <p:cNvSpPr/>
+          <p:nvPr/>
+        </p:nvSpPr>
+        <p:spPr>
+          <a:xfrm>
+            <a:off x="8412480" y="2194560"/>
+            <a:ext cx="3383280" cy="3291840"/>
+          </a:xfrm>
+          <a:prstGeom prst="roundRect">
+            <a:avLst>
+              <a:gd name="adj" fmla="val 3333"/>
+            </a:avLst>
+          </a:prstGeom>
+          <a:solidFill>
+            <a:srgbClr val="F4EEE8"/>
+          </a:solidFill>
+          <a:ln/>
+        </p:spPr>
+      </p:sp>
+      <p:sp>
+        <p:nvSpPr>
+          <p:cNvPr id="13" name="Shape 11"/>
+          <p:cNvSpPr/>
+          <p:nvPr/>
+        </p:nvSpPr>
+        <p:spPr>
+          <a:xfrm>
+            <a:off x="8823960" y="2606040"/>
+            <a:ext cx="548640" cy="548640"/>
           </a:xfrm>
           <a:prstGeom prst="ellipse">
             <a:avLst/>
           </a:prstGeom>
           <a:solidFill>
+            <a:srgbClr val="B9852F"/>
+          </a:solidFill>
+          <a:ln/>
+        </p:spPr>
+      </p:sp>
+      <p:sp>
+        <p:nvSpPr>
+          <p:cNvPr id="14" name="Text 12"/>
+          <p:cNvSpPr/>
+          <p:nvPr/>
+        </p:nvSpPr>
+        <p:spPr>
+          <a:xfrm>
+            <a:off x="8778240" y="3383280"/>
+            <a:ext cx="2651760" cy="548640"/>
+          </a:xfrm>
+          <a:prstGeom prst="rect">
+            <a:avLst/>
+          </a:prstGeom>
+          <a:noFill/>
+          <a:ln/>
+        </p:spPr>
+        <p:txBody>
+          <a:bodyPr wrap="square" rtlCol="0" anchor="ctr"/>
+          <a:lstStyle/>
+          <a:p>
+            <a:pPr indent="0" marL="0">
+              <a:buNone/>
+            </a:pPr>
+            <a:r>
+              <a:rPr lang="en-US" sz="2100" b="1" dirty="0">
+                <a:solidFill>
+                  <a:srgbClr val="1A1A1A"/>
+                </a:solidFill>
+                <a:latin typeface="Cambria" pitchFamily="34" charset="0"/>
+                <a:ea typeface="Cambria" pitchFamily="34" charset="-122"/>
+                <a:cs typeface="Cambria" pitchFamily="34" charset="-120"/>
+              </a:rPr>
+              <a:t>Discussion</a:t>
+            </a:r>
+            <a:endParaRPr lang="en-US" sz="2100" dirty="0"/>
+          </a:p>
+        </p:txBody>
+      </p:sp>
+      <p:sp>
+        <p:nvSpPr>
+          <p:cNvPr id="15" name="Text 13"/>
+          <p:cNvSpPr/>
+          <p:nvPr/>
+        </p:nvSpPr>
+        <p:spPr>
+          <a:xfrm>
+            <a:off x="8778240" y="3977640"/>
+            <a:ext cx="2651760" cy="1371600"/>
+          </a:xfrm>
+          <a:prstGeom prst="rect">
+            <a:avLst/>
+          </a:prstGeom>
+          <a:noFill/>
+          <a:ln/>
+        </p:spPr>
+        <p:txBody>
+          <a:bodyPr wrap="square" rtlCol="0" anchor="t">
+            <a:spAutoFit/>
+          </a:bodyPr>
+          <a:lstStyle/>
+          <a:p>
+            <a:pPr indent="0" marL="0">
+              <a:lnSpc>
+                <a:spcPct val="115000"/>
+              </a:lnSpc>
+              <a:buNone/>
+            </a:pPr>
+            <a:r>
+              <a:rPr lang="en-US" sz="1500" dirty="0">
+                <a:solidFill>
+                  <a:srgbClr val="1A1A1A"/>
+                </a:solidFill>
+                <a:latin typeface="Calibri" pitchFamily="34" charset="0"/>
+                <a:ea typeface="Calibri" pitchFamily="34" charset="-122"/>
+                <a:cs typeface="Calibri" pitchFamily="34" charset="-120"/>
+              </a:rPr>
+              <a:t>Interrogate the study, debate it, or critique each other's work.</a:t>
+            </a:r>
+            <a:endParaRPr lang="en-US" sz="1500" dirty="0"/>
+          </a:p>
+        </p:txBody>
+      </p:sp>
+    </p:spTree>
+  </p:cSld>
+  <p:clrMapOvr>
+    <a:masterClrMapping/>
+  </p:clrMapOvr>
+</p:sld>
+</file>
+
+<file path=ppt/slides/slide9.xml><?xml version="1.0" encoding="utf-8"?>
+<p:sld xmlns:a="http://schemas.openxmlformats.org/drawingml/2006/main" xmlns:r="http://schemas.openxmlformats.org/officeDocument/2006/relationships" xmlns:p="http://schemas.openxmlformats.org/presentationml/2006/main">
+  <p:cSld name="Slide 9">
+    <p:bg>
+      <p:bgPr>
+        <a:solidFill>
+          <a:srgbClr val="FFFFFF"/>
+        </a:solidFill>
+      </p:bgPr>
+    </p:bg>
+    <p:spTree>
+      <p:nvGrpSpPr>
+        <p:cNvPr id="1" name=""/>
+        <p:cNvGrpSpPr/>
+        <p:nvPr/>
+      </p:nvGrpSpPr>
+      <p:grpSpPr>
+        <a:xfrm>
+          <a:off x="0" y="0"/>
+          <a:ext cx="0" cy="0"/>
+          <a:chOff x="0" y="0"/>
+          <a:chExt cx="0" cy="0"/>
+        </a:xfrm>
+      </p:grpSpPr>
+      <p:sp>
+        <p:nvSpPr>
+          <p:cNvPr id="2" name="Text 0"/>
+          <p:cNvSpPr/>
+          <p:nvPr/>
+        </p:nvSpPr>
+        <p:spPr>
+          <a:xfrm>
+            <a:off x="640080" y="640080"/>
+            <a:ext cx="10058400" cy="731520"/>
+          </a:xfrm>
+          <a:prstGeom prst="rect">
+            <a:avLst/>
+          </a:prstGeom>
+          <a:noFill/>
+          <a:ln/>
+        </p:spPr>
+        <p:txBody>
+          <a:bodyPr wrap="square" rtlCol="0" anchor="ctr"/>
+          <a:lstStyle/>
+          <a:p>
+            <a:pPr indent="0" marL="0">
+              <a:buNone/>
+            </a:pPr>
+            <a:r>
+              <a:rPr lang="en-US" sz="3000" b="1" dirty="0">
+                <a:solidFill>
+                  <a:srgbClr val="1A1A1A"/>
+                </a:solidFill>
+                <a:latin typeface="Cambria" pitchFamily="34" charset="0"/>
+                <a:ea typeface="Cambria" pitchFamily="34" charset="-122"/>
+                <a:cs typeface="Cambria" pitchFamily="34" charset="-120"/>
+              </a:rPr>
+              <a:t>The session</a:t>
+            </a:r>
+            <a:endParaRPr lang="en-US" sz="3000" dirty="0"/>
+          </a:p>
+        </p:txBody>
+      </p:sp>
+      <p:sp>
+        <p:nvSpPr>
+          <p:cNvPr id="3" name="Shape 1"/>
+          <p:cNvSpPr/>
+          <p:nvPr/>
+        </p:nvSpPr>
+        <p:spPr>
+          <a:xfrm>
+            <a:off x="640080" y="1572768"/>
+            <a:ext cx="868680" cy="457200"/>
+          </a:xfrm>
+          <a:prstGeom prst="roundRect">
+            <a:avLst>
+              <a:gd name="adj" fmla="val 12000"/>
+            </a:avLst>
+          </a:prstGeom>
+          <a:solidFill>
             <a:srgbClr val="7A3B2E"/>
           </a:solidFill>
           <a:ln/>
@@ -4886,57 +6362,99 @@
       </p:sp>
       <p:sp>
         <p:nvSpPr>
+          <p:cNvPr id="4" name="Text 2"/>
+          <p:cNvSpPr/>
+          <p:nvPr/>
+        </p:nvSpPr>
+        <p:spPr>
+          <a:xfrm>
+            <a:off x="640080" y="1572768"/>
+            <a:ext cx="868680" cy="457200"/>
+          </a:xfrm>
+          <a:prstGeom prst="rect">
+            <a:avLst/>
+          </a:prstGeom>
+          <a:noFill/>
+          <a:ln/>
+        </p:spPr>
+        <p:txBody>
+          <a:bodyPr wrap="square" rtlCol="0" anchor="ctr"/>
+          <a:lstStyle/>
+          <a:p>
+            <a:pPr algn="ctr" indent="0" marL="0">
+              <a:buNone/>
+            </a:pPr>
+            <a:r>
+              <a:rPr lang="en-US" sz="1100" b="1" dirty="0">
+                <a:solidFill>
+                  <a:srgbClr val="FFFFFF"/>
+                </a:solidFill>
+                <a:latin typeface="Calibri" pitchFamily="34" charset="0"/>
+                <a:ea typeface="Calibri" pitchFamily="34" charset="-122"/>
+                <a:cs typeface="Calibri" pitchFamily="34" charset="-120"/>
+              </a:rPr>
+              <a:t>0:00</a:t>
+            </a:r>
+            <a:endParaRPr lang="en-US" sz="1100" dirty="0"/>
+          </a:p>
+        </p:txBody>
+      </p:sp>
+      <p:sp>
+        <p:nvSpPr>
+          <p:cNvPr id="5" name="Text 3"/>
+          <p:cNvSpPr/>
+          <p:nvPr/>
+        </p:nvSpPr>
+        <p:spPr>
+          <a:xfrm>
+            <a:off x="1691640" y="1554480"/>
+            <a:ext cx="9646920" cy="566928"/>
+          </a:xfrm>
+          <a:prstGeom prst="rect">
+            <a:avLst/>
+          </a:prstGeom>
+          <a:noFill/>
+          <a:ln/>
+        </p:spPr>
+        <p:txBody>
+          <a:bodyPr wrap="square" rtlCol="0" anchor="ctr">
+            <a:spAutoFit/>
+          </a:bodyPr>
+          <a:lstStyle/>
+          <a:p>
+            <a:pPr indent="0" marL="0">
+              <a:buNone/>
+            </a:pPr>
+            <a:r>
+              <a:rPr lang="en-US" sz="1250" dirty="0">
+                <a:solidFill>
+                  <a:srgbClr val="1A1A1A"/>
+                </a:solidFill>
+                <a:latin typeface="Calibri" pitchFamily="34" charset="0"/>
+                <a:ea typeface="Calibri" pitchFamily="34" charset="-122"/>
+                <a:cs typeface="Calibri" pitchFamily="34" charset="-120"/>
+              </a:rPr>
+              <a:t>Warm-up + Look at This: the process post.</a:t>
+            </a:r>
+            <a:endParaRPr lang="en-US" sz="1250" dirty="0"/>
+          </a:p>
+        </p:txBody>
+      </p:sp>
+      <p:sp>
+        <p:nvSpPr>
           <p:cNvPr id="6" name="Shape 4"/>
           <p:cNvSpPr/>
           <p:nvPr/>
         </p:nvSpPr>
         <p:spPr>
           <a:xfrm>
-            <a:off x="10817510" y="5927824"/>
-            <a:ext cx="55265" cy="55265"/>
-          </a:xfrm>
-          <a:prstGeom prst="ellipse">
-            <a:avLst/>
-          </a:prstGeom>
-          <a:solidFill>
-            <a:srgbClr val="3F6F5F"/>
-          </a:solidFill>
-          <a:ln/>
-        </p:spPr>
-      </p:sp>
-      <p:sp>
-        <p:nvSpPr>
-          <p:cNvPr id="7" name="Shape 5"/>
-          <p:cNvSpPr/>
-          <p:nvPr/>
-        </p:nvSpPr>
-        <p:spPr>
-          <a:xfrm>
-            <a:off x="9967264" y="4657804"/>
-            <a:ext cx="50677" cy="50677"/>
-          </a:xfrm>
-          <a:prstGeom prst="ellipse">
-            <a:avLst/>
-          </a:prstGeom>
-          <a:solidFill>
-            <a:srgbClr val="B9852F"/>
-          </a:solidFill>
-          <a:ln/>
-        </p:spPr>
-      </p:sp>
-      <p:sp>
-        <p:nvSpPr>
-          <p:cNvPr id="8" name="Shape 6"/>
-          <p:cNvSpPr/>
-          <p:nvPr/>
-        </p:nvSpPr>
-        <p:spPr>
-          <a:xfrm>
-            <a:off x="10391251" y="5072862"/>
-            <a:ext cx="52058" cy="52058"/>
-          </a:xfrm>
-          <a:prstGeom prst="ellipse">
-            <a:avLst/>
+            <a:off x="640080" y="2139696"/>
+            <a:ext cx="868680" cy="457200"/>
+          </a:xfrm>
+          <a:prstGeom prst="roundRect">
+            <a:avLst>
+              <a:gd name="adj" fmla="val 12000"/>
+            </a:avLst>
           </a:prstGeom>
           <a:solidFill>
             <a:srgbClr val="7A3B2E"/>
@@ -4946,57 +6464,99 @@
       </p:sp>
       <p:sp>
         <p:nvSpPr>
+          <p:cNvPr id="7" name="Text 5"/>
+          <p:cNvSpPr/>
+          <p:nvPr/>
+        </p:nvSpPr>
+        <p:spPr>
+          <a:xfrm>
+            <a:off x="640080" y="2139696"/>
+            <a:ext cx="868680" cy="457200"/>
+          </a:xfrm>
+          <a:prstGeom prst="rect">
+            <a:avLst/>
+          </a:prstGeom>
+          <a:noFill/>
+          <a:ln/>
+        </p:spPr>
+        <p:txBody>
+          <a:bodyPr wrap="square" rtlCol="0" anchor="ctr"/>
+          <a:lstStyle/>
+          <a:p>
+            <a:pPr algn="ctr" indent="0" marL="0">
+              <a:buNone/>
+            </a:pPr>
+            <a:r>
+              <a:rPr lang="en-US" sz="1100" b="1" dirty="0">
+                <a:solidFill>
+                  <a:srgbClr val="FFFFFF"/>
+                </a:solidFill>
+                <a:latin typeface="Calibri" pitchFamily="34" charset="0"/>
+                <a:ea typeface="Calibri" pitchFamily="34" charset="-122"/>
+                <a:cs typeface="Calibri" pitchFamily="34" charset="-120"/>
+              </a:rPr>
+              <a:t>0:08</a:t>
+            </a:r>
+            <a:endParaRPr lang="en-US" sz="1100" dirty="0"/>
+          </a:p>
+        </p:txBody>
+      </p:sp>
+      <p:sp>
+        <p:nvSpPr>
+          <p:cNvPr id="8" name="Text 6"/>
+          <p:cNvSpPr/>
+          <p:nvPr/>
+        </p:nvSpPr>
+        <p:spPr>
+          <a:xfrm>
+            <a:off x="1691640" y="2121408"/>
+            <a:ext cx="9646920" cy="566928"/>
+          </a:xfrm>
+          <a:prstGeom prst="rect">
+            <a:avLst/>
+          </a:prstGeom>
+          <a:noFill/>
+          <a:ln/>
+        </p:spPr>
+        <p:txBody>
+          <a:bodyPr wrap="square" rtlCol="0" anchor="ctr">
+            <a:spAutoFit/>
+          </a:bodyPr>
+          <a:lstStyle/>
+          <a:p>
+            <a:pPr indent="0" marL="0">
+              <a:buNone/>
+            </a:pPr>
+            <a:r>
+              <a:rPr lang="en-US" sz="1250" dirty="0">
+                <a:solidFill>
+                  <a:srgbClr val="1A1A1A"/>
+                </a:solidFill>
+                <a:latin typeface="Calibri" pitchFamily="34" charset="0"/>
+                <a:ea typeface="Calibri" pitchFamily="34" charset="-122"/>
+                <a:cs typeface="Calibri" pitchFamily="34" charset="-120"/>
+              </a:rPr>
+              <a:t>Pitches, three-minute hard cap each: your corpus (existence proof shown), your two methods, what would count as a finding.</a:t>
+            </a:r>
+            <a:endParaRPr lang="en-US" sz="1250" dirty="0"/>
+          </a:p>
+        </p:txBody>
+      </p:sp>
+      <p:sp>
+        <p:nvSpPr>
           <p:cNvPr id="9" name="Shape 7"/>
           <p:cNvSpPr/>
           <p:nvPr/>
         </p:nvSpPr>
         <p:spPr>
           <a:xfrm>
-            <a:off x="10595952" y="6159539"/>
-            <a:ext cx="82267" cy="82267"/>
-          </a:xfrm>
-          <a:prstGeom prst="ellipse">
-            <a:avLst/>
-          </a:prstGeom>
-          <a:solidFill>
-            <a:srgbClr val="3F6F5F"/>
-          </a:solidFill>
-          <a:ln/>
-        </p:spPr>
-      </p:sp>
-      <p:sp>
-        <p:nvSpPr>
-          <p:cNvPr id="10" name="Shape 8"/>
-          <p:cNvSpPr/>
-          <p:nvPr/>
-        </p:nvSpPr>
-        <p:spPr>
-          <a:xfrm>
-            <a:off x="9087846" y="5167014"/>
-            <a:ext cx="54438" cy="54438"/>
-          </a:xfrm>
-          <a:prstGeom prst="ellipse">
-            <a:avLst/>
-          </a:prstGeom>
-          <a:solidFill>
-            <a:srgbClr val="B9852F"/>
-          </a:solidFill>
-          <a:ln/>
-        </p:spPr>
-      </p:sp>
-      <p:sp>
-        <p:nvSpPr>
-          <p:cNvPr id="11" name="Shape 9"/>
-          <p:cNvSpPr/>
-          <p:nvPr/>
-        </p:nvSpPr>
-        <p:spPr>
-          <a:xfrm>
-            <a:off x="9494053" y="4556547"/>
-            <a:ext cx="46294" cy="46294"/>
-          </a:xfrm>
-          <a:prstGeom prst="ellipse">
-            <a:avLst/>
+            <a:off x="640080" y="2706624"/>
+            <a:ext cx="868680" cy="457200"/>
+          </a:xfrm>
+          <a:prstGeom prst="roundRect">
+            <a:avLst>
+              <a:gd name="adj" fmla="val 12000"/>
+            </a:avLst>
           </a:prstGeom>
           <a:solidFill>
             <a:srgbClr val="7A3B2E"/>
@@ -5006,57 +6566,99 @@
       </p:sp>
       <p:sp>
         <p:nvSpPr>
+          <p:cNvPr id="10" name="Text 8"/>
+          <p:cNvSpPr/>
+          <p:nvPr/>
+        </p:nvSpPr>
+        <p:spPr>
+          <a:xfrm>
+            <a:off x="640080" y="2706624"/>
+            <a:ext cx="868680" cy="457200"/>
+          </a:xfrm>
+          <a:prstGeom prst="rect">
+            <a:avLst/>
+          </a:prstGeom>
+          <a:noFill/>
+          <a:ln/>
+        </p:spPr>
+        <p:txBody>
+          <a:bodyPr wrap="square" rtlCol="0" anchor="ctr"/>
+          <a:lstStyle/>
+          <a:p>
+            <a:pPr algn="ctr" indent="0" marL="0">
+              <a:buNone/>
+            </a:pPr>
+            <a:r>
+              <a:rPr lang="en-US" sz="1100" b="1" dirty="0">
+                <a:solidFill>
+                  <a:srgbClr val="FFFFFF"/>
+                </a:solidFill>
+                <a:latin typeface="Calibri" pitchFamily="34" charset="0"/>
+                <a:ea typeface="Calibri" pitchFamily="34" charset="-122"/>
+                <a:cs typeface="Calibri" pitchFamily="34" charset="-120"/>
+              </a:rPr>
+              <a:t>0:48</a:t>
+            </a:r>
+            <a:endParaRPr lang="en-US" sz="1100" dirty="0"/>
+          </a:p>
+        </p:txBody>
+      </p:sp>
+      <p:sp>
+        <p:nvSpPr>
+          <p:cNvPr id="11" name="Text 9"/>
+          <p:cNvSpPr/>
+          <p:nvPr/>
+        </p:nvSpPr>
+        <p:spPr>
+          <a:xfrm>
+            <a:off x="1691640" y="2688336"/>
+            <a:ext cx="9646920" cy="566928"/>
+          </a:xfrm>
+          <a:prstGeom prst="rect">
+            <a:avLst/>
+          </a:prstGeom>
+          <a:noFill/>
+          <a:ln/>
+        </p:spPr>
+        <p:txBody>
+          <a:bodyPr wrap="square" rtlCol="0" anchor="ctr">
+            <a:spAutoFit/>
+          </a:bodyPr>
+          <a:lstStyle/>
+          <a:p>
+            <a:pPr indent="0" marL="0">
+              <a:buNone/>
+            </a:pPr>
+            <a:r>
+              <a:rPr lang="en-US" sz="1250" dirty="0">
+                <a:solidFill>
+                  <a:srgbClr val="1A1A1A"/>
+                </a:solidFill>
+                <a:latin typeface="Calibri" pitchFamily="34" charset="0"/>
+                <a:ea typeface="Calibri" pitchFamily="34" charset="-122"/>
+                <a:cs typeface="Calibri" pitchFamily="34" charset="-120"/>
+              </a:rPr>
+              <a:t>Break</a:t>
+            </a:r>
+            <a:endParaRPr lang="en-US" sz="1250" dirty="0"/>
+          </a:p>
+        </p:txBody>
+      </p:sp>
+      <p:sp>
+        <p:nvSpPr>
           <p:cNvPr id="12" name="Shape 10"/>
           <p:cNvSpPr/>
           <p:nvPr/>
         </p:nvSpPr>
         <p:spPr>
           <a:xfrm>
-            <a:off x="10321053" y="5052039"/>
-            <a:ext cx="80695" cy="80695"/>
-          </a:xfrm>
-          <a:prstGeom prst="ellipse">
-            <a:avLst/>
-          </a:prstGeom>
-          <a:solidFill>
-            <a:srgbClr val="3F6F5F"/>
-          </a:solidFill>
-          <a:ln/>
-        </p:spPr>
-      </p:sp>
-      <p:sp>
-        <p:nvSpPr>
-          <p:cNvPr id="13" name="Shape 11"/>
-          <p:cNvSpPr/>
-          <p:nvPr/>
-        </p:nvSpPr>
-        <p:spPr>
-          <a:xfrm>
-            <a:off x="10075327" y="5640029"/>
-            <a:ext cx="70772" cy="70772"/>
-          </a:xfrm>
-          <a:prstGeom prst="ellipse">
-            <a:avLst/>
-          </a:prstGeom>
-          <a:solidFill>
-            <a:srgbClr val="B9852F"/>
-          </a:solidFill>
-          <a:ln/>
-        </p:spPr>
-      </p:sp>
-      <p:sp>
-        <p:nvSpPr>
-          <p:cNvPr id="14" name="Shape 12"/>
-          <p:cNvSpPr/>
-          <p:nvPr/>
-        </p:nvSpPr>
-        <p:spPr>
-          <a:xfrm>
-            <a:off x="9823674" y="5307057"/>
-            <a:ext cx="94251" cy="94251"/>
-          </a:xfrm>
-          <a:prstGeom prst="ellipse">
-            <a:avLst/>
+            <a:off x="640080" y="3273552"/>
+            <a:ext cx="868680" cy="457200"/>
+          </a:xfrm>
+          <a:prstGeom prst="roundRect">
+            <a:avLst>
+              <a:gd name="adj" fmla="val 12000"/>
+            </a:avLst>
           </a:prstGeom>
           <a:solidFill>
             <a:srgbClr val="7A3B2E"/>
@@ -5066,57 +6668,99 @@
       </p:sp>
       <p:sp>
         <p:nvSpPr>
+          <p:cNvPr id="13" name="Text 11"/>
+          <p:cNvSpPr/>
+          <p:nvPr/>
+        </p:nvSpPr>
+        <p:spPr>
+          <a:xfrm>
+            <a:off x="640080" y="3273552"/>
+            <a:ext cx="868680" cy="457200"/>
+          </a:xfrm>
+          <a:prstGeom prst="rect">
+            <a:avLst/>
+          </a:prstGeom>
+          <a:noFill/>
+          <a:ln/>
+        </p:spPr>
+        <p:txBody>
+          <a:bodyPr wrap="square" rtlCol="0" anchor="ctr"/>
+          <a:lstStyle/>
+          <a:p>
+            <a:pPr algn="ctr" indent="0" marL="0">
+              <a:buNone/>
+            </a:pPr>
+            <a:r>
+              <a:rPr lang="en-US" sz="1100" b="1" dirty="0">
+                <a:solidFill>
+                  <a:srgbClr val="FFFFFF"/>
+                </a:solidFill>
+                <a:latin typeface="Calibri" pitchFamily="34" charset="0"/>
+                <a:ea typeface="Calibri" pitchFamily="34" charset="-122"/>
+                <a:cs typeface="Calibri" pitchFamily="34" charset="-120"/>
+              </a:rPr>
+              <a:t>0:58</a:t>
+            </a:r>
+            <a:endParaRPr lang="en-US" sz="1100" dirty="0"/>
+          </a:p>
+        </p:txBody>
+      </p:sp>
+      <p:sp>
+        <p:nvSpPr>
+          <p:cNvPr id="14" name="Text 12"/>
+          <p:cNvSpPr/>
+          <p:nvPr/>
+        </p:nvSpPr>
+        <p:spPr>
+          <a:xfrm>
+            <a:off x="1691640" y="3255264"/>
+            <a:ext cx="9646920" cy="566928"/>
+          </a:xfrm>
+          <a:prstGeom prst="rect">
+            <a:avLst/>
+          </a:prstGeom>
+          <a:noFill/>
+          <a:ln/>
+        </p:spPr>
+        <p:txBody>
+          <a:bodyPr wrap="square" rtlCol="0" anchor="ctr">
+            <a:spAutoFit/>
+          </a:bodyPr>
+          <a:lstStyle/>
+          <a:p>
+            <a:pPr indent="0" marL="0">
+              <a:buNone/>
+            </a:pPr>
+            <a:r>
+              <a:rPr lang="en-US" sz="1250" dirty="0">
+                <a:solidFill>
+                  <a:srgbClr val="1A1A1A"/>
+                </a:solidFill>
+                <a:latin typeface="Calibri" pitchFamily="34" charset="0"/>
+                <a:ea typeface="Calibri" pitchFamily="34" charset="-122"/>
+                <a:cs typeface="Calibri" pitchFamily="34" charset="-120"/>
+              </a:rPr>
+              <a:t>The data conversation: the licensing one-pager (CC0 museums and public-domain books go anywhere; academic-only sets analyze-don't-redistribute; lyrics and review text metadata-only; AO3 and other community-opposed archives a small attributed sample at most, never a shared dataset; live firehoses we discuss, don't scrape; pirated full-text books from shadow libraries like LibGen never, the line the field's $1.5B settlement was about), and the Data Biography introduced.</a:t>
+            </a:r>
+            <a:endParaRPr lang="en-US" sz="1250" dirty="0"/>
+          </a:p>
+        </p:txBody>
+      </p:sp>
+      <p:sp>
+        <p:nvSpPr>
           <p:cNvPr id="15" name="Shape 13"/>
           <p:cNvSpPr/>
           <p:nvPr/>
         </p:nvSpPr>
         <p:spPr>
           <a:xfrm>
-            <a:off x="10632895" y="4777024"/>
-            <a:ext cx="64263" cy="64263"/>
-          </a:xfrm>
-          <a:prstGeom prst="ellipse">
-            <a:avLst/>
-          </a:prstGeom>
-          <a:solidFill>
-            <a:srgbClr val="3F6F5F"/>
-          </a:solidFill>
-          <a:ln/>
-        </p:spPr>
-      </p:sp>
-      <p:sp>
-        <p:nvSpPr>
-          <p:cNvPr id="16" name="Shape 14"/>
-          <p:cNvSpPr/>
-          <p:nvPr/>
-        </p:nvSpPr>
-        <p:spPr>
-          <a:xfrm>
-            <a:off x="11009469" y="4773829"/>
-            <a:ext cx="58532" cy="58532"/>
-          </a:xfrm>
-          <a:prstGeom prst="ellipse">
-            <a:avLst/>
-          </a:prstGeom>
-          <a:solidFill>
-            <a:srgbClr val="B9852F"/>
-          </a:solidFill>
-          <a:ln/>
-        </p:spPr>
-      </p:sp>
-      <p:sp>
-        <p:nvSpPr>
-          <p:cNvPr id="17" name="Shape 15"/>
-          <p:cNvSpPr/>
-          <p:nvPr/>
-        </p:nvSpPr>
-        <p:spPr>
-          <a:xfrm>
-            <a:off x="9459876" y="6021372"/>
-            <a:ext cx="99917" cy="99917"/>
-          </a:xfrm>
-          <a:prstGeom prst="ellipse">
-            <a:avLst/>
+            <a:off x="640080" y="3840480"/>
+            <a:ext cx="868680" cy="457200"/>
+          </a:xfrm>
+          <a:prstGeom prst="roundRect">
+            <a:avLst>
+              <a:gd name="adj" fmla="val 12000"/>
+            </a:avLst>
           </a:prstGeom>
           <a:solidFill>
             <a:srgbClr val="7A3B2E"/>
@@ -5126,23 +6770,287 @@
       </p:sp>
       <p:sp>
         <p:nvSpPr>
+          <p:cNvPr id="16" name="Text 14"/>
+          <p:cNvSpPr/>
+          <p:nvPr/>
+        </p:nvSpPr>
+        <p:spPr>
+          <a:xfrm>
+            <a:off x="640080" y="3840480"/>
+            <a:ext cx="868680" cy="457200"/>
+          </a:xfrm>
+          <a:prstGeom prst="rect">
+            <a:avLst/>
+          </a:prstGeom>
+          <a:noFill/>
+          <a:ln/>
+        </p:spPr>
+        <p:txBody>
+          <a:bodyPr wrap="square" rtlCol="0" anchor="ctr"/>
+          <a:lstStyle/>
+          <a:p>
+            <a:pPr algn="ctr" indent="0" marL="0">
+              <a:buNone/>
+            </a:pPr>
+            <a:r>
+              <a:rPr lang="en-US" sz="1100" b="1" dirty="0">
+                <a:solidFill>
+                  <a:srgbClr val="FFFFFF"/>
+                </a:solidFill>
+                <a:latin typeface="Calibri" pitchFamily="34" charset="0"/>
+                <a:ea typeface="Calibri" pitchFamily="34" charset="-122"/>
+                <a:cs typeface="Calibri" pitchFamily="34" charset="-120"/>
+              </a:rPr>
+              <a:t>1:10</a:t>
+            </a:r>
+            <a:endParaRPr lang="en-US" sz="1100" dirty="0"/>
+          </a:p>
+        </p:txBody>
+      </p:sp>
+      <p:sp>
+        <p:nvSpPr>
+          <p:cNvPr id="17" name="Text 15"/>
+          <p:cNvSpPr/>
+          <p:nvPr/>
+        </p:nvSpPr>
+        <p:spPr>
+          <a:xfrm>
+            <a:off x="1691640" y="3822192"/>
+            <a:ext cx="9646920" cy="566928"/>
+          </a:xfrm>
+          <a:prstGeom prst="rect">
+            <a:avLst/>
+          </a:prstGeom>
+          <a:noFill/>
+          <a:ln/>
+        </p:spPr>
+        <p:txBody>
+          <a:bodyPr wrap="square" rtlCol="0" anchor="ctr">
+            <a:spAutoFit/>
+          </a:bodyPr>
+          <a:lstStyle/>
+          <a:p>
+            <a:pPr indent="0" marL="0">
+              <a:buNone/>
+            </a:pPr>
+            <a:r>
+              <a:rPr lang="en-US" sz="1250" dirty="0">
+                <a:solidFill>
+                  <a:srgbClr val="1A1A1A"/>
+                </a:solidFill>
+                <a:latin typeface="Calibri" pitchFamily="34" charset="0"/>
+                <a:ea typeface="Calibri" pitchFamily="34" charset="-122"/>
+                <a:cs typeface="Calibri" pitchFamily="34" charset="-120"/>
+              </a:rPr>
+              <a:t>Getting the data, APIs and scraping, demoed live with the AI writing the code. API first (the Met or Art Institute, no key); scraping second, with the robots.txt / ToS / rate-limit / anti-republish check.</a:t>
+            </a:r>
+            <a:endParaRPr lang="en-US" sz="1250" dirty="0"/>
+          </a:p>
+        </p:txBody>
+      </p:sp>
+      <p:sp>
+        <p:nvSpPr>
           <p:cNvPr id="18" name="Shape 16"/>
           <p:cNvSpPr/>
           <p:nvPr/>
         </p:nvSpPr>
         <p:spPr>
           <a:xfrm>
-            <a:off x="9611236" y="5768834"/>
-            <a:ext cx="46688" cy="46688"/>
-          </a:xfrm>
-          <a:prstGeom prst="ellipse">
-            <a:avLst/>
-          </a:prstGeom>
-          <a:solidFill>
-            <a:srgbClr val="3F6F5F"/>
-          </a:solidFill>
-          <a:ln/>
-        </p:spPr>
+            <a:off x="640080" y="4407408"/>
+            <a:ext cx="868680" cy="457200"/>
+          </a:xfrm>
+          <a:prstGeom prst="roundRect">
+            <a:avLst>
+              <a:gd name="adj" fmla="val 12000"/>
+            </a:avLst>
+          </a:prstGeom>
+          <a:solidFill>
+            <a:srgbClr val="7A3B2E"/>
+          </a:solidFill>
+          <a:ln/>
+        </p:spPr>
+      </p:sp>
+      <p:sp>
+        <p:nvSpPr>
+          <p:cNvPr id="19" name="Text 17"/>
+          <p:cNvSpPr/>
+          <p:nvPr/>
+        </p:nvSpPr>
+        <p:spPr>
+          <a:xfrm>
+            <a:off x="640080" y="4407408"/>
+            <a:ext cx="868680" cy="457200"/>
+          </a:xfrm>
+          <a:prstGeom prst="rect">
+            <a:avLst/>
+          </a:prstGeom>
+          <a:noFill/>
+          <a:ln/>
+        </p:spPr>
+        <p:txBody>
+          <a:bodyPr wrap="square" rtlCol="0" anchor="ctr"/>
+          <a:lstStyle/>
+          <a:p>
+            <a:pPr algn="ctr" indent="0" marL="0">
+              <a:buNone/>
+            </a:pPr>
+            <a:r>
+              <a:rPr lang="en-US" sz="1100" b="1" dirty="0">
+                <a:solidFill>
+                  <a:srgbClr val="FFFFFF"/>
+                </a:solidFill>
+                <a:latin typeface="Calibri" pitchFamily="34" charset="0"/>
+                <a:ea typeface="Calibri" pitchFamily="34" charset="-122"/>
+                <a:cs typeface="Calibri" pitchFamily="34" charset="-120"/>
+              </a:rPr>
+              <a:t>1:30</a:t>
+            </a:r>
+            <a:endParaRPr lang="en-US" sz="1100" dirty="0"/>
+          </a:p>
+        </p:txBody>
+      </p:sp>
+      <p:sp>
+        <p:nvSpPr>
+          <p:cNvPr id="20" name="Text 18"/>
+          <p:cNvSpPr/>
+          <p:nvPr/>
+        </p:nvSpPr>
+        <p:spPr>
+          <a:xfrm>
+            <a:off x="1691640" y="4389120"/>
+            <a:ext cx="9646920" cy="566928"/>
+          </a:xfrm>
+          <a:prstGeom prst="rect">
+            <a:avLst/>
+          </a:prstGeom>
+          <a:noFill/>
+          <a:ln/>
+        </p:spPr>
+        <p:txBody>
+          <a:bodyPr wrap="square" rtlCol="0" anchor="ctr">
+            <a:spAutoFit/>
+          </a:bodyPr>
+          <a:lstStyle/>
+          <a:p>
+            <a:pPr indent="0" marL="0">
+              <a:buNone/>
+            </a:pPr>
+            <a:r>
+              <a:rPr lang="en-US" sz="1250" dirty="0">
+                <a:solidFill>
+                  <a:srgbClr val="1A1A1A"/>
+                </a:solidFill>
+                <a:latin typeface="Calibri" pitchFamily="34" charset="0"/>
+                <a:ea typeface="Calibri" pitchFamily="34" charset="-122"/>
+                <a:cs typeface="Calibri" pitchFamily="34" charset="-120"/>
+              </a:rPr>
+              <a:t>Collect-and-build lab: point the cookbook notebook at your corpus, reshape it, and save it to your Drive project folder so it's there next week (when the Week 1 Drive mount pays off), and fork the publishing template. Your project repo is born today.</a:t>
+            </a:r>
+            <a:endParaRPr lang="en-US" sz="1250" dirty="0"/>
+          </a:p>
+        </p:txBody>
+      </p:sp>
+      <p:sp>
+        <p:nvSpPr>
+          <p:cNvPr id="21" name="Shape 19"/>
+          <p:cNvSpPr/>
+          <p:nvPr/>
+        </p:nvSpPr>
+        <p:spPr>
+          <a:xfrm>
+            <a:off x="640080" y="4974336"/>
+            <a:ext cx="868680" cy="457200"/>
+          </a:xfrm>
+          <a:prstGeom prst="roundRect">
+            <a:avLst>
+              <a:gd name="adj" fmla="val 12000"/>
+            </a:avLst>
+          </a:prstGeom>
+          <a:solidFill>
+            <a:srgbClr val="7A3B2E"/>
+          </a:solidFill>
+          <a:ln/>
+        </p:spPr>
+      </p:sp>
+      <p:sp>
+        <p:nvSpPr>
+          <p:cNvPr id="22" name="Text 20"/>
+          <p:cNvSpPr/>
+          <p:nvPr/>
+        </p:nvSpPr>
+        <p:spPr>
+          <a:xfrm>
+            <a:off x="640080" y="4974336"/>
+            <a:ext cx="868680" cy="457200"/>
+          </a:xfrm>
+          <a:prstGeom prst="rect">
+            <a:avLst/>
+          </a:prstGeom>
+          <a:noFill/>
+          <a:ln/>
+        </p:spPr>
+        <p:txBody>
+          <a:bodyPr wrap="square" rtlCol="0" anchor="ctr"/>
+          <a:lstStyle/>
+          <a:p>
+            <a:pPr algn="ctr" indent="0" marL="0">
+              <a:buNone/>
+            </a:pPr>
+            <a:r>
+              <a:rPr lang="en-US" sz="1100" b="1" dirty="0">
+                <a:solidFill>
+                  <a:srgbClr val="FFFFFF"/>
+                </a:solidFill>
+                <a:latin typeface="Calibri" pitchFamily="34" charset="0"/>
+                <a:ea typeface="Calibri" pitchFamily="34" charset="-122"/>
+                <a:cs typeface="Calibri" pitchFamily="34" charset="-120"/>
+              </a:rPr>
+              <a:t>1:55</a:t>
+            </a:r>
+            <a:endParaRPr lang="en-US" sz="1100" dirty="0"/>
+          </a:p>
+        </p:txBody>
+      </p:sp>
+      <p:sp>
+        <p:nvSpPr>
+          <p:cNvPr id="23" name="Text 21"/>
+          <p:cNvSpPr/>
+          <p:nvPr/>
+        </p:nvSpPr>
+        <p:spPr>
+          <a:xfrm>
+            <a:off x="1691640" y="4956048"/>
+            <a:ext cx="9646920" cy="566928"/>
+          </a:xfrm>
+          <a:prstGeom prst="rect">
+            <a:avLst/>
+          </a:prstGeom>
+          <a:noFill/>
+          <a:ln/>
+        </p:spPr>
+        <p:txBody>
+          <a:bodyPr wrap="square" rtlCol="0" anchor="ctr">
+            <a:spAutoFit/>
+          </a:bodyPr>
+          <a:lstStyle/>
+          <a:p>
+            <a:pPr indent="0" marL="0">
+              <a:buNone/>
+            </a:pPr>
+            <a:r>
+              <a:rPr lang="en-US" sz="1250" dirty="0">
+                <a:solidFill>
+                  <a:srgbClr val="1A1A1A"/>
+                </a:solidFill>
+                <a:latin typeface="Calibri" pitchFamily="34" charset="0"/>
+                <a:ea typeface="Calibri" pitchFamily="34" charset="-122"/>
+                <a:cs typeface="Calibri" pitchFamily="34" charset="-120"/>
+              </a:rPr>
+              <a:t>Commit, with the pivot kit named as insurance. A null result honestly shown is a complete project. Check-out.</a:t>
+            </a:r>
+            <a:endParaRPr lang="en-US" sz="1250" dirty="0"/>
+          </a:p>
+        </p:txBody>
       </p:sp>
     </p:spTree>
   </p:cSld>

--- a/slides/pptx/week-04.pptx
+++ b/slides/pptx/week-04.pptx
@@ -4315,7 +4315,7 @@
                 <a:ea typeface="Calibri" pitchFamily="34" charset="-122"/>
                 <a:cs typeface="Calibri" pitchFamily="34" charset="-120"/>
               </a:rPr>
-              <a:t>WEEK 4 · THE MATERIAL</a:t>
+              <a:t>WEEK 4 · KEY POINTS</a:t>
             </a:r>
             <a:endParaRPr lang="en-US" sz="1200" dirty="0"/>
           </a:p>
@@ -4703,7 +4703,7 @@
                 <a:ea typeface="Calibri" pitchFamily="34" charset="-122"/>
                 <a:cs typeface="Calibri" pitchFamily="34" charset="-120"/>
               </a:rPr>
-              <a:t>WEEK 4 · THE MATERIAL</a:t>
+              <a:t>WEEK 4 · KEY POINTS</a:t>
             </a:r>
             <a:endParaRPr lang="en-US" sz="1200" dirty="0"/>
           </a:p>
@@ -5091,7 +5091,7 @@
                 <a:ea typeface="Calibri" pitchFamily="34" charset="-122"/>
                 <a:cs typeface="Calibri" pitchFamily="34" charset="-120"/>
               </a:rPr>
-              <a:t>WEEK 4 · THE MATERIAL</a:t>
+              <a:t>WEEK 4 · KEY POINTS</a:t>
             </a:r>
             <a:endParaRPr lang="en-US" sz="1200" dirty="0"/>
           </a:p>
@@ -5479,7 +5479,7 @@
                 <a:ea typeface="Calibri" pitchFamily="34" charset="-122"/>
                 <a:cs typeface="Calibri" pitchFamily="34" charset="-120"/>
               </a:rPr>
-              <a:t>WEEK 4 · THE MATERIAL</a:t>
+              <a:t>WEEK 4 · KEY POINTS</a:t>
             </a:r>
             <a:endParaRPr lang="en-US" sz="1200" dirty="0"/>
           </a:p>

--- a/slides/pptx/week-04.pptx
+++ b/slides/pptx/week-04.pptx
@@ -4224,7 +4224,7 @@
                 <a:ea typeface="Calibri" pitchFamily="34" charset="-122"/>
                 <a:cs typeface="Calibri" pitchFamily="34" charset="-120"/>
               </a:rPr>
-              <a:t>Listen across the pitches for questions too vague to answer, corpora that don't exist as accessible data, methods chosen for vibes, and the quiet scaling-down of ambition.</a:t>
+              <a:t>Listen across the pitches for questions too vague to answer, corpora that don't exist as accessible data, methods chosen on instinct rather than fit, and the quiet scaling-down of ambition.</a:t>
             </a:r>
             <a:endParaRPr lang="en-US" sz="2000" dirty="0"/>
           </a:p>
@@ -4356,7 +4356,7 @@
                 <a:ea typeface="Cambria" pitchFamily="34" charset="-122"/>
                 <a:cs typeface="Cambria" pitchFamily="34" charset="-120"/>
               </a:rPr>
-              <a:t>A pitch that survives contact</a:t>
+              <a:t>What a viable pitch contains</a:t>
             </a:r>
             <a:endParaRPr lang="en-US" sz="3000" dirty="0"/>
           </a:p>
@@ -4612,7 +4612,7 @@
                 <a:ea typeface="Calibri" pitchFamily="34" charset="-122"/>
                 <a:cs typeface="Calibri" pitchFamily="34" charset="-120"/>
               </a:rPr>
-              <a:t>The pivot kit exists because corpora fail. Adopting a fallback pair is normal, not defeat.</a:t>
+              <a:t>The pivot kit exists because corpora fail. Adopting a fallback pair is normal, not a failure.</a:t>
             </a:r>
             <a:endParaRPr lang="en-US" sz="1650" dirty="0"/>
           </a:p>
@@ -4744,7 +4744,7 @@
                 <a:ea typeface="Cambria" pitchFamily="34" charset="-122"/>
                 <a:cs typeface="Cambria" pitchFamily="34" charset="-120"/>
               </a:rPr>
-              <a:t>The licensing line, in one slide</a:t>
+              <a:t>Licensing rules, in one slide</a:t>
             </a:r>
             <a:endParaRPr lang="en-US" sz="3000" dirty="0"/>
           </a:p>
@@ -5260,7 +5260,7 @@
                 <a:ea typeface="Calibri" pitchFamily="34" charset="-122"/>
                 <a:cs typeface="Calibri" pitchFamily="34" charset="-120"/>
               </a:rPr>
-              <a:t>Route 2, the polite front door: an API. The Met's endpoint returns JSON, no key required.</a:t>
+              <a:t>Route 2: an API, the sanctioned route. The Met's endpoint returns JSON, no key required.</a:t>
             </a:r>
             <a:endParaRPr lang="en-US" sz="1650" dirty="0"/>
           </a:p>
@@ -5324,7 +5324,7 @@
                 <a:ea typeface="Calibri" pitchFamily="34" charset="-122"/>
                 <a:cs typeface="Calibri" pitchFamily="34" charset="-120"/>
               </a:rPr>
-              <a:t>Route 3, the back door: scrape, carefully. Read robots.txt and the ToS, go slow, take only what you need, never republish.</a:t>
+              <a:t>Route 3, a last resort: scraping, done carefully. Read robots.txt and the terms of service, request slowly, take only what you need, never republish.</a:t>
             </a:r>
             <a:endParaRPr lang="en-US" sz="1650" dirty="0"/>
           </a:p>
@@ -6944,7 +6944,7 @@
                 <a:ea typeface="Calibri" pitchFamily="34" charset="-122"/>
                 <a:cs typeface="Calibri" pitchFamily="34" charset="-120"/>
               </a:rPr>
-              <a:t>Collect-and-build lab: point the cookbook notebook at your corpus, reshape it, and save it to your Drive project folder so it's there next week (when the Week 1 Drive mount pays off), and fork the publishing template. Your project repo is born today.</a:t>
+              <a:t>Collect-and-build lab: point the cookbook notebook at your corpus, reshape it, and save it to your Drive project folder so it's there next week (when the Week 1 Drive mount pays off), and fork the publishing template. Your project repository starts today.</a:t>
             </a:r>
             <a:endParaRPr lang="en-US" sz="1250" dirty="0"/>
           </a:p>

--- a/slides/pptx/week-04.pptx
+++ b/slides/pptx/week-04.pptx
@@ -2452,7 +2452,7 @@
         </p:nvSpPr>
         <p:spPr>
           <a:xfrm>
-            <a:off x="640080" y="1810512"/>
+            <a:off x="640080" y="1673352"/>
             <a:ext cx="219456" cy="219456"/>
           </a:xfrm>
           <a:prstGeom prst="ellipse">
@@ -2472,7 +2472,7 @@
         </p:nvSpPr>
         <p:spPr>
           <a:xfrm>
-            <a:off x="1051560" y="1737360"/>
+            <a:off x="1051560" y="1600200"/>
             <a:ext cx="10424160" cy="365760"/>
           </a:xfrm>
           <a:prstGeom prst="rect">
@@ -2511,7 +2511,7 @@
         </p:nvSpPr>
         <p:spPr>
           <a:xfrm>
-            <a:off x="1051560" y="2121408"/>
+            <a:off x="1051560" y="1984248"/>
             <a:ext cx="10424160" cy="731520"/>
           </a:xfrm>
           <a:prstGeom prst="rect">
@@ -2552,7 +2552,7 @@
         </p:nvSpPr>
         <p:spPr>
           <a:xfrm>
-            <a:off x="640080" y="2953512"/>
+            <a:off x="640080" y="2633472"/>
             <a:ext cx="219456" cy="219456"/>
           </a:xfrm>
           <a:prstGeom prst="ellipse">
@@ -2572,7 +2572,7 @@
         </p:nvSpPr>
         <p:spPr>
           <a:xfrm>
-            <a:off x="1051560" y="2880360"/>
+            <a:off x="1051560" y="2560320"/>
             <a:ext cx="10424160" cy="365760"/>
           </a:xfrm>
           <a:prstGeom prst="rect">
@@ -2611,7 +2611,7 @@
         </p:nvSpPr>
         <p:spPr>
           <a:xfrm>
-            <a:off x="1051560" y="3264408"/>
+            <a:off x="1051560" y="2944368"/>
             <a:ext cx="10424160" cy="731520"/>
           </a:xfrm>
           <a:prstGeom prst="rect">
@@ -2652,7 +2652,7 @@
         </p:nvSpPr>
         <p:spPr>
           <a:xfrm>
-            <a:off x="640080" y="4096512"/>
+            <a:off x="640080" y="3593592"/>
             <a:ext cx="219456" cy="219456"/>
           </a:xfrm>
           <a:prstGeom prst="ellipse">
@@ -2672,7 +2672,7 @@
         </p:nvSpPr>
         <p:spPr>
           <a:xfrm>
-            <a:off x="1051560" y="4023360"/>
+            <a:off x="1051560" y="3520440"/>
             <a:ext cx="10424160" cy="365760"/>
           </a:xfrm>
           <a:prstGeom prst="rect">
@@ -2697,7 +2697,7 @@
                 <a:ea typeface="Calibri" pitchFamily="34" charset="-122"/>
                 <a:cs typeface="Calibri" pitchFamily="34" charset="-120"/>
               </a:rPr>
-              <a:t>Sketch</a:t>
+              <a:t>Deeper (optional)</a:t>
             </a:r>
             <a:endParaRPr lang="en-US" sz="1500" dirty="0"/>
           </a:p>
@@ -2711,7 +2711,7 @@
         </p:nvSpPr>
         <p:spPr>
           <a:xfrm>
-            <a:off x="1051560" y="4407408"/>
+            <a:off x="1051560" y="3904488"/>
             <a:ext cx="10424160" cy="731520"/>
           </a:xfrm>
           <a:prstGeom prst="rect">
@@ -2738,7 +2738,7 @@
                 <a:ea typeface="Calibri" pitchFamily="34" charset="-122"/>
                 <a:cs typeface="Calibri" pitchFamily="34" charset="-120"/>
               </a:rPr>
-              <a:t>Write your Data Biography (~400 words) and actually collect your corpus with the cookbook.</a:t>
+              <a:t>boyd &amp;amp; Crawford, Critical Questions for Big Data (2012), the canonical statement of what large datasets cannot tell you</a:t>
             </a:r>
             <a:endParaRPr lang="en-US" sz="1400" dirty="0"/>
           </a:p>
@@ -2752,14 +2752,14 @@
         </p:nvSpPr>
         <p:spPr>
           <a:xfrm>
-            <a:off x="640080" y="5239512"/>
+            <a:off x="640080" y="4553712"/>
             <a:ext cx="219456" cy="219456"/>
           </a:xfrm>
           <a:prstGeom prst="ellipse">
             <a:avLst/>
           </a:prstGeom>
           <a:solidFill>
-            <a:srgbClr val="7A3B2E"/>
+            <a:srgbClr val="3F6F5F"/>
           </a:solidFill>
           <a:ln/>
         </p:spPr>
@@ -2772,7 +2772,7 @@
         </p:nvSpPr>
         <p:spPr>
           <a:xfrm>
-            <a:off x="1051560" y="5166360"/>
+            <a:off x="1051560" y="4480560"/>
             <a:ext cx="10424160" cy="365760"/>
           </a:xfrm>
           <a:prstGeom prst="rect">
@@ -2791,12 +2791,112 @@
             <a:r>
               <a:rPr lang="en-US" sz="1500" b="1" dirty="0">
                 <a:solidFill>
-                  <a:srgbClr val="7A3B2E"/>
+                  <a:srgbClr val="3F6F5F"/>
                 </a:solidFill>
                 <a:latin typeface="Calibri" pitchFamily="34" charset="0"/>
                 <a:ea typeface="Calibri" pitchFamily="34" charset="-122"/>
                 <a:cs typeface="Calibri" pitchFamily="34" charset="-120"/>
               </a:rPr>
+              <a:t>Sketch</a:t>
+            </a:r>
+            <a:endParaRPr lang="en-US" sz="1500" dirty="0"/>
+          </a:p>
+        </p:txBody>
+      </p:sp>
+      <p:sp>
+        <p:nvSpPr>
+          <p:cNvPr id="14" name="Text 12"/>
+          <p:cNvSpPr/>
+          <p:nvPr/>
+        </p:nvSpPr>
+        <p:spPr>
+          <a:xfrm>
+            <a:off x="1051560" y="4864608"/>
+            <a:ext cx="10424160" cy="731520"/>
+          </a:xfrm>
+          <a:prstGeom prst="rect">
+            <a:avLst/>
+          </a:prstGeom>
+          <a:noFill/>
+          <a:ln/>
+        </p:spPr>
+        <p:txBody>
+          <a:bodyPr wrap="square" rtlCol="0" anchor="t">
+            <a:spAutoFit/>
+          </a:bodyPr>
+          <a:lstStyle/>
+          <a:p>
+            <a:pPr indent="0" marL="0">
+              <a:buNone/>
+            </a:pPr>
+            <a:r>
+              <a:rPr lang="en-US" sz="1400" dirty="0">
+                <a:solidFill>
+                  <a:srgbClr val="1A1A1A"/>
+                </a:solidFill>
+                <a:latin typeface="Calibri" pitchFamily="34" charset="0"/>
+                <a:ea typeface="Calibri" pitchFamily="34" charset="-122"/>
+                <a:cs typeface="Calibri" pitchFamily="34" charset="-120"/>
+              </a:rPr>
+              <a:t>Write your Data Biography (~400 words) and actually collect your corpus with the cookbook.</a:t>
+            </a:r>
+            <a:endParaRPr lang="en-US" sz="1400" dirty="0"/>
+          </a:p>
+        </p:txBody>
+      </p:sp>
+      <p:sp>
+        <p:nvSpPr>
+          <p:cNvPr id="15" name="Shape 13"/>
+          <p:cNvSpPr/>
+          <p:nvPr/>
+        </p:nvSpPr>
+        <p:spPr>
+          <a:xfrm>
+            <a:off x="640080" y="5513832"/>
+            <a:ext cx="219456" cy="219456"/>
+          </a:xfrm>
+          <a:prstGeom prst="ellipse">
+            <a:avLst/>
+          </a:prstGeom>
+          <a:solidFill>
+            <a:srgbClr val="7A3B2E"/>
+          </a:solidFill>
+          <a:ln/>
+        </p:spPr>
+      </p:sp>
+      <p:sp>
+        <p:nvSpPr>
+          <p:cNvPr id="16" name="Text 14"/>
+          <p:cNvSpPr/>
+          <p:nvPr/>
+        </p:nvSpPr>
+        <p:spPr>
+          <a:xfrm>
+            <a:off x="1051560" y="5440680"/>
+            <a:ext cx="10424160" cy="365760"/>
+          </a:xfrm>
+          <a:prstGeom prst="rect">
+            <a:avLst/>
+          </a:prstGeom>
+          <a:noFill/>
+          <a:ln/>
+        </p:spPr>
+        <p:txBody>
+          <a:bodyPr wrap="square" rtlCol="0" anchor="ctr"/>
+          <a:lstStyle/>
+          <a:p>
+            <a:pPr indent="0" marL="0">
+              <a:buNone/>
+            </a:pPr>
+            <a:r>
+              <a:rPr lang="en-US" sz="1500" b="1" dirty="0">
+                <a:solidFill>
+                  <a:srgbClr val="7A3B2E"/>
+                </a:solidFill>
+                <a:latin typeface="Calibri" pitchFamily="34" charset="0"/>
+                <a:ea typeface="Calibri" pitchFamily="34" charset="-122"/>
+                <a:cs typeface="Calibri" pitchFamily="34" charset="-120"/>
+              </a:rPr>
               <a:t>Check (AI closed)</a:t>
             </a:r>
             <a:endParaRPr lang="en-US" sz="1500" dirty="0"/>
@@ -2805,13 +2905,13 @@
       </p:sp>
       <p:sp>
         <p:nvSpPr>
-          <p:cNvPr id="14" name="Text 12"/>
-          <p:cNvSpPr/>
-          <p:nvPr/>
-        </p:nvSpPr>
-        <p:spPr>
-          <a:xfrm>
-            <a:off x="1051560" y="5550408"/>
+          <p:cNvPr id="17" name="Text 15"/>
+          <p:cNvSpPr/>
+          <p:nvPr/>
+        </p:nvSpPr>
+        <p:spPr>
+          <a:xfrm>
+            <a:off x="1051560" y="5824728"/>
             <a:ext cx="10424160" cy="731520"/>
           </a:xfrm>
           <a:prstGeom prst="rect">

--- a/slides/pptx/week-04.pptx
+++ b/slides/pptx/week-04.pptx
@@ -7044,7 +7044,7 @@
                 <a:ea typeface="Calibri" pitchFamily="34" charset="-122"/>
                 <a:cs typeface="Calibri" pitchFamily="34" charset="-120"/>
               </a:rPr>
-              <a:t>Collect-and-build lab: point the cookbook notebook at your corpus, reshape it, and save it to your Drive project folder so it's there next week (when the Week 1 Drive mount pays off), and fork the publishing template. Your project repository starts today.</a:t>
+              <a:t>Collect-and-build lab: point the cookbook notebook at your corpus, reshape it, and save it to your Drive project folder so it's there next week (when the Week 1 Drive mount pays off), and fork the publishing template with GitHub Pages enabled, so a live placeholder URL exists from commit day. Your project repository starts today.</a:t>
             </a:r>
             <a:endParaRPr lang="en-US" sz="1250" dirty="0"/>
           </a:p>

--- a/slides/pptx/week-04.pptx
+++ b/slides/pptx/week-04.pptx
@@ -17,9 +17,12 @@
     <p:sldId id="265" r:id="rId11"/>
     <p:sldId id="266" r:id="rId12"/>
     <p:sldId id="267" r:id="rId13"/>
+    <p:sldId id="268" r:id="rId14"/>
+    <p:sldId id="269" r:id="rId15"/>
+    <p:sldId id="270" r:id="rId16"/>
   </p:sldIdLst>
   <p:notesMasterIdLst>
-    <p:notesMasterId r:id="rId14"/>
+    <p:notesMasterId r:id="rId17"/>
   </p:notesMasterIdLst>
   <p:sldSz cx="12191695" cy="6858000"/>
   <p:notesSz cx="6858000" cy="12191695"/>
@@ -819,6 +822,270 @@
 </p:notes>
 </file>
 
+<file path=ppt/notesSlides/notesSlide13.xml><?xml version="1.0" encoding="utf-8"?>
+<p:notes xmlns:a="http://schemas.openxmlformats.org/drawingml/2006/main" xmlns:r="http://schemas.openxmlformats.org/officeDocument/2006/relationships" xmlns:p="http://schemas.openxmlformats.org/presentationml/2006/main">
+  <p:cSld>
+    <p:spTree>
+      <p:nvGrpSpPr>
+        <p:cNvPr id="1" name=""/>
+        <p:cNvGrpSpPr/>
+        <p:nvPr/>
+      </p:nvGrpSpPr>
+      <p:grpSpPr>
+        <a:xfrm>
+          <a:off x="0" y="0"/>
+          <a:ext cx="0" cy="0"/>
+          <a:chOff x="0" y="0"/>
+          <a:chExt cx="0" cy="0"/>
+        </a:xfrm>
+      </p:grpSpPr>
+      <p:sp>
+        <p:nvSpPr>
+          <p:cNvPr id="2" name="Slide Image Placeholder 1"/>
+          <p:cNvSpPr>
+            <a:spLocks noGrp="1" noRot="1" noChangeAspect="1"/>
+          </p:cNvSpPr>
+          <p:nvPr>
+            <p:ph type="sldImg"/>
+          </p:nvPr>
+        </p:nvSpPr>
+        <p:spPr/>
+      </p:sp>
+      <p:sp>
+        <p:nvSpPr>
+          <p:cNvPr id="3" name="Notes Placeholder 2"/>
+          <p:cNvSpPr>
+            <a:spLocks noGrp="1"/>
+          </p:cNvSpPr>
+          <p:nvPr>
+            <p:ph type="body" idx="1"/>
+          </p:nvPr>
+        </p:nvSpPr>
+        <p:spPr/>
+        <p:txBody>
+          <a:bodyPr/>
+          <a:lstStyle/>
+          <a:p>
+            <a:r>
+              <a:rPr lang="en-US" dirty="0"/>
+              <a:t/>
+            </a:r>
+            <a:endParaRPr lang="en-US" dirty="0"/>
+          </a:p>
+        </p:txBody>
+      </p:sp>
+      <p:sp>
+        <p:nvSpPr>
+          <p:cNvPr id="4" name="Slide Number Placeholder 3"/>
+          <p:cNvSpPr>
+            <a:spLocks noGrp="1"/>
+          </p:cNvSpPr>
+          <p:nvPr>
+            <p:ph type="sldNum" sz="quarter" idx="10"/>
+          </p:nvPr>
+        </p:nvSpPr>
+        <p:spPr/>
+        <p:txBody>
+          <a:bodyPr/>
+          <a:lstStyle/>
+          <a:p>
+            <a:fld id="{F7021451-1387-4CA6-816F-3879F97B5CBC}" type="slidenum">
+              <a:rPr lang="en-US"/>
+              <a:t>13</a:t>
+            </a:fld>
+            <a:endParaRPr lang="en-US"/>
+          </a:p>
+        </p:txBody>
+      </p:sp>
+    </p:spTree>
+    <p:extLst>
+      <p:ext uri="{BB962C8B-B14F-4D97-AF65-F5344CB8AC3E}">
+        <p14:creationId xmlns:p14="http://schemas.microsoft.com/office/powerpoint/2010/main" val="1024086991"/>
+      </p:ext>
+    </p:extLst>
+  </p:cSld>
+  <p:clrMapOvr>
+    <a:masterClrMapping/>
+  </p:clrMapOvr>
+</p:notes>
+</file>
+
+<file path=ppt/notesSlides/notesSlide14.xml><?xml version="1.0" encoding="utf-8"?>
+<p:notes xmlns:a="http://schemas.openxmlformats.org/drawingml/2006/main" xmlns:r="http://schemas.openxmlformats.org/officeDocument/2006/relationships" xmlns:p="http://schemas.openxmlformats.org/presentationml/2006/main">
+  <p:cSld>
+    <p:spTree>
+      <p:nvGrpSpPr>
+        <p:cNvPr id="1" name=""/>
+        <p:cNvGrpSpPr/>
+        <p:nvPr/>
+      </p:nvGrpSpPr>
+      <p:grpSpPr>
+        <a:xfrm>
+          <a:off x="0" y="0"/>
+          <a:ext cx="0" cy="0"/>
+          <a:chOff x="0" y="0"/>
+          <a:chExt cx="0" cy="0"/>
+        </a:xfrm>
+      </p:grpSpPr>
+      <p:sp>
+        <p:nvSpPr>
+          <p:cNvPr id="2" name="Slide Image Placeholder 1"/>
+          <p:cNvSpPr>
+            <a:spLocks noGrp="1" noRot="1" noChangeAspect="1"/>
+          </p:cNvSpPr>
+          <p:nvPr>
+            <p:ph type="sldImg"/>
+          </p:nvPr>
+        </p:nvSpPr>
+        <p:spPr/>
+      </p:sp>
+      <p:sp>
+        <p:nvSpPr>
+          <p:cNvPr id="3" name="Notes Placeholder 2"/>
+          <p:cNvSpPr>
+            <a:spLocks noGrp="1"/>
+          </p:cNvSpPr>
+          <p:nvPr>
+            <p:ph type="body" idx="1"/>
+          </p:nvPr>
+        </p:nvSpPr>
+        <p:spPr/>
+        <p:txBody>
+          <a:bodyPr/>
+          <a:lstStyle/>
+          <a:p>
+            <a:r>
+              <a:rPr lang="en-US" dirty="0"/>
+              <a:t/>
+            </a:r>
+            <a:endParaRPr lang="en-US" dirty="0"/>
+          </a:p>
+        </p:txBody>
+      </p:sp>
+      <p:sp>
+        <p:nvSpPr>
+          <p:cNvPr id="4" name="Slide Number Placeholder 3"/>
+          <p:cNvSpPr>
+            <a:spLocks noGrp="1"/>
+          </p:cNvSpPr>
+          <p:nvPr>
+            <p:ph type="sldNum" sz="quarter" idx="10"/>
+          </p:nvPr>
+        </p:nvSpPr>
+        <p:spPr/>
+        <p:txBody>
+          <a:bodyPr/>
+          <a:lstStyle/>
+          <a:p>
+            <a:fld id="{F7021451-1387-4CA6-816F-3879F97B5CBC}" type="slidenum">
+              <a:rPr lang="en-US"/>
+              <a:t>14</a:t>
+            </a:fld>
+            <a:endParaRPr lang="en-US"/>
+          </a:p>
+        </p:txBody>
+      </p:sp>
+    </p:spTree>
+    <p:extLst>
+      <p:ext uri="{BB962C8B-B14F-4D97-AF65-F5344CB8AC3E}">
+        <p14:creationId xmlns:p14="http://schemas.microsoft.com/office/powerpoint/2010/main" val="1024086991"/>
+      </p:ext>
+    </p:extLst>
+  </p:cSld>
+  <p:clrMapOvr>
+    <a:masterClrMapping/>
+  </p:clrMapOvr>
+</p:notes>
+</file>
+
+<file path=ppt/notesSlides/notesSlide15.xml><?xml version="1.0" encoding="utf-8"?>
+<p:notes xmlns:a="http://schemas.openxmlformats.org/drawingml/2006/main" xmlns:r="http://schemas.openxmlformats.org/officeDocument/2006/relationships" xmlns:p="http://schemas.openxmlformats.org/presentationml/2006/main">
+  <p:cSld>
+    <p:spTree>
+      <p:nvGrpSpPr>
+        <p:cNvPr id="1" name=""/>
+        <p:cNvGrpSpPr/>
+        <p:nvPr/>
+      </p:nvGrpSpPr>
+      <p:grpSpPr>
+        <a:xfrm>
+          <a:off x="0" y="0"/>
+          <a:ext cx="0" cy="0"/>
+          <a:chOff x="0" y="0"/>
+          <a:chExt cx="0" cy="0"/>
+        </a:xfrm>
+      </p:grpSpPr>
+      <p:sp>
+        <p:nvSpPr>
+          <p:cNvPr id="2" name="Slide Image Placeholder 1"/>
+          <p:cNvSpPr>
+            <a:spLocks noGrp="1" noRot="1" noChangeAspect="1"/>
+          </p:cNvSpPr>
+          <p:nvPr>
+            <p:ph type="sldImg"/>
+          </p:nvPr>
+        </p:nvSpPr>
+        <p:spPr/>
+      </p:sp>
+      <p:sp>
+        <p:nvSpPr>
+          <p:cNvPr id="3" name="Notes Placeholder 2"/>
+          <p:cNvSpPr>
+            <a:spLocks noGrp="1"/>
+          </p:cNvSpPr>
+          <p:nvPr>
+            <p:ph type="body" idx="1"/>
+          </p:nvPr>
+        </p:nvSpPr>
+        <p:spPr/>
+        <p:txBody>
+          <a:bodyPr/>
+          <a:lstStyle/>
+          <a:p>
+            <a:r>
+              <a:rPr lang="en-US" dirty="0"/>
+              <a:t/>
+            </a:r>
+            <a:endParaRPr lang="en-US" dirty="0"/>
+          </a:p>
+        </p:txBody>
+      </p:sp>
+      <p:sp>
+        <p:nvSpPr>
+          <p:cNvPr id="4" name="Slide Number Placeholder 3"/>
+          <p:cNvSpPr>
+            <a:spLocks noGrp="1"/>
+          </p:cNvSpPr>
+          <p:nvPr>
+            <p:ph type="sldNum" sz="quarter" idx="10"/>
+          </p:nvPr>
+        </p:nvSpPr>
+        <p:spPr/>
+        <p:txBody>
+          <a:bodyPr/>
+          <a:lstStyle/>
+          <a:p>
+            <a:fld id="{F7021451-1387-4CA6-816F-3879F97B5CBC}" type="slidenum">
+              <a:rPr lang="en-US"/>
+              <a:t>15</a:t>
+            </a:fld>
+            <a:endParaRPr lang="en-US"/>
+          </a:p>
+        </p:txBody>
+      </p:sp>
+    </p:spTree>
+    <p:extLst>
+      <p:ext uri="{BB962C8B-B14F-4D97-AF65-F5344CB8AC3E}">
+        <p14:creationId xmlns:p14="http://schemas.microsoft.com/office/powerpoint/2010/main" val="1024086991"/>
+      </p:ext>
+    </p:extLst>
+  </p:cSld>
+  <p:clrMapOvr>
+    <a:masterClrMapping/>
+  </p:clrMapOvr>
+</p:notes>
+</file>
+
 <file path=ppt/notesSlides/notesSlide2.xml><?xml version="1.0" encoding="utf-8"?>
 <p:notes xmlns:a="http://schemas.openxmlformats.org/drawingml/2006/main" xmlns:r="http://schemas.openxmlformats.org/officeDocument/2006/relationships" xmlns:p="http://schemas.openxmlformats.org/presentationml/2006/main">
   <p:cSld>
@@ -1967,7 +2234,7 @@
                 <a:ea typeface="Cambria" pitchFamily="34" charset="-122"/>
                 <a:cs typeface="Cambria" pitchFamily="34" charset="-120"/>
               </a:rPr>
-              <a:t>Pick a Corpus. Pick Two Methods. Commit.</a:t>
+              <a:t>How Machines Learn to Read: Neural Networks and Word Embeddings</a:t>
             </a:r>
             <a:endParaRPr lang="en-US" sz="4000" dirty="0"/>
           </a:p>
@@ -2008,7 +2275,7 @@
                 <a:ea typeface="Calibri" pitchFamily="34" charset="-122"/>
                 <a:cs typeface="Calibri" pitchFamily="34" charset="-120"/>
               </a:rPr>
-              <a:t>Leave with a pitched project, two chosen methods, your Data Biography drafted, and the skill that makes "bring your own corpus" real: getting data off the web.</a:t>
+              <a:t>See what your Week 3 classifier becomes when you stack it, learn where word vectors come from and what they can and cannot do, and leave with your own corpus collected, saved and committed to.</a:t>
             </a:r>
             <a:endParaRPr lang="en-US" sz="1600" dirty="0"/>
           </a:p>
@@ -2047,7 +2314,7 @@
                 <a:ea typeface="Calibri" pitchFamily="34" charset="-122"/>
                 <a:cs typeface="Calibri" pitchFamily="34" charset="-120"/>
               </a:rPr>
-              <a:t>Tool / method:  The project (no new mechanism this week)</a:t>
+              <a:t>Tool / method:  Neural networks and word embeddings, plus getting data off the web</a:t>
             </a:r>
             <a:endParaRPr lang="en-US" sz="1200" dirty="0"/>
           </a:p>
@@ -2407,14 +2674,34 @@
       </p:grpSpPr>
       <p:sp>
         <p:nvSpPr>
-          <p:cNvPr id="2" name="Text 0"/>
+          <p:cNvPr id="2" name="Shape 0"/>
+          <p:cNvSpPr/>
+          <p:nvPr/>
+        </p:nvSpPr>
+        <p:spPr>
+          <a:xfrm>
+            <a:off x="0" y="0"/>
+            <a:ext cx="164592" cy="6858000"/>
+          </a:xfrm>
+          <a:prstGeom prst="rect">
+            <a:avLst/>
+          </a:prstGeom>
+          <a:solidFill>
+            <a:srgbClr val="7A3B2E"/>
+          </a:solidFill>
+          <a:ln/>
+        </p:spPr>
+      </p:sp>
+      <p:sp>
+        <p:nvSpPr>
+          <p:cNvPr id="3" name="Text 1"/>
           <p:cNvSpPr/>
           <p:nvPr/>
         </p:nvSpPr>
         <p:spPr>
           <a:xfrm>
             <a:off x="640080" y="640080"/>
-            <a:ext cx="10058400" cy="731520"/>
+            <a:ext cx="10058400" cy="320040"/>
           </a:xfrm>
           <a:prstGeom prst="rect">
             <a:avLst/>
@@ -2424,6 +2711,47 @@
         </p:spPr>
         <p:txBody>
           <a:bodyPr wrap="square" rtlCol="0" anchor="ctr"/>
+          <a:lstStyle/>
+          <a:p>
+            <a:pPr indent="0" marL="0">
+              <a:buNone/>
+            </a:pPr>
+            <a:r>
+              <a:rPr lang="en-US" sz="1200" b="1" spc="300" kern="0" dirty="0">
+                <a:solidFill>
+                  <a:srgbClr val="7A3B2E"/>
+                </a:solidFill>
+                <a:latin typeface="Calibri" pitchFamily="34" charset="0"/>
+                <a:ea typeface="Calibri" pitchFamily="34" charset="-122"/>
+                <a:cs typeface="Calibri" pitchFamily="34" charset="-120"/>
+              </a:rPr>
+              <a:t>WEEK 4 · KEY POINTS</a:t>
+            </a:r>
+            <a:endParaRPr lang="en-US" sz="1200" dirty="0"/>
+          </a:p>
+        </p:txBody>
+      </p:sp>
+      <p:sp>
+        <p:nvSpPr>
+          <p:cNvPr id="4" name="Text 2"/>
+          <p:cNvSpPr/>
+          <p:nvPr/>
+        </p:nvSpPr>
+        <p:spPr>
+          <a:xfrm>
+            <a:off x="640080" y="1005840"/>
+            <a:ext cx="10881360" cy="914400"/>
+          </a:xfrm>
+          <a:prstGeom prst="rect">
+            <a:avLst/>
+          </a:prstGeom>
+          <a:noFill/>
+          <a:ln/>
+        </p:spPr>
+        <p:txBody>
+          <a:bodyPr wrap="square" rtlCol="0" anchor="t">
+            <a:spAutoFit/>
+          </a:bodyPr>
           <a:lstStyle/>
           <a:p>
             <a:pPr indent="0" marL="0">
@@ -2438,7 +2766,7 @@
                 <a:ea typeface="Cambria" pitchFamily="34" charset="-122"/>
                 <a:cs typeface="Cambria" pitchFamily="34" charset="-120"/>
               </a:rPr>
-              <a:t>Reading &amp; homework</a:t>
+              <a:t>The licensing line, in three sentences</a:t>
             </a:r>
             <a:endParaRPr lang="en-US" sz="3000" dirty="0"/>
           </a:p>
@@ -2446,14 +2774,14 @@
       </p:sp>
       <p:sp>
         <p:nvSpPr>
-          <p:cNvPr id="3" name="Shape 1"/>
-          <p:cNvSpPr/>
-          <p:nvPr/>
-        </p:nvSpPr>
-        <p:spPr>
-          <a:xfrm>
-            <a:off x="640080" y="1673352"/>
-            <a:ext cx="219456" cy="219456"/>
+          <p:cNvPr id="5" name="Shape 3"/>
+          <p:cNvSpPr/>
+          <p:nvPr/>
+        </p:nvSpPr>
+        <p:spPr>
+          <a:xfrm>
+            <a:off x="640080" y="2331720"/>
+            <a:ext cx="201168" cy="201168"/>
           </a:xfrm>
           <a:prstGeom prst="ellipse">
             <a:avLst/>
@@ -2466,53 +2794,78 @@
       </p:sp>
       <p:sp>
         <p:nvSpPr>
-          <p:cNvPr id="4" name="Text 2"/>
-          <p:cNvSpPr/>
-          <p:nvPr/>
-        </p:nvSpPr>
-        <p:spPr>
-          <a:xfrm>
-            <a:off x="1051560" y="1600200"/>
-            <a:ext cx="10424160" cy="365760"/>
-          </a:xfrm>
-          <a:prstGeom prst="rect">
-            <a:avLst/>
-          </a:prstGeom>
-          <a:noFill/>
-          <a:ln/>
-        </p:spPr>
-        <p:txBody>
-          <a:bodyPr wrap="square" rtlCol="0" anchor="ctr"/>
-          <a:lstStyle/>
-          <a:p>
-            <a:pPr indent="0" marL="0">
-              <a:buNone/>
-            </a:pPr>
-            <a:r>
-              <a:rPr lang="en-US" sz="1500" b="1" dirty="0">
-                <a:solidFill>
-                  <a:srgbClr val="7A3B2E"/>
+          <p:cNvPr id="6" name="Text 4"/>
+          <p:cNvSpPr/>
+          <p:nvPr/>
+        </p:nvSpPr>
+        <p:spPr>
+          <a:xfrm>
+            <a:off x="1097280" y="2240280"/>
+            <a:ext cx="10607040" cy="1017270"/>
+          </a:xfrm>
+          <a:prstGeom prst="rect">
+            <a:avLst/>
+          </a:prstGeom>
+          <a:noFill/>
+          <a:ln/>
+        </p:spPr>
+        <p:txBody>
+          <a:bodyPr wrap="square" rtlCol="0" anchor="t">
+            <a:spAutoFit/>
+          </a:bodyPr>
+          <a:lstStyle/>
+          <a:p>
+            <a:pPr indent="0" marL="0">
+              <a:lnSpc>
+                <a:spcPct val="112000"/>
+              </a:lnSpc>
+              <a:buNone/>
+            </a:pPr>
+            <a:r>
+              <a:rPr lang="en-US" sz="1650" dirty="0">
+                <a:solidFill>
+                  <a:srgbClr val="1A1A1A"/>
                 </a:solidFill>
                 <a:latin typeface="Calibri" pitchFamily="34" charset="0"/>
                 <a:ea typeface="Calibri" pitchFamily="34" charset="-122"/>
                 <a:cs typeface="Calibri" pitchFamily="34" charset="-120"/>
               </a:rPr>
-              <a:t>Reading</a:t>
-            </a:r>
-            <a:endParaRPr lang="en-US" sz="1500" dirty="0"/>
-          </a:p>
-        </p:txBody>
-      </p:sp>
-      <p:sp>
-        <p:nvSpPr>
-          <p:cNvPr id="5" name="Text 3"/>
-          <p:cNvSpPr/>
-          <p:nvPr/>
-        </p:nvSpPr>
-        <p:spPr>
-          <a:xfrm>
-            <a:off x="1051560" y="1984248"/>
-            <a:ext cx="10424160" cy="731520"/>
+              <a:t>CC0 museum data and public-domain books: use freely, republish freely.</a:t>
+            </a:r>
+            <a:endParaRPr lang="en-US" sz="1650" dirty="0"/>
+          </a:p>
+        </p:txBody>
+      </p:sp>
+      <p:sp>
+        <p:nvSpPr>
+          <p:cNvPr id="7" name="Shape 5"/>
+          <p:cNvSpPr/>
+          <p:nvPr/>
+        </p:nvSpPr>
+        <p:spPr>
+          <a:xfrm>
+            <a:off x="640080" y="3348990"/>
+            <a:ext cx="201168" cy="201168"/>
+          </a:xfrm>
+          <a:prstGeom prst="ellipse">
+            <a:avLst/>
+          </a:prstGeom>
+          <a:solidFill>
+            <a:srgbClr val="3F6F5F"/>
+          </a:solidFill>
+          <a:ln/>
+        </p:spPr>
+      </p:sp>
+      <p:sp>
+        <p:nvSpPr>
+          <p:cNvPr id="8" name="Text 6"/>
+          <p:cNvSpPr/>
+          <p:nvPr/>
+        </p:nvSpPr>
+        <p:spPr>
+          <a:xfrm>
+            <a:off x="1097280" y="3257550"/>
+            <a:ext cx="10607040" cy="1017270"/>
           </a:xfrm>
           <a:prstGeom prst="rect">
             <a:avLst/>
@@ -2527,10 +2880,13 @@
           <a:lstStyle/>
           <a:p>
             <a:pPr indent="0" marL="0">
-              <a:buNone/>
-            </a:pPr>
-            <a:r>
-              <a:rPr lang="en-US" sz="1400" dirty="0">
+              <a:lnSpc>
+                <a:spcPct val="112000"/>
+              </a:lnSpc>
+              <a:buNone/>
+            </a:pPr>
+            <a:r>
+              <a:rPr lang="en-US" sz="1650" dirty="0">
                 <a:solidFill>
                   <a:srgbClr val="1A1A1A"/>
                 </a:solidFill>
@@ -2538,81 +2894,106 @@
                 <a:ea typeface="Calibri" pitchFamily="34" charset="-122"/>
                 <a:cs typeface="Calibri" pitchFamily="34" charset="-120"/>
               </a:rPr>
-              <a:t>Krause, Data Biographies (We All Count)</a:t>
-            </a:r>
-            <a:endParaRPr lang="en-US" sz="1400" dirty="0"/>
-          </a:p>
-        </p:txBody>
-      </p:sp>
-      <p:sp>
-        <p:nvSpPr>
-          <p:cNvPr id="6" name="Shape 4"/>
-          <p:cNvSpPr/>
-          <p:nvPr/>
-        </p:nvSpPr>
-        <p:spPr>
-          <a:xfrm>
-            <a:off x="640080" y="2633472"/>
-            <a:ext cx="219456" cy="219456"/>
+              <a:t>Academic corpora and community text: analyze, do not redistribute. Lyrics and reviews: metadata and counts only.</a:t>
+            </a:r>
+            <a:endParaRPr lang="en-US" sz="1650" dirty="0"/>
+          </a:p>
+        </p:txBody>
+      </p:sp>
+      <p:sp>
+        <p:nvSpPr>
+          <p:cNvPr id="9" name="Shape 7"/>
+          <p:cNvSpPr/>
+          <p:nvPr/>
+        </p:nvSpPr>
+        <p:spPr>
+          <a:xfrm>
+            <a:off x="640080" y="4366260"/>
+            <a:ext cx="201168" cy="201168"/>
           </a:xfrm>
           <a:prstGeom prst="ellipse">
             <a:avLst/>
           </a:prstGeom>
           <a:solidFill>
-            <a:srgbClr val="3F6F5F"/>
-          </a:solidFill>
-          <a:ln/>
-        </p:spPr>
-      </p:sp>
-      <p:sp>
-        <p:nvSpPr>
-          <p:cNvPr id="7" name="Text 5"/>
-          <p:cNvSpPr/>
-          <p:nvPr/>
-        </p:nvSpPr>
-        <p:spPr>
-          <a:xfrm>
-            <a:off x="1051560" y="2560320"/>
-            <a:ext cx="10424160" cy="365760"/>
-          </a:xfrm>
-          <a:prstGeom prst="rect">
-            <a:avLst/>
-          </a:prstGeom>
-          <a:noFill/>
-          <a:ln/>
-        </p:spPr>
-        <p:txBody>
-          <a:bodyPr wrap="square" rtlCol="0" anchor="ctr"/>
-          <a:lstStyle/>
-          <a:p>
-            <a:pPr indent="0" marL="0">
-              <a:buNone/>
-            </a:pPr>
-            <a:r>
-              <a:rPr lang="en-US" sz="1500" b="1" dirty="0">
-                <a:solidFill>
-                  <a:srgbClr val="3F6F5F"/>
+            <a:srgbClr val="B9852F"/>
+          </a:solidFill>
+          <a:ln/>
+        </p:spPr>
+      </p:sp>
+      <p:sp>
+        <p:nvSpPr>
+          <p:cNvPr id="10" name="Text 8"/>
+          <p:cNvSpPr/>
+          <p:nvPr/>
+        </p:nvSpPr>
+        <p:spPr>
+          <a:xfrm>
+            <a:off x="1097280" y="4274820"/>
+            <a:ext cx="10607040" cy="1017270"/>
+          </a:xfrm>
+          <a:prstGeom prst="rect">
+            <a:avLst/>
+          </a:prstGeom>
+          <a:noFill/>
+          <a:ln/>
+        </p:spPr>
+        <p:txBody>
+          <a:bodyPr wrap="square" rtlCol="0" anchor="t">
+            <a:spAutoFit/>
+          </a:bodyPr>
+          <a:lstStyle/>
+          <a:p>
+            <a:pPr indent="0" marL="0">
+              <a:lnSpc>
+                <a:spcPct val="112000"/>
+              </a:lnSpc>
+              <a:buNone/>
+            </a:pPr>
+            <a:r>
+              <a:rPr lang="en-US" sz="1650" dirty="0">
+                <a:solidFill>
+                  <a:srgbClr val="1A1A1A"/>
                 </a:solidFill>
                 <a:latin typeface="Calibri" pitchFamily="34" charset="0"/>
                 <a:ea typeface="Calibri" pitchFamily="34" charset="-122"/>
                 <a:cs typeface="Calibri" pitchFamily="34" charset="-120"/>
               </a:rPr>
-              <a:t>Supplement</a:t>
-            </a:r>
-            <a:endParaRPr lang="en-US" sz="1500" dirty="0"/>
-          </a:p>
-        </p:txBody>
-      </p:sp>
-      <p:sp>
-        <p:nvSpPr>
-          <p:cNvPr id="8" name="Text 6"/>
-          <p:cNvSpPr/>
-          <p:nvPr/>
-        </p:nvSpPr>
-        <p:spPr>
-          <a:xfrm>
-            <a:off x="1051560" y="2944368"/>
-            <a:ext cx="10424160" cy="731520"/>
+              <a:t>Shadow-library books: never. That line is what the field's $1.5B settlement was about.</a:t>
+            </a:r>
+            <a:endParaRPr lang="en-US" sz="1650" dirty="0"/>
+          </a:p>
+        </p:txBody>
+      </p:sp>
+      <p:sp>
+        <p:nvSpPr>
+          <p:cNvPr id="11" name="Shape 9"/>
+          <p:cNvSpPr/>
+          <p:nvPr/>
+        </p:nvSpPr>
+        <p:spPr>
+          <a:xfrm>
+            <a:off x="640080" y="5383530"/>
+            <a:ext cx="201168" cy="201168"/>
+          </a:xfrm>
+          <a:prstGeom prst="ellipse">
+            <a:avLst/>
+          </a:prstGeom>
+          <a:solidFill>
+            <a:srgbClr val="7A3B2E"/>
+          </a:solidFill>
+          <a:ln/>
+        </p:spPr>
+      </p:sp>
+      <p:sp>
+        <p:nvSpPr>
+          <p:cNvPr id="12" name="Text 10"/>
+          <p:cNvSpPr/>
+          <p:nvPr/>
+        </p:nvSpPr>
+        <p:spPr>
+          <a:xfrm>
+            <a:off x="1097280" y="5292090"/>
+            <a:ext cx="10607040" cy="1017270"/>
           </a:xfrm>
           <a:prstGeom prst="rect">
             <a:avLst/>
@@ -2627,10 +3008,13 @@
           <a:lstStyle/>
           <a:p>
             <a:pPr indent="0" marL="0">
-              <a:buNone/>
-            </a:pPr>
-            <a:r>
-              <a:rPr lang="en-US" sz="1400" dirty="0">
+              <a:lnSpc>
+                <a:spcPct val="112000"/>
+              </a:lnSpc>
+              <a:buNone/>
+            </a:pPr>
+            <a:r>
+              <a:rPr lang="en-US" sz="1650" dirty="0">
                 <a:solidFill>
                   <a:srgbClr val="1A1A1A"/>
                 </a:solidFill>
@@ -2638,309 +3022,9 @@
                 <a:ea typeface="Calibri" pitchFamily="34" charset="-122"/>
                 <a:cs typeface="Calibri" pitchFamily="34" charset="-120"/>
               </a:rPr>
-              <a:t>Freelon, Post-API Age</a:t>
-            </a:r>
-            <a:endParaRPr lang="en-US" sz="1400" dirty="0"/>
-          </a:p>
-        </p:txBody>
-      </p:sp>
-      <p:sp>
-        <p:nvSpPr>
-          <p:cNvPr id="9" name="Shape 7"/>
-          <p:cNvSpPr/>
-          <p:nvPr/>
-        </p:nvSpPr>
-        <p:spPr>
-          <a:xfrm>
-            <a:off x="640080" y="3593592"/>
-            <a:ext cx="219456" cy="219456"/>
-          </a:xfrm>
-          <a:prstGeom prst="ellipse">
-            <a:avLst/>
-          </a:prstGeom>
-          <a:solidFill>
-            <a:srgbClr val="B9852F"/>
-          </a:solidFill>
-          <a:ln/>
-        </p:spPr>
-      </p:sp>
-      <p:sp>
-        <p:nvSpPr>
-          <p:cNvPr id="10" name="Text 8"/>
-          <p:cNvSpPr/>
-          <p:nvPr/>
-        </p:nvSpPr>
-        <p:spPr>
-          <a:xfrm>
-            <a:off x="1051560" y="3520440"/>
-            <a:ext cx="10424160" cy="365760"/>
-          </a:xfrm>
-          <a:prstGeom prst="rect">
-            <a:avLst/>
-          </a:prstGeom>
-          <a:noFill/>
-          <a:ln/>
-        </p:spPr>
-        <p:txBody>
-          <a:bodyPr wrap="square" rtlCol="0" anchor="ctr"/>
-          <a:lstStyle/>
-          <a:p>
-            <a:pPr indent="0" marL="0">
-              <a:buNone/>
-            </a:pPr>
-            <a:r>
-              <a:rPr lang="en-US" sz="1500" b="1" dirty="0">
-                <a:solidFill>
-                  <a:srgbClr val="B9852F"/>
-                </a:solidFill>
-                <a:latin typeface="Calibri" pitchFamily="34" charset="0"/>
-                <a:ea typeface="Calibri" pitchFamily="34" charset="-122"/>
-                <a:cs typeface="Calibri" pitchFamily="34" charset="-120"/>
-              </a:rPr>
-              <a:t>Deeper (optional)</a:t>
-            </a:r>
-            <a:endParaRPr lang="en-US" sz="1500" dirty="0"/>
-          </a:p>
-        </p:txBody>
-      </p:sp>
-      <p:sp>
-        <p:nvSpPr>
-          <p:cNvPr id="11" name="Text 9"/>
-          <p:cNvSpPr/>
-          <p:nvPr/>
-        </p:nvSpPr>
-        <p:spPr>
-          <a:xfrm>
-            <a:off x="1051560" y="3904488"/>
-            <a:ext cx="10424160" cy="731520"/>
-          </a:xfrm>
-          <a:prstGeom prst="rect">
-            <a:avLst/>
-          </a:prstGeom>
-          <a:noFill/>
-          <a:ln/>
-        </p:spPr>
-        <p:txBody>
-          <a:bodyPr wrap="square" rtlCol="0" anchor="t">
-            <a:spAutoFit/>
-          </a:bodyPr>
-          <a:lstStyle/>
-          <a:p>
-            <a:pPr indent="0" marL="0">
-              <a:buNone/>
-            </a:pPr>
-            <a:r>
-              <a:rPr lang="en-US" sz="1400" dirty="0">
-                <a:solidFill>
-                  <a:srgbClr val="1A1A1A"/>
-                </a:solidFill>
-                <a:latin typeface="Calibri" pitchFamily="34" charset="0"/>
-                <a:ea typeface="Calibri" pitchFamily="34" charset="-122"/>
-                <a:cs typeface="Calibri" pitchFamily="34" charset="-120"/>
-              </a:rPr>
-              <a:t>boyd &amp;amp; Crawford, Critical Questions for Big Data (2012), the canonical statement of what large datasets cannot tell you</a:t>
-            </a:r>
-            <a:endParaRPr lang="en-US" sz="1400" dirty="0"/>
-          </a:p>
-        </p:txBody>
-      </p:sp>
-      <p:sp>
-        <p:nvSpPr>
-          <p:cNvPr id="12" name="Shape 10"/>
-          <p:cNvSpPr/>
-          <p:nvPr/>
-        </p:nvSpPr>
-        <p:spPr>
-          <a:xfrm>
-            <a:off x="640080" y="4553712"/>
-            <a:ext cx="219456" cy="219456"/>
-          </a:xfrm>
-          <a:prstGeom prst="ellipse">
-            <a:avLst/>
-          </a:prstGeom>
-          <a:solidFill>
-            <a:srgbClr val="3F6F5F"/>
-          </a:solidFill>
-          <a:ln/>
-        </p:spPr>
-      </p:sp>
-      <p:sp>
-        <p:nvSpPr>
-          <p:cNvPr id="13" name="Text 11"/>
-          <p:cNvSpPr/>
-          <p:nvPr/>
-        </p:nvSpPr>
-        <p:spPr>
-          <a:xfrm>
-            <a:off x="1051560" y="4480560"/>
-            <a:ext cx="10424160" cy="365760"/>
-          </a:xfrm>
-          <a:prstGeom prst="rect">
-            <a:avLst/>
-          </a:prstGeom>
-          <a:noFill/>
-          <a:ln/>
-        </p:spPr>
-        <p:txBody>
-          <a:bodyPr wrap="square" rtlCol="0" anchor="ctr"/>
-          <a:lstStyle/>
-          <a:p>
-            <a:pPr indent="0" marL="0">
-              <a:buNone/>
-            </a:pPr>
-            <a:r>
-              <a:rPr lang="en-US" sz="1500" b="1" dirty="0">
-                <a:solidFill>
-                  <a:srgbClr val="3F6F5F"/>
-                </a:solidFill>
-                <a:latin typeface="Calibri" pitchFamily="34" charset="0"/>
-                <a:ea typeface="Calibri" pitchFamily="34" charset="-122"/>
-                <a:cs typeface="Calibri" pitchFamily="34" charset="-120"/>
-              </a:rPr>
-              <a:t>Sketch</a:t>
-            </a:r>
-            <a:endParaRPr lang="en-US" sz="1500" dirty="0"/>
-          </a:p>
-        </p:txBody>
-      </p:sp>
-      <p:sp>
-        <p:nvSpPr>
-          <p:cNvPr id="14" name="Text 12"/>
-          <p:cNvSpPr/>
-          <p:nvPr/>
-        </p:nvSpPr>
-        <p:spPr>
-          <a:xfrm>
-            <a:off x="1051560" y="4864608"/>
-            <a:ext cx="10424160" cy="731520"/>
-          </a:xfrm>
-          <a:prstGeom prst="rect">
-            <a:avLst/>
-          </a:prstGeom>
-          <a:noFill/>
-          <a:ln/>
-        </p:spPr>
-        <p:txBody>
-          <a:bodyPr wrap="square" rtlCol="0" anchor="t">
-            <a:spAutoFit/>
-          </a:bodyPr>
-          <a:lstStyle/>
-          <a:p>
-            <a:pPr indent="0" marL="0">
-              <a:buNone/>
-            </a:pPr>
-            <a:r>
-              <a:rPr lang="en-US" sz="1400" dirty="0">
-                <a:solidFill>
-                  <a:srgbClr val="1A1A1A"/>
-                </a:solidFill>
-                <a:latin typeface="Calibri" pitchFamily="34" charset="0"/>
-                <a:ea typeface="Calibri" pitchFamily="34" charset="-122"/>
-                <a:cs typeface="Calibri" pitchFamily="34" charset="-120"/>
-              </a:rPr>
-              <a:t>Write your Data Biography (~400 words) and actually collect your corpus with the cookbook.</a:t>
-            </a:r>
-            <a:endParaRPr lang="en-US" sz="1400" dirty="0"/>
-          </a:p>
-        </p:txBody>
-      </p:sp>
-      <p:sp>
-        <p:nvSpPr>
-          <p:cNvPr id="15" name="Shape 13"/>
-          <p:cNvSpPr/>
-          <p:nvPr/>
-        </p:nvSpPr>
-        <p:spPr>
-          <a:xfrm>
-            <a:off x="640080" y="5513832"/>
-            <a:ext cx="219456" cy="219456"/>
-          </a:xfrm>
-          <a:prstGeom prst="ellipse">
-            <a:avLst/>
-          </a:prstGeom>
-          <a:solidFill>
-            <a:srgbClr val="7A3B2E"/>
-          </a:solidFill>
-          <a:ln/>
-        </p:spPr>
-      </p:sp>
-      <p:sp>
-        <p:nvSpPr>
-          <p:cNvPr id="16" name="Text 14"/>
-          <p:cNvSpPr/>
-          <p:nvPr/>
-        </p:nvSpPr>
-        <p:spPr>
-          <a:xfrm>
-            <a:off x="1051560" y="5440680"/>
-            <a:ext cx="10424160" cy="365760"/>
-          </a:xfrm>
-          <a:prstGeom prst="rect">
-            <a:avLst/>
-          </a:prstGeom>
-          <a:noFill/>
-          <a:ln/>
-        </p:spPr>
-        <p:txBody>
-          <a:bodyPr wrap="square" rtlCol="0" anchor="ctr"/>
-          <a:lstStyle/>
-          <a:p>
-            <a:pPr indent="0" marL="0">
-              <a:buNone/>
-            </a:pPr>
-            <a:r>
-              <a:rPr lang="en-US" sz="1500" b="1" dirty="0">
-                <a:solidFill>
-                  <a:srgbClr val="7A3B2E"/>
-                </a:solidFill>
-                <a:latin typeface="Calibri" pitchFamily="34" charset="0"/>
-                <a:ea typeface="Calibri" pitchFamily="34" charset="-122"/>
-                <a:cs typeface="Calibri" pitchFamily="34" charset="-120"/>
-              </a:rPr>
-              <a:t>Check (AI closed)</a:t>
-            </a:r>
-            <a:endParaRPr lang="en-US" sz="1500" dirty="0"/>
-          </a:p>
-        </p:txBody>
-      </p:sp>
-      <p:sp>
-        <p:nvSpPr>
-          <p:cNvPr id="17" name="Text 15"/>
-          <p:cNvSpPr/>
-          <p:nvPr/>
-        </p:nvSpPr>
-        <p:spPr>
-          <a:xfrm>
-            <a:off x="1051560" y="5824728"/>
-            <a:ext cx="10424160" cy="731520"/>
-          </a:xfrm>
-          <a:prstGeom prst="rect">
-            <a:avLst/>
-          </a:prstGeom>
-          <a:noFill/>
-          <a:ln/>
-        </p:spPr>
-        <p:txBody>
-          <a:bodyPr wrap="square" rtlCol="0" anchor="t">
-            <a:spAutoFit/>
-          </a:bodyPr>
-          <a:lstStyle/>
-          <a:p>
-            <a:pPr indent="0" marL="0">
-              <a:buNone/>
-            </a:pPr>
-            <a:r>
-              <a:rPr lang="en-US" sz="1400" dirty="0">
-                <a:solidFill>
-                  <a:srgbClr val="1A1A1A"/>
-                </a:solidFill>
-                <a:latin typeface="Calibri" pitchFamily="34" charset="0"/>
-                <a:ea typeface="Calibri" pitchFamily="34" charset="-122"/>
-                <a:cs typeface="Calibri" pitchFamily="34" charset="-120"/>
-              </a:rPr>
-              <a:t>Explain it: your question aloud, what it omits, and where your data actually comes from. (Competencies 2, 6.)</a:t>
-            </a:r>
-            <a:endParaRPr lang="en-US" sz="1400" dirty="0"/>
+              <a:t>The Data Biography answers the rest: where it came from, who is missing, what it cannot say.</a:t>
+            </a:r>
+            <a:endParaRPr lang="en-US" sz="1650" dirty="0"/>
           </a:p>
         </p:txBody>
       </p:sp>
@@ -2984,8 +3068,8 @@
         </p:nvSpPr>
         <p:spPr>
           <a:xfrm>
-            <a:off x="640080" y="640080"/>
-            <a:ext cx="10058400" cy="320040"/>
+            <a:off x="640080" y="731520"/>
+            <a:ext cx="10058400" cy="731520"/>
           </a:xfrm>
           <a:prstGeom prst="rect">
             <a:avLst/>
@@ -3001,30 +3085,111 @@
               <a:buNone/>
             </a:pPr>
             <a:r>
-              <a:rPr lang="en-US" sz="1300" b="1" spc="300" kern="0" dirty="0">
-                <a:solidFill>
-                  <a:srgbClr val="7A3B2E"/>
+              <a:rPr lang="en-US" sz="3000" b="1" dirty="0">
+                <a:solidFill>
+                  <a:srgbClr val="1A1A1A"/>
+                </a:solidFill>
+                <a:latin typeface="Cambria" pitchFamily="34" charset="0"/>
+                <a:ea typeface="Cambria" pitchFamily="34" charset="-122"/>
+                <a:cs typeface="Cambria" pitchFamily="34" charset="-120"/>
+              </a:rPr>
+              <a:t>Three modes today</a:t>
+            </a:r>
+            <a:endParaRPr lang="en-US" sz="3000" dirty="0"/>
+          </a:p>
+        </p:txBody>
+      </p:sp>
+      <p:sp>
+        <p:nvSpPr>
+          <p:cNvPr id="3" name="Text 1"/>
+          <p:cNvSpPr/>
+          <p:nvPr/>
+        </p:nvSpPr>
+        <p:spPr>
+          <a:xfrm>
+            <a:off x="640080" y="1417320"/>
+            <a:ext cx="10058400" cy="365760"/>
+          </a:xfrm>
+          <a:prstGeom prst="rect">
+            <a:avLst/>
+          </a:prstGeom>
+          <a:noFill/>
+          <a:ln/>
+        </p:spPr>
+        <p:txBody>
+          <a:bodyPr wrap="square" rtlCol="0" anchor="ctr"/>
+          <a:lstStyle/>
+          <a:p>
+            <a:pPr indent="0" marL="0">
+              <a:buNone/>
+            </a:pPr>
+            <a:r>
+              <a:rPr lang="en-US" sz="1400" i="1" dirty="0">
+                <a:solidFill>
+                  <a:srgbClr val="6B6B63"/>
                 </a:solidFill>
                 <a:latin typeface="Calibri" pitchFamily="34" charset="0"/>
                 <a:ea typeface="Calibri" pitchFamily="34" charset="-122"/>
                 <a:cs typeface="Calibri" pitchFamily="34" charset="-120"/>
               </a:rPr>
-              <a:t>HOW THIS WEEK CONNECTS</a:t>
-            </a:r>
-            <a:endParaRPr lang="en-US" sz="1300" dirty="0"/>
-          </a:p>
-        </p:txBody>
-      </p:sp>
-      <p:sp>
-        <p:nvSpPr>
-          <p:cNvPr id="3" name="Text 1"/>
-          <p:cNvSpPr/>
-          <p:nvPr/>
-        </p:nvSpPr>
-        <p:spPr>
-          <a:xfrm>
-            <a:off x="640080" y="987552"/>
-            <a:ext cx="10058400" cy="640080"/>
+              <a:t>about a third of the session each</a:t>
+            </a:r>
+            <a:endParaRPr lang="en-US" sz="1400" dirty="0"/>
+          </a:p>
+        </p:txBody>
+      </p:sp>
+      <p:sp>
+        <p:nvSpPr>
+          <p:cNvPr id="4" name="Shape 2"/>
+          <p:cNvSpPr/>
+          <p:nvPr/>
+        </p:nvSpPr>
+        <p:spPr>
+          <a:xfrm>
+            <a:off x="640080" y="2194560"/>
+            <a:ext cx="3383280" cy="3291840"/>
+          </a:xfrm>
+          <a:prstGeom prst="roundRect">
+            <a:avLst>
+              <a:gd name="adj" fmla="val 3333"/>
+            </a:avLst>
+          </a:prstGeom>
+          <a:solidFill>
+            <a:srgbClr val="F4EEE8"/>
+          </a:solidFill>
+          <a:ln/>
+        </p:spPr>
+      </p:sp>
+      <p:sp>
+        <p:nvSpPr>
+          <p:cNvPr id="5" name="Shape 3"/>
+          <p:cNvSpPr/>
+          <p:nvPr/>
+        </p:nvSpPr>
+        <p:spPr>
+          <a:xfrm>
+            <a:off x="1051560" y="2606040"/>
+            <a:ext cx="548640" cy="548640"/>
+          </a:xfrm>
+          <a:prstGeom prst="ellipse">
+            <a:avLst/>
+          </a:prstGeom>
+          <a:solidFill>
+            <a:srgbClr val="7A3B2E"/>
+          </a:solidFill>
+          <a:ln/>
+        </p:spPr>
+      </p:sp>
+      <p:sp>
+        <p:nvSpPr>
+          <p:cNvPr id="6" name="Text 4"/>
+          <p:cNvSpPr/>
+          <p:nvPr/>
+        </p:nvSpPr>
+        <p:spPr>
+          <a:xfrm>
+            <a:off x="1005840" y="3383280"/>
+            <a:ext cx="2651760" cy="548640"/>
           </a:xfrm>
           <a:prstGeom prst="rect">
             <a:avLst/>
@@ -3040,7 +3205,7 @@
               <a:buNone/>
             </a:pPr>
             <a:r>
-              <a:rPr lang="en-US" sz="2800" b="1" dirty="0">
+              <a:rPr lang="en-US" sz="2100" b="1" dirty="0">
                 <a:solidFill>
                   <a:srgbClr val="1A1A1A"/>
                 </a:solidFill>
@@ -3048,44 +3213,108 @@
                 <a:ea typeface="Cambria" pitchFamily="34" charset="-122"/>
                 <a:cs typeface="Cambria" pitchFamily="34" charset="-120"/>
               </a:rPr>
-              <a:t>The course's through-lines</a:t>
-            </a:r>
-            <a:endParaRPr lang="en-US" sz="2800" dirty="0"/>
-          </a:p>
-        </p:txBody>
-      </p:sp>
-      <p:sp>
-        <p:nvSpPr>
-          <p:cNvPr id="4" name="Shape 2"/>
-          <p:cNvSpPr/>
-          <p:nvPr/>
-        </p:nvSpPr>
-        <p:spPr>
-          <a:xfrm>
-            <a:off x="640080" y="2057400"/>
-            <a:ext cx="457200" cy="457200"/>
+              <a:t>Lecture / demo</a:t>
+            </a:r>
+            <a:endParaRPr lang="en-US" sz="2100" dirty="0"/>
+          </a:p>
+        </p:txBody>
+      </p:sp>
+      <p:sp>
+        <p:nvSpPr>
+          <p:cNvPr id="7" name="Text 5"/>
+          <p:cNvSpPr/>
+          <p:nvPr/>
+        </p:nvSpPr>
+        <p:spPr>
+          <a:xfrm>
+            <a:off x="1005840" y="3977640"/>
+            <a:ext cx="2651760" cy="1371600"/>
+          </a:xfrm>
+          <a:prstGeom prst="rect">
+            <a:avLst/>
+          </a:prstGeom>
+          <a:noFill/>
+          <a:ln/>
+        </p:spPr>
+        <p:txBody>
+          <a:bodyPr wrap="square" rtlCol="0" anchor="t">
+            <a:spAutoFit/>
+          </a:bodyPr>
+          <a:lstStyle/>
+          <a:p>
+            <a:pPr indent="0" marL="0">
+              <a:lnSpc>
+                <a:spcPct val="115000"/>
+              </a:lnSpc>
+              <a:buNone/>
+            </a:pPr>
+            <a:r>
+              <a:rPr lang="en-US" sz="1500" dirty="0">
+                <a:solidFill>
+                  <a:srgbClr val="1A1A1A"/>
+                </a:solidFill>
+                <a:latin typeface="Calibri" pitchFamily="34" charset="0"/>
+                <a:ea typeface="Calibri" pitchFamily="34" charset="-122"/>
+                <a:cs typeface="Calibri" pitchFamily="34" charset="-120"/>
+              </a:rPr>
+              <a:t>Neural networks and word embeddings, plus getting data off the web</a:t>
+            </a:r>
+            <a:endParaRPr lang="en-US" sz="1500" dirty="0"/>
+          </a:p>
+        </p:txBody>
+      </p:sp>
+      <p:sp>
+        <p:nvSpPr>
+          <p:cNvPr id="8" name="Shape 6"/>
+          <p:cNvSpPr/>
+          <p:nvPr/>
+        </p:nvSpPr>
+        <p:spPr>
+          <a:xfrm>
+            <a:off x="4526280" y="2194560"/>
+            <a:ext cx="3383280" cy="3291840"/>
           </a:xfrm>
           <a:prstGeom prst="roundRect">
             <a:avLst>
-              <a:gd name="adj" fmla="val 16000"/>
+              <a:gd name="adj" fmla="val 3333"/>
             </a:avLst>
           </a:prstGeom>
           <a:solidFill>
-            <a:srgbClr val="7A3B2E"/>
-          </a:solidFill>
-          <a:ln/>
-        </p:spPr>
-      </p:sp>
-      <p:sp>
-        <p:nvSpPr>
-          <p:cNvPr id="5" name="Text 3"/>
-          <p:cNvSpPr/>
-          <p:nvPr/>
-        </p:nvSpPr>
-        <p:spPr>
-          <a:xfrm>
-            <a:off x="640080" y="2057400"/>
-            <a:ext cx="457200" cy="457200"/>
+            <a:srgbClr val="F4EEE8"/>
+          </a:solidFill>
+          <a:ln/>
+        </p:spPr>
+      </p:sp>
+      <p:sp>
+        <p:nvSpPr>
+          <p:cNvPr id="9" name="Shape 7"/>
+          <p:cNvSpPr/>
+          <p:nvPr/>
+        </p:nvSpPr>
+        <p:spPr>
+          <a:xfrm>
+            <a:off x="4937760" y="2606040"/>
+            <a:ext cx="548640" cy="548640"/>
+          </a:xfrm>
+          <a:prstGeom prst="ellipse">
+            <a:avLst/>
+          </a:prstGeom>
+          <a:solidFill>
+            <a:srgbClr val="3F6F5F"/>
+          </a:solidFill>
+          <a:ln/>
+        </p:spPr>
+      </p:sp>
+      <p:sp>
+        <p:nvSpPr>
+          <p:cNvPr id="10" name="Text 8"/>
+          <p:cNvSpPr/>
+          <p:nvPr/>
+        </p:nvSpPr>
+        <p:spPr>
+          <a:xfrm>
+            <a:off x="4892040" y="3383280"/>
+            <a:ext cx="2651760" cy="548640"/>
           </a:xfrm>
           <a:prstGeom prst="rect">
             <a:avLst/>
@@ -3097,34 +3326,120 @@
           <a:bodyPr wrap="square" rtlCol="0" anchor="ctr"/>
           <a:lstStyle/>
           <a:p>
-            <a:pPr algn="ctr" indent="0" marL="0">
-              <a:buNone/>
-            </a:pPr>
-            <a:r>
-              <a:rPr lang="en-US" sz="2000" b="1" dirty="0">
-                <a:solidFill>
-                  <a:srgbClr val="FFFFFF"/>
+            <a:pPr indent="0" marL="0">
+              <a:buNone/>
+            </a:pPr>
+            <a:r>
+              <a:rPr lang="en-US" sz="2100" b="1" dirty="0">
+                <a:solidFill>
+                  <a:srgbClr val="1A1A1A"/>
                 </a:solidFill>
                 <a:latin typeface="Cambria" pitchFamily="34" charset="0"/>
                 <a:ea typeface="Cambria" pitchFamily="34" charset="-122"/>
                 <a:cs typeface="Cambria" pitchFamily="34" charset="-120"/>
               </a:rPr>
-              <a:t>1</a:t>
-            </a:r>
-            <a:endParaRPr lang="en-US" sz="2000" dirty="0"/>
-          </a:p>
-        </p:txBody>
-      </p:sp>
-      <p:sp>
-        <p:nvSpPr>
-          <p:cNvPr id="6" name="Text 4"/>
-          <p:cNvSpPr/>
-          <p:nvPr/>
-        </p:nvSpPr>
-        <p:spPr>
-          <a:xfrm>
-            <a:off x="1371600" y="2020824"/>
-            <a:ext cx="10332720" cy="411480"/>
+              <a:t>Workshop</a:t>
+            </a:r>
+            <a:endParaRPr lang="en-US" sz="2100" dirty="0"/>
+          </a:p>
+        </p:txBody>
+      </p:sp>
+      <p:sp>
+        <p:nvSpPr>
+          <p:cNvPr id="11" name="Text 9"/>
+          <p:cNvSpPr/>
+          <p:nvPr/>
+        </p:nvSpPr>
+        <p:spPr>
+          <a:xfrm>
+            <a:off x="4892040" y="3977640"/>
+            <a:ext cx="2651760" cy="1371600"/>
+          </a:xfrm>
+          <a:prstGeom prst="rect">
+            <a:avLst/>
+          </a:prstGeom>
+          <a:noFill/>
+          <a:ln/>
+        </p:spPr>
+        <p:txBody>
+          <a:bodyPr wrap="square" rtlCol="0" anchor="t">
+            <a:spAutoFit/>
+          </a:bodyPr>
+          <a:lstStyle/>
+          <a:p>
+            <a:pPr indent="0" marL="0">
+              <a:lnSpc>
+                <a:spcPct val="115000"/>
+              </a:lnSpc>
+              <a:buNone/>
+            </a:pPr>
+            <a:r>
+              <a:rPr lang="en-US" sz="1500" dirty="0">
+                <a:solidFill>
+                  <a:srgbClr val="1A1A1A"/>
+                </a:solidFill>
+                <a:latin typeface="Calibri" pitchFamily="34" charset="0"/>
+                <a:ea typeface="Calibri" pitchFamily="34" charset="-122"/>
+                <a:cs typeface="Calibri" pitchFamily="34" charset="-120"/>
+              </a:rPr>
+              <a:t>Build hands-on on your own data.</a:t>
+            </a:r>
+            <a:endParaRPr lang="en-US" sz="1500" dirty="0"/>
+          </a:p>
+        </p:txBody>
+      </p:sp>
+      <p:sp>
+        <p:nvSpPr>
+          <p:cNvPr id="12" name="Shape 10"/>
+          <p:cNvSpPr/>
+          <p:nvPr/>
+        </p:nvSpPr>
+        <p:spPr>
+          <a:xfrm>
+            <a:off x="8412480" y="2194560"/>
+            <a:ext cx="3383280" cy="3291840"/>
+          </a:xfrm>
+          <a:prstGeom prst="roundRect">
+            <a:avLst>
+              <a:gd name="adj" fmla="val 3333"/>
+            </a:avLst>
+          </a:prstGeom>
+          <a:solidFill>
+            <a:srgbClr val="F4EEE8"/>
+          </a:solidFill>
+          <a:ln/>
+        </p:spPr>
+      </p:sp>
+      <p:sp>
+        <p:nvSpPr>
+          <p:cNvPr id="13" name="Shape 11"/>
+          <p:cNvSpPr/>
+          <p:nvPr/>
+        </p:nvSpPr>
+        <p:spPr>
+          <a:xfrm>
+            <a:off x="8823960" y="2606040"/>
+            <a:ext cx="548640" cy="548640"/>
+          </a:xfrm>
+          <a:prstGeom prst="ellipse">
+            <a:avLst/>
+          </a:prstGeom>
+          <a:solidFill>
+            <a:srgbClr val="B9852F"/>
+          </a:solidFill>
+          <a:ln/>
+        </p:spPr>
+      </p:sp>
+      <p:sp>
+        <p:nvSpPr>
+          <p:cNvPr id="14" name="Text 12"/>
+          <p:cNvSpPr/>
+          <p:nvPr/>
+        </p:nvSpPr>
+        <p:spPr>
+          <a:xfrm>
+            <a:off x="8778240" y="3383280"/>
+            <a:ext cx="2651760" cy="548640"/>
           </a:xfrm>
           <a:prstGeom prst="rect">
             <a:avLst/>
@@ -3140,30 +3455,30 @@
               <a:buNone/>
             </a:pPr>
             <a:r>
-              <a:rPr lang="en-US" sz="1900" b="1" dirty="0">
-                <a:solidFill>
-                  <a:srgbClr val="7A3B2E"/>
+              <a:rPr lang="en-US" sz="2100" b="1" dirty="0">
+                <a:solidFill>
+                  <a:srgbClr val="1A1A1A"/>
                 </a:solidFill>
                 <a:latin typeface="Cambria" pitchFamily="34" charset="0"/>
                 <a:ea typeface="Cambria" pitchFamily="34" charset="-122"/>
                 <a:cs typeface="Cambria" pitchFamily="34" charset="-120"/>
               </a:rPr>
-              <a:t>Whose data</a:t>
-            </a:r>
-            <a:endParaRPr lang="en-US" sz="1900" dirty="0"/>
-          </a:p>
-        </p:txBody>
-      </p:sp>
-      <p:sp>
-        <p:nvSpPr>
-          <p:cNvPr id="7" name="Text 5"/>
-          <p:cNvSpPr/>
-          <p:nvPr/>
-        </p:nvSpPr>
-        <p:spPr>
-          <a:xfrm>
-            <a:off x="1371600" y="2441448"/>
-            <a:ext cx="10332720" cy="914400"/>
+              <a:t>Discussion</a:t>
+            </a:r>
+            <a:endParaRPr lang="en-US" sz="2100" dirty="0"/>
+          </a:p>
+        </p:txBody>
+      </p:sp>
+      <p:sp>
+        <p:nvSpPr>
+          <p:cNvPr id="15" name="Text 13"/>
+          <p:cNvSpPr/>
+          <p:nvPr/>
+        </p:nvSpPr>
+        <p:spPr>
+          <a:xfrm>
+            <a:off x="8778240" y="3977640"/>
+            <a:ext cx="2651760" cy="1371600"/>
           </a:xfrm>
           <a:prstGeom prst="rect">
             <a:avLst/>
@@ -3179,12 +3494,12 @@
           <a:p>
             <a:pPr indent="0" marL="0">
               <a:lnSpc>
-                <a:spcPct val="112000"/>
+                <a:spcPct val="115000"/>
               </a:lnSpc>
               <a:buNone/>
             </a:pPr>
             <a:r>
-              <a:rPr lang="en-US" sz="1450" dirty="0">
+              <a:rPr lang="en-US" sz="1500" dirty="0">
                 <a:solidFill>
                   <a:srgbClr val="1A1A1A"/>
                 </a:solidFill>
@@ -3192,297 +3507,9 @@
                 <a:ea typeface="Calibri" pitchFamily="34" charset="-122"/>
                 <a:cs typeface="Calibri" pitchFamily="34" charset="-120"/>
               </a:rPr>
-              <a:t>The Data Biography: where it came from, who is missing, what it cannot say.</a:t>
-            </a:r>
-            <a:endParaRPr lang="en-US" sz="1450" dirty="0"/>
-          </a:p>
-        </p:txBody>
-      </p:sp>
-      <p:sp>
-        <p:nvSpPr>
-          <p:cNvPr id="8" name="Shape 6"/>
-          <p:cNvSpPr/>
-          <p:nvPr/>
-        </p:nvSpPr>
-        <p:spPr>
-          <a:xfrm>
-            <a:off x="640080" y="3520440"/>
-            <a:ext cx="457200" cy="457200"/>
-          </a:xfrm>
-          <a:prstGeom prst="roundRect">
-            <a:avLst>
-              <a:gd name="adj" fmla="val 16000"/>
-            </a:avLst>
-          </a:prstGeom>
-          <a:solidFill>
-            <a:srgbClr val="3F6F5F"/>
-          </a:solidFill>
-          <a:ln/>
-        </p:spPr>
-      </p:sp>
-      <p:sp>
-        <p:nvSpPr>
-          <p:cNvPr id="9" name="Text 7"/>
-          <p:cNvSpPr/>
-          <p:nvPr/>
-        </p:nvSpPr>
-        <p:spPr>
-          <a:xfrm>
-            <a:off x="640080" y="3520440"/>
-            <a:ext cx="457200" cy="457200"/>
-          </a:xfrm>
-          <a:prstGeom prst="rect">
-            <a:avLst/>
-          </a:prstGeom>
-          <a:noFill/>
-          <a:ln/>
-        </p:spPr>
-        <p:txBody>
-          <a:bodyPr wrap="square" rtlCol="0" anchor="ctr"/>
-          <a:lstStyle/>
-          <a:p>
-            <a:pPr algn="ctr" indent="0" marL="0">
-              <a:buNone/>
-            </a:pPr>
-            <a:r>
-              <a:rPr lang="en-US" sz="2000" b="1" dirty="0">
-                <a:solidFill>
-                  <a:srgbClr val="FFFFFF"/>
-                </a:solidFill>
-                <a:latin typeface="Cambria" pitchFamily="34" charset="0"/>
-                <a:ea typeface="Cambria" pitchFamily="34" charset="-122"/>
-                <a:cs typeface="Cambria" pitchFamily="34" charset="-120"/>
-              </a:rPr>
-              <a:t>2</a:t>
-            </a:r>
-            <a:endParaRPr lang="en-US" sz="2000" dirty="0"/>
-          </a:p>
-        </p:txBody>
-      </p:sp>
-      <p:sp>
-        <p:nvSpPr>
-          <p:cNvPr id="10" name="Text 8"/>
-          <p:cNvSpPr/>
-          <p:nvPr/>
-        </p:nvSpPr>
-        <p:spPr>
-          <a:xfrm>
-            <a:off x="1371600" y="3483864"/>
-            <a:ext cx="10332720" cy="411480"/>
-          </a:xfrm>
-          <a:prstGeom prst="rect">
-            <a:avLst/>
-          </a:prstGeom>
-          <a:noFill/>
-          <a:ln/>
-        </p:spPr>
-        <p:txBody>
-          <a:bodyPr wrap="square" rtlCol="0" anchor="ctr"/>
-          <a:lstStyle/>
-          <a:p>
-            <a:pPr indent="0" marL="0">
-              <a:buNone/>
-            </a:pPr>
-            <a:r>
-              <a:rPr lang="en-US" sz="1900" b="1" dirty="0">
-                <a:solidFill>
-                  <a:srgbClr val="3F6F5F"/>
-                </a:solidFill>
-                <a:latin typeface="Cambria" pitchFamily="34" charset="0"/>
-                <a:ea typeface="Cambria" pitchFamily="34" charset="-122"/>
-                <a:cs typeface="Cambria" pitchFamily="34" charset="-120"/>
-              </a:rPr>
-              <a:t>The licensing line</a:t>
-            </a:r>
-            <a:endParaRPr lang="en-US" sz="1900" dirty="0"/>
-          </a:p>
-        </p:txBody>
-      </p:sp>
-      <p:sp>
-        <p:nvSpPr>
-          <p:cNvPr id="11" name="Text 9"/>
-          <p:cNvSpPr/>
-          <p:nvPr/>
-        </p:nvSpPr>
-        <p:spPr>
-          <a:xfrm>
-            <a:off x="1371600" y="3904488"/>
-            <a:ext cx="10332720" cy="914400"/>
-          </a:xfrm>
-          <a:prstGeom prst="rect">
-            <a:avLst/>
-          </a:prstGeom>
-          <a:noFill/>
-          <a:ln/>
-        </p:spPr>
-        <p:txBody>
-          <a:bodyPr wrap="square" rtlCol="0" anchor="t">
-            <a:spAutoFit/>
-          </a:bodyPr>
-          <a:lstStyle/>
-          <a:p>
-            <a:pPr indent="0" marL="0">
-              <a:lnSpc>
-                <a:spcPct val="112000"/>
-              </a:lnSpc>
-              <a:buNone/>
-            </a:pPr>
-            <a:r>
-              <a:rPr lang="en-US" sz="1450" dirty="0">
-                <a:solidFill>
-                  <a:srgbClr val="1A1A1A"/>
-                </a:solidFill>
-                <a:latin typeface="Calibri" pitchFamily="34" charset="0"/>
-                <a:ea typeface="Calibri" pitchFamily="34" charset="-122"/>
-                <a:cs typeface="Calibri" pitchFamily="34" charset="-120"/>
-              </a:rPr>
-              <a:t>CC0, to scrape-with-care, to never (LibGen). Judgment, not a rulebook.</a:t>
-            </a:r>
-            <a:endParaRPr lang="en-US" sz="1450" dirty="0"/>
-          </a:p>
-        </p:txBody>
-      </p:sp>
-      <p:sp>
-        <p:nvSpPr>
-          <p:cNvPr id="12" name="Shape 10"/>
-          <p:cNvSpPr/>
-          <p:nvPr/>
-        </p:nvSpPr>
-        <p:spPr>
-          <a:xfrm>
-            <a:off x="640080" y="4983480"/>
-            <a:ext cx="457200" cy="457200"/>
-          </a:xfrm>
-          <a:prstGeom prst="roundRect">
-            <a:avLst>
-              <a:gd name="adj" fmla="val 16000"/>
-            </a:avLst>
-          </a:prstGeom>
-          <a:solidFill>
-            <a:srgbClr val="B9852F"/>
-          </a:solidFill>
-          <a:ln/>
-        </p:spPr>
-      </p:sp>
-      <p:sp>
-        <p:nvSpPr>
-          <p:cNvPr id="13" name="Text 11"/>
-          <p:cNvSpPr/>
-          <p:nvPr/>
-        </p:nvSpPr>
-        <p:spPr>
-          <a:xfrm>
-            <a:off x="640080" y="4983480"/>
-            <a:ext cx="457200" cy="457200"/>
-          </a:xfrm>
-          <a:prstGeom prst="rect">
-            <a:avLst/>
-          </a:prstGeom>
-          <a:noFill/>
-          <a:ln/>
-        </p:spPr>
-        <p:txBody>
-          <a:bodyPr wrap="square" rtlCol="0" anchor="ctr"/>
-          <a:lstStyle/>
-          <a:p>
-            <a:pPr algn="ctr" indent="0" marL="0">
-              <a:buNone/>
-            </a:pPr>
-            <a:r>
-              <a:rPr lang="en-US" sz="2000" b="1" dirty="0">
-                <a:solidFill>
-                  <a:srgbClr val="FFFFFF"/>
-                </a:solidFill>
-                <a:latin typeface="Cambria" pitchFamily="34" charset="0"/>
-                <a:ea typeface="Cambria" pitchFamily="34" charset="-122"/>
-                <a:cs typeface="Cambria" pitchFamily="34" charset="-120"/>
-              </a:rPr>
-              <a:t>3</a:t>
-            </a:r>
-            <a:endParaRPr lang="en-US" sz="2000" dirty="0"/>
-          </a:p>
-        </p:txBody>
-      </p:sp>
-      <p:sp>
-        <p:nvSpPr>
-          <p:cNvPr id="14" name="Text 12"/>
-          <p:cNvSpPr/>
-          <p:nvPr/>
-        </p:nvSpPr>
-        <p:spPr>
-          <a:xfrm>
-            <a:off x="1371600" y="4946904"/>
-            <a:ext cx="10332720" cy="411480"/>
-          </a:xfrm>
-          <a:prstGeom prst="rect">
-            <a:avLst/>
-          </a:prstGeom>
-          <a:noFill/>
-          <a:ln/>
-        </p:spPr>
-        <p:txBody>
-          <a:bodyPr wrap="square" rtlCol="0" anchor="ctr"/>
-          <a:lstStyle/>
-          <a:p>
-            <a:pPr indent="0" marL="0">
-              <a:buNone/>
-            </a:pPr>
-            <a:r>
-              <a:rPr lang="en-US" sz="1900" b="1" dirty="0">
-                <a:solidFill>
-                  <a:srgbClr val="B9852F"/>
-                </a:solidFill>
-                <a:latin typeface="Cambria" pitchFamily="34" charset="0"/>
-                <a:ea typeface="Cambria" pitchFamily="34" charset="-122"/>
-                <a:cs typeface="Cambria" pitchFamily="34" charset="-120"/>
-              </a:rPr>
-              <a:t>Make something real</a:t>
-            </a:r>
-            <a:endParaRPr lang="en-US" sz="1900" dirty="0"/>
-          </a:p>
-        </p:txBody>
-      </p:sp>
-      <p:sp>
-        <p:nvSpPr>
-          <p:cNvPr id="15" name="Text 13"/>
-          <p:cNvSpPr/>
-          <p:nvPr/>
-        </p:nvSpPr>
-        <p:spPr>
-          <a:xfrm>
-            <a:off x="1371600" y="5367528"/>
-            <a:ext cx="10332720" cy="914400"/>
-          </a:xfrm>
-          <a:prstGeom prst="rect">
-            <a:avLst/>
-          </a:prstGeom>
-          <a:noFill/>
-          <a:ln/>
-        </p:spPr>
-        <p:txBody>
-          <a:bodyPr wrap="square" rtlCol="0" anchor="t">
-            <a:spAutoFit/>
-          </a:bodyPr>
-          <a:lstStyle/>
-          <a:p>
-            <a:pPr indent="0" marL="0">
-              <a:lnSpc>
-                <a:spcPct val="112000"/>
-              </a:lnSpc>
-              <a:buNone/>
-            </a:pPr>
-            <a:r>
-              <a:rPr lang="en-US" sz="1450" dirty="0">
-                <a:solidFill>
-                  <a:srgbClr val="1A1A1A"/>
-                </a:solidFill>
-                <a:latin typeface="Calibri" pitchFamily="34" charset="0"/>
-                <a:ea typeface="Calibri" pitchFamily="34" charset="-122"/>
-                <a:cs typeface="Calibri" pitchFamily="34" charset="-120"/>
-              </a:rPr>
-              <a:t>You leave with a real corpus in hand and a project repo born.</a:t>
-            </a:r>
-            <a:endParaRPr lang="en-US" sz="1450" dirty="0"/>
+              <a:t>Interrogate the study, debate it, or critique each other's work.</a:t>
+            </a:r>
+            <a:endParaRPr lang="en-US" sz="1500" dirty="0"/>
           </a:p>
         </p:txBody>
       </p:sp>
@@ -3497,6 +3524,1904 @@
 <file path=ppt/slides/slide12.xml><?xml version="1.0" encoding="utf-8"?>
 <p:sld xmlns:a="http://schemas.openxmlformats.org/drawingml/2006/main" xmlns:r="http://schemas.openxmlformats.org/officeDocument/2006/relationships" xmlns:p="http://schemas.openxmlformats.org/presentationml/2006/main">
   <p:cSld name="Slide 12">
+    <p:bg>
+      <p:bgPr>
+        <a:solidFill>
+          <a:srgbClr val="FFFFFF"/>
+        </a:solidFill>
+      </p:bgPr>
+    </p:bg>
+    <p:spTree>
+      <p:nvGrpSpPr>
+        <p:cNvPr id="1" name=""/>
+        <p:cNvGrpSpPr/>
+        <p:nvPr/>
+      </p:nvGrpSpPr>
+      <p:grpSpPr>
+        <a:xfrm>
+          <a:off x="0" y="0"/>
+          <a:ext cx="0" cy="0"/>
+          <a:chOff x="0" y="0"/>
+          <a:chExt cx="0" cy="0"/>
+        </a:xfrm>
+      </p:grpSpPr>
+      <p:sp>
+        <p:nvSpPr>
+          <p:cNvPr id="2" name="Text 0"/>
+          <p:cNvSpPr/>
+          <p:nvPr/>
+        </p:nvSpPr>
+        <p:spPr>
+          <a:xfrm>
+            <a:off x="640080" y="640080"/>
+            <a:ext cx="10058400" cy="731520"/>
+          </a:xfrm>
+          <a:prstGeom prst="rect">
+            <a:avLst/>
+          </a:prstGeom>
+          <a:noFill/>
+          <a:ln/>
+        </p:spPr>
+        <p:txBody>
+          <a:bodyPr wrap="square" rtlCol="0" anchor="ctr"/>
+          <a:lstStyle/>
+          <a:p>
+            <a:pPr indent="0" marL="0">
+              <a:buNone/>
+            </a:pPr>
+            <a:r>
+              <a:rPr lang="en-US" sz="3000" b="1" dirty="0">
+                <a:solidFill>
+                  <a:srgbClr val="1A1A1A"/>
+                </a:solidFill>
+                <a:latin typeface="Cambria" pitchFamily="34" charset="0"/>
+                <a:ea typeface="Cambria" pitchFamily="34" charset="-122"/>
+                <a:cs typeface="Cambria" pitchFamily="34" charset="-120"/>
+              </a:rPr>
+              <a:t>The session</a:t>
+            </a:r>
+            <a:endParaRPr lang="en-US" sz="3000" dirty="0"/>
+          </a:p>
+        </p:txBody>
+      </p:sp>
+      <p:sp>
+        <p:nvSpPr>
+          <p:cNvPr id="3" name="Shape 1"/>
+          <p:cNvSpPr/>
+          <p:nvPr/>
+        </p:nvSpPr>
+        <p:spPr>
+          <a:xfrm>
+            <a:off x="640080" y="1572768"/>
+            <a:ext cx="868680" cy="457200"/>
+          </a:xfrm>
+          <a:prstGeom prst="roundRect">
+            <a:avLst>
+              <a:gd name="adj" fmla="val 12000"/>
+            </a:avLst>
+          </a:prstGeom>
+          <a:solidFill>
+            <a:srgbClr val="7A3B2E"/>
+          </a:solidFill>
+          <a:ln/>
+        </p:spPr>
+      </p:sp>
+      <p:sp>
+        <p:nvSpPr>
+          <p:cNvPr id="4" name="Text 2"/>
+          <p:cNvSpPr/>
+          <p:nvPr/>
+        </p:nvSpPr>
+        <p:spPr>
+          <a:xfrm>
+            <a:off x="640080" y="1572768"/>
+            <a:ext cx="868680" cy="457200"/>
+          </a:xfrm>
+          <a:prstGeom prst="rect">
+            <a:avLst/>
+          </a:prstGeom>
+          <a:noFill/>
+          <a:ln/>
+        </p:spPr>
+        <p:txBody>
+          <a:bodyPr wrap="square" rtlCol="0" anchor="ctr"/>
+          <a:lstStyle/>
+          <a:p>
+            <a:pPr algn="ctr" indent="0" marL="0">
+              <a:buNone/>
+            </a:pPr>
+            <a:r>
+              <a:rPr lang="en-US" sz="1100" b="1" dirty="0">
+                <a:solidFill>
+                  <a:srgbClr val="FFFFFF"/>
+                </a:solidFill>
+                <a:latin typeface="Calibri" pitchFamily="34" charset="0"/>
+                <a:ea typeface="Calibri" pitchFamily="34" charset="-122"/>
+                <a:cs typeface="Calibri" pitchFamily="34" charset="-120"/>
+              </a:rPr>
+              <a:t>0:00</a:t>
+            </a:r>
+            <a:endParaRPr lang="en-US" sz="1100" dirty="0"/>
+          </a:p>
+        </p:txBody>
+      </p:sp>
+      <p:sp>
+        <p:nvSpPr>
+          <p:cNvPr id="5" name="Text 3"/>
+          <p:cNvSpPr/>
+          <p:nvPr/>
+        </p:nvSpPr>
+        <p:spPr>
+          <a:xfrm>
+            <a:off x="1691640" y="1554480"/>
+            <a:ext cx="9646920" cy="566928"/>
+          </a:xfrm>
+          <a:prstGeom prst="rect">
+            <a:avLst/>
+          </a:prstGeom>
+          <a:noFill/>
+          <a:ln/>
+        </p:spPr>
+        <p:txBody>
+          <a:bodyPr wrap="square" rtlCol="0" anchor="ctr">
+            <a:spAutoFit/>
+          </a:bodyPr>
+          <a:lstStyle/>
+          <a:p>
+            <a:pPr indent="0" marL="0">
+              <a:buNone/>
+            </a:pPr>
+            <a:r>
+              <a:rPr lang="en-US" sz="1250" dirty="0">
+                <a:solidFill>
+                  <a:srgbClr val="1A1A1A"/>
+                </a:solidFill>
+                <a:latin typeface="Calibri" pitchFamily="34" charset="0"/>
+                <a:ea typeface="Calibri" pitchFamily="34" charset="-122"/>
+                <a:cs typeface="Calibri" pitchFamily="34" charset="-120"/>
+              </a:rPr>
+              <a:t>Warm-up: where Week 3 left off, and one sentence on where today goes. The classifier you built is one neuron; today it grows.</a:t>
+            </a:r>
+            <a:endParaRPr lang="en-US" sz="1250" dirty="0"/>
+          </a:p>
+        </p:txBody>
+      </p:sp>
+      <p:sp>
+        <p:nvSpPr>
+          <p:cNvPr id="6" name="Shape 4"/>
+          <p:cNvSpPr/>
+          <p:nvPr/>
+        </p:nvSpPr>
+        <p:spPr>
+          <a:xfrm>
+            <a:off x="640080" y="2139696"/>
+            <a:ext cx="868680" cy="457200"/>
+          </a:xfrm>
+          <a:prstGeom prst="roundRect">
+            <a:avLst>
+              <a:gd name="adj" fmla="val 12000"/>
+            </a:avLst>
+          </a:prstGeom>
+          <a:solidFill>
+            <a:srgbClr val="7A3B2E"/>
+          </a:solidFill>
+          <a:ln/>
+        </p:spPr>
+      </p:sp>
+      <p:sp>
+        <p:nvSpPr>
+          <p:cNvPr id="7" name="Text 5"/>
+          <p:cNvSpPr/>
+          <p:nvPr/>
+        </p:nvSpPr>
+        <p:spPr>
+          <a:xfrm>
+            <a:off x="640080" y="2139696"/>
+            <a:ext cx="868680" cy="457200"/>
+          </a:xfrm>
+          <a:prstGeom prst="rect">
+            <a:avLst/>
+          </a:prstGeom>
+          <a:noFill/>
+          <a:ln/>
+        </p:spPr>
+        <p:txBody>
+          <a:bodyPr wrap="square" rtlCol="0" anchor="ctr"/>
+          <a:lstStyle/>
+          <a:p>
+            <a:pPr algn="ctr" indent="0" marL="0">
+              <a:buNone/>
+            </a:pPr>
+            <a:r>
+              <a:rPr lang="en-US" sz="1100" b="1" dirty="0">
+                <a:solidFill>
+                  <a:srgbClr val="FFFFFF"/>
+                </a:solidFill>
+                <a:latin typeface="Calibri" pitchFamily="34" charset="0"/>
+                <a:ea typeface="Calibri" pitchFamily="34" charset="-122"/>
+                <a:cs typeface="Calibri" pitchFamily="34" charset="-120"/>
+              </a:rPr>
+              <a:t>0:05</a:t>
+            </a:r>
+            <a:endParaRPr lang="en-US" sz="1100" dirty="0"/>
+          </a:p>
+        </p:txBody>
+      </p:sp>
+      <p:sp>
+        <p:nvSpPr>
+          <p:cNvPr id="8" name="Text 6"/>
+          <p:cNvSpPr/>
+          <p:nvPr/>
+        </p:nvSpPr>
+        <p:spPr>
+          <a:xfrm>
+            <a:off x="1691640" y="2121408"/>
+            <a:ext cx="9646920" cy="566928"/>
+          </a:xfrm>
+          <a:prstGeom prst="rect">
+            <a:avLst/>
+          </a:prstGeom>
+          <a:noFill/>
+          <a:ln/>
+        </p:spPr>
+        <p:txBody>
+          <a:bodyPr wrap="square" rtlCol="0" anchor="ctr">
+            <a:spAutoFit/>
+          </a:bodyPr>
+          <a:lstStyle/>
+          <a:p>
+            <a:pPr indent="0" marL="0">
+              <a:buNone/>
+            </a:pPr>
+            <a:r>
+              <a:rPr lang="en-US" sz="1250" dirty="0">
+                <a:solidFill>
+                  <a:srgbClr val="1A1A1A"/>
+                </a:solidFill>
+                <a:latin typeface="Calibri" pitchFamily="34" charset="0"/>
+                <a:ea typeface="Calibri" pitchFamily="34" charset="-122"/>
+                <a:cs typeface="Calibri" pitchFamily="34" charset="-120"/>
+              </a:rPr>
+              <a:t>Lecture one, from one neuron to a network (25 min). Your logistic regression, redrawn: inputs, one weight each, a sum, a squash. Then stack it, hidden layer first, and what stacking buys you: features nobody hand-wrote. Training as rolling downhill, loss and gradient descent without the calculus. TensorFlow Playground live on the spiral, watching hidden units carve the space. What it costs: the weights stop being readable, which is exactly the trade Week 7 asks you to accept.</a:t>
+            </a:r>
+            <a:endParaRPr lang="en-US" sz="1250" dirty="0"/>
+          </a:p>
+        </p:txBody>
+      </p:sp>
+      <p:sp>
+        <p:nvSpPr>
+          <p:cNvPr id="9" name="Shape 7"/>
+          <p:cNvSpPr/>
+          <p:nvPr/>
+        </p:nvSpPr>
+        <p:spPr>
+          <a:xfrm>
+            <a:off x="640080" y="2706624"/>
+            <a:ext cx="868680" cy="457200"/>
+          </a:xfrm>
+          <a:prstGeom prst="roundRect">
+            <a:avLst>
+              <a:gd name="adj" fmla="val 12000"/>
+            </a:avLst>
+          </a:prstGeom>
+          <a:solidFill>
+            <a:srgbClr val="7A3B2E"/>
+          </a:solidFill>
+          <a:ln/>
+        </p:spPr>
+      </p:sp>
+      <p:sp>
+        <p:nvSpPr>
+          <p:cNvPr id="10" name="Text 8"/>
+          <p:cNvSpPr/>
+          <p:nvPr/>
+        </p:nvSpPr>
+        <p:spPr>
+          <a:xfrm>
+            <a:off x="640080" y="2706624"/>
+            <a:ext cx="868680" cy="457200"/>
+          </a:xfrm>
+          <a:prstGeom prst="rect">
+            <a:avLst/>
+          </a:prstGeom>
+          <a:noFill/>
+          <a:ln/>
+        </p:spPr>
+        <p:txBody>
+          <a:bodyPr wrap="square" rtlCol="0" anchor="ctr"/>
+          <a:lstStyle/>
+          <a:p>
+            <a:pPr algn="ctr" indent="0" marL="0">
+              <a:buNone/>
+            </a:pPr>
+            <a:r>
+              <a:rPr lang="en-US" sz="1100" b="1" dirty="0">
+                <a:solidFill>
+                  <a:srgbClr val="FFFFFF"/>
+                </a:solidFill>
+                <a:latin typeface="Calibri" pitchFamily="34" charset="0"/>
+                <a:ea typeface="Calibri" pitchFamily="34" charset="-122"/>
+                <a:cs typeface="Calibri" pitchFamily="34" charset="-120"/>
+              </a:rPr>
+              <a:t>0:30</a:t>
+            </a:r>
+            <a:endParaRPr lang="en-US" sz="1100" dirty="0"/>
+          </a:p>
+        </p:txBody>
+      </p:sp>
+      <p:sp>
+        <p:nvSpPr>
+          <p:cNvPr id="11" name="Text 9"/>
+          <p:cNvSpPr/>
+          <p:nvPr/>
+        </p:nvSpPr>
+        <p:spPr>
+          <a:xfrm>
+            <a:off x="1691640" y="2688336"/>
+            <a:ext cx="9646920" cy="566928"/>
+          </a:xfrm>
+          <a:prstGeom prst="rect">
+            <a:avLst/>
+          </a:prstGeom>
+          <a:noFill/>
+          <a:ln/>
+        </p:spPr>
+        <p:txBody>
+          <a:bodyPr wrap="square" rtlCol="0" anchor="ctr">
+            <a:spAutoFit/>
+          </a:bodyPr>
+          <a:lstStyle/>
+          <a:p>
+            <a:pPr indent="0" marL="0">
+              <a:buNone/>
+            </a:pPr>
+            <a:r>
+              <a:rPr lang="en-US" sz="1250" dirty="0">
+                <a:solidFill>
+                  <a:srgbClr val="1A1A1A"/>
+                </a:solidFill>
+                <a:latin typeface="Calibri" pitchFamily="34" charset="0"/>
+                <a:ea typeface="Calibri" pitchFamily="34" charset="-122"/>
+                <a:cs typeface="Calibri" pitchFamily="34" charset="-120"/>
+              </a:rPr>
+              <a:t>Lecture two, word embeddings (30 min). The problem first: to a bag of words, happy and joyful are unrelated columns, which is counting's honest floor. The distributional idea, a word is known by the company it keeps. word2vec as a small neural net trained on a fake task, predict the neighbouring word, whose by-product is the vector. Then the geometry: nearest neighbours, cosine similarity, and the king - man + woman analogy with its caveats shown. The Embedding Projector live on a real vocabulary. Closing distinction, one line each: static vectors (one per word) versus contextual ones (one per occurrence), and the sentence embeddings Week 5 actually uses.</a:t>
+            </a:r>
+            <a:endParaRPr lang="en-US" sz="1250" dirty="0"/>
+          </a:p>
+        </p:txBody>
+      </p:sp>
+      <p:sp>
+        <p:nvSpPr>
+          <p:cNvPr id="12" name="Shape 10"/>
+          <p:cNvSpPr/>
+          <p:nvPr/>
+        </p:nvSpPr>
+        <p:spPr>
+          <a:xfrm>
+            <a:off x="640080" y="3273552"/>
+            <a:ext cx="868680" cy="457200"/>
+          </a:xfrm>
+          <a:prstGeom prst="roundRect">
+            <a:avLst>
+              <a:gd name="adj" fmla="val 12000"/>
+            </a:avLst>
+          </a:prstGeom>
+          <a:solidFill>
+            <a:srgbClr val="7A3B2E"/>
+          </a:solidFill>
+          <a:ln/>
+        </p:spPr>
+      </p:sp>
+      <p:sp>
+        <p:nvSpPr>
+          <p:cNvPr id="13" name="Text 11"/>
+          <p:cNvSpPr/>
+          <p:nvPr/>
+        </p:nvSpPr>
+        <p:spPr>
+          <a:xfrm>
+            <a:off x="640080" y="3273552"/>
+            <a:ext cx="868680" cy="457200"/>
+          </a:xfrm>
+          <a:prstGeom prst="rect">
+            <a:avLst/>
+          </a:prstGeom>
+          <a:noFill/>
+          <a:ln/>
+        </p:spPr>
+        <p:txBody>
+          <a:bodyPr wrap="square" rtlCol="0" anchor="ctr"/>
+          <a:lstStyle/>
+          <a:p>
+            <a:pPr algn="ctr" indent="0" marL="0">
+              <a:buNone/>
+            </a:pPr>
+            <a:r>
+              <a:rPr lang="en-US" sz="1100" b="1" dirty="0">
+                <a:solidFill>
+                  <a:srgbClr val="FFFFFF"/>
+                </a:solidFill>
+                <a:latin typeface="Calibri" pitchFamily="34" charset="0"/>
+                <a:ea typeface="Calibri" pitchFamily="34" charset="-122"/>
+                <a:cs typeface="Calibri" pitchFamily="34" charset="-120"/>
+              </a:rPr>
+              <a:t>1:00</a:t>
+            </a:r>
+            <a:endParaRPr lang="en-US" sz="1100" dirty="0"/>
+          </a:p>
+        </p:txBody>
+      </p:sp>
+      <p:sp>
+        <p:nvSpPr>
+          <p:cNvPr id="14" name="Text 12"/>
+          <p:cNvSpPr/>
+          <p:nvPr/>
+        </p:nvSpPr>
+        <p:spPr>
+          <a:xfrm>
+            <a:off x="1691640" y="3255264"/>
+            <a:ext cx="9646920" cy="566928"/>
+          </a:xfrm>
+          <a:prstGeom prst="rect">
+            <a:avLst/>
+          </a:prstGeom>
+          <a:noFill/>
+          <a:ln/>
+        </p:spPr>
+        <p:txBody>
+          <a:bodyPr wrap="square" rtlCol="0" anchor="ctr">
+            <a:spAutoFit/>
+          </a:bodyPr>
+          <a:lstStyle/>
+          <a:p>
+            <a:pPr indent="0" marL="0">
+              <a:buNone/>
+            </a:pPr>
+            <a:r>
+              <a:rPr lang="en-US" sz="1250" dirty="0">
+                <a:solidFill>
+                  <a:srgbClr val="1A1A1A"/>
+                </a:solidFill>
+                <a:latin typeface="Calibri" pitchFamily="34" charset="0"/>
+                <a:ea typeface="Calibri" pitchFamily="34" charset="-122"/>
+                <a:cs typeface="Calibri" pitchFamily="34" charset="-120"/>
+              </a:rPr>
+              <a:t>Break</a:t>
+            </a:r>
+            <a:endParaRPr lang="en-US" sz="1250" dirty="0"/>
+          </a:p>
+        </p:txBody>
+      </p:sp>
+      <p:sp>
+        <p:nvSpPr>
+          <p:cNvPr id="15" name="Shape 13"/>
+          <p:cNvSpPr/>
+          <p:nvPr/>
+        </p:nvSpPr>
+        <p:spPr>
+          <a:xfrm>
+            <a:off x="640080" y="3840480"/>
+            <a:ext cx="868680" cy="457200"/>
+          </a:xfrm>
+          <a:prstGeom prst="roundRect">
+            <a:avLst>
+              <a:gd name="adj" fmla="val 12000"/>
+            </a:avLst>
+          </a:prstGeom>
+          <a:solidFill>
+            <a:srgbClr val="7A3B2E"/>
+          </a:solidFill>
+          <a:ln/>
+        </p:spPr>
+      </p:sp>
+      <p:sp>
+        <p:nvSpPr>
+          <p:cNvPr id="16" name="Text 14"/>
+          <p:cNvSpPr/>
+          <p:nvPr/>
+        </p:nvSpPr>
+        <p:spPr>
+          <a:xfrm>
+            <a:off x="640080" y="3840480"/>
+            <a:ext cx="868680" cy="457200"/>
+          </a:xfrm>
+          <a:prstGeom prst="rect">
+            <a:avLst/>
+          </a:prstGeom>
+          <a:noFill/>
+          <a:ln/>
+        </p:spPr>
+        <p:txBody>
+          <a:bodyPr wrap="square" rtlCol="0" anchor="ctr"/>
+          <a:lstStyle/>
+          <a:p>
+            <a:pPr algn="ctr" indent="0" marL="0">
+              <a:buNone/>
+            </a:pPr>
+            <a:r>
+              <a:rPr lang="en-US" sz="1100" b="1" dirty="0">
+                <a:solidFill>
+                  <a:srgbClr val="FFFFFF"/>
+                </a:solidFill>
+                <a:latin typeface="Calibri" pitchFamily="34" charset="0"/>
+                <a:ea typeface="Calibri" pitchFamily="34" charset="-122"/>
+                <a:cs typeface="Calibri" pitchFamily="34" charset="-120"/>
+              </a:rPr>
+              <a:t>1:10</a:t>
+            </a:r>
+            <a:endParaRPr lang="en-US" sz="1100" dirty="0"/>
+          </a:p>
+        </p:txBody>
+      </p:sp>
+      <p:sp>
+        <p:nvSpPr>
+          <p:cNvPr id="17" name="Text 15"/>
+          <p:cNvSpPr/>
+          <p:nvPr/>
+        </p:nvSpPr>
+        <p:spPr>
+          <a:xfrm>
+            <a:off x="1691640" y="3822192"/>
+            <a:ext cx="9646920" cy="566928"/>
+          </a:xfrm>
+          <a:prstGeom prst="rect">
+            <a:avLst/>
+          </a:prstGeom>
+          <a:noFill/>
+          <a:ln/>
+        </p:spPr>
+        <p:txBody>
+          <a:bodyPr wrap="square" rtlCol="0" anchor="ctr">
+            <a:spAutoFit/>
+          </a:bodyPr>
+          <a:lstStyle/>
+          <a:p>
+            <a:pPr indent="0" marL="0">
+              <a:buNone/>
+            </a:pPr>
+            <a:r>
+              <a:rPr lang="en-US" sz="1250" dirty="0">
+                <a:solidFill>
+                  <a:srgbClr val="1A1A1A"/>
+                </a:solidFill>
+                <a:latin typeface="Calibri" pitchFamily="34" charset="0"/>
+                <a:ea typeface="Calibri" pitchFamily="34" charset="-122"/>
+                <a:cs typeface="Calibri" pitchFamily="34" charset="-120"/>
+              </a:rPr>
+              <a:t>Where a corpus comes from, APIs and scraping (20 min), demoed live with the AI writing the code. Route one, the prepared file most projects should use. Route two, an API: hit the Met or Art Institute endpoint, no key, and name what an endpoint, a key, pagination and a rate limit are as they appear on screen. Route three, a small scrape with BeautifulSoup, and the four-line check that comes with it: read robots.txt and the terms, request slowly, take only what you need, never republish. The licensing line in three sentences: CC0 and public domain go anywhere, academic sets are analyze-don't-redistribute, shadow libraries never.</a:t>
+            </a:r>
+            <a:endParaRPr lang="en-US" sz="1250" dirty="0"/>
+          </a:p>
+        </p:txBody>
+      </p:sp>
+      <p:sp>
+        <p:nvSpPr>
+          <p:cNvPr id="18" name="Shape 16"/>
+          <p:cNvSpPr/>
+          <p:nvPr/>
+        </p:nvSpPr>
+        <p:spPr>
+          <a:xfrm>
+            <a:off x="640080" y="4407408"/>
+            <a:ext cx="868680" cy="457200"/>
+          </a:xfrm>
+          <a:prstGeom prst="roundRect">
+            <a:avLst>
+              <a:gd name="adj" fmla="val 12000"/>
+            </a:avLst>
+          </a:prstGeom>
+          <a:solidFill>
+            <a:srgbClr val="7A3B2E"/>
+          </a:solidFill>
+          <a:ln/>
+        </p:spPr>
+      </p:sp>
+      <p:sp>
+        <p:nvSpPr>
+          <p:cNvPr id="19" name="Text 17"/>
+          <p:cNvSpPr/>
+          <p:nvPr/>
+        </p:nvSpPr>
+        <p:spPr>
+          <a:xfrm>
+            <a:off x="640080" y="4407408"/>
+            <a:ext cx="868680" cy="457200"/>
+          </a:xfrm>
+          <a:prstGeom prst="rect">
+            <a:avLst/>
+          </a:prstGeom>
+          <a:noFill/>
+          <a:ln/>
+        </p:spPr>
+        <p:txBody>
+          <a:bodyPr wrap="square" rtlCol="0" anchor="ctr"/>
+          <a:lstStyle/>
+          <a:p>
+            <a:pPr algn="ctr" indent="0" marL="0">
+              <a:buNone/>
+            </a:pPr>
+            <a:r>
+              <a:rPr lang="en-US" sz="1100" b="1" dirty="0">
+                <a:solidFill>
+                  <a:srgbClr val="FFFFFF"/>
+                </a:solidFill>
+                <a:latin typeface="Calibri" pitchFamily="34" charset="0"/>
+                <a:ea typeface="Calibri" pitchFamily="34" charset="-122"/>
+                <a:cs typeface="Calibri" pitchFamily="34" charset="-120"/>
+              </a:rPr>
+              <a:t>1:30</a:t>
+            </a:r>
+            <a:endParaRPr lang="en-US" sz="1100" dirty="0"/>
+          </a:p>
+        </p:txBody>
+      </p:sp>
+      <p:sp>
+        <p:nvSpPr>
+          <p:cNvPr id="20" name="Text 18"/>
+          <p:cNvSpPr/>
+          <p:nvPr/>
+        </p:nvSpPr>
+        <p:spPr>
+          <a:xfrm>
+            <a:off x="1691640" y="4389120"/>
+            <a:ext cx="9646920" cy="566928"/>
+          </a:xfrm>
+          <a:prstGeom prst="rect">
+            <a:avLst/>
+          </a:prstGeom>
+          <a:noFill/>
+          <a:ln/>
+        </p:spPr>
+        <p:txBody>
+          <a:bodyPr wrap="square" rtlCol="0" anchor="ctr">
+            <a:spAutoFit/>
+          </a:bodyPr>
+          <a:lstStyle/>
+          <a:p>
+            <a:pPr indent="0" marL="0">
+              <a:buNone/>
+            </a:pPr>
+            <a:r>
+              <a:rPr lang="en-US" sz="1250" dirty="0">
+                <a:solidFill>
+                  <a:srgbClr val="1A1A1A"/>
+                </a:solidFill>
+                <a:latin typeface="Calibri" pitchFamily="34" charset="0"/>
+                <a:ea typeface="Calibri" pitchFamily="34" charset="-122"/>
+                <a:cs typeface="Calibri" pitchFamily="34" charset="-120"/>
+              </a:rPr>
+              <a:t>Collect-and-build lab (20 min): point the cookbook notebook at your corpus, reshape it, and save it to your Drive project folder so it is there next week. Fork the publishing template with GitHub Pages on, so a live placeholder URL exists from today.</a:t>
+            </a:r>
+            <a:endParaRPr lang="en-US" sz="1250" dirty="0"/>
+          </a:p>
+        </p:txBody>
+      </p:sp>
+      <p:sp>
+        <p:nvSpPr>
+          <p:cNvPr id="21" name="Shape 19"/>
+          <p:cNvSpPr/>
+          <p:nvPr/>
+        </p:nvSpPr>
+        <p:spPr>
+          <a:xfrm>
+            <a:off x="640080" y="4974336"/>
+            <a:ext cx="868680" cy="457200"/>
+          </a:xfrm>
+          <a:prstGeom prst="roundRect">
+            <a:avLst>
+              <a:gd name="adj" fmla="val 12000"/>
+            </a:avLst>
+          </a:prstGeom>
+          <a:solidFill>
+            <a:srgbClr val="7A3B2E"/>
+          </a:solidFill>
+          <a:ln/>
+        </p:spPr>
+      </p:sp>
+      <p:sp>
+        <p:nvSpPr>
+          <p:cNvPr id="22" name="Text 20"/>
+          <p:cNvSpPr/>
+          <p:nvPr/>
+        </p:nvSpPr>
+        <p:spPr>
+          <a:xfrm>
+            <a:off x="640080" y="4974336"/>
+            <a:ext cx="868680" cy="457200"/>
+          </a:xfrm>
+          <a:prstGeom prst="rect">
+            <a:avLst/>
+          </a:prstGeom>
+          <a:noFill/>
+          <a:ln/>
+        </p:spPr>
+        <p:txBody>
+          <a:bodyPr wrap="square" rtlCol="0" anchor="ctr"/>
+          <a:lstStyle/>
+          <a:p>
+            <a:pPr algn="ctr" indent="0" marL="0">
+              <a:buNone/>
+            </a:pPr>
+            <a:r>
+              <a:rPr lang="en-US" sz="1100" b="1" dirty="0">
+                <a:solidFill>
+                  <a:srgbClr val="FFFFFF"/>
+                </a:solidFill>
+                <a:latin typeface="Calibri" pitchFamily="34" charset="0"/>
+                <a:ea typeface="Calibri" pitchFamily="34" charset="-122"/>
+                <a:cs typeface="Calibri" pitchFamily="34" charset="-120"/>
+              </a:rPr>
+              <a:t>1:50</a:t>
+            </a:r>
+            <a:endParaRPr lang="en-US" sz="1100" dirty="0"/>
+          </a:p>
+        </p:txBody>
+      </p:sp>
+      <p:sp>
+        <p:nvSpPr>
+          <p:cNvPr id="23" name="Text 21"/>
+          <p:cNvSpPr/>
+          <p:nvPr/>
+        </p:nvSpPr>
+        <p:spPr>
+          <a:xfrm>
+            <a:off x="1691640" y="4956048"/>
+            <a:ext cx="9646920" cy="566928"/>
+          </a:xfrm>
+          <a:prstGeom prst="rect">
+            <a:avLst/>
+          </a:prstGeom>
+          <a:noFill/>
+          <a:ln/>
+        </p:spPr>
+        <p:txBody>
+          <a:bodyPr wrap="square" rtlCol="0" anchor="ctr">
+            <a:spAutoFit/>
+          </a:bodyPr>
+          <a:lstStyle/>
+          <a:p>
+            <a:pPr indent="0" marL="0">
+              <a:buNone/>
+            </a:pPr>
+            <a:r>
+              <a:rPr lang="en-US" sz="1250" dirty="0">
+                <a:solidFill>
+                  <a:srgbClr val="1A1A1A"/>
+                </a:solidFill>
+                <a:latin typeface="Calibri" pitchFamily="34" charset="0"/>
+                <a:ea typeface="Calibri" pitchFamily="34" charset="-122"/>
+                <a:cs typeface="Calibri" pitchFamily="34" charset="-120"/>
+              </a:rPr>
+              <a:t>Pitch in pairs, two minutes each: your corpus, your two methods, what would count as a finding. Then commit, with the pivot kit named as insurance and a null result named as a real result. Check-out.</a:t>
+            </a:r>
+            <a:endParaRPr lang="en-US" sz="1250" dirty="0"/>
+          </a:p>
+        </p:txBody>
+      </p:sp>
+    </p:spTree>
+  </p:cSld>
+  <p:clrMapOvr>
+    <a:masterClrMapping/>
+  </p:clrMapOvr>
+</p:sld>
+</file>
+
+<file path=ppt/slides/slide13.xml><?xml version="1.0" encoding="utf-8"?>
+<p:sld xmlns:a="http://schemas.openxmlformats.org/drawingml/2006/main" xmlns:r="http://schemas.openxmlformats.org/officeDocument/2006/relationships" xmlns:p="http://schemas.openxmlformats.org/presentationml/2006/main">
+  <p:cSld name="Slide 13">
+    <p:bg>
+      <p:bgPr>
+        <a:solidFill>
+          <a:srgbClr val="FFFFFF"/>
+        </a:solidFill>
+      </p:bgPr>
+    </p:bg>
+    <p:spTree>
+      <p:nvGrpSpPr>
+        <p:cNvPr id="1" name=""/>
+        <p:cNvGrpSpPr/>
+        <p:nvPr/>
+      </p:nvGrpSpPr>
+      <p:grpSpPr>
+        <a:xfrm>
+          <a:off x="0" y="0"/>
+          <a:ext cx="0" cy="0"/>
+          <a:chOff x="0" y="0"/>
+          <a:chExt cx="0" cy="0"/>
+        </a:xfrm>
+      </p:grpSpPr>
+      <p:sp>
+        <p:nvSpPr>
+          <p:cNvPr id="2" name="Text 0"/>
+          <p:cNvSpPr/>
+          <p:nvPr/>
+        </p:nvSpPr>
+        <p:spPr>
+          <a:xfrm>
+            <a:off x="640080" y="640080"/>
+            <a:ext cx="10058400" cy="731520"/>
+          </a:xfrm>
+          <a:prstGeom prst="rect">
+            <a:avLst/>
+          </a:prstGeom>
+          <a:noFill/>
+          <a:ln/>
+        </p:spPr>
+        <p:txBody>
+          <a:bodyPr wrap="square" rtlCol="0" anchor="ctr"/>
+          <a:lstStyle/>
+          <a:p>
+            <a:pPr indent="0" marL="0">
+              <a:buNone/>
+            </a:pPr>
+            <a:r>
+              <a:rPr lang="en-US" sz="3000" b="1" dirty="0">
+                <a:solidFill>
+                  <a:srgbClr val="1A1A1A"/>
+                </a:solidFill>
+                <a:latin typeface="Cambria" pitchFamily="34" charset="0"/>
+                <a:ea typeface="Cambria" pitchFamily="34" charset="-122"/>
+                <a:cs typeface="Cambria" pitchFamily="34" charset="-120"/>
+              </a:rPr>
+              <a:t>Reading &amp; homework</a:t>
+            </a:r>
+            <a:endParaRPr lang="en-US" sz="3000" dirty="0"/>
+          </a:p>
+        </p:txBody>
+      </p:sp>
+      <p:sp>
+        <p:nvSpPr>
+          <p:cNvPr id="3" name="Shape 1"/>
+          <p:cNvSpPr/>
+          <p:nvPr/>
+        </p:nvSpPr>
+        <p:spPr>
+          <a:xfrm>
+            <a:off x="640080" y="1673352"/>
+            <a:ext cx="219456" cy="219456"/>
+          </a:xfrm>
+          <a:prstGeom prst="ellipse">
+            <a:avLst/>
+          </a:prstGeom>
+          <a:solidFill>
+            <a:srgbClr val="7A3B2E"/>
+          </a:solidFill>
+          <a:ln/>
+        </p:spPr>
+      </p:sp>
+      <p:sp>
+        <p:nvSpPr>
+          <p:cNvPr id="4" name="Text 2"/>
+          <p:cNvSpPr/>
+          <p:nvPr/>
+        </p:nvSpPr>
+        <p:spPr>
+          <a:xfrm>
+            <a:off x="1051560" y="1600200"/>
+            <a:ext cx="10424160" cy="365760"/>
+          </a:xfrm>
+          <a:prstGeom prst="rect">
+            <a:avLst/>
+          </a:prstGeom>
+          <a:noFill/>
+          <a:ln/>
+        </p:spPr>
+        <p:txBody>
+          <a:bodyPr wrap="square" rtlCol="0" anchor="ctr"/>
+          <a:lstStyle/>
+          <a:p>
+            <a:pPr indent="0" marL="0">
+              <a:buNone/>
+            </a:pPr>
+            <a:r>
+              <a:rPr lang="en-US" sz="1500" b="1" dirty="0">
+                <a:solidFill>
+                  <a:srgbClr val="7A3B2E"/>
+                </a:solidFill>
+                <a:latin typeface="Calibri" pitchFamily="34" charset="0"/>
+                <a:ea typeface="Calibri" pitchFamily="34" charset="-122"/>
+                <a:cs typeface="Calibri" pitchFamily="34" charset="-120"/>
+              </a:rPr>
+              <a:t>Reading</a:t>
+            </a:r>
+            <a:endParaRPr lang="en-US" sz="1500" dirty="0"/>
+          </a:p>
+        </p:txBody>
+      </p:sp>
+      <p:sp>
+        <p:nvSpPr>
+          <p:cNvPr id="5" name="Text 3"/>
+          <p:cNvSpPr/>
+          <p:nvPr/>
+        </p:nvSpPr>
+        <p:spPr>
+          <a:xfrm>
+            <a:off x="1051560" y="1984248"/>
+            <a:ext cx="10424160" cy="731520"/>
+          </a:xfrm>
+          <a:prstGeom prst="rect">
+            <a:avLst/>
+          </a:prstGeom>
+          <a:noFill/>
+          <a:ln/>
+        </p:spPr>
+        <p:txBody>
+          <a:bodyPr wrap="square" rtlCol="0" anchor="t">
+            <a:spAutoFit/>
+          </a:bodyPr>
+          <a:lstStyle/>
+          <a:p>
+            <a:pPr indent="0" marL="0">
+              <a:buNone/>
+            </a:pPr>
+            <a:r>
+              <a:rPr lang="en-US" sz="1400" dirty="0">
+                <a:solidFill>
+                  <a:srgbClr val="1A1A1A"/>
+                </a:solidFill>
+                <a:latin typeface="Calibri" pitchFamily="34" charset="0"/>
+                <a:ea typeface="Calibri" pitchFamily="34" charset="-122"/>
+                <a:cs typeface="Calibri" pitchFamily="34" charset="-120"/>
+              </a:rPr>
+              <a:t>Alammar, The Illustrated Word2Vec: where word vectors come from, drawn one picture at a time. The lecture assumes the pictures, so read it first</a:t>
+            </a:r>
+            <a:endParaRPr lang="en-US" sz="1400" dirty="0"/>
+          </a:p>
+        </p:txBody>
+      </p:sp>
+      <p:sp>
+        <p:nvSpPr>
+          <p:cNvPr id="6" name="Shape 4"/>
+          <p:cNvSpPr/>
+          <p:nvPr/>
+        </p:nvSpPr>
+        <p:spPr>
+          <a:xfrm>
+            <a:off x="640080" y="2633472"/>
+            <a:ext cx="219456" cy="219456"/>
+          </a:xfrm>
+          <a:prstGeom prst="ellipse">
+            <a:avLst/>
+          </a:prstGeom>
+          <a:solidFill>
+            <a:srgbClr val="3F6F5F"/>
+          </a:solidFill>
+          <a:ln/>
+        </p:spPr>
+      </p:sp>
+      <p:sp>
+        <p:nvSpPr>
+          <p:cNvPr id="7" name="Text 5"/>
+          <p:cNvSpPr/>
+          <p:nvPr/>
+        </p:nvSpPr>
+        <p:spPr>
+          <a:xfrm>
+            <a:off x="1051560" y="2560320"/>
+            <a:ext cx="10424160" cy="365760"/>
+          </a:xfrm>
+          <a:prstGeom prst="rect">
+            <a:avLst/>
+          </a:prstGeom>
+          <a:noFill/>
+          <a:ln/>
+        </p:spPr>
+        <p:txBody>
+          <a:bodyPr wrap="square" rtlCol="0" anchor="ctr"/>
+          <a:lstStyle/>
+          <a:p>
+            <a:pPr indent="0" marL="0">
+              <a:buNone/>
+            </a:pPr>
+            <a:r>
+              <a:rPr lang="en-US" sz="1500" b="1" dirty="0">
+                <a:solidFill>
+                  <a:srgbClr val="3F6F5F"/>
+                </a:solidFill>
+                <a:latin typeface="Calibri" pitchFamily="34" charset="0"/>
+                <a:ea typeface="Calibri" pitchFamily="34" charset="-122"/>
+                <a:cs typeface="Calibri" pitchFamily="34" charset="-120"/>
+              </a:rPr>
+              <a:t>Supplement</a:t>
+            </a:r>
+            <a:endParaRPr lang="en-US" sz="1500" dirty="0"/>
+          </a:p>
+        </p:txBody>
+      </p:sp>
+      <p:sp>
+        <p:nvSpPr>
+          <p:cNvPr id="8" name="Text 6"/>
+          <p:cNvSpPr/>
+          <p:nvPr/>
+        </p:nvSpPr>
+        <p:spPr>
+          <a:xfrm>
+            <a:off x="1051560" y="2944368"/>
+            <a:ext cx="10424160" cy="731520"/>
+          </a:xfrm>
+          <a:prstGeom prst="rect">
+            <a:avLst/>
+          </a:prstGeom>
+          <a:noFill/>
+          <a:ln/>
+        </p:spPr>
+        <p:txBody>
+          <a:bodyPr wrap="square" rtlCol="0" anchor="t">
+            <a:spAutoFit/>
+          </a:bodyPr>
+          <a:lstStyle/>
+          <a:p>
+            <a:pPr indent="0" marL="0">
+              <a:buNone/>
+            </a:pPr>
+            <a:r>
+              <a:rPr lang="en-US" sz="1400" dirty="0">
+                <a:solidFill>
+                  <a:srgbClr val="1A1A1A"/>
+                </a:solidFill>
+                <a:latin typeface="Calibri" pitchFamily="34" charset="0"/>
+                <a:ea typeface="Calibri" pitchFamily="34" charset="-122"/>
+                <a:cs typeface="Calibri" pitchFamily="34" charset="-120"/>
+              </a:rPr>
+              <a:t>Krause, Data Biographies (We All Count), the frame for this week's sketch; Freelon, Post-API Age, on what happens when the front door closes</a:t>
+            </a:r>
+            <a:endParaRPr lang="en-US" sz="1400" dirty="0"/>
+          </a:p>
+        </p:txBody>
+      </p:sp>
+      <p:sp>
+        <p:nvSpPr>
+          <p:cNvPr id="9" name="Shape 7"/>
+          <p:cNvSpPr/>
+          <p:nvPr/>
+        </p:nvSpPr>
+        <p:spPr>
+          <a:xfrm>
+            <a:off x="640080" y="3593592"/>
+            <a:ext cx="219456" cy="219456"/>
+          </a:xfrm>
+          <a:prstGeom prst="ellipse">
+            <a:avLst/>
+          </a:prstGeom>
+          <a:solidFill>
+            <a:srgbClr val="B9852F"/>
+          </a:solidFill>
+          <a:ln/>
+        </p:spPr>
+      </p:sp>
+      <p:sp>
+        <p:nvSpPr>
+          <p:cNvPr id="10" name="Text 8"/>
+          <p:cNvSpPr/>
+          <p:nvPr/>
+        </p:nvSpPr>
+        <p:spPr>
+          <a:xfrm>
+            <a:off x="1051560" y="3520440"/>
+            <a:ext cx="10424160" cy="365760"/>
+          </a:xfrm>
+          <a:prstGeom prst="rect">
+            <a:avLst/>
+          </a:prstGeom>
+          <a:noFill/>
+          <a:ln/>
+        </p:spPr>
+        <p:txBody>
+          <a:bodyPr wrap="square" rtlCol="0" anchor="ctr"/>
+          <a:lstStyle/>
+          <a:p>
+            <a:pPr indent="0" marL="0">
+              <a:buNone/>
+            </a:pPr>
+            <a:r>
+              <a:rPr lang="en-US" sz="1500" b="1" dirty="0">
+                <a:solidFill>
+                  <a:srgbClr val="B9852F"/>
+                </a:solidFill>
+                <a:latin typeface="Calibri" pitchFamily="34" charset="0"/>
+                <a:ea typeface="Calibri" pitchFamily="34" charset="-122"/>
+                <a:cs typeface="Calibri" pitchFamily="34" charset="-120"/>
+              </a:rPr>
+              <a:t>Deeper (optional)</a:t>
+            </a:r>
+            <a:endParaRPr lang="en-US" sz="1500" dirty="0"/>
+          </a:p>
+        </p:txBody>
+      </p:sp>
+      <p:sp>
+        <p:nvSpPr>
+          <p:cNvPr id="11" name="Text 9"/>
+          <p:cNvSpPr/>
+          <p:nvPr/>
+        </p:nvSpPr>
+        <p:spPr>
+          <a:xfrm>
+            <a:off x="1051560" y="3904488"/>
+            <a:ext cx="10424160" cy="731520"/>
+          </a:xfrm>
+          <a:prstGeom prst="rect">
+            <a:avLst/>
+          </a:prstGeom>
+          <a:noFill/>
+          <a:ln/>
+        </p:spPr>
+        <p:txBody>
+          <a:bodyPr wrap="square" rtlCol="0" anchor="t">
+            <a:spAutoFit/>
+          </a:bodyPr>
+          <a:lstStyle/>
+          <a:p>
+            <a:pPr indent="0" marL="0">
+              <a:buNone/>
+            </a:pPr>
+            <a:r>
+              <a:rPr lang="en-US" sz="1400" dirty="0">
+                <a:solidFill>
+                  <a:srgbClr val="1A1A1A"/>
+                </a:solidFill>
+                <a:latin typeface="Calibri" pitchFamily="34" charset="0"/>
+                <a:ea typeface="Calibri" pitchFamily="34" charset="-122"/>
+                <a:cs typeface="Calibri" pitchFamily="34" charset="-120"/>
+              </a:rPr>
+              <a:t>3Blue1Brown, Neural Networks, chapters 1 and 2, the same lecture with better animation; then Mikolov et al. (2013), the four-page paper that started it</a:t>
+            </a:r>
+            <a:endParaRPr lang="en-US" sz="1400" dirty="0"/>
+          </a:p>
+        </p:txBody>
+      </p:sp>
+      <p:sp>
+        <p:nvSpPr>
+          <p:cNvPr id="12" name="Shape 10"/>
+          <p:cNvSpPr/>
+          <p:nvPr/>
+        </p:nvSpPr>
+        <p:spPr>
+          <a:xfrm>
+            <a:off x="640080" y="4553712"/>
+            <a:ext cx="219456" cy="219456"/>
+          </a:xfrm>
+          <a:prstGeom prst="ellipse">
+            <a:avLst/>
+          </a:prstGeom>
+          <a:solidFill>
+            <a:srgbClr val="3F6F5F"/>
+          </a:solidFill>
+          <a:ln/>
+        </p:spPr>
+      </p:sp>
+      <p:sp>
+        <p:nvSpPr>
+          <p:cNvPr id="13" name="Text 11"/>
+          <p:cNvSpPr/>
+          <p:nvPr/>
+        </p:nvSpPr>
+        <p:spPr>
+          <a:xfrm>
+            <a:off x="1051560" y="4480560"/>
+            <a:ext cx="10424160" cy="365760"/>
+          </a:xfrm>
+          <a:prstGeom prst="rect">
+            <a:avLst/>
+          </a:prstGeom>
+          <a:noFill/>
+          <a:ln/>
+        </p:spPr>
+        <p:txBody>
+          <a:bodyPr wrap="square" rtlCol="0" anchor="ctr"/>
+          <a:lstStyle/>
+          <a:p>
+            <a:pPr indent="0" marL="0">
+              <a:buNone/>
+            </a:pPr>
+            <a:r>
+              <a:rPr lang="en-US" sz="1500" b="1" dirty="0">
+                <a:solidFill>
+                  <a:srgbClr val="3F6F5F"/>
+                </a:solidFill>
+                <a:latin typeface="Calibri" pitchFamily="34" charset="0"/>
+                <a:ea typeface="Calibri" pitchFamily="34" charset="-122"/>
+                <a:cs typeface="Calibri" pitchFamily="34" charset="-120"/>
+              </a:rPr>
+              <a:t>Sketch</a:t>
+            </a:r>
+            <a:endParaRPr lang="en-US" sz="1500" dirty="0"/>
+          </a:p>
+        </p:txBody>
+      </p:sp>
+      <p:sp>
+        <p:nvSpPr>
+          <p:cNvPr id="14" name="Text 12"/>
+          <p:cNvSpPr/>
+          <p:nvPr/>
+        </p:nvSpPr>
+        <p:spPr>
+          <a:xfrm>
+            <a:off x="1051560" y="4864608"/>
+            <a:ext cx="10424160" cy="731520"/>
+          </a:xfrm>
+          <a:prstGeom prst="rect">
+            <a:avLst/>
+          </a:prstGeom>
+          <a:noFill/>
+          <a:ln/>
+        </p:spPr>
+        <p:txBody>
+          <a:bodyPr wrap="square" rtlCol="0" anchor="t">
+            <a:spAutoFit/>
+          </a:bodyPr>
+          <a:lstStyle/>
+          <a:p>
+            <a:pPr indent="0" marL="0">
+              <a:buNone/>
+            </a:pPr>
+            <a:r>
+              <a:rPr lang="en-US" sz="1400" dirty="0">
+                <a:solidFill>
+                  <a:srgbClr val="1A1A1A"/>
+                </a:solidFill>
+                <a:latin typeface="Calibri" pitchFamily="34" charset="0"/>
+                <a:ea typeface="Calibri" pitchFamily="34" charset="-122"/>
+                <a:cs typeface="Calibri" pitchFamily="34" charset="-120"/>
+              </a:rPr>
+              <a:t>Data Biography (~400 words), collect your corpus with the cookbook, and one surprising neighbour from the Embedding Projector.</a:t>
+            </a:r>
+            <a:endParaRPr lang="en-US" sz="1400" dirty="0"/>
+          </a:p>
+        </p:txBody>
+      </p:sp>
+      <p:sp>
+        <p:nvSpPr>
+          <p:cNvPr id="15" name="Shape 13"/>
+          <p:cNvSpPr/>
+          <p:nvPr/>
+        </p:nvSpPr>
+        <p:spPr>
+          <a:xfrm>
+            <a:off x="640080" y="5513832"/>
+            <a:ext cx="219456" cy="219456"/>
+          </a:xfrm>
+          <a:prstGeom prst="ellipse">
+            <a:avLst/>
+          </a:prstGeom>
+          <a:solidFill>
+            <a:srgbClr val="7A3B2E"/>
+          </a:solidFill>
+          <a:ln/>
+        </p:spPr>
+      </p:sp>
+      <p:sp>
+        <p:nvSpPr>
+          <p:cNvPr id="16" name="Text 14"/>
+          <p:cNvSpPr/>
+          <p:nvPr/>
+        </p:nvSpPr>
+        <p:spPr>
+          <a:xfrm>
+            <a:off x="1051560" y="5440680"/>
+            <a:ext cx="10424160" cy="365760"/>
+          </a:xfrm>
+          <a:prstGeom prst="rect">
+            <a:avLst/>
+          </a:prstGeom>
+          <a:noFill/>
+          <a:ln/>
+        </p:spPr>
+        <p:txBody>
+          <a:bodyPr wrap="square" rtlCol="0" anchor="ctr"/>
+          <a:lstStyle/>
+          <a:p>
+            <a:pPr indent="0" marL="0">
+              <a:buNone/>
+            </a:pPr>
+            <a:r>
+              <a:rPr lang="en-US" sz="1500" b="1" dirty="0">
+                <a:solidFill>
+                  <a:srgbClr val="7A3B2E"/>
+                </a:solidFill>
+                <a:latin typeface="Calibri" pitchFamily="34" charset="0"/>
+                <a:ea typeface="Calibri" pitchFamily="34" charset="-122"/>
+                <a:cs typeface="Calibri" pitchFamily="34" charset="-120"/>
+              </a:rPr>
+              <a:t>Check (AI closed)</a:t>
+            </a:r>
+            <a:endParaRPr lang="en-US" sz="1500" dirty="0"/>
+          </a:p>
+        </p:txBody>
+      </p:sp>
+      <p:sp>
+        <p:nvSpPr>
+          <p:cNvPr id="17" name="Text 15"/>
+          <p:cNvSpPr/>
+          <p:nvPr/>
+        </p:nvSpPr>
+        <p:spPr>
+          <a:xfrm>
+            <a:off x="1051560" y="5824728"/>
+            <a:ext cx="10424160" cy="731520"/>
+          </a:xfrm>
+          <a:prstGeom prst="rect">
+            <a:avLst/>
+          </a:prstGeom>
+          <a:noFill/>
+          <a:ln/>
+        </p:spPr>
+        <p:txBody>
+          <a:bodyPr wrap="square" rtlCol="0" anchor="t">
+            <a:spAutoFit/>
+          </a:bodyPr>
+          <a:lstStyle/>
+          <a:p>
+            <a:pPr indent="0" marL="0">
+              <a:buNone/>
+            </a:pPr>
+            <a:r>
+              <a:rPr lang="en-US" sz="1400" dirty="0">
+                <a:solidFill>
+                  <a:srgbClr val="1A1A1A"/>
+                </a:solidFill>
+                <a:latin typeface="Calibri" pitchFamily="34" charset="0"/>
+                <a:ea typeface="Calibri" pitchFamily="34" charset="-122"/>
+                <a:cs typeface="Calibri" pitchFamily="34" charset="-120"/>
+              </a:rPr>
+              <a:t>Explain it: what a word vector is, in your own words, and one thing it cannot tell you. Plus your question aloud, what it omits, and where your data comes from. (Competencies 2, 6.)</a:t>
+            </a:r>
+            <a:endParaRPr lang="en-US" sz="1400" dirty="0"/>
+          </a:p>
+        </p:txBody>
+      </p:sp>
+    </p:spTree>
+  </p:cSld>
+  <p:clrMapOvr>
+    <a:masterClrMapping/>
+  </p:clrMapOvr>
+</p:sld>
+</file>
+
+<file path=ppt/slides/slide14.xml><?xml version="1.0" encoding="utf-8"?>
+<p:sld xmlns:a="http://schemas.openxmlformats.org/drawingml/2006/main" xmlns:r="http://schemas.openxmlformats.org/officeDocument/2006/relationships" xmlns:p="http://schemas.openxmlformats.org/presentationml/2006/main">
+  <p:cSld name="Slide 14">
+    <p:bg>
+      <p:bgPr>
+        <a:solidFill>
+          <a:srgbClr val="FFFFFF"/>
+        </a:solidFill>
+      </p:bgPr>
+    </p:bg>
+    <p:spTree>
+      <p:nvGrpSpPr>
+        <p:cNvPr id="1" name=""/>
+        <p:cNvGrpSpPr/>
+        <p:nvPr/>
+      </p:nvGrpSpPr>
+      <p:grpSpPr>
+        <a:xfrm>
+          <a:off x="0" y="0"/>
+          <a:ext cx="0" cy="0"/>
+          <a:chOff x="0" y="0"/>
+          <a:chExt cx="0" cy="0"/>
+        </a:xfrm>
+      </p:grpSpPr>
+      <p:sp>
+        <p:nvSpPr>
+          <p:cNvPr id="2" name="Text 0"/>
+          <p:cNvSpPr/>
+          <p:nvPr/>
+        </p:nvSpPr>
+        <p:spPr>
+          <a:xfrm>
+            <a:off x="640080" y="640080"/>
+            <a:ext cx="10058400" cy="320040"/>
+          </a:xfrm>
+          <a:prstGeom prst="rect">
+            <a:avLst/>
+          </a:prstGeom>
+          <a:noFill/>
+          <a:ln/>
+        </p:spPr>
+        <p:txBody>
+          <a:bodyPr wrap="square" rtlCol="0" anchor="ctr"/>
+          <a:lstStyle/>
+          <a:p>
+            <a:pPr indent="0" marL="0">
+              <a:buNone/>
+            </a:pPr>
+            <a:r>
+              <a:rPr lang="en-US" sz="1300" b="1" spc="300" kern="0" dirty="0">
+                <a:solidFill>
+                  <a:srgbClr val="7A3B2E"/>
+                </a:solidFill>
+                <a:latin typeface="Calibri" pitchFamily="34" charset="0"/>
+                <a:ea typeface="Calibri" pitchFamily="34" charset="-122"/>
+                <a:cs typeface="Calibri" pitchFamily="34" charset="-120"/>
+              </a:rPr>
+              <a:t>HOW THIS WEEK CONNECTS</a:t>
+            </a:r>
+            <a:endParaRPr lang="en-US" sz="1300" dirty="0"/>
+          </a:p>
+        </p:txBody>
+      </p:sp>
+      <p:sp>
+        <p:nvSpPr>
+          <p:cNvPr id="3" name="Text 1"/>
+          <p:cNvSpPr/>
+          <p:nvPr/>
+        </p:nvSpPr>
+        <p:spPr>
+          <a:xfrm>
+            <a:off x="640080" y="987552"/>
+            <a:ext cx="10058400" cy="640080"/>
+          </a:xfrm>
+          <a:prstGeom prst="rect">
+            <a:avLst/>
+          </a:prstGeom>
+          <a:noFill/>
+          <a:ln/>
+        </p:spPr>
+        <p:txBody>
+          <a:bodyPr wrap="square" rtlCol="0" anchor="ctr"/>
+          <a:lstStyle/>
+          <a:p>
+            <a:pPr indent="0" marL="0">
+              <a:buNone/>
+            </a:pPr>
+            <a:r>
+              <a:rPr lang="en-US" sz="2800" b="1" dirty="0">
+                <a:solidFill>
+                  <a:srgbClr val="1A1A1A"/>
+                </a:solidFill>
+                <a:latin typeface="Cambria" pitchFamily="34" charset="0"/>
+                <a:ea typeface="Cambria" pitchFamily="34" charset="-122"/>
+                <a:cs typeface="Cambria" pitchFamily="34" charset="-120"/>
+              </a:rPr>
+              <a:t>The course's through-lines</a:t>
+            </a:r>
+            <a:endParaRPr lang="en-US" sz="2800" dirty="0"/>
+          </a:p>
+        </p:txBody>
+      </p:sp>
+      <p:sp>
+        <p:nvSpPr>
+          <p:cNvPr id="4" name="Shape 2"/>
+          <p:cNvSpPr/>
+          <p:nvPr/>
+        </p:nvSpPr>
+        <p:spPr>
+          <a:xfrm>
+            <a:off x="640080" y="2057400"/>
+            <a:ext cx="457200" cy="457200"/>
+          </a:xfrm>
+          <a:prstGeom prst="roundRect">
+            <a:avLst>
+              <a:gd name="adj" fmla="val 16000"/>
+            </a:avLst>
+          </a:prstGeom>
+          <a:solidFill>
+            <a:srgbClr val="7A3B2E"/>
+          </a:solidFill>
+          <a:ln/>
+        </p:spPr>
+      </p:sp>
+      <p:sp>
+        <p:nvSpPr>
+          <p:cNvPr id="5" name="Text 3"/>
+          <p:cNvSpPr/>
+          <p:nvPr/>
+        </p:nvSpPr>
+        <p:spPr>
+          <a:xfrm>
+            <a:off x="640080" y="2057400"/>
+            <a:ext cx="457200" cy="457200"/>
+          </a:xfrm>
+          <a:prstGeom prst="rect">
+            <a:avLst/>
+          </a:prstGeom>
+          <a:noFill/>
+          <a:ln/>
+        </p:spPr>
+        <p:txBody>
+          <a:bodyPr wrap="square" rtlCol="0" anchor="ctr"/>
+          <a:lstStyle/>
+          <a:p>
+            <a:pPr algn="ctr" indent="0" marL="0">
+              <a:buNone/>
+            </a:pPr>
+            <a:r>
+              <a:rPr lang="en-US" sz="2000" b="1" dirty="0">
+                <a:solidFill>
+                  <a:srgbClr val="FFFFFF"/>
+                </a:solidFill>
+                <a:latin typeface="Cambria" pitchFamily="34" charset="0"/>
+                <a:ea typeface="Cambria" pitchFamily="34" charset="-122"/>
+                <a:cs typeface="Cambria" pitchFamily="34" charset="-120"/>
+              </a:rPr>
+              <a:t>1</a:t>
+            </a:r>
+            <a:endParaRPr lang="en-US" sz="2000" dirty="0"/>
+          </a:p>
+        </p:txBody>
+      </p:sp>
+      <p:sp>
+        <p:nvSpPr>
+          <p:cNvPr id="6" name="Text 4"/>
+          <p:cNvSpPr/>
+          <p:nvPr/>
+        </p:nvSpPr>
+        <p:spPr>
+          <a:xfrm>
+            <a:off x="1371600" y="2020824"/>
+            <a:ext cx="10332720" cy="411480"/>
+          </a:xfrm>
+          <a:prstGeom prst="rect">
+            <a:avLst/>
+          </a:prstGeom>
+          <a:noFill/>
+          <a:ln/>
+        </p:spPr>
+        <p:txBody>
+          <a:bodyPr wrap="square" rtlCol="0" anchor="ctr"/>
+          <a:lstStyle/>
+          <a:p>
+            <a:pPr indent="0" marL="0">
+              <a:buNone/>
+            </a:pPr>
+            <a:r>
+              <a:rPr lang="en-US" sz="1900" b="1" dirty="0">
+                <a:solidFill>
+                  <a:srgbClr val="7A3B2E"/>
+                </a:solidFill>
+                <a:latin typeface="Cambria" pitchFamily="34" charset="0"/>
+                <a:ea typeface="Cambria" pitchFamily="34" charset="-122"/>
+                <a:cs typeface="Cambria" pitchFamily="34" charset="-120"/>
+              </a:rPr>
+              <a:t>One neuron, then many</a:t>
+            </a:r>
+            <a:endParaRPr lang="en-US" sz="1900" dirty="0"/>
+          </a:p>
+        </p:txBody>
+      </p:sp>
+      <p:sp>
+        <p:nvSpPr>
+          <p:cNvPr id="7" name="Text 5"/>
+          <p:cNvSpPr/>
+          <p:nvPr/>
+        </p:nvSpPr>
+        <p:spPr>
+          <a:xfrm>
+            <a:off x="1371600" y="2441448"/>
+            <a:ext cx="10332720" cy="914400"/>
+          </a:xfrm>
+          <a:prstGeom prst="rect">
+            <a:avLst/>
+          </a:prstGeom>
+          <a:noFill/>
+          <a:ln/>
+        </p:spPr>
+        <p:txBody>
+          <a:bodyPr wrap="square" rtlCol="0" anchor="t">
+            <a:spAutoFit/>
+          </a:bodyPr>
+          <a:lstStyle/>
+          <a:p>
+            <a:pPr indent="0" marL="0">
+              <a:lnSpc>
+                <a:spcPct val="112000"/>
+              </a:lnSpc>
+              <a:buNone/>
+            </a:pPr>
+            <a:r>
+              <a:rPr lang="en-US" sz="1450" dirty="0">
+                <a:solidFill>
+                  <a:srgbClr val="1A1A1A"/>
+                </a:solidFill>
+                <a:latin typeface="Calibri" pitchFamily="34" charset="0"/>
+                <a:ea typeface="Calibri" pitchFamily="34" charset="-122"/>
+                <a:cs typeface="Calibri" pitchFamily="34" charset="-120"/>
+              </a:rPr>
+              <a:t>Week 3's classifier is a single neuron. Stack them and the machine learns features nobody wrote down - and you stop being able to read the weights.</a:t>
+            </a:r>
+            <a:endParaRPr lang="en-US" sz="1450" dirty="0"/>
+          </a:p>
+        </p:txBody>
+      </p:sp>
+      <p:sp>
+        <p:nvSpPr>
+          <p:cNvPr id="8" name="Shape 6"/>
+          <p:cNvSpPr/>
+          <p:nvPr/>
+        </p:nvSpPr>
+        <p:spPr>
+          <a:xfrm>
+            <a:off x="640080" y="3520440"/>
+            <a:ext cx="457200" cy="457200"/>
+          </a:xfrm>
+          <a:prstGeom prst="roundRect">
+            <a:avLst>
+              <a:gd name="adj" fmla="val 16000"/>
+            </a:avLst>
+          </a:prstGeom>
+          <a:solidFill>
+            <a:srgbClr val="3F6F5F"/>
+          </a:solidFill>
+          <a:ln/>
+        </p:spPr>
+      </p:sp>
+      <p:sp>
+        <p:nvSpPr>
+          <p:cNvPr id="9" name="Text 7"/>
+          <p:cNvSpPr/>
+          <p:nvPr/>
+        </p:nvSpPr>
+        <p:spPr>
+          <a:xfrm>
+            <a:off x="640080" y="3520440"/>
+            <a:ext cx="457200" cy="457200"/>
+          </a:xfrm>
+          <a:prstGeom prst="rect">
+            <a:avLst/>
+          </a:prstGeom>
+          <a:noFill/>
+          <a:ln/>
+        </p:spPr>
+        <p:txBody>
+          <a:bodyPr wrap="square" rtlCol="0" anchor="ctr"/>
+          <a:lstStyle/>
+          <a:p>
+            <a:pPr algn="ctr" indent="0" marL="0">
+              <a:buNone/>
+            </a:pPr>
+            <a:r>
+              <a:rPr lang="en-US" sz="2000" b="1" dirty="0">
+                <a:solidFill>
+                  <a:srgbClr val="FFFFFF"/>
+                </a:solidFill>
+                <a:latin typeface="Cambria" pitchFamily="34" charset="0"/>
+                <a:ea typeface="Cambria" pitchFamily="34" charset="-122"/>
+                <a:cs typeface="Cambria" pitchFamily="34" charset="-120"/>
+              </a:rPr>
+              <a:t>2</a:t>
+            </a:r>
+            <a:endParaRPr lang="en-US" sz="2000" dirty="0"/>
+          </a:p>
+        </p:txBody>
+      </p:sp>
+      <p:sp>
+        <p:nvSpPr>
+          <p:cNvPr id="10" name="Text 8"/>
+          <p:cNvSpPr/>
+          <p:nvPr/>
+        </p:nvSpPr>
+        <p:spPr>
+          <a:xfrm>
+            <a:off x="1371600" y="3483864"/>
+            <a:ext cx="10332720" cy="411480"/>
+          </a:xfrm>
+          <a:prstGeom prst="rect">
+            <a:avLst/>
+          </a:prstGeom>
+          <a:noFill/>
+          <a:ln/>
+        </p:spPr>
+        <p:txBody>
+          <a:bodyPr wrap="square" rtlCol="0" anchor="ctr"/>
+          <a:lstStyle/>
+          <a:p>
+            <a:pPr indent="0" marL="0">
+              <a:buNone/>
+            </a:pPr>
+            <a:r>
+              <a:rPr lang="en-US" sz="1900" b="1" dirty="0">
+                <a:solidFill>
+                  <a:srgbClr val="3F6F5F"/>
+                </a:solidFill>
+                <a:latin typeface="Cambria" pitchFamily="34" charset="0"/>
+                <a:ea typeface="Cambria" pitchFamily="34" charset="-122"/>
+                <a:cs typeface="Cambria" pitchFamily="34" charset="-120"/>
+              </a:rPr>
+              <a:t>Beyond counting</a:t>
+            </a:r>
+            <a:endParaRPr lang="en-US" sz="1900" dirty="0"/>
+          </a:p>
+        </p:txBody>
+      </p:sp>
+      <p:sp>
+        <p:nvSpPr>
+          <p:cNvPr id="11" name="Text 9"/>
+          <p:cNvSpPr/>
+          <p:nvPr/>
+        </p:nvSpPr>
+        <p:spPr>
+          <a:xfrm>
+            <a:off x="1371600" y="3904488"/>
+            <a:ext cx="10332720" cy="914400"/>
+          </a:xfrm>
+          <a:prstGeom prst="rect">
+            <a:avLst/>
+          </a:prstGeom>
+          <a:noFill/>
+          <a:ln/>
+        </p:spPr>
+        <p:txBody>
+          <a:bodyPr wrap="square" rtlCol="0" anchor="t">
+            <a:spAutoFit/>
+          </a:bodyPr>
+          <a:lstStyle/>
+          <a:p>
+            <a:pPr indent="0" marL="0">
+              <a:lnSpc>
+                <a:spcPct val="112000"/>
+              </a:lnSpc>
+              <a:buNone/>
+            </a:pPr>
+            <a:r>
+              <a:rPr lang="en-US" sz="1450" dirty="0">
+                <a:solidFill>
+                  <a:srgbClr val="1A1A1A"/>
+                </a:solidFill>
+                <a:latin typeface="Calibri" pitchFamily="34" charset="0"/>
+                <a:ea typeface="Calibri" pitchFamily="34" charset="-122"/>
+                <a:cs typeface="Calibri" pitchFamily="34" charset="-120"/>
+              </a:rPr>
+              <a:t>To a bag of words, happy and joyful are unrelated columns. Embeddings are the fix, and the reason Week 5 exists.</a:t>
+            </a:r>
+            <a:endParaRPr lang="en-US" sz="1450" dirty="0"/>
+          </a:p>
+        </p:txBody>
+      </p:sp>
+      <p:sp>
+        <p:nvSpPr>
+          <p:cNvPr id="12" name="Shape 10"/>
+          <p:cNvSpPr/>
+          <p:nvPr/>
+        </p:nvSpPr>
+        <p:spPr>
+          <a:xfrm>
+            <a:off x="640080" y="4983480"/>
+            <a:ext cx="457200" cy="457200"/>
+          </a:xfrm>
+          <a:prstGeom prst="roundRect">
+            <a:avLst>
+              <a:gd name="adj" fmla="val 16000"/>
+            </a:avLst>
+          </a:prstGeom>
+          <a:solidFill>
+            <a:srgbClr val="B9852F"/>
+          </a:solidFill>
+          <a:ln/>
+        </p:spPr>
+      </p:sp>
+      <p:sp>
+        <p:nvSpPr>
+          <p:cNvPr id="13" name="Text 11"/>
+          <p:cNvSpPr/>
+          <p:nvPr/>
+        </p:nvSpPr>
+        <p:spPr>
+          <a:xfrm>
+            <a:off x="640080" y="4983480"/>
+            <a:ext cx="457200" cy="457200"/>
+          </a:xfrm>
+          <a:prstGeom prst="rect">
+            <a:avLst/>
+          </a:prstGeom>
+          <a:noFill/>
+          <a:ln/>
+        </p:spPr>
+        <p:txBody>
+          <a:bodyPr wrap="square" rtlCol="0" anchor="ctr"/>
+          <a:lstStyle/>
+          <a:p>
+            <a:pPr algn="ctr" indent="0" marL="0">
+              <a:buNone/>
+            </a:pPr>
+            <a:r>
+              <a:rPr lang="en-US" sz="2000" b="1" dirty="0">
+                <a:solidFill>
+                  <a:srgbClr val="FFFFFF"/>
+                </a:solidFill>
+                <a:latin typeface="Cambria" pitchFamily="34" charset="0"/>
+                <a:ea typeface="Cambria" pitchFamily="34" charset="-122"/>
+                <a:cs typeface="Cambria" pitchFamily="34" charset="-120"/>
+              </a:rPr>
+              <a:t>3</a:t>
+            </a:r>
+            <a:endParaRPr lang="en-US" sz="2000" dirty="0"/>
+          </a:p>
+        </p:txBody>
+      </p:sp>
+      <p:sp>
+        <p:nvSpPr>
+          <p:cNvPr id="14" name="Text 12"/>
+          <p:cNvSpPr/>
+          <p:nvPr/>
+        </p:nvSpPr>
+        <p:spPr>
+          <a:xfrm>
+            <a:off x="1371600" y="4946904"/>
+            <a:ext cx="10332720" cy="411480"/>
+          </a:xfrm>
+          <a:prstGeom prst="rect">
+            <a:avLst/>
+          </a:prstGeom>
+          <a:noFill/>
+          <a:ln/>
+        </p:spPr>
+        <p:txBody>
+          <a:bodyPr wrap="square" rtlCol="0" anchor="ctr"/>
+          <a:lstStyle/>
+          <a:p>
+            <a:pPr indent="0" marL="0">
+              <a:buNone/>
+            </a:pPr>
+            <a:r>
+              <a:rPr lang="en-US" sz="1900" b="1" dirty="0">
+                <a:solidFill>
+                  <a:srgbClr val="B9852F"/>
+                </a:solidFill>
+                <a:latin typeface="Cambria" pitchFamily="34" charset="0"/>
+                <a:ea typeface="Cambria" pitchFamily="34" charset="-122"/>
+                <a:cs typeface="Cambria" pitchFamily="34" charset="-120"/>
+              </a:rPr>
+              <a:t>Whose data</a:t>
+            </a:r>
+            <a:endParaRPr lang="en-US" sz="1900" dirty="0"/>
+          </a:p>
+        </p:txBody>
+      </p:sp>
+      <p:sp>
+        <p:nvSpPr>
+          <p:cNvPr id="15" name="Text 13"/>
+          <p:cNvSpPr/>
+          <p:nvPr/>
+        </p:nvSpPr>
+        <p:spPr>
+          <a:xfrm>
+            <a:off x="1371600" y="5367528"/>
+            <a:ext cx="10332720" cy="914400"/>
+          </a:xfrm>
+          <a:prstGeom prst="rect">
+            <a:avLst/>
+          </a:prstGeom>
+          <a:noFill/>
+          <a:ln/>
+        </p:spPr>
+        <p:txBody>
+          <a:bodyPr wrap="square" rtlCol="0" anchor="t">
+            <a:spAutoFit/>
+          </a:bodyPr>
+          <a:lstStyle/>
+          <a:p>
+            <a:pPr indent="0" marL="0">
+              <a:lnSpc>
+                <a:spcPct val="112000"/>
+              </a:lnSpc>
+              <a:buNone/>
+            </a:pPr>
+            <a:r>
+              <a:rPr lang="en-US" sz="1450" dirty="0">
+                <a:solidFill>
+                  <a:srgbClr val="1A1A1A"/>
+                </a:solidFill>
+                <a:latin typeface="Calibri" pitchFamily="34" charset="0"/>
+                <a:ea typeface="Calibri" pitchFamily="34" charset="-122"/>
+                <a:cs typeface="Calibri" pitchFamily="34" charset="-120"/>
+              </a:rPr>
+              <a:t>Where your corpus comes from, what the licence allows, and what the Data Biography has to answer.</a:t>
+            </a:r>
+            <a:endParaRPr lang="en-US" sz="1450" dirty="0"/>
+          </a:p>
+        </p:txBody>
+      </p:sp>
+    </p:spTree>
+  </p:cSld>
+  <p:clrMapOvr>
+    <a:masterClrMapping/>
+  </p:clrMapOvr>
+</p:sld>
+</file>
+
+<file path=ppt/slides/slide15.xml><?xml version="1.0" encoding="utf-8"?>
+<p:sld xmlns:a="http://schemas.openxmlformats.org/drawingml/2006/main" xmlns:r="http://schemas.openxmlformats.org/officeDocument/2006/relationships" xmlns:p="http://schemas.openxmlformats.org/presentationml/2006/main">
+  <p:cSld name="Slide 15">
     <p:bg>
       <p:bgPr>
         <a:solidFill>
@@ -3595,7 +5520,7 @@
                 <a:ea typeface="Cambria" pitchFamily="34" charset="-122"/>
                 <a:cs typeface="Cambria" pitchFamily="34" charset="-120"/>
               </a:rPr>
-              <a:t>Explain it: your question aloud, what it omits, and where your data actually comes from. (Competencies 2, 6.)</a:t>
+              <a:t>Explain it: what a word vector is, in your own words, and one thing it cannot tell you. Plus your question aloud, what it omits, and where your data comes from. (Competencies 2, 6.)</a:t>
             </a:r>
             <a:endParaRPr lang="en-US" sz="2600" dirty="0"/>
           </a:p>
@@ -4148,7 +6073,7 @@
                 <a:ea typeface="Calibri" pitchFamily="34" charset="-122"/>
                 <a:cs typeface="Calibri" pitchFamily="34" charset="-120"/>
               </a:rPr>
-              <a:t>A Pudding "How We Made…" process post, the messy middle, where every polished piece had a moment its maker thought it wouldn't work.</a:t>
+              <a:t>The word2vec analogy that made the field pay attention: king - man + woman lands near queen. A model nobody told about royalty or gender, trained only to guess neighbouring words, ends up with those relationships as directions in space.</a:t>
             </a:r>
             <a:endParaRPr lang="en-US" sz="1900" dirty="0"/>
           </a:p>
@@ -4324,7 +6249,7 @@
                 <a:ea typeface="Calibri" pitchFamily="34" charset="-122"/>
                 <a:cs typeface="Calibri" pitchFamily="34" charset="-120"/>
               </a:rPr>
-              <a:t>Listen across the pitches for questions too vague to answer, corpora that don't exist as accessible data, methods chosen on instinct rather than fit, and the quiet scaling-down of ambition.</a:t>
+              <a:t>The analogy is real and it is also a magic trick: the arithmetic is nudged (the query word is excluded from the answer), most analogies fail, and the same geometry that gives you queen gives you the occupational stereotypes Bolukbasi found. What the vectors know, they learned from us.</a:t>
             </a:r>
             <a:endParaRPr lang="en-US" sz="2000" dirty="0"/>
           </a:p>
@@ -4456,7 +6381,7 @@
                 <a:ea typeface="Cambria" pitchFamily="34" charset="-122"/>
                 <a:cs typeface="Cambria" pitchFamily="34" charset="-120"/>
               </a:rPr>
-              <a:t>What a viable pitch contains</a:t>
+              <a:t>Your classifier, redrawn as a neuron</a:t>
             </a:r>
             <a:endParaRPr lang="en-US" sz="3000" dirty="0"/>
           </a:p>
@@ -4520,7 +6445,7 @@
                 <a:ea typeface="Calibri" pitchFamily="34" charset="-122"/>
                 <a:cs typeface="Calibri" pitchFamily="34" charset="-120"/>
               </a:rPr>
-              <a:t>Three minutes, hard cap: your corpus (existence proof on screen), your two methods, and what would count as a finding.</a:t>
+              <a:t>Inputs (word counts), one weight each, add them up, squash to a probability. That is Week 3, and it is one neuron.</a:t>
             </a:r>
             <a:endParaRPr lang="en-US" sz="1650" dirty="0"/>
           </a:p>
@@ -4584,7 +6509,7 @@
                 <a:ea typeface="Calibri" pitchFamily="34" charset="-122"/>
                 <a:cs typeface="Calibri" pitchFamily="34" charset="-120"/>
               </a:rPr>
-              <a:t>"Explore themes in music" is not answerable. "Did Billboard #1 lyrics narrow in vocabulary 1990-2020?" is.</a:t>
+              <a:t>A network stacks them: a hidden layer between the words and the answer.</a:t>
             </a:r>
             <a:endParaRPr lang="en-US" sz="1650" dirty="0"/>
           </a:p>
@@ -4648,7 +6573,7 @@
                 <a:ea typeface="Calibri" pitchFamily="34" charset="-122"/>
                 <a:cs typeface="Calibri" pitchFamily="34" charset="-120"/>
               </a:rPr>
-              <a:t>A null result, honestly shown, is a complete project: "I expected X, the data doesn't show it, here's how I know."</a:t>
+              <a:t>What stacking buys: features nobody hand-wrote. Combinations of words the model invents because they help.</a:t>
             </a:r>
             <a:endParaRPr lang="en-US" sz="1650" dirty="0"/>
           </a:p>
@@ -4712,7 +6637,7 @@
                 <a:ea typeface="Calibri" pitchFamily="34" charset="-122"/>
                 <a:cs typeface="Calibri" pitchFamily="34" charset="-120"/>
               </a:rPr>
-              <a:t>The pivot kit exists because corpora fail. Adopting a fallback pair is normal, not a failure.</a:t>
+              <a:t>What it costs: the weights stop being readable. That is the trade Week 7 asks you to accept knowingly.</a:t>
             </a:r>
             <a:endParaRPr lang="en-US" sz="1650" dirty="0"/>
           </a:p>
@@ -4844,7 +6769,7 @@
                 <a:ea typeface="Cambria" pitchFamily="34" charset="-122"/>
                 <a:cs typeface="Cambria" pitchFamily="34" charset="-120"/>
               </a:rPr>
-              <a:t>Licensing rules, in one slide</a:t>
+              <a:t>How it learns: downhill, in small steps</a:t>
             </a:r>
             <a:endParaRPr lang="en-US" sz="3000" dirty="0"/>
           </a:p>
@@ -4908,7 +6833,7 @@
                 <a:ea typeface="Calibri" pitchFamily="34" charset="-122"/>
                 <a:cs typeface="Calibri" pitchFamily="34" charset="-120"/>
               </a:rPr>
-              <a:t>CC0 museum data and public-domain books: use freely, republish freely.</a:t>
+              <a:t>A loss is one number saying how wrong the model currently is.</a:t>
             </a:r>
             <a:endParaRPr lang="en-US" sz="1650" dirty="0"/>
           </a:p>
@@ -4972,7 +6897,7 @@
                 <a:ea typeface="Calibri" pitchFamily="34" charset="-122"/>
                 <a:cs typeface="Calibri" pitchFamily="34" charset="-120"/>
               </a:rPr>
-              <a:t>Academic corpora: analyze, don't redistribute. Lyrics and review text: metadata and counts only.</a:t>
+              <a:t>Gradient descent: nudge every weight in the direction that lowers the loss, then repeat.</a:t>
             </a:r>
             <a:endParaRPr lang="en-US" sz="1650" dirty="0"/>
           </a:p>
@@ -5036,7 +6961,7 @@
                 <a:ea typeface="Calibri" pitchFamily="34" charset="-122"/>
                 <a:cs typeface="Calibri" pitchFamily="34" charset="-120"/>
               </a:rPr>
-              <a:t>AO3 and other community-opposed archives: a small attributed sample at most, never a shared dataset.</a:t>
+              <a:t>No calculus today. Rolling downhill in fog, feeling for the slope, is the honest picture.</a:t>
             </a:r>
             <a:endParaRPr lang="en-US" sz="1650" dirty="0"/>
           </a:p>
@@ -5100,7 +7025,7 @@
                 <a:ea typeface="Calibri" pitchFamily="34" charset="-122"/>
                 <a:cs typeface="Calibri" pitchFamily="34" charset="-120"/>
               </a:rPr>
-              <a:t>Shadow-library books: never. That line is what the field's $1.5B settlement was about.</a:t>
+              <a:t>TensorFlow Playground, live on the spiral: watch the hidden units carve the space into pieces.</a:t>
             </a:r>
             <a:endParaRPr lang="en-US" sz="1650" dirty="0"/>
           </a:p>
@@ -5232,7 +7157,7 @@
                 <a:ea typeface="Cambria" pitchFamily="34" charset="-122"/>
                 <a:cs typeface="Cambria" pitchFamily="34" charset="-120"/>
               </a:rPr>
-              <a:t>Three routes to a corpus</a:t>
+              <a:t>The problem embeddings solve</a:t>
             </a:r>
             <a:endParaRPr lang="en-US" sz="3000" dirty="0"/>
           </a:p>
@@ -5296,7 +7221,7 @@
                 <a:ea typeface="Calibri" pitchFamily="34" charset="-122"/>
                 <a:cs typeface="Calibri" pitchFamily="34" charset="-120"/>
               </a:rPr>
-              <a:t>Route 1, the common case: a prepared file. pd.read_csv(url), gdown for Drive links, load_dataset() for Hugging Face.</a:t>
+              <a:t>In a bag of words, happy and joyful share nothing. Neither do Oakland and Berkeley.</a:t>
             </a:r>
             <a:endParaRPr lang="en-US" sz="1650" dirty="0"/>
           </a:p>
@@ -5360,7 +7285,7 @@
                 <a:ea typeface="Calibri" pitchFamily="34" charset="-122"/>
                 <a:cs typeface="Calibri" pitchFamily="34" charset="-120"/>
               </a:rPr>
-              <a:t>Route 2: an API, the sanctioned route. The Met's endpoint returns JSON, no key required.</a:t>
+              <a:t>Counting has no notion of meaning. That is its honest floor, and you have lived with it since Week 2.</a:t>
             </a:r>
             <a:endParaRPr lang="en-US" sz="1650" dirty="0"/>
           </a:p>
@@ -5424,7 +7349,7 @@
                 <a:ea typeface="Calibri" pitchFamily="34" charset="-122"/>
                 <a:cs typeface="Calibri" pitchFamily="34" charset="-120"/>
               </a:rPr>
-              <a:t>Route 3, a last resort: scraping, done carefully. Read robots.txt and the terms of service, request slowly, take only what you need, never republish.</a:t>
+              <a:t>The distributional idea: a word is known by the company it keeps.</a:t>
             </a:r>
             <a:endParaRPr lang="en-US" sz="1650" dirty="0"/>
           </a:p>
@@ -5488,7 +7413,7 @@
                 <a:ea typeface="Calibri" pitchFamily="34" charset="-122"/>
                 <a:cs typeface="Calibri" pitchFamily="34" charset="-120"/>
               </a:rPr>
-              <a:t>Whatever the route: save the result to your Drive project folder today. Week 5 depends on it.</a:t>
+              <a:t>So put every word in a space where words that keep similar company land near each other.</a:t>
             </a:r>
             <a:endParaRPr lang="en-US" sz="1650" dirty="0"/>
           </a:p>
@@ -5620,7 +7545,7 @@
                 <a:ea typeface="Cambria" pitchFamily="34" charset="-122"/>
                 <a:cs typeface="Cambria" pitchFamily="34" charset="-120"/>
               </a:rPr>
-              <a:t>The Data Biography (~400 words, due Week 5)</a:t>
+              <a:t>Where word vectors come from</a:t>
             </a:r>
             <a:endParaRPr lang="en-US" sz="3000" dirty="0"/>
           </a:p>
@@ -5684,7 +7609,7 @@
                 <a:ea typeface="Calibri" pitchFamily="34" charset="-122"/>
                 <a:cs typeface="Calibri" pitchFamily="34" charset="-120"/>
               </a:rPr>
-              <a:t>Where did this data come from, and who made it?</a:t>
+              <a:t>word2vec is a small neural net trained on a fake task: given a word, guess its neighbours.</a:t>
             </a:r>
             <a:endParaRPr lang="en-US" sz="1650" dirty="0"/>
           </a:p>
@@ -5748,7 +7673,7 @@
                 <a:ea typeface="Calibri" pitchFamily="34" charset="-122"/>
                 <a:cs typeface="Calibri" pitchFamily="34" charset="-120"/>
               </a:rPr>
-              <a:t>Who is in it, and who is missing from it?</a:t>
+              <a:t>Nobody wants the predictions. The by-product is the point: the hidden layer becomes one vector per word.</a:t>
             </a:r>
             <a:endParaRPr lang="en-US" sz="1650" dirty="0"/>
           </a:p>
@@ -5812,7 +7737,7 @@
                 <a:ea typeface="Calibri" pitchFamily="34" charset="-122"/>
                 <a:cs typeface="Calibri" pitchFamily="34" charset="-120"/>
               </a:rPr>
-              <a:t>What can it not tell you, no matter how cleverly you count?</a:t>
+              <a:t>Similarity is the angle between two vectors, the same cosine as Week 2's vector space.</a:t>
             </a:r>
             <a:endParaRPr lang="en-US" sz="1650" dirty="0"/>
           </a:p>
@@ -5876,7 +7801,7 @@
                 <a:ea typeface="Calibri" pitchFamily="34" charset="-122"/>
                 <a:cs typeface="Calibri" pitchFamily="34" charset="-120"/>
               </a:rPr>
-              <a:t>Its distilled form becomes your essay's corpus note in Week 8. Write it once, use it twice.</a:t>
+              <a:t>king - man + woman lands near queen. Directions in the space carry relationships nobody labelled.</a:t>
             </a:r>
             <a:endParaRPr lang="en-US" sz="1650" dirty="0"/>
           </a:p>
@@ -5916,14 +7841,34 @@
       </p:grpSpPr>
       <p:sp>
         <p:nvSpPr>
-          <p:cNvPr id="2" name="Text 0"/>
-          <p:cNvSpPr/>
-          <p:nvPr/>
-        </p:nvSpPr>
-        <p:spPr>
-          <a:xfrm>
-            <a:off x="640080" y="731520"/>
-            <a:ext cx="10058400" cy="731520"/>
+          <p:cNvPr id="2" name="Shape 0"/>
+          <p:cNvSpPr/>
+          <p:nvPr/>
+        </p:nvSpPr>
+        <p:spPr>
+          <a:xfrm>
+            <a:off x="0" y="0"/>
+            <a:ext cx="164592" cy="6858000"/>
+          </a:xfrm>
+          <a:prstGeom prst="rect">
+            <a:avLst/>
+          </a:prstGeom>
+          <a:solidFill>
+            <a:srgbClr val="3F6F5F"/>
+          </a:solidFill>
+          <a:ln/>
+        </p:spPr>
+      </p:sp>
+      <p:sp>
+        <p:nvSpPr>
+          <p:cNvPr id="3" name="Text 1"/>
+          <p:cNvSpPr/>
+          <p:nvPr/>
+        </p:nvSpPr>
+        <p:spPr>
+          <a:xfrm>
+            <a:off x="640080" y="640080"/>
+            <a:ext cx="10058400" cy="320040"/>
           </a:xfrm>
           <a:prstGeom prst="rect">
             <a:avLst/>
@@ -5933,6 +7878,47 @@
         </p:spPr>
         <p:txBody>
           <a:bodyPr wrap="square" rtlCol="0" anchor="ctr"/>
+          <a:lstStyle/>
+          <a:p>
+            <a:pPr indent="0" marL="0">
+              <a:buNone/>
+            </a:pPr>
+            <a:r>
+              <a:rPr lang="en-US" sz="1200" b="1" spc="300" kern="0" dirty="0">
+                <a:solidFill>
+                  <a:srgbClr val="3F6F5F"/>
+                </a:solidFill>
+                <a:latin typeface="Calibri" pitchFamily="34" charset="0"/>
+                <a:ea typeface="Calibri" pitchFamily="34" charset="-122"/>
+                <a:cs typeface="Calibri" pitchFamily="34" charset="-120"/>
+              </a:rPr>
+              <a:t>WEEK 4 · KEY POINTS</a:t>
+            </a:r>
+            <a:endParaRPr lang="en-US" sz="1200" dirty="0"/>
+          </a:p>
+        </p:txBody>
+      </p:sp>
+      <p:sp>
+        <p:nvSpPr>
+          <p:cNvPr id="4" name="Text 2"/>
+          <p:cNvSpPr/>
+          <p:nvPr/>
+        </p:nvSpPr>
+        <p:spPr>
+          <a:xfrm>
+            <a:off x="640080" y="1005840"/>
+            <a:ext cx="10881360" cy="914400"/>
+          </a:xfrm>
+          <a:prstGeom prst="rect">
+            <a:avLst/>
+          </a:prstGeom>
+          <a:noFill/>
+          <a:ln/>
+        </p:spPr>
+        <p:txBody>
+          <a:bodyPr wrap="square" rtlCol="0" anchor="t">
+            <a:spAutoFit/>
+          </a:bodyPr>
           <a:lstStyle/>
           <a:p>
             <a:pPr indent="0" marL="0">
@@ -5947,7 +7933,7 @@
                 <a:ea typeface="Cambria" pitchFamily="34" charset="-122"/>
                 <a:cs typeface="Cambria" pitchFamily="34" charset="-120"/>
               </a:rPr>
-              <a:t>Three modes today</a:t>
+              <a:t>The analogy, with its caveats attached</a:t>
             </a:r>
             <a:endParaRPr lang="en-US" sz="3000" dirty="0"/>
           </a:p>
@@ -5955,134 +7941,98 @@
       </p:sp>
       <p:sp>
         <p:nvSpPr>
-          <p:cNvPr id="3" name="Text 1"/>
-          <p:cNvSpPr/>
-          <p:nvPr/>
-        </p:nvSpPr>
-        <p:spPr>
-          <a:xfrm>
-            <a:off x="640080" y="1417320"/>
-            <a:ext cx="10058400" cy="365760"/>
-          </a:xfrm>
-          <a:prstGeom prst="rect">
-            <a:avLst/>
-          </a:prstGeom>
-          <a:noFill/>
-          <a:ln/>
-        </p:spPr>
-        <p:txBody>
-          <a:bodyPr wrap="square" rtlCol="0" anchor="ctr"/>
-          <a:lstStyle/>
-          <a:p>
-            <a:pPr indent="0" marL="0">
-              <a:buNone/>
-            </a:pPr>
-            <a:r>
-              <a:rPr lang="en-US" sz="1400" i="1" dirty="0">
-                <a:solidFill>
-                  <a:srgbClr val="6B6B63"/>
+          <p:cNvPr id="5" name="Shape 3"/>
+          <p:cNvSpPr/>
+          <p:nvPr/>
+        </p:nvSpPr>
+        <p:spPr>
+          <a:xfrm>
+            <a:off x="640080" y="2331720"/>
+            <a:ext cx="201168" cy="201168"/>
+          </a:xfrm>
+          <a:prstGeom prst="ellipse">
+            <a:avLst/>
+          </a:prstGeom>
+          <a:solidFill>
+            <a:srgbClr val="7A3B2E"/>
+          </a:solidFill>
+          <a:ln/>
+        </p:spPr>
+      </p:sp>
+      <p:sp>
+        <p:nvSpPr>
+          <p:cNvPr id="6" name="Text 4"/>
+          <p:cNvSpPr/>
+          <p:nvPr/>
+        </p:nvSpPr>
+        <p:spPr>
+          <a:xfrm>
+            <a:off x="1097280" y="2240280"/>
+            <a:ext cx="10607040" cy="1017270"/>
+          </a:xfrm>
+          <a:prstGeom prst="rect">
+            <a:avLst/>
+          </a:prstGeom>
+          <a:noFill/>
+          <a:ln/>
+        </p:spPr>
+        <p:txBody>
+          <a:bodyPr wrap="square" rtlCol="0" anchor="t">
+            <a:spAutoFit/>
+          </a:bodyPr>
+          <a:lstStyle/>
+          <a:p>
+            <a:pPr indent="0" marL="0">
+              <a:lnSpc>
+                <a:spcPct val="112000"/>
+              </a:lnSpc>
+              <a:buNone/>
+            </a:pPr>
+            <a:r>
+              <a:rPr lang="en-US" sz="1650" dirty="0">
+                <a:solidFill>
+                  <a:srgbClr val="1A1A1A"/>
                 </a:solidFill>
                 <a:latin typeface="Calibri" pitchFamily="34" charset="0"/>
                 <a:ea typeface="Calibri" pitchFamily="34" charset="-122"/>
                 <a:cs typeface="Calibri" pitchFamily="34" charset="-120"/>
               </a:rPr>
-              <a:t>about a third of the session each</a:t>
-            </a:r>
-            <a:endParaRPr lang="en-US" sz="1400" dirty="0"/>
-          </a:p>
-        </p:txBody>
-      </p:sp>
-      <p:sp>
-        <p:nvSpPr>
-          <p:cNvPr id="4" name="Shape 2"/>
-          <p:cNvSpPr/>
-          <p:nvPr/>
-        </p:nvSpPr>
-        <p:spPr>
-          <a:xfrm>
-            <a:off x="640080" y="2194560"/>
-            <a:ext cx="3383280" cy="3291840"/>
-          </a:xfrm>
-          <a:prstGeom prst="roundRect">
-            <a:avLst>
-              <a:gd name="adj" fmla="val 3333"/>
-            </a:avLst>
-          </a:prstGeom>
-          <a:solidFill>
-            <a:srgbClr val="F4EEE8"/>
-          </a:solidFill>
-          <a:ln/>
-        </p:spPr>
-      </p:sp>
-      <p:sp>
-        <p:nvSpPr>
-          <p:cNvPr id="5" name="Shape 3"/>
-          <p:cNvSpPr/>
-          <p:nvPr/>
-        </p:nvSpPr>
-        <p:spPr>
-          <a:xfrm>
-            <a:off x="1051560" y="2606040"/>
-            <a:ext cx="548640" cy="548640"/>
+              <a:t>The arithmetic is nudged: the query words are excluded, or king comes back as its own nearest neighbour.</a:t>
+            </a:r>
+            <a:endParaRPr lang="en-US" sz="1650" dirty="0"/>
+          </a:p>
+        </p:txBody>
+      </p:sp>
+      <p:sp>
+        <p:nvSpPr>
+          <p:cNvPr id="7" name="Shape 5"/>
+          <p:cNvSpPr/>
+          <p:nvPr/>
+        </p:nvSpPr>
+        <p:spPr>
+          <a:xfrm>
+            <a:off x="640080" y="3348990"/>
+            <a:ext cx="201168" cy="201168"/>
           </a:xfrm>
           <a:prstGeom prst="ellipse">
             <a:avLst/>
           </a:prstGeom>
           <a:solidFill>
-            <a:srgbClr val="7A3B2E"/>
-          </a:solidFill>
-          <a:ln/>
-        </p:spPr>
-      </p:sp>
-      <p:sp>
-        <p:nvSpPr>
-          <p:cNvPr id="6" name="Text 4"/>
-          <p:cNvSpPr/>
-          <p:nvPr/>
-        </p:nvSpPr>
-        <p:spPr>
-          <a:xfrm>
-            <a:off x="1005840" y="3383280"/>
-            <a:ext cx="2651760" cy="548640"/>
-          </a:xfrm>
-          <a:prstGeom prst="rect">
-            <a:avLst/>
-          </a:prstGeom>
-          <a:noFill/>
-          <a:ln/>
-        </p:spPr>
-        <p:txBody>
-          <a:bodyPr wrap="square" rtlCol="0" anchor="ctr"/>
-          <a:lstStyle/>
-          <a:p>
-            <a:pPr indent="0" marL="0">
-              <a:buNone/>
-            </a:pPr>
-            <a:r>
-              <a:rPr lang="en-US" sz="2100" b="1" dirty="0">
-                <a:solidFill>
-                  <a:srgbClr val="1A1A1A"/>
-                </a:solidFill>
-                <a:latin typeface="Cambria" pitchFamily="34" charset="0"/>
-                <a:ea typeface="Cambria" pitchFamily="34" charset="-122"/>
-                <a:cs typeface="Cambria" pitchFamily="34" charset="-120"/>
-              </a:rPr>
-              <a:t>Lecture / demo</a:t>
-            </a:r>
-            <a:endParaRPr lang="en-US" sz="2100" dirty="0"/>
-          </a:p>
-        </p:txBody>
-      </p:sp>
-      <p:sp>
-        <p:nvSpPr>
-          <p:cNvPr id="7" name="Text 5"/>
-          <p:cNvSpPr/>
-          <p:nvPr/>
-        </p:nvSpPr>
-        <p:spPr>
-          <a:xfrm>
-            <a:off x="1005840" y="3977640"/>
-            <a:ext cx="2651760" cy="1371600"/>
+            <a:srgbClr val="3F6F5F"/>
+          </a:solidFill>
+          <a:ln/>
+        </p:spPr>
+      </p:sp>
+      <p:sp>
+        <p:nvSpPr>
+          <p:cNvPr id="8" name="Text 6"/>
+          <p:cNvSpPr/>
+          <p:nvPr/>
+        </p:nvSpPr>
+        <p:spPr>
+          <a:xfrm>
+            <a:off x="1097280" y="3257550"/>
+            <a:ext cx="10607040" cy="1017270"/>
           </a:xfrm>
           <a:prstGeom prst="rect">
             <a:avLst/>
@@ -6098,12 +8048,12 @@
           <a:p>
             <a:pPr indent="0" marL="0">
               <a:lnSpc>
-                <a:spcPct val="115000"/>
+                <a:spcPct val="112000"/>
               </a:lnSpc>
               <a:buNone/>
             </a:pPr>
             <a:r>
-              <a:rPr lang="en-US" sz="1500" dirty="0">
+              <a:rPr lang="en-US" sz="1650" dirty="0">
                 <a:solidFill>
                   <a:srgbClr val="1A1A1A"/>
                 </a:solidFill>
@@ -6111,33 +8061,11 @@
                 <a:ea typeface="Calibri" pitchFamily="34" charset="-122"/>
                 <a:cs typeface="Calibri" pitchFamily="34" charset="-120"/>
               </a:rPr>
-              <a:t>The project (no new mechanism this week)</a:t>
-            </a:r>
-            <a:endParaRPr lang="en-US" sz="1500" dirty="0"/>
-          </a:p>
-        </p:txBody>
-      </p:sp>
-      <p:sp>
-        <p:nvSpPr>
-          <p:cNvPr id="8" name="Shape 6"/>
-          <p:cNvSpPr/>
-          <p:nvPr/>
-        </p:nvSpPr>
-        <p:spPr>
-          <a:xfrm>
-            <a:off x="4526280" y="2194560"/>
-            <a:ext cx="3383280" cy="3291840"/>
-          </a:xfrm>
-          <a:prstGeom prst="roundRect">
-            <a:avLst>
-              <a:gd name="adj" fmla="val 3333"/>
-            </a:avLst>
-          </a:prstGeom>
-          <a:solidFill>
-            <a:srgbClr val="F4EEE8"/>
-          </a:solidFill>
-          <a:ln/>
-        </p:spPr>
+              <a:t>Most analogies fail. The famous four are the ones that worked.</a:t>
+            </a:r>
+            <a:endParaRPr lang="en-US" sz="1650" dirty="0"/>
+          </a:p>
+        </p:txBody>
       </p:sp>
       <p:sp>
         <p:nvSpPr>
@@ -6147,14 +8075,14 @@
         </p:nvSpPr>
         <p:spPr>
           <a:xfrm>
-            <a:off x="4937760" y="2606040"/>
-            <a:ext cx="548640" cy="548640"/>
+            <a:off x="640080" y="4366260"/>
+            <a:ext cx="201168" cy="201168"/>
           </a:xfrm>
           <a:prstGeom prst="ellipse">
             <a:avLst/>
           </a:prstGeom>
           <a:solidFill>
-            <a:srgbClr val="3F6F5F"/>
+            <a:srgbClr val="B9852F"/>
           </a:solidFill>
           <a:ln/>
         </p:spPr>
@@ -6167,47 +8095,8 @@
         </p:nvSpPr>
         <p:spPr>
           <a:xfrm>
-            <a:off x="4892040" y="3383280"/>
-            <a:ext cx="2651760" cy="548640"/>
-          </a:xfrm>
-          <a:prstGeom prst="rect">
-            <a:avLst/>
-          </a:prstGeom>
-          <a:noFill/>
-          <a:ln/>
-        </p:spPr>
-        <p:txBody>
-          <a:bodyPr wrap="square" rtlCol="0" anchor="ctr"/>
-          <a:lstStyle/>
-          <a:p>
-            <a:pPr indent="0" marL="0">
-              <a:buNone/>
-            </a:pPr>
-            <a:r>
-              <a:rPr lang="en-US" sz="2100" b="1" dirty="0">
-                <a:solidFill>
-                  <a:srgbClr val="1A1A1A"/>
-                </a:solidFill>
-                <a:latin typeface="Cambria" pitchFamily="34" charset="0"/>
-                <a:ea typeface="Cambria" pitchFamily="34" charset="-122"/>
-                <a:cs typeface="Cambria" pitchFamily="34" charset="-120"/>
-              </a:rPr>
-              <a:t>Workshop</a:t>
-            </a:r>
-            <a:endParaRPr lang="en-US" sz="2100" dirty="0"/>
-          </a:p>
-        </p:txBody>
-      </p:sp>
-      <p:sp>
-        <p:nvSpPr>
-          <p:cNvPr id="11" name="Text 9"/>
-          <p:cNvSpPr/>
-          <p:nvPr/>
-        </p:nvSpPr>
-        <p:spPr>
-          <a:xfrm>
-            <a:off x="4892040" y="3977640"/>
-            <a:ext cx="2651760" cy="1371600"/>
+            <a:off x="1097280" y="4274820"/>
+            <a:ext cx="10607040" cy="1017270"/>
           </a:xfrm>
           <a:prstGeom prst="rect">
             <a:avLst/>
@@ -6223,12 +8112,12 @@
           <a:p>
             <a:pPr indent="0" marL="0">
               <a:lnSpc>
-                <a:spcPct val="115000"/>
+                <a:spcPct val="112000"/>
               </a:lnSpc>
               <a:buNone/>
             </a:pPr>
             <a:r>
-              <a:rPr lang="en-US" sz="1500" dirty="0">
+              <a:rPr lang="en-US" sz="1650" dirty="0">
                 <a:solidFill>
                   <a:srgbClr val="1A1A1A"/>
                 </a:solidFill>
@@ -6236,103 +8125,42 @@
                 <a:ea typeface="Calibri" pitchFamily="34" charset="-122"/>
                 <a:cs typeface="Calibri" pitchFamily="34" charset="-120"/>
               </a:rPr>
-              <a:t>Build hands-on on your own data.</a:t>
-            </a:r>
-            <a:endParaRPr lang="en-US" sz="1500" dirty="0"/>
-          </a:p>
-        </p:txBody>
-      </p:sp>
-      <p:sp>
-        <p:nvSpPr>
-          <p:cNvPr id="12" name="Shape 10"/>
-          <p:cNvSpPr/>
-          <p:nvPr/>
-        </p:nvSpPr>
-        <p:spPr>
-          <a:xfrm>
-            <a:off x="8412480" y="2194560"/>
-            <a:ext cx="3383280" cy="3291840"/>
-          </a:xfrm>
-          <a:prstGeom prst="roundRect">
-            <a:avLst>
-              <a:gd name="adj" fmla="val 3333"/>
-            </a:avLst>
-          </a:prstGeom>
-          <a:solidFill>
-            <a:srgbClr val="F4EEE8"/>
-          </a:solidFill>
-          <a:ln/>
-        </p:spPr>
-      </p:sp>
-      <p:sp>
-        <p:nvSpPr>
-          <p:cNvPr id="13" name="Shape 11"/>
-          <p:cNvSpPr/>
-          <p:nvPr/>
-        </p:nvSpPr>
-        <p:spPr>
-          <a:xfrm>
-            <a:off x="8823960" y="2606040"/>
-            <a:ext cx="548640" cy="548640"/>
+              <a:t>The same geometry gives doctor - man + woman = nurse (Bolukbasi 2016). Week 5 argues about what that means.</a:t>
+            </a:r>
+            <a:endParaRPr lang="en-US" sz="1650" dirty="0"/>
+          </a:p>
+        </p:txBody>
+      </p:sp>
+      <p:sp>
+        <p:nvSpPr>
+          <p:cNvPr id="11" name="Shape 9"/>
+          <p:cNvSpPr/>
+          <p:nvPr/>
+        </p:nvSpPr>
+        <p:spPr>
+          <a:xfrm>
+            <a:off x="640080" y="5383530"/>
+            <a:ext cx="201168" cy="201168"/>
           </a:xfrm>
           <a:prstGeom prst="ellipse">
             <a:avLst/>
           </a:prstGeom>
           <a:solidFill>
-            <a:srgbClr val="B9852F"/>
-          </a:solidFill>
-          <a:ln/>
-        </p:spPr>
-      </p:sp>
-      <p:sp>
-        <p:nvSpPr>
-          <p:cNvPr id="14" name="Text 12"/>
-          <p:cNvSpPr/>
-          <p:nvPr/>
-        </p:nvSpPr>
-        <p:spPr>
-          <a:xfrm>
-            <a:off x="8778240" y="3383280"/>
-            <a:ext cx="2651760" cy="548640"/>
-          </a:xfrm>
-          <a:prstGeom prst="rect">
-            <a:avLst/>
-          </a:prstGeom>
-          <a:noFill/>
-          <a:ln/>
-        </p:spPr>
-        <p:txBody>
-          <a:bodyPr wrap="square" rtlCol="0" anchor="ctr"/>
-          <a:lstStyle/>
-          <a:p>
-            <a:pPr indent="0" marL="0">
-              <a:buNone/>
-            </a:pPr>
-            <a:r>
-              <a:rPr lang="en-US" sz="2100" b="1" dirty="0">
-                <a:solidFill>
-                  <a:srgbClr val="1A1A1A"/>
-                </a:solidFill>
-                <a:latin typeface="Cambria" pitchFamily="34" charset="0"/>
-                <a:ea typeface="Cambria" pitchFamily="34" charset="-122"/>
-                <a:cs typeface="Cambria" pitchFamily="34" charset="-120"/>
-              </a:rPr>
-              <a:t>Discussion</a:t>
-            </a:r>
-            <a:endParaRPr lang="en-US" sz="2100" dirty="0"/>
-          </a:p>
-        </p:txBody>
-      </p:sp>
-      <p:sp>
-        <p:nvSpPr>
-          <p:cNvPr id="15" name="Text 13"/>
-          <p:cNvSpPr/>
-          <p:nvPr/>
-        </p:nvSpPr>
-        <p:spPr>
-          <a:xfrm>
-            <a:off x="8778240" y="3977640"/>
-            <a:ext cx="2651760" cy="1371600"/>
+            <a:srgbClr val="7A3B2E"/>
+          </a:solidFill>
+          <a:ln/>
+        </p:spPr>
+      </p:sp>
+      <p:sp>
+        <p:nvSpPr>
+          <p:cNvPr id="12" name="Text 10"/>
+          <p:cNvSpPr/>
+          <p:nvPr/>
+        </p:nvSpPr>
+        <p:spPr>
+          <a:xfrm>
+            <a:off x="1097280" y="5292090"/>
+            <a:ext cx="10607040" cy="1017270"/>
           </a:xfrm>
           <a:prstGeom prst="rect">
             <a:avLst/>
@@ -6348,12 +8176,12 @@
           <a:p>
             <a:pPr indent="0" marL="0">
               <a:lnSpc>
-                <a:spcPct val="115000"/>
+                <a:spcPct val="112000"/>
               </a:lnSpc>
               <a:buNone/>
             </a:pPr>
             <a:r>
-              <a:rPr lang="en-US" sz="1500" dirty="0">
+              <a:rPr lang="en-US" sz="1650" dirty="0">
                 <a:solidFill>
                   <a:srgbClr val="1A1A1A"/>
                 </a:solidFill>
@@ -6361,9 +8189,9 @@
                 <a:ea typeface="Calibri" pitchFamily="34" charset="-122"/>
                 <a:cs typeface="Calibri" pitchFamily="34" charset="-120"/>
               </a:rPr>
-              <a:t>Interrogate the study, debate it, or critique each other's work.</a:t>
-            </a:r>
-            <a:endParaRPr lang="en-US" sz="1500" dirty="0"/>
+              <a:t>Static vectors: one per word. Contextual models: one per occurrence. Week 5 embeds whole sentences.</a:t>
+            </a:r>
+            <a:endParaRPr lang="en-US" sz="1650" dirty="0"/>
           </a:p>
         </p:txBody>
       </p:sp>
@@ -6401,14 +8229,34 @@
       </p:grpSpPr>
       <p:sp>
         <p:nvSpPr>
-          <p:cNvPr id="2" name="Text 0"/>
+          <p:cNvPr id="2" name="Shape 0"/>
+          <p:cNvSpPr/>
+          <p:nvPr/>
+        </p:nvSpPr>
+        <p:spPr>
+          <a:xfrm>
+            <a:off x="0" y="0"/>
+            <a:ext cx="164592" cy="6858000"/>
+          </a:xfrm>
+          <a:prstGeom prst="rect">
+            <a:avLst/>
+          </a:prstGeom>
+          <a:solidFill>
+            <a:srgbClr val="B9852F"/>
+          </a:solidFill>
+          <a:ln/>
+        </p:spPr>
+      </p:sp>
+      <p:sp>
+        <p:nvSpPr>
+          <p:cNvPr id="3" name="Text 1"/>
           <p:cNvSpPr/>
           <p:nvPr/>
         </p:nvSpPr>
         <p:spPr>
           <a:xfrm>
             <a:off x="640080" y="640080"/>
-            <a:ext cx="10058400" cy="731520"/>
+            <a:ext cx="10058400" cy="320040"/>
           </a:xfrm>
           <a:prstGeom prst="rect">
             <a:avLst/>
@@ -6418,6 +8266,47 @@
         </p:spPr>
         <p:txBody>
           <a:bodyPr wrap="square" rtlCol="0" anchor="ctr"/>
+          <a:lstStyle/>
+          <a:p>
+            <a:pPr indent="0" marL="0">
+              <a:buNone/>
+            </a:pPr>
+            <a:r>
+              <a:rPr lang="en-US" sz="1200" b="1" spc="300" kern="0" dirty="0">
+                <a:solidFill>
+                  <a:srgbClr val="B9852F"/>
+                </a:solidFill>
+                <a:latin typeface="Calibri" pitchFamily="34" charset="0"/>
+                <a:ea typeface="Calibri" pitchFamily="34" charset="-122"/>
+                <a:cs typeface="Calibri" pitchFamily="34" charset="-120"/>
+              </a:rPr>
+              <a:t>WEEK 4 · KEY POINTS</a:t>
+            </a:r>
+            <a:endParaRPr lang="en-US" sz="1200" dirty="0"/>
+          </a:p>
+        </p:txBody>
+      </p:sp>
+      <p:sp>
+        <p:nvSpPr>
+          <p:cNvPr id="4" name="Text 2"/>
+          <p:cNvSpPr/>
+          <p:nvPr/>
+        </p:nvSpPr>
+        <p:spPr>
+          <a:xfrm>
+            <a:off x="640080" y="1005840"/>
+            <a:ext cx="10881360" cy="914400"/>
+          </a:xfrm>
+          <a:prstGeom prst="rect">
+            <a:avLst/>
+          </a:prstGeom>
+          <a:noFill/>
+          <a:ln/>
+        </p:spPr>
+        <p:txBody>
+          <a:bodyPr wrap="square" rtlCol="0" anchor="t">
+            <a:spAutoFit/>
+          </a:bodyPr>
           <a:lstStyle/>
           <a:p>
             <a:pPr indent="0" marL="0">
@@ -6432,7 +8321,7 @@
                 <a:ea typeface="Cambria" pitchFamily="34" charset="-122"/>
                 <a:cs typeface="Cambria" pitchFamily="34" charset="-120"/>
               </a:rPr>
-              <a:t>The session</a:t>
+              <a:t>Where a corpus comes from</a:t>
             </a:r>
             <a:endParaRPr lang="en-US" sz="3000" dirty="0"/>
           </a:p>
@@ -6440,19 +8329,17 @@
       </p:sp>
       <p:sp>
         <p:nvSpPr>
-          <p:cNvPr id="3" name="Shape 1"/>
-          <p:cNvSpPr/>
-          <p:nvPr/>
-        </p:nvSpPr>
-        <p:spPr>
-          <a:xfrm>
-            <a:off x="640080" y="1572768"/>
-            <a:ext cx="868680" cy="457200"/>
-          </a:xfrm>
-          <a:prstGeom prst="roundRect">
-            <a:avLst>
-              <a:gd name="adj" fmla="val 12000"/>
-            </a:avLst>
+          <p:cNvPr id="5" name="Shape 3"/>
+          <p:cNvSpPr/>
+          <p:nvPr/>
+        </p:nvSpPr>
+        <p:spPr>
+          <a:xfrm>
+            <a:off x="640080" y="2331720"/>
+            <a:ext cx="201168" cy="201168"/>
+          </a:xfrm>
+          <a:prstGeom prst="ellipse">
+            <a:avLst/>
           </a:prstGeom>
           <a:solidFill>
             <a:srgbClr val="7A3B2E"/>
@@ -6462,71 +8349,99 @@
       </p:sp>
       <p:sp>
         <p:nvSpPr>
-          <p:cNvPr id="4" name="Text 2"/>
-          <p:cNvSpPr/>
-          <p:nvPr/>
-        </p:nvSpPr>
-        <p:spPr>
-          <a:xfrm>
-            <a:off x="640080" y="1572768"/>
-            <a:ext cx="868680" cy="457200"/>
-          </a:xfrm>
-          <a:prstGeom prst="rect">
-            <a:avLst/>
-          </a:prstGeom>
-          <a:noFill/>
-          <a:ln/>
-        </p:spPr>
-        <p:txBody>
-          <a:bodyPr wrap="square" rtlCol="0" anchor="ctr"/>
-          <a:lstStyle/>
-          <a:p>
-            <a:pPr algn="ctr" indent="0" marL="0">
-              <a:buNone/>
-            </a:pPr>
-            <a:r>
-              <a:rPr lang="en-US" sz="1100" b="1" dirty="0">
-                <a:solidFill>
-                  <a:srgbClr val="FFFFFF"/>
+          <p:cNvPr id="6" name="Text 4"/>
+          <p:cNvSpPr/>
+          <p:nvPr/>
+        </p:nvSpPr>
+        <p:spPr>
+          <a:xfrm>
+            <a:off x="1097280" y="2240280"/>
+            <a:ext cx="10607040" cy="1017270"/>
+          </a:xfrm>
+          <a:prstGeom prst="rect">
+            <a:avLst/>
+          </a:prstGeom>
+          <a:noFill/>
+          <a:ln/>
+        </p:spPr>
+        <p:txBody>
+          <a:bodyPr wrap="square" rtlCol="0" anchor="t">
+            <a:spAutoFit/>
+          </a:bodyPr>
+          <a:lstStyle/>
+          <a:p>
+            <a:pPr indent="0" marL="0">
+              <a:lnSpc>
+                <a:spcPct val="112000"/>
+              </a:lnSpc>
+              <a:buNone/>
+            </a:pPr>
+            <a:r>
+              <a:rPr lang="en-US" sz="1650" dirty="0">
+                <a:solidFill>
+                  <a:srgbClr val="1A1A1A"/>
                 </a:solidFill>
                 <a:latin typeface="Calibri" pitchFamily="34" charset="0"/>
                 <a:ea typeface="Calibri" pitchFamily="34" charset="-122"/>
                 <a:cs typeface="Calibri" pitchFamily="34" charset="-120"/>
               </a:rPr>
-              <a:t>0:00</a:t>
-            </a:r>
-            <a:endParaRPr lang="en-US" sz="1100" dirty="0"/>
-          </a:p>
-        </p:txBody>
-      </p:sp>
-      <p:sp>
-        <p:nvSpPr>
-          <p:cNvPr id="5" name="Text 3"/>
-          <p:cNvSpPr/>
-          <p:nvPr/>
-        </p:nvSpPr>
-        <p:spPr>
-          <a:xfrm>
-            <a:off x="1691640" y="1554480"/>
-            <a:ext cx="9646920" cy="566928"/>
-          </a:xfrm>
-          <a:prstGeom prst="rect">
-            <a:avLst/>
-          </a:prstGeom>
-          <a:noFill/>
-          <a:ln/>
-        </p:spPr>
-        <p:txBody>
-          <a:bodyPr wrap="square" rtlCol="0" anchor="ctr">
+              <a:t>Route 1, and most projects should stop here: a prepared file. pd.read_csv(url), gdown, load_dataset().</a:t>
+            </a:r>
+            <a:endParaRPr lang="en-US" sz="1650" dirty="0"/>
+          </a:p>
+        </p:txBody>
+      </p:sp>
+      <p:sp>
+        <p:nvSpPr>
+          <p:cNvPr id="7" name="Shape 5"/>
+          <p:cNvSpPr/>
+          <p:nvPr/>
+        </p:nvSpPr>
+        <p:spPr>
+          <a:xfrm>
+            <a:off x="640080" y="3348990"/>
+            <a:ext cx="201168" cy="201168"/>
+          </a:xfrm>
+          <a:prstGeom prst="ellipse">
+            <a:avLst/>
+          </a:prstGeom>
+          <a:solidFill>
+            <a:srgbClr val="3F6F5F"/>
+          </a:solidFill>
+          <a:ln/>
+        </p:spPr>
+      </p:sp>
+      <p:sp>
+        <p:nvSpPr>
+          <p:cNvPr id="8" name="Text 6"/>
+          <p:cNvSpPr/>
+          <p:nvPr/>
+        </p:nvSpPr>
+        <p:spPr>
+          <a:xfrm>
+            <a:off x="1097280" y="3257550"/>
+            <a:ext cx="10607040" cy="1017270"/>
+          </a:xfrm>
+          <a:prstGeom prst="rect">
+            <a:avLst/>
+          </a:prstGeom>
+          <a:noFill/>
+          <a:ln/>
+        </p:spPr>
+        <p:txBody>
+          <a:bodyPr wrap="square" rtlCol="0" anchor="t">
             <a:spAutoFit/>
           </a:bodyPr>
           <a:lstStyle/>
           <a:p>
             <a:pPr indent="0" marL="0">
-              <a:buNone/>
-            </a:pPr>
-            <a:r>
-              <a:rPr lang="en-US" sz="1250" dirty="0">
+              <a:lnSpc>
+                <a:spcPct val="112000"/>
+              </a:lnSpc>
+              <a:buNone/>
+            </a:pPr>
+            <a:r>
+              <a:rPr lang="en-US" sz="1650" dirty="0">
                 <a:solidFill>
                   <a:srgbClr val="1A1A1A"/>
                 </a:solidFill>
@@ -6534,101 +8449,127 @@
                 <a:ea typeface="Calibri" pitchFamily="34" charset="-122"/>
                 <a:cs typeface="Calibri" pitchFamily="34" charset="-120"/>
               </a:rPr>
-              <a:t>Warm-up + Look at This: the process post.</a:t>
-            </a:r>
-            <a:endParaRPr lang="en-US" sz="1250" dirty="0"/>
-          </a:p>
-        </p:txBody>
-      </p:sp>
-      <p:sp>
-        <p:nvSpPr>
-          <p:cNvPr id="6" name="Shape 4"/>
-          <p:cNvSpPr/>
-          <p:nvPr/>
-        </p:nvSpPr>
-        <p:spPr>
-          <a:xfrm>
-            <a:off x="640080" y="2139696"/>
-            <a:ext cx="868680" cy="457200"/>
-          </a:xfrm>
-          <a:prstGeom prst="roundRect">
-            <a:avLst>
-              <a:gd name="adj" fmla="val 12000"/>
-            </a:avLst>
-          </a:prstGeom>
-          <a:solidFill>
-            <a:srgbClr val="7A3B2E"/>
-          </a:solidFill>
-          <a:ln/>
-        </p:spPr>
-      </p:sp>
-      <p:sp>
-        <p:nvSpPr>
-          <p:cNvPr id="7" name="Text 5"/>
-          <p:cNvSpPr/>
-          <p:nvPr/>
-        </p:nvSpPr>
-        <p:spPr>
-          <a:xfrm>
-            <a:off x="640080" y="2139696"/>
-            <a:ext cx="868680" cy="457200"/>
-          </a:xfrm>
-          <a:prstGeom prst="rect">
-            <a:avLst/>
-          </a:prstGeom>
-          <a:noFill/>
-          <a:ln/>
-        </p:spPr>
-        <p:txBody>
-          <a:bodyPr wrap="square" rtlCol="0" anchor="ctr"/>
-          <a:lstStyle/>
-          <a:p>
-            <a:pPr algn="ctr" indent="0" marL="0">
-              <a:buNone/>
-            </a:pPr>
-            <a:r>
-              <a:rPr lang="en-US" sz="1100" b="1" dirty="0">
-                <a:solidFill>
-                  <a:srgbClr val="FFFFFF"/>
+              <a:t>Route 2, an API: a documented URL returning JSON. Endpoint, key, pagination, rate limit - all four on screen as we call the Met.</a:t>
+            </a:r>
+            <a:endParaRPr lang="en-US" sz="1650" dirty="0"/>
+          </a:p>
+        </p:txBody>
+      </p:sp>
+      <p:sp>
+        <p:nvSpPr>
+          <p:cNvPr id="9" name="Shape 7"/>
+          <p:cNvSpPr/>
+          <p:nvPr/>
+        </p:nvSpPr>
+        <p:spPr>
+          <a:xfrm>
+            <a:off x="640080" y="4366260"/>
+            <a:ext cx="201168" cy="201168"/>
+          </a:xfrm>
+          <a:prstGeom prst="ellipse">
+            <a:avLst/>
+          </a:prstGeom>
+          <a:solidFill>
+            <a:srgbClr val="B9852F"/>
+          </a:solidFill>
+          <a:ln/>
+        </p:spPr>
+      </p:sp>
+      <p:sp>
+        <p:nvSpPr>
+          <p:cNvPr id="10" name="Text 8"/>
+          <p:cNvSpPr/>
+          <p:nvPr/>
+        </p:nvSpPr>
+        <p:spPr>
+          <a:xfrm>
+            <a:off x="1097280" y="4274820"/>
+            <a:ext cx="10607040" cy="1017270"/>
+          </a:xfrm>
+          <a:prstGeom prst="rect">
+            <a:avLst/>
+          </a:prstGeom>
+          <a:noFill/>
+          <a:ln/>
+        </p:spPr>
+        <p:txBody>
+          <a:bodyPr wrap="square" rtlCol="0" anchor="t">
+            <a:spAutoFit/>
+          </a:bodyPr>
+          <a:lstStyle/>
+          <a:p>
+            <a:pPr indent="0" marL="0">
+              <a:lnSpc>
+                <a:spcPct val="112000"/>
+              </a:lnSpc>
+              <a:buNone/>
+            </a:pPr>
+            <a:r>
+              <a:rPr lang="en-US" sz="1650" dirty="0">
+                <a:solidFill>
+                  <a:srgbClr val="1A1A1A"/>
                 </a:solidFill>
                 <a:latin typeface="Calibri" pitchFamily="34" charset="0"/>
                 <a:ea typeface="Calibri" pitchFamily="34" charset="-122"/>
                 <a:cs typeface="Calibri" pitchFamily="34" charset="-120"/>
               </a:rPr>
-              <a:t>0:08</a:t>
-            </a:r>
-            <a:endParaRPr lang="en-US" sz="1100" dirty="0"/>
-          </a:p>
-        </p:txBody>
-      </p:sp>
-      <p:sp>
-        <p:nvSpPr>
-          <p:cNvPr id="8" name="Text 6"/>
-          <p:cNvSpPr/>
-          <p:nvPr/>
-        </p:nvSpPr>
-        <p:spPr>
-          <a:xfrm>
-            <a:off x="1691640" y="2121408"/>
-            <a:ext cx="9646920" cy="566928"/>
-          </a:xfrm>
-          <a:prstGeom prst="rect">
-            <a:avLst/>
-          </a:prstGeom>
-          <a:noFill/>
-          <a:ln/>
-        </p:spPr>
-        <p:txBody>
-          <a:bodyPr wrap="square" rtlCol="0" anchor="ctr">
+              <a:t>Route 3, a small scrape, only when there is no file and no API. BeautifulSoup, slowly.</a:t>
+            </a:r>
+            <a:endParaRPr lang="en-US" sz="1650" dirty="0"/>
+          </a:p>
+        </p:txBody>
+      </p:sp>
+      <p:sp>
+        <p:nvSpPr>
+          <p:cNvPr id="11" name="Shape 9"/>
+          <p:cNvSpPr/>
+          <p:nvPr/>
+        </p:nvSpPr>
+        <p:spPr>
+          <a:xfrm>
+            <a:off x="640080" y="5383530"/>
+            <a:ext cx="201168" cy="201168"/>
+          </a:xfrm>
+          <a:prstGeom prst="ellipse">
+            <a:avLst/>
+          </a:prstGeom>
+          <a:solidFill>
+            <a:srgbClr val="7A3B2E"/>
+          </a:solidFill>
+          <a:ln/>
+        </p:spPr>
+      </p:sp>
+      <p:sp>
+        <p:nvSpPr>
+          <p:cNvPr id="12" name="Text 10"/>
+          <p:cNvSpPr/>
+          <p:nvPr/>
+        </p:nvSpPr>
+        <p:spPr>
+          <a:xfrm>
+            <a:off x="1097280" y="5292090"/>
+            <a:ext cx="10607040" cy="1017270"/>
+          </a:xfrm>
+          <a:prstGeom prst="rect">
+            <a:avLst/>
+          </a:prstGeom>
+          <a:noFill/>
+          <a:ln/>
+        </p:spPr>
+        <p:txBody>
+          <a:bodyPr wrap="square" rtlCol="0" anchor="t">
             <a:spAutoFit/>
           </a:bodyPr>
           <a:lstStyle/>
           <a:p>
             <a:pPr indent="0" marL="0">
-              <a:buNone/>
-            </a:pPr>
-            <a:r>
-              <a:rPr lang="en-US" sz="1250" dirty="0">
+              <a:lnSpc>
+                <a:spcPct val="112000"/>
+              </a:lnSpc>
+              <a:buNone/>
+            </a:pPr>
+            <a:r>
+              <a:rPr lang="en-US" sz="1650" dirty="0">
                 <a:solidFill>
                   <a:srgbClr val="1A1A1A"/>
                 </a:solidFill>
@@ -6636,519 +8577,9 @@
                 <a:ea typeface="Calibri" pitchFamily="34" charset="-122"/>
                 <a:cs typeface="Calibri" pitchFamily="34" charset="-120"/>
               </a:rPr>
-              <a:t>Pitches, three-minute hard cap each: your corpus (existence proof shown), your two methods, what would count as a finding.</a:t>
-            </a:r>
-            <a:endParaRPr lang="en-US" sz="1250" dirty="0"/>
-          </a:p>
-        </p:txBody>
-      </p:sp>
-      <p:sp>
-        <p:nvSpPr>
-          <p:cNvPr id="9" name="Shape 7"/>
-          <p:cNvSpPr/>
-          <p:nvPr/>
-        </p:nvSpPr>
-        <p:spPr>
-          <a:xfrm>
-            <a:off x="640080" y="2706624"/>
-            <a:ext cx="868680" cy="457200"/>
-          </a:xfrm>
-          <a:prstGeom prst="roundRect">
-            <a:avLst>
-              <a:gd name="adj" fmla="val 12000"/>
-            </a:avLst>
-          </a:prstGeom>
-          <a:solidFill>
-            <a:srgbClr val="7A3B2E"/>
-          </a:solidFill>
-          <a:ln/>
-        </p:spPr>
-      </p:sp>
-      <p:sp>
-        <p:nvSpPr>
-          <p:cNvPr id="10" name="Text 8"/>
-          <p:cNvSpPr/>
-          <p:nvPr/>
-        </p:nvSpPr>
-        <p:spPr>
-          <a:xfrm>
-            <a:off x="640080" y="2706624"/>
-            <a:ext cx="868680" cy="457200"/>
-          </a:xfrm>
-          <a:prstGeom prst="rect">
-            <a:avLst/>
-          </a:prstGeom>
-          <a:noFill/>
-          <a:ln/>
-        </p:spPr>
-        <p:txBody>
-          <a:bodyPr wrap="square" rtlCol="0" anchor="ctr"/>
-          <a:lstStyle/>
-          <a:p>
-            <a:pPr algn="ctr" indent="0" marL="0">
-              <a:buNone/>
-            </a:pPr>
-            <a:r>
-              <a:rPr lang="en-US" sz="1100" b="1" dirty="0">
-                <a:solidFill>
-                  <a:srgbClr val="FFFFFF"/>
-                </a:solidFill>
-                <a:latin typeface="Calibri" pitchFamily="34" charset="0"/>
-                <a:ea typeface="Calibri" pitchFamily="34" charset="-122"/>
-                <a:cs typeface="Calibri" pitchFamily="34" charset="-120"/>
-              </a:rPr>
-              <a:t>0:48</a:t>
-            </a:r>
-            <a:endParaRPr lang="en-US" sz="1100" dirty="0"/>
-          </a:p>
-        </p:txBody>
-      </p:sp>
-      <p:sp>
-        <p:nvSpPr>
-          <p:cNvPr id="11" name="Text 9"/>
-          <p:cNvSpPr/>
-          <p:nvPr/>
-        </p:nvSpPr>
-        <p:spPr>
-          <a:xfrm>
-            <a:off x="1691640" y="2688336"/>
-            <a:ext cx="9646920" cy="566928"/>
-          </a:xfrm>
-          <a:prstGeom prst="rect">
-            <a:avLst/>
-          </a:prstGeom>
-          <a:noFill/>
-          <a:ln/>
-        </p:spPr>
-        <p:txBody>
-          <a:bodyPr wrap="square" rtlCol="0" anchor="ctr">
-            <a:spAutoFit/>
-          </a:bodyPr>
-          <a:lstStyle/>
-          <a:p>
-            <a:pPr indent="0" marL="0">
-              <a:buNone/>
-            </a:pPr>
-            <a:r>
-              <a:rPr lang="en-US" sz="1250" dirty="0">
-                <a:solidFill>
-                  <a:srgbClr val="1A1A1A"/>
-                </a:solidFill>
-                <a:latin typeface="Calibri" pitchFamily="34" charset="0"/>
-                <a:ea typeface="Calibri" pitchFamily="34" charset="-122"/>
-                <a:cs typeface="Calibri" pitchFamily="34" charset="-120"/>
-              </a:rPr>
-              <a:t>Break</a:t>
-            </a:r>
-            <a:endParaRPr lang="en-US" sz="1250" dirty="0"/>
-          </a:p>
-        </p:txBody>
-      </p:sp>
-      <p:sp>
-        <p:nvSpPr>
-          <p:cNvPr id="12" name="Shape 10"/>
-          <p:cNvSpPr/>
-          <p:nvPr/>
-        </p:nvSpPr>
-        <p:spPr>
-          <a:xfrm>
-            <a:off x="640080" y="3273552"/>
-            <a:ext cx="868680" cy="457200"/>
-          </a:xfrm>
-          <a:prstGeom prst="roundRect">
-            <a:avLst>
-              <a:gd name="adj" fmla="val 12000"/>
-            </a:avLst>
-          </a:prstGeom>
-          <a:solidFill>
-            <a:srgbClr val="7A3B2E"/>
-          </a:solidFill>
-          <a:ln/>
-        </p:spPr>
-      </p:sp>
-      <p:sp>
-        <p:nvSpPr>
-          <p:cNvPr id="13" name="Text 11"/>
-          <p:cNvSpPr/>
-          <p:nvPr/>
-        </p:nvSpPr>
-        <p:spPr>
-          <a:xfrm>
-            <a:off x="640080" y="3273552"/>
-            <a:ext cx="868680" cy="457200"/>
-          </a:xfrm>
-          <a:prstGeom prst="rect">
-            <a:avLst/>
-          </a:prstGeom>
-          <a:noFill/>
-          <a:ln/>
-        </p:spPr>
-        <p:txBody>
-          <a:bodyPr wrap="square" rtlCol="0" anchor="ctr"/>
-          <a:lstStyle/>
-          <a:p>
-            <a:pPr algn="ctr" indent="0" marL="0">
-              <a:buNone/>
-            </a:pPr>
-            <a:r>
-              <a:rPr lang="en-US" sz="1100" b="1" dirty="0">
-                <a:solidFill>
-                  <a:srgbClr val="FFFFFF"/>
-                </a:solidFill>
-                <a:latin typeface="Calibri" pitchFamily="34" charset="0"/>
-                <a:ea typeface="Calibri" pitchFamily="34" charset="-122"/>
-                <a:cs typeface="Calibri" pitchFamily="34" charset="-120"/>
-              </a:rPr>
-              <a:t>0:58</a:t>
-            </a:r>
-            <a:endParaRPr lang="en-US" sz="1100" dirty="0"/>
-          </a:p>
-        </p:txBody>
-      </p:sp>
-      <p:sp>
-        <p:nvSpPr>
-          <p:cNvPr id="14" name="Text 12"/>
-          <p:cNvSpPr/>
-          <p:nvPr/>
-        </p:nvSpPr>
-        <p:spPr>
-          <a:xfrm>
-            <a:off x="1691640" y="3255264"/>
-            <a:ext cx="9646920" cy="566928"/>
-          </a:xfrm>
-          <a:prstGeom prst="rect">
-            <a:avLst/>
-          </a:prstGeom>
-          <a:noFill/>
-          <a:ln/>
-        </p:spPr>
-        <p:txBody>
-          <a:bodyPr wrap="square" rtlCol="0" anchor="ctr">
-            <a:spAutoFit/>
-          </a:bodyPr>
-          <a:lstStyle/>
-          <a:p>
-            <a:pPr indent="0" marL="0">
-              <a:buNone/>
-            </a:pPr>
-            <a:r>
-              <a:rPr lang="en-US" sz="1250" dirty="0">
-                <a:solidFill>
-                  <a:srgbClr val="1A1A1A"/>
-                </a:solidFill>
-                <a:latin typeface="Calibri" pitchFamily="34" charset="0"/>
-                <a:ea typeface="Calibri" pitchFamily="34" charset="-122"/>
-                <a:cs typeface="Calibri" pitchFamily="34" charset="-120"/>
-              </a:rPr>
-              <a:t>The data conversation: the licensing one-pager (CC0 museums and public-domain books go anywhere; academic-only sets analyze-don't-redistribute; lyrics and review text metadata-only; AO3 and other community-opposed archives a small attributed sample at most, never a shared dataset; live firehoses we discuss, don't scrape; pirated full-text books from shadow libraries like LibGen never, the line the field's $1.5B settlement was about), and the Data Biography introduced.</a:t>
-            </a:r>
-            <a:endParaRPr lang="en-US" sz="1250" dirty="0"/>
-          </a:p>
-        </p:txBody>
-      </p:sp>
-      <p:sp>
-        <p:nvSpPr>
-          <p:cNvPr id="15" name="Shape 13"/>
-          <p:cNvSpPr/>
-          <p:nvPr/>
-        </p:nvSpPr>
-        <p:spPr>
-          <a:xfrm>
-            <a:off x="640080" y="3840480"/>
-            <a:ext cx="868680" cy="457200"/>
-          </a:xfrm>
-          <a:prstGeom prst="roundRect">
-            <a:avLst>
-              <a:gd name="adj" fmla="val 12000"/>
-            </a:avLst>
-          </a:prstGeom>
-          <a:solidFill>
-            <a:srgbClr val="7A3B2E"/>
-          </a:solidFill>
-          <a:ln/>
-        </p:spPr>
-      </p:sp>
-      <p:sp>
-        <p:nvSpPr>
-          <p:cNvPr id="16" name="Text 14"/>
-          <p:cNvSpPr/>
-          <p:nvPr/>
-        </p:nvSpPr>
-        <p:spPr>
-          <a:xfrm>
-            <a:off x="640080" y="3840480"/>
-            <a:ext cx="868680" cy="457200"/>
-          </a:xfrm>
-          <a:prstGeom prst="rect">
-            <a:avLst/>
-          </a:prstGeom>
-          <a:noFill/>
-          <a:ln/>
-        </p:spPr>
-        <p:txBody>
-          <a:bodyPr wrap="square" rtlCol="0" anchor="ctr"/>
-          <a:lstStyle/>
-          <a:p>
-            <a:pPr algn="ctr" indent="0" marL="0">
-              <a:buNone/>
-            </a:pPr>
-            <a:r>
-              <a:rPr lang="en-US" sz="1100" b="1" dirty="0">
-                <a:solidFill>
-                  <a:srgbClr val="FFFFFF"/>
-                </a:solidFill>
-                <a:latin typeface="Calibri" pitchFamily="34" charset="0"/>
-                <a:ea typeface="Calibri" pitchFamily="34" charset="-122"/>
-                <a:cs typeface="Calibri" pitchFamily="34" charset="-120"/>
-              </a:rPr>
-              <a:t>1:10</a:t>
-            </a:r>
-            <a:endParaRPr lang="en-US" sz="1100" dirty="0"/>
-          </a:p>
-        </p:txBody>
-      </p:sp>
-      <p:sp>
-        <p:nvSpPr>
-          <p:cNvPr id="17" name="Text 15"/>
-          <p:cNvSpPr/>
-          <p:nvPr/>
-        </p:nvSpPr>
-        <p:spPr>
-          <a:xfrm>
-            <a:off x="1691640" y="3822192"/>
-            <a:ext cx="9646920" cy="566928"/>
-          </a:xfrm>
-          <a:prstGeom prst="rect">
-            <a:avLst/>
-          </a:prstGeom>
-          <a:noFill/>
-          <a:ln/>
-        </p:spPr>
-        <p:txBody>
-          <a:bodyPr wrap="square" rtlCol="0" anchor="ctr">
-            <a:spAutoFit/>
-          </a:bodyPr>
-          <a:lstStyle/>
-          <a:p>
-            <a:pPr indent="0" marL="0">
-              <a:buNone/>
-            </a:pPr>
-            <a:r>
-              <a:rPr lang="en-US" sz="1250" dirty="0">
-                <a:solidFill>
-                  <a:srgbClr val="1A1A1A"/>
-                </a:solidFill>
-                <a:latin typeface="Calibri" pitchFamily="34" charset="0"/>
-                <a:ea typeface="Calibri" pitchFamily="34" charset="-122"/>
-                <a:cs typeface="Calibri" pitchFamily="34" charset="-120"/>
-              </a:rPr>
-              <a:t>Getting the data, APIs and scraping, demoed live with the AI writing the code. API first (the Met or Art Institute, no key); scraping second, with the robots.txt / ToS / rate-limit / anti-republish check.</a:t>
-            </a:r>
-            <a:endParaRPr lang="en-US" sz="1250" dirty="0"/>
-          </a:p>
-        </p:txBody>
-      </p:sp>
-      <p:sp>
-        <p:nvSpPr>
-          <p:cNvPr id="18" name="Shape 16"/>
-          <p:cNvSpPr/>
-          <p:nvPr/>
-        </p:nvSpPr>
-        <p:spPr>
-          <a:xfrm>
-            <a:off x="640080" y="4407408"/>
-            <a:ext cx="868680" cy="457200"/>
-          </a:xfrm>
-          <a:prstGeom prst="roundRect">
-            <a:avLst>
-              <a:gd name="adj" fmla="val 12000"/>
-            </a:avLst>
-          </a:prstGeom>
-          <a:solidFill>
-            <a:srgbClr val="7A3B2E"/>
-          </a:solidFill>
-          <a:ln/>
-        </p:spPr>
-      </p:sp>
-      <p:sp>
-        <p:nvSpPr>
-          <p:cNvPr id="19" name="Text 17"/>
-          <p:cNvSpPr/>
-          <p:nvPr/>
-        </p:nvSpPr>
-        <p:spPr>
-          <a:xfrm>
-            <a:off x="640080" y="4407408"/>
-            <a:ext cx="868680" cy="457200"/>
-          </a:xfrm>
-          <a:prstGeom prst="rect">
-            <a:avLst/>
-          </a:prstGeom>
-          <a:noFill/>
-          <a:ln/>
-        </p:spPr>
-        <p:txBody>
-          <a:bodyPr wrap="square" rtlCol="0" anchor="ctr"/>
-          <a:lstStyle/>
-          <a:p>
-            <a:pPr algn="ctr" indent="0" marL="0">
-              <a:buNone/>
-            </a:pPr>
-            <a:r>
-              <a:rPr lang="en-US" sz="1100" b="1" dirty="0">
-                <a:solidFill>
-                  <a:srgbClr val="FFFFFF"/>
-                </a:solidFill>
-                <a:latin typeface="Calibri" pitchFamily="34" charset="0"/>
-                <a:ea typeface="Calibri" pitchFamily="34" charset="-122"/>
-                <a:cs typeface="Calibri" pitchFamily="34" charset="-120"/>
-              </a:rPr>
-              <a:t>1:30</a:t>
-            </a:r>
-            <a:endParaRPr lang="en-US" sz="1100" dirty="0"/>
-          </a:p>
-        </p:txBody>
-      </p:sp>
-      <p:sp>
-        <p:nvSpPr>
-          <p:cNvPr id="20" name="Text 18"/>
-          <p:cNvSpPr/>
-          <p:nvPr/>
-        </p:nvSpPr>
-        <p:spPr>
-          <a:xfrm>
-            <a:off x="1691640" y="4389120"/>
-            <a:ext cx="9646920" cy="566928"/>
-          </a:xfrm>
-          <a:prstGeom prst="rect">
-            <a:avLst/>
-          </a:prstGeom>
-          <a:noFill/>
-          <a:ln/>
-        </p:spPr>
-        <p:txBody>
-          <a:bodyPr wrap="square" rtlCol="0" anchor="ctr">
-            <a:spAutoFit/>
-          </a:bodyPr>
-          <a:lstStyle/>
-          <a:p>
-            <a:pPr indent="0" marL="0">
-              <a:buNone/>
-            </a:pPr>
-            <a:r>
-              <a:rPr lang="en-US" sz="1250" dirty="0">
-                <a:solidFill>
-                  <a:srgbClr val="1A1A1A"/>
-                </a:solidFill>
-                <a:latin typeface="Calibri" pitchFamily="34" charset="0"/>
-                <a:ea typeface="Calibri" pitchFamily="34" charset="-122"/>
-                <a:cs typeface="Calibri" pitchFamily="34" charset="-120"/>
-              </a:rPr>
-              <a:t>Collect-and-build lab: point the cookbook notebook at your corpus, reshape it, and save it to your Drive project folder so it's there next week (when the Week 1 Drive mount pays off), and fork the publishing template with GitHub Pages enabled, so a live placeholder URL exists from commit day. Your project repository starts today.</a:t>
-            </a:r>
-            <a:endParaRPr lang="en-US" sz="1250" dirty="0"/>
-          </a:p>
-        </p:txBody>
-      </p:sp>
-      <p:sp>
-        <p:nvSpPr>
-          <p:cNvPr id="21" name="Shape 19"/>
-          <p:cNvSpPr/>
-          <p:nvPr/>
-        </p:nvSpPr>
-        <p:spPr>
-          <a:xfrm>
-            <a:off x="640080" y="4974336"/>
-            <a:ext cx="868680" cy="457200"/>
-          </a:xfrm>
-          <a:prstGeom prst="roundRect">
-            <a:avLst>
-              <a:gd name="adj" fmla="val 12000"/>
-            </a:avLst>
-          </a:prstGeom>
-          <a:solidFill>
-            <a:srgbClr val="7A3B2E"/>
-          </a:solidFill>
-          <a:ln/>
-        </p:spPr>
-      </p:sp>
-      <p:sp>
-        <p:nvSpPr>
-          <p:cNvPr id="22" name="Text 20"/>
-          <p:cNvSpPr/>
-          <p:nvPr/>
-        </p:nvSpPr>
-        <p:spPr>
-          <a:xfrm>
-            <a:off x="640080" y="4974336"/>
-            <a:ext cx="868680" cy="457200"/>
-          </a:xfrm>
-          <a:prstGeom prst="rect">
-            <a:avLst/>
-          </a:prstGeom>
-          <a:noFill/>
-          <a:ln/>
-        </p:spPr>
-        <p:txBody>
-          <a:bodyPr wrap="square" rtlCol="0" anchor="ctr"/>
-          <a:lstStyle/>
-          <a:p>
-            <a:pPr algn="ctr" indent="0" marL="0">
-              <a:buNone/>
-            </a:pPr>
-            <a:r>
-              <a:rPr lang="en-US" sz="1100" b="1" dirty="0">
-                <a:solidFill>
-                  <a:srgbClr val="FFFFFF"/>
-                </a:solidFill>
-                <a:latin typeface="Calibri" pitchFamily="34" charset="0"/>
-                <a:ea typeface="Calibri" pitchFamily="34" charset="-122"/>
-                <a:cs typeface="Calibri" pitchFamily="34" charset="-120"/>
-              </a:rPr>
-              <a:t>1:55</a:t>
-            </a:r>
-            <a:endParaRPr lang="en-US" sz="1100" dirty="0"/>
-          </a:p>
-        </p:txBody>
-      </p:sp>
-      <p:sp>
-        <p:nvSpPr>
-          <p:cNvPr id="23" name="Text 21"/>
-          <p:cNvSpPr/>
-          <p:nvPr/>
-        </p:nvSpPr>
-        <p:spPr>
-          <a:xfrm>
-            <a:off x="1691640" y="4956048"/>
-            <a:ext cx="9646920" cy="566928"/>
-          </a:xfrm>
-          <a:prstGeom prst="rect">
-            <a:avLst/>
-          </a:prstGeom>
-          <a:noFill/>
-          <a:ln/>
-        </p:spPr>
-        <p:txBody>
-          <a:bodyPr wrap="square" rtlCol="0" anchor="ctr">
-            <a:spAutoFit/>
-          </a:bodyPr>
-          <a:lstStyle/>
-          <a:p>
-            <a:pPr indent="0" marL="0">
-              <a:buNone/>
-            </a:pPr>
-            <a:r>
-              <a:rPr lang="en-US" sz="1250" dirty="0">
-                <a:solidFill>
-                  <a:srgbClr val="1A1A1A"/>
-                </a:solidFill>
-                <a:latin typeface="Calibri" pitchFamily="34" charset="0"/>
-                <a:ea typeface="Calibri" pitchFamily="34" charset="-122"/>
-                <a:cs typeface="Calibri" pitchFamily="34" charset="-120"/>
-              </a:rPr>
-              <a:t>Commit, with the pivot kit named as insurance. A null result honestly shown is a complete project. Check-out.</a:t>
-            </a:r>
-            <a:endParaRPr lang="en-US" sz="1250" dirty="0"/>
+              <a:t>The check that comes with route 3: robots.txt and the terms, request slowly, take only what you need, never republish.</a:t>
+            </a:r>
+            <a:endParaRPr lang="en-US" sz="1650" dirty="0"/>
           </a:p>
         </p:txBody>
       </p:sp>
